--- a/assets/samples/btob-marketing-sample.pptx
+++ b/assets/samples/btob-marketing-sample.pptx
@@ -39335,14 +39335,6 @@
 <file path=ppt/slides/slide1.xml><?xml version="1.0" encoding="utf-8"?>
 <p:sld xmlns:a="http://schemas.openxmlformats.org/drawingml/2006/main" xmlns:p="http://schemas.openxmlformats.org/presentationml/2006/main" xmlns:r="http://schemas.openxmlformats.org/officeDocument/2006/relationships">
   <p:cSld>
-    <p:bg>
-      <p:bgPr>
-        <a:solidFill>
-          <a:srgbClr val="001F33"/>
-        </a:solidFill>
-        <a:effectLst/>
-      </p:bgPr>
-    </p:bg>
     <p:spTree>
       <p:nvGrpSpPr>
         <p:cNvPr id="1" name=""/>
@@ -39364,7 +39356,17 @@
         <p:txBody>
           <a:bodyPr/>
           <a:lstStyle/>
-          <a:p/>
+          <a:p>
+            <a:r>
+              <a:rPr sz="1100">
+                <a:solidFill>
+                  <a:srgbClr val="5A6470"/>
+                </a:solidFill>
+                <a:latin typeface="Noto Sans JP"/>
+              </a:rPr>
+              <a:t>2026.04.28  /  AKKODiS Japan / マーケティング部</a:t>
+            </a:r>
+          </a:p>
         </p:txBody>
       </p:sp>
       <p:sp>
@@ -39381,7 +39383,17 @@
         <p:txBody>
           <a:bodyPr/>
           <a:lstStyle/>
-          <a:p/>
+          <a:p>
+            <a:r>
+              <a:rPr sz="2000">
+                <a:solidFill>
+                  <a:srgbClr val="001F33"/>
+                </a:solidFill>
+                <a:latin typeface="Noto Sans JP"/>
+              </a:rPr>
+              <a:t>失敗しがちな3つの罠と打ち手</a:t>
+            </a:r>
+          </a:p>
         </p:txBody>
       </p:sp>
       <p:sp>
@@ -39398,121 +39410,124 @@
         <p:txBody>
           <a:bodyPr/>
           <a:lstStyle/>
-          <a:p/>
+          <a:p>
+            <a:r>
+              <a:rPr sz="4000" b="1">
+                <a:solidFill>
+                  <a:srgbClr val="001F33"/>
+                </a:solidFill>
+                <a:latin typeface="Noto Sans JP"/>
+              </a:rPr>
+              <a:t>BtoB マーケティングの全体像</a:t>
+            </a:r>
+          </a:p>
         </p:txBody>
       </p:sp>
+    </p:spTree>
+  </p:cSld>
+  <p:clrMapOvr>
+    <a:masterClrMapping/>
+  </p:clrMapOvr>
+</p:sld>
+</file>
+
+<file path=ppt/slides/slide2.xml><?xml version="1.0" encoding="utf-8"?>
+<p:sld xmlns:a="http://schemas.openxmlformats.org/drawingml/2006/main" xmlns:p="http://schemas.openxmlformats.org/presentationml/2006/main" xmlns:r="http://schemas.openxmlformats.org/officeDocument/2006/relationships">
+  <p:cSld>
+    <p:spTree>
+      <p:nvGrpSpPr>
+        <p:cNvPr id="1" name=""/>
+        <p:cNvGrpSpPr/>
+        <p:nvPr/>
+      </p:nvGrpSpPr>
+      <p:grpSpPr/>
       <p:sp>
         <p:nvSpPr>
-          <p:cNvPr id="5" name="TextBox 4"/>
-          <p:cNvSpPr txBox="1"/>
+          <p:cNvPr id="5" name="Rectangle 4"/>
+          <p:cNvSpPr/>
           <p:nvPr/>
         </p:nvSpPr>
         <p:spPr>
           <a:xfrm>
-            <a:off x="548640" y="2514600"/>
-            <a:ext cx="11094720" cy="1280160"/>
+            <a:off x="0" y="0"/>
+            <a:ext cx="12192000" cy="6858000"/>
           </a:xfrm>
           <a:prstGeom prst="rect">
             <a:avLst/>
           </a:prstGeom>
-          <a:noFill/>
+          <a:solidFill>
+            <a:srgbClr val="FFFFFF">
+              <a:alpha val="82000"/>
+            </a:srgbClr>
+          </a:solidFill>
+          <a:ln>
+            <a:noFill/>
+          </a:ln>
         </p:spPr>
+        <p:style>
+          <a:lnRef idx="1">
+            <a:schemeClr val="accent1"/>
+          </a:lnRef>
+          <a:fillRef idx="3">
+            <a:schemeClr val="accent1"/>
+          </a:fillRef>
+          <a:effectRef idx="2">
+            <a:schemeClr val="accent1"/>
+          </a:effectRef>
+          <a:fontRef idx="minor">
+            <a:schemeClr val="lt1"/>
+          </a:fontRef>
+        </p:style>
         <p:txBody>
-          <a:bodyPr wrap="none">
-            <a:spAutoFit/>
-          </a:bodyPr>
+          <a:bodyPr rtlCol="0" anchor="ctr"/>
           <a:lstStyle/>
           <a:p>
-            <a:r>
-              <a:rPr sz="4000" b="1">
-                <a:solidFill>
-                  <a:srgbClr val="FFB81C"/>
-                </a:solidFill>
-                <a:latin typeface="Noto Sans JP"/>
-              </a:rPr>
-              <a:t>BtoB マーケティングの全体像</a:t>
-            </a:r>
+            <a:pPr algn="ctr"/>
           </a:p>
         </p:txBody>
       </p:sp>
       <p:sp>
         <p:nvSpPr>
-          <p:cNvPr id="6" name="TextBox 5"/>
-          <p:cNvSpPr txBox="1"/>
-          <p:nvPr/>
+          <p:cNvPr id="4" name="Title 3"/>
+          <p:cNvSpPr>
+            <a:spLocks noGrp="1"/>
+          </p:cNvSpPr>
+          <p:nvPr>
+            <p:ph type="title"/>
+          </p:nvPr>
         </p:nvSpPr>
         <p:spPr>
           <a:xfrm>
-            <a:off x="548640" y="3703320"/>
-            <a:ext cx="11094720" cy="548640"/>
-          </a:xfrm>
-          <a:prstGeom prst="rect">
-            <a:avLst/>
-          </a:prstGeom>
-          <a:noFill/>
+            <a:off x="548640" y="457200"/>
+            <a:ext cx="11091672" cy="822960"/>
+          </a:xfrm>
         </p:spPr>
         <p:txBody>
-          <a:bodyPr wrap="none">
-            <a:spAutoFit/>
-          </a:bodyPr>
+          <a:bodyPr/>
           <a:lstStyle/>
           <a:p>
             <a:r>
-              <a:rPr sz="2000" b="0">
-                <a:solidFill>
-                  <a:srgbClr val="FFFFFF"/>
+              <a:rPr sz="2800" b="1">
+                <a:solidFill>
+                  <a:srgbClr val="001F33"/>
                 </a:solidFill>
                 <a:latin typeface="Noto Sans JP"/>
               </a:rPr>
-              <a:t>失敗しがちな3つの罠と打ち手</a:t>
+              <a:t>アジェンダ</a:t>
             </a:r>
           </a:p>
         </p:txBody>
       </p:sp>
       <p:sp>
         <p:nvSpPr>
-          <p:cNvPr id="7" name="TextBox 6"/>
-          <p:cNvSpPr txBox="1"/>
-          <p:nvPr/>
-        </p:nvSpPr>
-        <p:spPr>
-          <a:xfrm>
-            <a:off x="548640" y="5486400"/>
-            <a:ext cx="11094720" cy="457200"/>
-          </a:xfrm>
-          <a:prstGeom prst="rect">
-            <a:avLst/>
-          </a:prstGeom>
-          <a:noFill/>
-        </p:spPr>
-        <p:txBody>
-          <a:bodyPr wrap="none">
-            <a:spAutoFit/>
-          </a:bodyPr>
-          <a:lstStyle/>
-          <a:p>
-            <a:r>
-              <a:rPr sz="1400" b="0">
-                <a:solidFill>
-                  <a:srgbClr val="FFB81C"/>
-                </a:solidFill>
-                <a:latin typeface="Noto Sans JP"/>
-              </a:rPr>
-              <a:t>AKKODiS — Internal  /  AKKODiS Japan / マーケティング部</a:t>
-            </a:r>
-          </a:p>
-        </p:txBody>
-      </p:sp>
-      <p:sp>
-        <p:nvSpPr>
-          <p:cNvPr id="8" name="Rectangle 7"/>
+          <p:cNvPr id="6" name="Rectangle 5"/>
           <p:cNvSpPr/>
           <p:nvPr/>
         </p:nvSpPr>
         <p:spPr>
           <a:xfrm>
-            <a:off x="0" y="6455664"/>
-            <a:ext cx="12192000" cy="36576"/>
+            <a:off x="548640" y="1325880"/>
+            <a:ext cx="548640" cy="54864"/>
           </a:xfrm>
           <a:prstGeom prst="rect">
             <a:avLst/>
@@ -39548,14 +39563,87 @@
       </p:sp>
       <p:sp>
         <p:nvSpPr>
-          <p:cNvPr id="9" name="TextBox 8"/>
+          <p:cNvPr id="7" name="TextBox 6"/>
           <p:cNvSpPr txBox="1"/>
           <p:nvPr/>
         </p:nvSpPr>
         <p:spPr>
           <a:xfrm>
-            <a:off x="10454640" y="6172200"/>
-            <a:ext cx="1371600" cy="274320"/>
+            <a:off x="914400" y="1828800"/>
+            <a:ext cx="10515600" cy="4114800"/>
+          </a:xfrm>
+          <a:prstGeom prst="rect">
+            <a:avLst/>
+          </a:prstGeom>
+          <a:noFill/>
+        </p:spPr>
+        <p:txBody>
+          <a:bodyPr wrap="square">
+            <a:spAutoFit/>
+          </a:bodyPr>
+          <a:lstStyle/>
+          <a:p>
+            <a:pPr>
+              <a:spcAft>
+                <a:spcPts val="1400"/>
+              </a:spcAft>
+            </a:pPr>
+            <a:r>
+              <a:rPr sz="2800" b="1">
+                <a:solidFill>
+                  <a:srgbClr val="FFB81C"/>
+                </a:solidFill>
+                <a:latin typeface="Inter"/>
+              </a:rPr>
+              <a:t>01    </a:t>
+            </a:r>
+            <a:r>
+              <a:rPr sz="2200">
+                <a:solidFill>
+                  <a:srgbClr val="000000"/>
+                </a:solidFill>
+                <a:latin typeface="Noto Sans JP"/>
+              </a:rPr>
+              <a:t>1. BtoB マーケが BtoC と決定的に違う3点</a:t>
+            </a:r>
+          </a:p>
+          <a:p>
+            <a:pPr>
+              <a:spcAft>
+                <a:spcPts val="1400"/>
+              </a:spcAft>
+            </a:pPr>
+            <a:r>
+              <a:rPr sz="2800" b="1">
+                <a:solidFill>
+                  <a:srgbClr val="FFB81C"/>
+                </a:solidFill>
+                <a:latin typeface="Inter"/>
+              </a:rPr>
+              <a:t>02    </a:t>
+            </a:r>
+            <a:r>
+              <a:rPr sz="2200">
+                <a:solidFill>
+                  <a:srgbClr val="000000"/>
+                </a:solidFill>
+                <a:latin typeface="Noto Sans JP"/>
+              </a:rPr>
+              <a:t>2. 失敗パターン × 打ち手（Marketo / SharePoint / Power BI 活用）</a:t>
+            </a:r>
+          </a:p>
+        </p:txBody>
+      </p:sp>
+      <p:sp>
+        <p:nvSpPr>
+          <p:cNvPr id="8" name="TextBox 7"/>
+          <p:cNvSpPr txBox="1"/>
+          <p:nvPr/>
+        </p:nvSpPr>
+        <p:spPr>
+          <a:xfrm>
+            <a:off x="10911840" y="6400800"/>
+            <a:ext cx="914400" cy="274320"/>
           </a:xfrm>
           <a:prstGeom prst="rect">
             <a:avLst/>
@@ -39572,11 +39660,11 @@
             <a:r>
               <a:rPr sz="1000" b="0">
                 <a:solidFill>
-                  <a:srgbClr val="FFFFFF"/>
+                  <a:srgbClr val="5A6470"/>
                 </a:solidFill>
                 <a:latin typeface="Noto Sans JP"/>
               </a:rPr>
-              <a:t>1 / 3</a:t>
+              <a:t>2 / 3</a:t>
             </a:r>
           </a:p>
         </p:txBody>
@@ -39589,17 +39677,9 @@
 </p:sld>
 </file>
 
-<file path=ppt/slides/slide2.xml><?xml version="1.0" encoding="utf-8"?>
+<file path=ppt/slides/slide3.xml><?xml version="1.0" encoding="utf-8"?>
 <p:sld xmlns:a="http://schemas.openxmlformats.org/drawingml/2006/main" xmlns:p="http://schemas.openxmlformats.org/presentationml/2006/main" xmlns:r="http://schemas.openxmlformats.org/officeDocument/2006/relationships">
   <p:cSld>
-    <p:bg>
-      <p:bgPr>
-        <a:solidFill>
-          <a:srgbClr val="FFFFFF"/>
-        </a:solidFill>
-        <a:effectLst/>
-      </p:bgPr>
-    </p:bg>
     <p:spTree>
       <p:nvGrpSpPr>
         <p:cNvPr id="1" name=""/>
@@ -39609,71 +39689,22 @@
       <p:grpSpPr/>
       <p:sp>
         <p:nvSpPr>
-          <p:cNvPr id="2" name="Text Placeholder 1"/>
-          <p:cNvSpPr>
-            <a:spLocks noGrp="1"/>
-          </p:cNvSpPr>
-          <p:nvPr>
-            <p:ph type="body" idx="11" sz="quarter"/>
-          </p:nvPr>
-        </p:nvSpPr>
-        <p:spPr/>
-        <p:txBody>
-          <a:bodyPr/>
-          <a:lstStyle/>
-          <a:p/>
-        </p:txBody>
-      </p:sp>
-      <p:sp>
-        <p:nvSpPr>
-          <p:cNvPr id="3" name="Text Placeholder 2"/>
-          <p:cNvSpPr>
-            <a:spLocks noGrp="1"/>
-          </p:cNvSpPr>
-          <p:nvPr>
-            <p:ph type="body" idx="10" sz="quarter"/>
-          </p:nvPr>
-        </p:nvSpPr>
-        <p:spPr/>
-        <p:txBody>
-          <a:bodyPr/>
-          <a:lstStyle/>
-          <a:p/>
-        </p:txBody>
-      </p:sp>
-      <p:sp>
-        <p:nvSpPr>
-          <p:cNvPr id="4" name="Title 3"/>
-          <p:cNvSpPr>
-            <a:spLocks noGrp="1"/>
-          </p:cNvSpPr>
-          <p:nvPr>
-            <p:ph type="title"/>
-          </p:nvPr>
-        </p:nvSpPr>
-        <p:spPr/>
-        <p:txBody>
-          <a:bodyPr/>
-          <a:lstStyle/>
-          <a:p/>
-        </p:txBody>
-      </p:sp>
-      <p:sp>
-        <p:nvSpPr>
           <p:cNvPr id="5" name="Rectangle 4"/>
           <p:cNvSpPr/>
           <p:nvPr/>
         </p:nvSpPr>
         <p:spPr>
           <a:xfrm>
-            <a:off x="0" y="411480"/>
-            <a:ext cx="12192000" cy="45720"/>
+            <a:off x="0" y="0"/>
+            <a:ext cx="12192000" cy="6858000"/>
           </a:xfrm>
           <a:prstGeom prst="rect">
             <a:avLst/>
           </a:prstGeom>
           <a:solidFill>
-            <a:srgbClr val="001F33"/>
+            <a:srgbClr val="FFFFFF">
+              <a:alpha val="82000"/>
+            </a:srgbClr>
           </a:solidFill>
           <a:ln>
             <a:noFill/>
@@ -39703,103 +39734,46 @@
       </p:sp>
       <p:sp>
         <p:nvSpPr>
-          <p:cNvPr id="6" name="TextBox 5"/>
-          <p:cNvSpPr txBox="1"/>
-          <p:nvPr/>
+          <p:cNvPr id="4" name="Title 3"/>
+          <p:cNvSpPr>
+            <a:spLocks noGrp="1"/>
+          </p:cNvSpPr>
+          <p:nvPr>
+            <p:ph type="title"/>
+          </p:nvPr>
         </p:nvSpPr>
         <p:spPr>
           <a:xfrm>
-            <a:off x="548640" y="594360"/>
-            <a:ext cx="11094720" cy="822960"/>
-          </a:xfrm>
-          <a:prstGeom prst="rect">
-            <a:avLst/>
-          </a:prstGeom>
-          <a:noFill/>
+            <a:off x="548640" y="457200"/>
+            <a:ext cx="11091672" cy="822960"/>
+          </a:xfrm>
         </p:spPr>
         <p:txBody>
-          <a:bodyPr wrap="none">
-            <a:spAutoFit/>
-          </a:bodyPr>
+          <a:bodyPr/>
           <a:lstStyle/>
           <a:p>
             <a:r>
-              <a:rPr sz="3000" b="1">
+              <a:rPr sz="2800" b="1">
                 <a:solidFill>
                   <a:srgbClr val="001F33"/>
                 </a:solidFill>
                 <a:latin typeface="Noto Sans JP"/>
               </a:rPr>
-              <a:t>アジェンダ</a:t>
+              <a:t>BtoB マーケティングの本質と打ち手</a:t>
             </a:r>
           </a:p>
         </p:txBody>
       </p:sp>
       <p:sp>
         <p:nvSpPr>
-          <p:cNvPr id="7" name="TextBox 6"/>
-          <p:cNvSpPr txBox="1"/>
-          <p:nvPr/>
-        </p:nvSpPr>
-        <p:spPr>
-          <a:xfrm>
-            <a:off x="548640" y="1645920"/>
-            <a:ext cx="11094720" cy="4572000"/>
-          </a:xfrm>
-          <a:prstGeom prst="rect">
-            <a:avLst/>
-          </a:prstGeom>
-          <a:noFill/>
-        </p:spPr>
-        <p:txBody>
-          <a:bodyPr wrap="square">
-            <a:spAutoFit/>
-          </a:bodyPr>
-          <a:lstStyle/>
-          <a:p>
-            <a:pPr>
-              <a:spcAft>
-                <a:spcPts val="800"/>
-              </a:spcAft>
-            </a:pPr>
-            <a:r>
-              <a:rPr sz="2000">
-                <a:solidFill>
-                  <a:srgbClr val="000000"/>
-                </a:solidFill>
-                <a:latin typeface="Noto Sans JP"/>
-              </a:rPr>
-              <a:t>・1. BtoB マーケが BtoC と決定的に違う3点</a:t>
-            </a:r>
-          </a:p>
-          <a:p>
-            <a:pPr>
-              <a:spcAft>
-                <a:spcPts val="800"/>
-              </a:spcAft>
-            </a:pPr>
-            <a:r>
-              <a:rPr sz="2000">
-                <a:solidFill>
-                  <a:srgbClr val="000000"/>
-                </a:solidFill>
-                <a:latin typeface="Noto Sans JP"/>
-              </a:rPr>
-              <a:t>・2. 失敗パターン × 打ち手（Marketo / SharePoint / Power BI 活用）</a:t>
-            </a:r>
-          </a:p>
-        </p:txBody>
-      </p:sp>
-      <p:sp>
-        <p:nvSpPr>
-          <p:cNvPr id="8" name="Rectangle 7"/>
+          <p:cNvPr id="6" name="Rectangle 5"/>
           <p:cNvSpPr/>
           <p:nvPr/>
         </p:nvSpPr>
         <p:spPr>
           <a:xfrm>
-            <a:off x="0" y="6455664"/>
-            <a:ext cx="12192000" cy="36576"/>
+            <a:off x="548640" y="1325880"/>
+            <a:ext cx="548640" cy="54864"/>
           </a:xfrm>
           <a:prstGeom prst="rect">
             <a:avLst/>
@@ -39835,195 +39809,6 @@
       </p:sp>
       <p:sp>
         <p:nvSpPr>
-          <p:cNvPr id="9" name="TextBox 8"/>
-          <p:cNvSpPr txBox="1"/>
-          <p:nvPr/>
-        </p:nvSpPr>
-        <p:spPr>
-          <a:xfrm>
-            <a:off x="10454640" y="6172200"/>
-            <a:ext cx="1371600" cy="274320"/>
-          </a:xfrm>
-          <a:prstGeom prst="rect">
-            <a:avLst/>
-          </a:prstGeom>
-          <a:noFill/>
-        </p:spPr>
-        <p:txBody>
-          <a:bodyPr wrap="none">
-            <a:spAutoFit/>
-          </a:bodyPr>
-          <a:lstStyle/>
-          <a:p>
-            <a:pPr algn="r"/>
-            <a:r>
-              <a:rPr sz="1000" b="0">
-                <a:solidFill>
-                  <a:srgbClr val="5A6470"/>
-                </a:solidFill>
-                <a:latin typeface="Noto Sans JP"/>
-              </a:rPr>
-              <a:t>2 / 3</a:t>
-            </a:r>
-          </a:p>
-        </p:txBody>
-      </p:sp>
-    </p:spTree>
-  </p:cSld>
-  <p:clrMapOvr>
-    <a:masterClrMapping/>
-  </p:clrMapOvr>
-</p:sld>
-</file>
-
-<file path=ppt/slides/slide3.xml><?xml version="1.0" encoding="utf-8"?>
-<p:sld xmlns:a="http://schemas.openxmlformats.org/drawingml/2006/main" xmlns:p="http://schemas.openxmlformats.org/presentationml/2006/main" xmlns:r="http://schemas.openxmlformats.org/officeDocument/2006/relationships">
-  <p:cSld>
-    <p:bg>
-      <p:bgPr>
-        <a:solidFill>
-          <a:srgbClr val="FFFFFF"/>
-        </a:solidFill>
-        <a:effectLst/>
-      </p:bgPr>
-    </p:bg>
-    <p:spTree>
-      <p:nvGrpSpPr>
-        <p:cNvPr id="1" name=""/>
-        <p:cNvGrpSpPr/>
-        <p:nvPr/>
-      </p:nvGrpSpPr>
-      <p:grpSpPr/>
-      <p:sp>
-        <p:nvSpPr>
-          <p:cNvPr id="2" name="Text Placeholder 1"/>
-          <p:cNvSpPr>
-            <a:spLocks noGrp="1"/>
-          </p:cNvSpPr>
-          <p:nvPr>
-            <p:ph type="body" idx="11" sz="quarter"/>
-          </p:nvPr>
-        </p:nvSpPr>
-        <p:spPr/>
-        <p:txBody>
-          <a:bodyPr/>
-          <a:lstStyle/>
-          <a:p/>
-        </p:txBody>
-      </p:sp>
-      <p:sp>
-        <p:nvSpPr>
-          <p:cNvPr id="3" name="Text Placeholder 2"/>
-          <p:cNvSpPr>
-            <a:spLocks noGrp="1"/>
-          </p:cNvSpPr>
-          <p:nvPr>
-            <p:ph type="body" idx="10" sz="quarter"/>
-          </p:nvPr>
-        </p:nvSpPr>
-        <p:spPr/>
-        <p:txBody>
-          <a:bodyPr/>
-          <a:lstStyle/>
-          <a:p/>
-        </p:txBody>
-      </p:sp>
-      <p:sp>
-        <p:nvSpPr>
-          <p:cNvPr id="4" name="Title 3"/>
-          <p:cNvSpPr>
-            <a:spLocks noGrp="1"/>
-          </p:cNvSpPr>
-          <p:nvPr>
-            <p:ph type="title"/>
-          </p:nvPr>
-        </p:nvSpPr>
-        <p:spPr/>
-        <p:txBody>
-          <a:bodyPr/>
-          <a:lstStyle/>
-          <a:p/>
-        </p:txBody>
-      </p:sp>
-      <p:sp>
-        <p:nvSpPr>
-          <p:cNvPr id="5" name="Rectangle 4"/>
-          <p:cNvSpPr/>
-          <p:nvPr/>
-        </p:nvSpPr>
-        <p:spPr>
-          <a:xfrm>
-            <a:off x="0" y="411480"/>
-            <a:ext cx="12192000" cy="45720"/>
-          </a:xfrm>
-          <a:prstGeom prst="rect">
-            <a:avLst/>
-          </a:prstGeom>
-          <a:solidFill>
-            <a:srgbClr val="001F33"/>
-          </a:solidFill>
-          <a:ln>
-            <a:noFill/>
-          </a:ln>
-        </p:spPr>
-        <p:style>
-          <a:lnRef idx="1">
-            <a:schemeClr val="accent1"/>
-          </a:lnRef>
-          <a:fillRef idx="3">
-            <a:schemeClr val="accent1"/>
-          </a:fillRef>
-          <a:effectRef idx="2">
-            <a:schemeClr val="accent1"/>
-          </a:effectRef>
-          <a:fontRef idx="minor">
-            <a:schemeClr val="lt1"/>
-          </a:fontRef>
-        </p:style>
-        <p:txBody>
-          <a:bodyPr rtlCol="0" anchor="ctr"/>
-          <a:lstStyle/>
-          <a:p>
-            <a:pPr algn="ctr"/>
-          </a:p>
-        </p:txBody>
-      </p:sp>
-      <p:sp>
-        <p:nvSpPr>
-          <p:cNvPr id="6" name="TextBox 5"/>
-          <p:cNvSpPr txBox="1"/>
-          <p:nvPr/>
-        </p:nvSpPr>
-        <p:spPr>
-          <a:xfrm>
-            <a:off x="548640" y="594360"/>
-            <a:ext cx="11094720" cy="822960"/>
-          </a:xfrm>
-          <a:prstGeom prst="rect">
-            <a:avLst/>
-          </a:prstGeom>
-          <a:noFill/>
-        </p:spPr>
-        <p:txBody>
-          <a:bodyPr wrap="none">
-            <a:spAutoFit/>
-          </a:bodyPr>
-          <a:lstStyle/>
-          <a:p>
-            <a:r>
-              <a:rPr sz="3000" b="1">
-                <a:solidFill>
-                  <a:srgbClr val="001F33"/>
-                </a:solidFill>
-                <a:latin typeface="Noto Sans JP"/>
-              </a:rPr>
-              <a:t>BtoB マーケティングの本質と打ち手</a:t>
-            </a:r>
-          </a:p>
-        </p:txBody>
-      </p:sp>
-      <p:sp>
-        <p:nvSpPr>
           <p:cNvPr id="7" name="TextBox 6"/>
           <p:cNvSpPr txBox="1"/>
           <p:nvPr/>
@@ -40031,7 +39816,7 @@
         <p:spPr>
           <a:xfrm>
             <a:off x="548640" y="1645920"/>
-            <a:ext cx="11094720" cy="4572000"/>
+            <a:ext cx="11091672" cy="4572000"/>
           </a:xfrm>
           <a:prstGeom prst="rect">
             <a:avLst/>
@@ -40045,139 +39830,111 @@
           <a:lstStyle/>
           <a:p>
             <a:pPr>
+              <a:spcBef>
+                <a:spcPts val="400"/>
+              </a:spcBef>
               <a:spcAft>
-                <a:spcPts val="800"/>
+                <a:spcPts val="1000"/>
               </a:spcAft>
             </a:pPr>
             <a:r>
-              <a:rPr sz="2000">
+              <a:rPr sz="1800">
                 <a:solidFill>
                   <a:srgbClr val="000000"/>
                 </a:solidFill>
                 <a:latin typeface="Noto Sans JP"/>
               </a:rPr>
-              <a:t>・意思決定者が複数（DMU）→ ペルソナを職種別に複数定義し、職種別 LP を用意</a:t>
+              <a:t>—  意思決定者が複数（DMU）→ ペルソナを職種別に複数定義し、職種別 LP を用意</a:t>
             </a:r>
           </a:p>
           <a:p>
             <a:pPr>
+              <a:spcBef>
+                <a:spcPts val="400"/>
+              </a:spcBef>
               <a:spcAft>
-                <a:spcPts val="800"/>
+                <a:spcPts val="1000"/>
               </a:spcAft>
             </a:pPr>
             <a:r>
-              <a:rPr sz="2000">
+              <a:rPr sz="1800">
                 <a:solidFill>
                   <a:srgbClr val="000000"/>
                 </a:solidFill>
                 <a:latin typeface="Noto Sans JP"/>
               </a:rPr>
-              <a:t>・意思決定サイクルが長い → Marketo でフェーズ別ナーチャリングを自動化</a:t>
+              <a:t>—  意思決定サイクルが長い → Marketo でフェーズ別ナーチャリングを自動化</a:t>
             </a:r>
           </a:p>
           <a:p>
             <a:pPr>
+              <a:spcBef>
+                <a:spcPts val="400"/>
+              </a:spcBef>
               <a:spcAft>
-                <a:spcPts val="800"/>
+                <a:spcPts val="1000"/>
               </a:spcAft>
             </a:pPr>
             <a:r>
-              <a:rPr sz="2000">
+              <a:rPr sz="1800">
                 <a:solidFill>
                   <a:srgbClr val="000000"/>
                 </a:solidFill>
                 <a:latin typeface="Noto Sans JP"/>
               </a:rPr>
-              <a:t>・ROI 計測が難しい → MQL/SQL/商談化を中間 KPI として Power BI で可視化</a:t>
+              <a:t>—  ROI 計測が難しい → MQL/SQL/商談化を中間 KPI として Power BI で可視化</a:t>
             </a:r>
           </a:p>
           <a:p>
             <a:pPr>
+              <a:spcBef>
+                <a:spcPts val="400"/>
+              </a:spcBef>
               <a:spcAft>
-                <a:spcPts val="800"/>
+                <a:spcPts val="1000"/>
               </a:spcAft>
             </a:pPr>
             <a:r>
-              <a:rPr sz="2000">
+              <a:rPr sz="1800">
                 <a:solidFill>
                   <a:srgbClr val="000000"/>
                 </a:solidFill>
                 <a:latin typeface="Noto Sans JP"/>
               </a:rPr>
-              <a:t>・失敗1: リード量だけ追う → 商談化率・受注率まで KPI 化する</a:t>
+              <a:t>—  失敗1: リード量だけ追う → 商談化率・受注率まで KPI 化する</a:t>
             </a:r>
           </a:p>
           <a:p>
             <a:pPr>
+              <a:spcBef>
+                <a:spcPts val="400"/>
+              </a:spcBef>
               <a:spcAft>
-                <a:spcPts val="800"/>
+                <a:spcPts val="1000"/>
               </a:spcAft>
             </a:pPr>
             <a:r>
-              <a:rPr sz="2000">
+              <a:rPr sz="1800">
                 <a:solidFill>
                   <a:srgbClr val="000000"/>
                 </a:solidFill>
                 <a:latin typeface="Noto Sans JP"/>
               </a:rPr>
-              <a:t>・失敗2: LP を1本化 → 業種・職種で分岐し、コンバージョンを最適化</a:t>
+              <a:t>—  失敗2: LP を1本化 → 業種・職種で分岐し、コンバージョンを最適化</a:t>
             </a:r>
           </a:p>
         </p:txBody>
       </p:sp>
       <p:sp>
         <p:nvSpPr>
-          <p:cNvPr id="8" name="Rectangle 7"/>
-          <p:cNvSpPr/>
-          <p:nvPr/>
-        </p:nvSpPr>
-        <p:spPr>
-          <a:xfrm>
-            <a:off x="0" y="6455664"/>
-            <a:ext cx="12192000" cy="36576"/>
-          </a:xfrm>
-          <a:prstGeom prst="rect">
-            <a:avLst/>
-          </a:prstGeom>
-          <a:solidFill>
-            <a:srgbClr val="FFB81C"/>
-          </a:solidFill>
-          <a:ln>
-            <a:noFill/>
-          </a:ln>
-        </p:spPr>
-        <p:style>
-          <a:lnRef idx="1">
-            <a:schemeClr val="accent1"/>
-          </a:lnRef>
-          <a:fillRef idx="3">
-            <a:schemeClr val="accent1"/>
-          </a:fillRef>
-          <a:effectRef idx="2">
-            <a:schemeClr val="accent1"/>
-          </a:effectRef>
-          <a:fontRef idx="minor">
-            <a:schemeClr val="lt1"/>
-          </a:fontRef>
-        </p:style>
-        <p:txBody>
-          <a:bodyPr rtlCol="0" anchor="ctr"/>
-          <a:lstStyle/>
-          <a:p>
-            <a:pPr algn="ctr"/>
-          </a:p>
-        </p:txBody>
-      </p:sp>
-      <p:sp>
-        <p:nvSpPr>
-          <p:cNvPr id="9" name="TextBox 8"/>
+          <p:cNvPr id="8" name="TextBox 7"/>
           <p:cNvSpPr txBox="1"/>
           <p:nvPr/>
         </p:nvSpPr>
         <p:spPr>
           <a:xfrm>
-            <a:off x="10454640" y="6172200"/>
-            <a:ext cx="1371600" cy="274320"/>
+            <a:off x="10911840" y="6400800"/>
+            <a:ext cx="914400" cy="274320"/>
           </a:xfrm>
           <a:prstGeom prst="rect">
             <a:avLst/>

--- a/assets/samples/btob-marketing-sample.pptx
+++ b/assets/samples/btob-marketing-sample.pptx
@@ -14,9 +14,9 @@
     <p:handoutMasterId r:id="rId25"/>
   </p:handoutMasterIdLst>
   <p:sldIdLst>
-    <p:sldId id="256" r:id="rId16"/>
-    <p:sldId id="257" r:id="rId17"/>
-    <p:sldId id="258" r:id="rId18"/>
+    <p:sldId id="256" r:id="rId17"/>
+    <p:sldId id="257" r:id="rId18"/>
+    <p:sldId id="258" r:id="rId19"/>
   </p:sldIdLst>
   <p:sldSz cx="12192000" cy="6858000"/>
   <p:notesSz cx="6797675" cy="9926638"/>
@@ -160,51 +160,703 @@
 </p:presentation>
 </file>
 
+<file path=ppt/revisionInfo.xml><?xml version="1.0" encoding="utf-8"?>
+<p1510:revInfo xmlns:a="http://schemas.openxmlformats.org/drawingml/2006/main" xmlns:r="http://schemas.openxmlformats.org/officeDocument/2006/relationships" xmlns:p1510="http://schemas.microsoft.com/office/powerpoint/2015/10/main">
+  <p1510:revLst>
+    <p1510:client id="{E99A5A20-6F92-4A74-A59F-D6FF4797BAE6}" v="4" dt="2025-05-01T06:54:48.082"/>
+  </p1510:revLst>
+</p1510:revInfo>
+</file>
+
 <file path=ppt/changesInfos/changesInfo1.xml><?xml version="1.0" encoding="utf-8"?>
 <pc:chgInfo xmlns:a="http://schemas.openxmlformats.org/drawingml/2006/main" xmlns:r="http://schemas.openxmlformats.org/officeDocument/2006/relationships" xmlns:ac="http://schemas.microsoft.com/office/drawing/2013/main/command" xmlns:pc="http://schemas.microsoft.com/office/powerpoint/2013/main/command">
   <pc:docChgLst>
-    <pc:chgData name="James Bottari" userId="aa7a7255-5a07-4af6-b02d-40373b14c66b" providerId="ADAL" clId="{F3B5B969-2578-4A64-A897-C43095AC5D53}"/>
-    <pc:docChg chg="undo custSel modMainMaster">
-      <pc:chgData name="James Bottari" userId="aa7a7255-5a07-4af6-b02d-40373b14c66b" providerId="ADAL" clId="{F3B5B969-2578-4A64-A897-C43095AC5D53}" dt="2025-03-26T07:38:42.146" v="8" actId="478"/>
+    <pc:chgData name="James Bottari" userId="aa7a7255-5a07-4af6-b02d-40373b14c66b" providerId="ADAL" clId="{2A732B6F-06FB-4E60-84BF-826ED2223EED}"/>
+    <pc:docChg chg="undo custSel modSld modMainMaster">
+      <pc:chgData name="James Bottari" userId="aa7a7255-5a07-4af6-b02d-40373b14c66b" providerId="ADAL" clId="{2A732B6F-06FB-4E60-84BF-826ED2223EED}" dt="2024-11-26T07:27:04.525" v="82" actId="12788"/>
       <pc:docMkLst>
         <pc:docMk/>
       </pc:docMkLst>
-      <pc:sldMasterChg chg="modSldLayout">
-        <pc:chgData name="James Bottari" userId="aa7a7255-5a07-4af6-b02d-40373b14c66b" providerId="ADAL" clId="{F3B5B969-2578-4A64-A897-C43095AC5D53}" dt="2025-03-26T07:38:42.146" v="8" actId="478"/>
+      <pc:sldChg chg="modAnim">
+        <pc:chgData name="James Bottari" userId="aa7a7255-5a07-4af6-b02d-40373b14c66b" providerId="ADAL" clId="{2A732B6F-06FB-4E60-84BF-826ED2223EED}" dt="2024-11-26T07:16:19.719" v="69"/>
+        <pc:sldMkLst>
+          <pc:docMk/>
+          <pc:sldMk cId="2385859357" sldId="296"/>
+        </pc:sldMkLst>
+      </pc:sldChg>
+      <pc:sldMasterChg chg="addSp delSp modSp mod modSldLayout">
+        <pc:chgData name="James Bottari" userId="aa7a7255-5a07-4af6-b02d-40373b14c66b" providerId="ADAL" clId="{2A732B6F-06FB-4E60-84BF-826ED2223EED}" dt="2024-11-26T04:42:03.573" v="14" actId="478"/>
+        <pc:sldMasterMkLst>
+          <pc:docMk/>
+          <pc:sldMasterMk cId="1096814676" sldId="2147483895"/>
+        </pc:sldMasterMkLst>
+        <pc:sldLayoutChg chg="delSp mod">
+          <pc:chgData name="James Bottari" userId="aa7a7255-5a07-4af6-b02d-40373b14c66b" providerId="ADAL" clId="{2A732B6F-06FB-4E60-84BF-826ED2223EED}" dt="2024-11-26T04:40:17.314" v="5" actId="478"/>
+          <pc:sldLayoutMkLst>
+            <pc:docMk/>
+            <pc:sldMasterMk cId="1096814676" sldId="2147483895"/>
+            <pc:sldLayoutMk cId="476608779" sldId="2147483901"/>
+          </pc:sldLayoutMkLst>
+        </pc:sldLayoutChg>
+        <pc:sldLayoutChg chg="delSp mod">
+          <pc:chgData name="James Bottari" userId="aa7a7255-5a07-4af6-b02d-40373b14c66b" providerId="ADAL" clId="{2A732B6F-06FB-4E60-84BF-826ED2223EED}" dt="2024-11-26T04:40:14.558" v="4" actId="478"/>
+          <pc:sldLayoutMkLst>
+            <pc:docMk/>
+            <pc:sldMasterMk cId="1096814676" sldId="2147483895"/>
+            <pc:sldLayoutMk cId="2939810570" sldId="2147483902"/>
+          </pc:sldLayoutMkLst>
+        </pc:sldLayoutChg>
+        <pc:sldLayoutChg chg="delSp mod">
+          <pc:chgData name="James Bottari" userId="aa7a7255-5a07-4af6-b02d-40373b14c66b" providerId="ADAL" clId="{2A732B6F-06FB-4E60-84BF-826ED2223EED}" dt="2024-11-26T04:40:09.921" v="3" actId="478"/>
+          <pc:sldLayoutMkLst>
+            <pc:docMk/>
+            <pc:sldMasterMk cId="1096814676" sldId="2147483895"/>
+            <pc:sldLayoutMk cId="3255171268" sldId="2147483971"/>
+          </pc:sldLayoutMkLst>
+        </pc:sldLayoutChg>
+        <pc:sldLayoutChg chg="delSp mod">
+          <pc:chgData name="James Bottari" userId="aa7a7255-5a07-4af6-b02d-40373b14c66b" providerId="ADAL" clId="{2A732B6F-06FB-4E60-84BF-826ED2223EED}" dt="2024-11-26T04:40:22.659" v="6" actId="478"/>
+          <pc:sldLayoutMkLst>
+            <pc:docMk/>
+            <pc:sldMasterMk cId="1096814676" sldId="2147483895"/>
+            <pc:sldLayoutMk cId="1554080316" sldId="2147483975"/>
+          </pc:sldLayoutMkLst>
+        </pc:sldLayoutChg>
+      </pc:sldMasterChg>
+      <pc:sldMasterChg chg="delSp mod modSldLayout">
+        <pc:chgData name="James Bottari" userId="aa7a7255-5a07-4af6-b02d-40373b14c66b" providerId="ADAL" clId="{2A732B6F-06FB-4E60-84BF-826ED2223EED}" dt="2024-11-26T07:27:04.525" v="82" actId="12788"/>
+        <pc:sldMasterMkLst>
+          <pc:docMk/>
+          <pc:sldMasterMk cId="3870990250" sldId="2147483896"/>
+        </pc:sldMasterMkLst>
+        <pc:sldLayoutChg chg="addSp delSp modSp mod">
+          <pc:chgData name="James Bottari" userId="aa7a7255-5a07-4af6-b02d-40373b14c66b" providerId="ADAL" clId="{2A732B6F-06FB-4E60-84BF-826ED2223EED}" dt="2024-11-26T04:44:01.997" v="42"/>
+          <pc:sldLayoutMkLst>
+            <pc:docMk/>
+            <pc:sldMasterMk cId="3870990250" sldId="2147483896"/>
+            <pc:sldLayoutMk cId="3376014336" sldId="2147483649"/>
+          </pc:sldLayoutMkLst>
+        </pc:sldLayoutChg>
+        <pc:sldLayoutChg chg="addSp delSp modSp mod">
+          <pc:chgData name="James Bottari" userId="aa7a7255-5a07-4af6-b02d-40373b14c66b" providerId="ADAL" clId="{2A732B6F-06FB-4E60-84BF-826ED2223EED}" dt="2024-11-26T07:21:15.850" v="79" actId="122"/>
+          <pc:sldLayoutMkLst>
+            <pc:docMk/>
+            <pc:sldMasterMk cId="3870990250" sldId="2147483896"/>
+            <pc:sldLayoutMk cId="3792869417" sldId="2147483897"/>
+          </pc:sldLayoutMkLst>
+        </pc:sldLayoutChg>
+        <pc:sldLayoutChg chg="addSp delSp modSp mod delAnim modAnim">
+          <pc:chgData name="James Bottari" userId="aa7a7255-5a07-4af6-b02d-40373b14c66b" providerId="ADAL" clId="{2A732B6F-06FB-4E60-84BF-826ED2223EED}" dt="2024-11-26T07:27:04.525" v="82" actId="12788"/>
+          <pc:sldLayoutMkLst>
+            <pc:docMk/>
+            <pc:sldMasterMk cId="3870990250" sldId="2147483896"/>
+            <pc:sldLayoutMk cId="2994822769" sldId="2147483898"/>
+          </pc:sldLayoutMkLst>
+        </pc:sldLayoutChg>
+        <pc:sldLayoutChg chg="addSp delSp modSp mod">
+          <pc:chgData name="James Bottari" userId="aa7a7255-5a07-4af6-b02d-40373b14c66b" providerId="ADAL" clId="{2A732B6F-06FB-4E60-84BF-826ED2223EED}" dt="2024-11-26T04:44:05.799" v="44"/>
+          <pc:sldLayoutMkLst>
+            <pc:docMk/>
+            <pc:sldMasterMk cId="3870990250" sldId="2147483896"/>
+            <pc:sldLayoutMk cId="1416010805" sldId="2147483900"/>
+          </pc:sldLayoutMkLst>
+        </pc:sldLayoutChg>
+      </pc:sldMasterChg>
+      <pc:sldMasterChg chg="delSp modSp mod modSldLayout">
+        <pc:chgData name="James Bottari" userId="aa7a7255-5a07-4af6-b02d-40373b14c66b" providerId="ADAL" clId="{2A732B6F-06FB-4E60-84BF-826ED2223EED}" dt="2024-11-26T04:58:07.497" v="54" actId="478"/>
         <pc:sldMasterMkLst>
           <pc:docMk/>
           <pc:sldMasterMk cId="1584904203" sldId="2147483904"/>
         </pc:sldMasterMkLst>
         <pc:sldLayoutChg chg="addSp delSp modSp mod">
-          <pc:chgData name="James Bottari" userId="aa7a7255-5a07-4af6-b02d-40373b14c66b" providerId="ADAL" clId="{F3B5B969-2578-4A64-A897-C43095AC5D53}" dt="2025-03-26T07:38:42.146" v="8" actId="478"/>
+          <pc:chgData name="James Bottari" userId="aa7a7255-5a07-4af6-b02d-40373b14c66b" providerId="ADAL" clId="{2A732B6F-06FB-4E60-84BF-826ED2223EED}" dt="2024-11-26T04:57:59.385" v="51" actId="1035"/>
+          <pc:sldLayoutMkLst>
+            <pc:docMk/>
+            <pc:sldMasterMk cId="1584904203" sldId="2147483904"/>
+            <pc:sldLayoutMk cId="1393762226" sldId="2147483905"/>
+          </pc:sldLayoutMkLst>
+        </pc:sldLayoutChg>
+        <pc:sldLayoutChg chg="addSp modSp">
+          <pc:chgData name="James Bottari" userId="aa7a7255-5a07-4af6-b02d-40373b14c66b" providerId="ADAL" clId="{2A732B6F-06FB-4E60-84BF-826ED2223EED}" dt="2024-11-26T04:58:01.198" v="52"/>
+          <pc:sldLayoutMkLst>
+            <pc:docMk/>
+            <pc:sldMasterMk cId="1584904203" sldId="2147483904"/>
+            <pc:sldLayoutMk cId="747897296" sldId="2147483906"/>
+          </pc:sldLayoutMkLst>
+        </pc:sldLayoutChg>
+        <pc:sldLayoutChg chg="addSp delSp modSp mod">
+          <pc:chgData name="James Bottari" userId="aa7a7255-5a07-4af6-b02d-40373b14c66b" providerId="ADAL" clId="{2A732B6F-06FB-4E60-84BF-826ED2223EED}" dt="2024-11-26T04:42:31.707" v="20"/>
           <pc:sldLayoutMkLst>
             <pc:docMk/>
             <pc:sldMasterMk cId="1584904203" sldId="2147483904"/>
             <pc:sldLayoutMk cId="3542484949" sldId="2147483907"/>
           </pc:sldLayoutMkLst>
         </pc:sldLayoutChg>
+        <pc:sldLayoutChg chg="addSp modSp">
+          <pc:chgData name="James Bottari" userId="aa7a7255-5a07-4af6-b02d-40373b14c66b" providerId="ADAL" clId="{2A732B6F-06FB-4E60-84BF-826ED2223EED}" dt="2024-11-26T04:46:48.279" v="48"/>
+          <pc:sldLayoutMkLst>
+            <pc:docMk/>
+            <pc:sldMasterMk cId="1584904203" sldId="2147483904"/>
+            <pc:sldLayoutMk cId="3359192433" sldId="2147483910"/>
+          </pc:sldLayoutMkLst>
+        </pc:sldLayoutChg>
+        <pc:sldLayoutChg chg="addSp modSp">
+          <pc:chgData name="James Bottari" userId="aa7a7255-5a07-4af6-b02d-40373b14c66b" providerId="ADAL" clId="{2A732B6F-06FB-4E60-84BF-826ED2223EED}" dt="2024-11-26T04:58:02.573" v="53"/>
+          <pc:sldLayoutMkLst>
+            <pc:docMk/>
+            <pc:sldMasterMk cId="1584904203" sldId="2147483904"/>
+            <pc:sldLayoutMk cId="2925468937" sldId="2147483911"/>
+          </pc:sldLayoutMkLst>
+        </pc:sldLayoutChg>
+      </pc:sldMasterChg>
+      <pc:sldMasterChg chg="addSp delSp modSp mod modSldLayout">
+        <pc:chgData name="James Bottari" userId="aa7a7255-5a07-4af6-b02d-40373b14c66b" providerId="ADAL" clId="{2A732B6F-06FB-4E60-84BF-826ED2223EED}" dt="2024-11-26T04:59:10.910" v="67"/>
+        <pc:sldMasterMkLst>
+          <pc:docMk/>
+          <pc:sldMasterMk cId="2557689541" sldId="2147483924"/>
+        </pc:sldMasterMkLst>
+        <pc:sldLayoutChg chg="addSp modSp">
+          <pc:chgData name="James Bottari" userId="aa7a7255-5a07-4af6-b02d-40373b14c66b" providerId="ADAL" clId="{2A732B6F-06FB-4E60-84BF-826ED2223EED}" dt="2024-11-26T04:58:42.730" v="59"/>
+          <pc:sldLayoutMkLst>
+            <pc:docMk/>
+            <pc:sldMasterMk cId="2557689541" sldId="2147483924"/>
+            <pc:sldLayoutMk cId="662095832" sldId="2147483926"/>
+          </pc:sldLayoutMkLst>
+        </pc:sldLayoutChg>
+        <pc:sldLayoutChg chg="addSp modSp">
+          <pc:chgData name="James Bottari" userId="aa7a7255-5a07-4af6-b02d-40373b14c66b" providerId="ADAL" clId="{2A732B6F-06FB-4E60-84BF-826ED2223EED}" dt="2024-11-26T04:58:48.125" v="61"/>
+          <pc:sldLayoutMkLst>
+            <pc:docMk/>
+            <pc:sldMasterMk cId="2557689541" sldId="2147483924"/>
+            <pc:sldLayoutMk cId="2136145471" sldId="2147483939"/>
+          </pc:sldLayoutMkLst>
+        </pc:sldLayoutChg>
+        <pc:sldLayoutChg chg="addSp modSp">
+          <pc:chgData name="James Bottari" userId="aa7a7255-5a07-4af6-b02d-40373b14c66b" providerId="ADAL" clId="{2A732B6F-06FB-4E60-84BF-826ED2223EED}" dt="2024-11-26T04:58:31.103" v="58"/>
+          <pc:sldLayoutMkLst>
+            <pc:docMk/>
+            <pc:sldMasterMk cId="2557689541" sldId="2147483924"/>
+            <pc:sldLayoutMk cId="2935727249" sldId="2147483953"/>
+          </pc:sldLayoutMkLst>
+        </pc:sldLayoutChg>
+        <pc:sldLayoutChg chg="addSp delSp modSp mod">
+          <pc:chgData name="James Bottari" userId="aa7a7255-5a07-4af6-b02d-40373b14c66b" providerId="ADAL" clId="{2A732B6F-06FB-4E60-84BF-826ED2223EED}" dt="2024-11-26T04:42:51.639" v="26"/>
+          <pc:sldLayoutMkLst>
+            <pc:docMk/>
+            <pc:sldMasterMk cId="2557689541" sldId="2147483924"/>
+            <pc:sldLayoutMk cId="3133591715" sldId="2147483954"/>
+          </pc:sldLayoutMkLst>
+        </pc:sldLayoutChg>
+        <pc:sldLayoutChg chg="addSp modSp">
+          <pc:chgData name="James Bottari" userId="aa7a7255-5a07-4af6-b02d-40373b14c66b" providerId="ADAL" clId="{2A732B6F-06FB-4E60-84BF-826ED2223EED}" dt="2024-11-26T04:59:02.725" v="66"/>
+          <pc:sldLayoutMkLst>
+            <pc:docMk/>
+            <pc:sldMasterMk cId="2557689541" sldId="2147483924"/>
+            <pc:sldLayoutMk cId="2792437263" sldId="2147483955"/>
+          </pc:sldLayoutMkLst>
+        </pc:sldLayoutChg>
+        <pc:sldLayoutChg chg="addSp modSp">
+          <pc:chgData name="James Bottari" userId="aa7a7255-5a07-4af6-b02d-40373b14c66b" providerId="ADAL" clId="{2A732B6F-06FB-4E60-84BF-826ED2223EED}" dt="2024-11-26T04:59:10.910" v="67"/>
+          <pc:sldLayoutMkLst>
+            <pc:docMk/>
+            <pc:sldMasterMk cId="2557689541" sldId="2147483924"/>
+            <pc:sldLayoutMk cId="1748968647" sldId="2147483956"/>
+          </pc:sldLayoutMkLst>
+        </pc:sldLayoutChg>
+        <pc:sldLayoutChg chg="addSp modSp">
+          <pc:chgData name="James Bottari" userId="aa7a7255-5a07-4af6-b02d-40373b14c66b" providerId="ADAL" clId="{2A732B6F-06FB-4E60-84BF-826ED2223EED}" dt="2024-11-26T04:58:55.695" v="64"/>
+          <pc:sldLayoutMkLst>
+            <pc:docMk/>
+            <pc:sldMasterMk cId="2557689541" sldId="2147483924"/>
+            <pc:sldLayoutMk cId="1616492962" sldId="2147483957"/>
+          </pc:sldLayoutMkLst>
+        </pc:sldLayoutChg>
+        <pc:sldLayoutChg chg="addSp delSp modSp mod">
+          <pc:chgData name="James Bottari" userId="aa7a7255-5a07-4af6-b02d-40373b14c66b" providerId="ADAL" clId="{2A732B6F-06FB-4E60-84BF-826ED2223EED}" dt="2024-11-26T04:43:27.900" v="34"/>
+          <pc:sldLayoutMkLst>
+            <pc:docMk/>
+            <pc:sldMasterMk cId="2557689541" sldId="2147483924"/>
+            <pc:sldLayoutMk cId="2537478654" sldId="2147483958"/>
+          </pc:sldLayoutMkLst>
+        </pc:sldLayoutChg>
+        <pc:sldLayoutChg chg="addSp modSp">
+          <pc:chgData name="James Bottari" userId="aa7a7255-5a07-4af6-b02d-40373b14c66b" providerId="ADAL" clId="{2A732B6F-06FB-4E60-84BF-826ED2223EED}" dt="2024-11-26T04:58:44.924" v="60"/>
+          <pc:sldLayoutMkLst>
+            <pc:docMk/>
+            <pc:sldMasterMk cId="2557689541" sldId="2147483924"/>
+            <pc:sldLayoutMk cId="2255840168" sldId="2147483959"/>
+          </pc:sldLayoutMkLst>
+        </pc:sldLayoutChg>
+        <pc:sldLayoutChg chg="addSp modSp">
+          <pc:chgData name="James Bottari" userId="aa7a7255-5a07-4af6-b02d-40373b14c66b" providerId="ADAL" clId="{2A732B6F-06FB-4E60-84BF-826ED2223EED}" dt="2024-11-26T04:58:58.734" v="65"/>
+          <pc:sldLayoutMkLst>
+            <pc:docMk/>
+            <pc:sldMasterMk cId="2557689541" sldId="2147483924"/>
+            <pc:sldLayoutMk cId="2905150168" sldId="2147483960"/>
+          </pc:sldLayoutMkLst>
+        </pc:sldLayoutChg>
+        <pc:sldLayoutChg chg="addSp modSp">
+          <pc:chgData name="James Bottari" userId="aa7a7255-5a07-4af6-b02d-40373b14c66b" providerId="ADAL" clId="{2A732B6F-06FB-4E60-84BF-826ED2223EED}" dt="2024-11-26T04:58:21.547" v="56"/>
+          <pc:sldLayoutMkLst>
+            <pc:docMk/>
+            <pc:sldMasterMk cId="2557689541" sldId="2147483924"/>
+            <pc:sldLayoutMk cId="2560168924" sldId="2147483961"/>
+          </pc:sldLayoutMkLst>
+        </pc:sldLayoutChg>
+        <pc:sldLayoutChg chg="addSp modSp">
+          <pc:chgData name="James Bottari" userId="aa7a7255-5a07-4af6-b02d-40373b14c66b" providerId="ADAL" clId="{2A732B6F-06FB-4E60-84BF-826ED2223EED}" dt="2024-11-26T04:58:52.093" v="63"/>
+          <pc:sldLayoutMkLst>
+            <pc:docMk/>
+            <pc:sldMasterMk cId="2557689541" sldId="2147483924"/>
+            <pc:sldLayoutMk cId="4002871511" sldId="2147483963"/>
+          </pc:sldLayoutMkLst>
+        </pc:sldLayoutChg>
+        <pc:sldLayoutChg chg="addSp delSp modSp mod">
+          <pc:chgData name="James Bottari" userId="aa7a7255-5a07-4af6-b02d-40373b14c66b" providerId="ADAL" clId="{2A732B6F-06FB-4E60-84BF-826ED2223EED}" dt="2024-11-26T04:42:45.996" v="24"/>
+          <pc:sldLayoutMkLst>
+            <pc:docMk/>
+            <pc:sldMasterMk cId="2557689541" sldId="2147483924"/>
+            <pc:sldLayoutMk cId="207074033" sldId="2147483964"/>
+          </pc:sldLayoutMkLst>
+        </pc:sldLayoutChg>
+        <pc:sldLayoutChg chg="addSp delSp modSp mod">
+          <pc:chgData name="James Bottari" userId="aa7a7255-5a07-4af6-b02d-40373b14c66b" providerId="ADAL" clId="{2A732B6F-06FB-4E60-84BF-826ED2223EED}" dt="2024-11-26T04:43:43.084" v="36"/>
+          <pc:sldLayoutMkLst>
+            <pc:docMk/>
+            <pc:sldMasterMk cId="2557689541" sldId="2147483924"/>
+            <pc:sldLayoutMk cId="2382353240" sldId="2147483965"/>
+          </pc:sldLayoutMkLst>
+        </pc:sldLayoutChg>
+        <pc:sldLayoutChg chg="addSp delSp modSp mod">
+          <pc:chgData name="James Bottari" userId="aa7a7255-5a07-4af6-b02d-40373b14c66b" providerId="ADAL" clId="{2A732B6F-06FB-4E60-84BF-826ED2223EED}" dt="2024-11-26T04:43:03.461" v="29" actId="207"/>
+          <pc:sldLayoutMkLst>
+            <pc:docMk/>
+            <pc:sldMasterMk cId="2557689541" sldId="2147483924"/>
+            <pc:sldLayoutMk cId="475247331" sldId="2147483966"/>
+          </pc:sldLayoutMkLst>
+        </pc:sldLayoutChg>
+        <pc:sldLayoutChg chg="addSp delSp modSp mod">
+          <pc:chgData name="James Bottari" userId="aa7a7255-5a07-4af6-b02d-40373b14c66b" providerId="ADAL" clId="{2A732B6F-06FB-4E60-84BF-826ED2223EED}" dt="2024-11-26T04:43:21.051" v="32" actId="207"/>
+          <pc:sldLayoutMkLst>
+            <pc:docMk/>
+            <pc:sldMasterMk cId="2557689541" sldId="2147483924"/>
+            <pc:sldLayoutMk cId="3845850737" sldId="2147483968"/>
+          </pc:sldLayoutMkLst>
+        </pc:sldLayoutChg>
+        <pc:sldLayoutChg chg="addSp modSp">
+          <pc:chgData name="James Bottari" userId="aa7a7255-5a07-4af6-b02d-40373b14c66b" providerId="ADAL" clId="{2A732B6F-06FB-4E60-84BF-826ED2223EED}" dt="2024-11-26T04:58:50.576" v="62"/>
+          <pc:sldLayoutMkLst>
+            <pc:docMk/>
+            <pc:sldMasterMk cId="2557689541" sldId="2147483924"/>
+            <pc:sldLayoutMk cId="3806122435" sldId="2147483969"/>
+          </pc:sldLayoutMkLst>
+        </pc:sldLayoutChg>
+        <pc:sldLayoutChg chg="addSp modSp">
+          <pc:chgData name="James Bottari" userId="aa7a7255-5a07-4af6-b02d-40373b14c66b" providerId="ADAL" clId="{2A732B6F-06FB-4E60-84BF-826ED2223EED}" dt="2024-11-26T04:58:24.847" v="57"/>
+          <pc:sldLayoutMkLst>
+            <pc:docMk/>
+            <pc:sldMasterMk cId="2557689541" sldId="2147483924"/>
+            <pc:sldLayoutMk cId="1544716566" sldId="2147483970"/>
+          </pc:sldLayoutMkLst>
+        </pc:sldLayoutChg>
+        <pc:sldLayoutChg chg="addSp delSp modSp mod">
+          <pc:chgData name="James Bottari" userId="aa7a7255-5a07-4af6-b02d-40373b14c66b" providerId="ADAL" clId="{2A732B6F-06FB-4E60-84BF-826ED2223EED}" dt="2024-11-26T04:43:49.498" v="38"/>
+          <pc:sldLayoutMkLst>
+            <pc:docMk/>
+            <pc:sldMasterMk cId="2557689541" sldId="2147483924"/>
+            <pc:sldLayoutMk cId="2276701835" sldId="2147483973"/>
+          </pc:sldLayoutMkLst>
+        </pc:sldLayoutChg>
+        <pc:sldLayoutChg chg="addSp delSp modSp mod">
+          <pc:chgData name="James Bottari" userId="aa7a7255-5a07-4af6-b02d-40373b14c66b" providerId="ADAL" clId="{2A732B6F-06FB-4E60-84BF-826ED2223EED}" dt="2024-11-26T04:43:54.318" v="40"/>
+          <pc:sldLayoutMkLst>
+            <pc:docMk/>
+            <pc:sldMasterMk cId="2557689541" sldId="2147483924"/>
+            <pc:sldLayoutMk cId="2031086626" sldId="2147483974"/>
+          </pc:sldLayoutMkLst>
+        </pc:sldLayoutChg>
       </pc:sldMasterChg>
     </pc:docChg>
   </pc:docChgLst>
   <pc:docChgLst>
-    <pc:chgData name="James Bottari" userId="aa7a7255-5a07-4af6-b02d-40373b14c66b" providerId="ADAL" clId="{19D58300-46BC-4723-AA93-9B1F0C59B16A}"/>
-    <pc:docChg chg="addSld delSld">
-      <pc:chgData name="James Bottari" userId="aa7a7255-5a07-4af6-b02d-40373b14c66b" providerId="ADAL" clId="{19D58300-46BC-4723-AA93-9B1F0C59B16A}" dt="2025-05-25T06:06:00.980" v="1" actId="47"/>
+    <pc:chgData name="James Bottari" userId="aa7a7255-5a07-4af6-b02d-40373b14c66b" providerId="ADAL" clId="{68B0AB2A-45B9-492D-99AC-8029653979EC}"/>
+    <pc:docChg chg="custSel delSld modSld modMainMaster">
+      <pc:chgData name="James Bottari" userId="aa7a7255-5a07-4af6-b02d-40373b14c66b" providerId="ADAL" clId="{68B0AB2A-45B9-492D-99AC-8029653979EC}" dt="2024-12-10T03:23:09.075" v="106" actId="2711"/>
       <pc:docMkLst>
         <pc:docMk/>
       </pc:docMkLst>
-      <pc:sldChg chg="del">
-        <pc:chgData name="James Bottari" userId="aa7a7255-5a07-4af6-b02d-40373b14c66b" providerId="ADAL" clId="{19D58300-46BC-4723-AA93-9B1F0C59B16A}" dt="2025-05-25T06:06:00.980" v="1" actId="47"/>
+      <pc:sldChg chg="modSp mod">
+        <pc:chgData name="James Bottari" userId="aa7a7255-5a07-4af6-b02d-40373b14c66b" providerId="ADAL" clId="{68B0AB2A-45B9-492D-99AC-8029653979EC}" dt="2024-12-10T02:52:32.302" v="5" actId="27636"/>
         <pc:sldMkLst>
           <pc:docMk/>
-          <pc:sldMk cId="3040465958" sldId="322"/>
+          <pc:sldMk cId="1269259594" sldId="270"/>
         </pc:sldMkLst>
       </pc:sldChg>
-      <pc:sldChg chg="new">
-        <pc:chgData name="James Bottari" userId="aa7a7255-5a07-4af6-b02d-40373b14c66b" providerId="ADAL" clId="{19D58300-46BC-4723-AA93-9B1F0C59B16A}" dt="2025-05-25T06:05:58.159" v="0" actId="680"/>
+      <pc:sldChg chg="modSp mod">
+        <pc:chgData name="James Bottari" userId="aa7a7255-5a07-4af6-b02d-40373b14c66b" providerId="ADAL" clId="{68B0AB2A-45B9-492D-99AC-8029653979EC}" dt="2024-12-10T02:52:32.287" v="4" actId="27636"/>
         <pc:sldMkLst>
           <pc:docMk/>
-          <pc:sldMk cId="1876469223" sldId="327"/>
+          <pc:sldMk cId="635136332" sldId="303"/>
+        </pc:sldMkLst>
+      </pc:sldChg>
+      <pc:sldChg chg="del">
+        <pc:chgData name="James Bottari" userId="aa7a7255-5a07-4af6-b02d-40373b14c66b" providerId="ADAL" clId="{68B0AB2A-45B9-492D-99AC-8029653979EC}" dt="2024-12-10T03:22:40.436" v="104" actId="47"/>
+        <pc:sldMkLst>
+          <pc:docMk/>
+          <pc:sldMk cId="893122604" sldId="313"/>
+        </pc:sldMkLst>
+      </pc:sldChg>
+      <pc:sldChg chg="del">
+        <pc:chgData name="James Bottari" userId="aa7a7255-5a07-4af6-b02d-40373b14c66b" providerId="ADAL" clId="{68B0AB2A-45B9-492D-99AC-8029653979EC}" dt="2024-12-10T03:22:39.444" v="103" actId="47"/>
+        <pc:sldMkLst>
+          <pc:docMk/>
+          <pc:sldMk cId="708943038" sldId="314"/>
+        </pc:sldMkLst>
+      </pc:sldChg>
+      <pc:sldChg chg="del">
+        <pc:chgData name="James Bottari" userId="aa7a7255-5a07-4af6-b02d-40373b14c66b" providerId="ADAL" clId="{68B0AB2A-45B9-492D-99AC-8029653979EC}" dt="2024-12-10T03:22:44.354" v="105" actId="47"/>
+        <pc:sldMkLst>
+          <pc:docMk/>
+          <pc:sldMk cId="2925611277" sldId="316"/>
+        </pc:sldMkLst>
+      </pc:sldChg>
+      <pc:sldMasterChg chg="modSldLayout">
+        <pc:chgData name="James Bottari" userId="aa7a7255-5a07-4af6-b02d-40373b14c66b" providerId="ADAL" clId="{68B0AB2A-45B9-492D-99AC-8029653979EC}" dt="2024-12-10T02:53:11.961" v="9" actId="2711"/>
+        <pc:sldMasterMkLst>
+          <pc:docMk/>
+          <pc:sldMasterMk cId="1096814676" sldId="2147483895"/>
+        </pc:sldMasterMkLst>
+        <pc:sldLayoutChg chg="modSp">
+          <pc:chgData name="James Bottari" userId="aa7a7255-5a07-4af6-b02d-40373b14c66b" providerId="ADAL" clId="{68B0AB2A-45B9-492D-99AC-8029653979EC}" dt="2024-12-10T02:53:03.898" v="8" actId="2711"/>
+          <pc:sldLayoutMkLst>
+            <pc:docMk/>
+            <pc:sldMasterMk cId="1096814676" sldId="2147483895"/>
+            <pc:sldLayoutMk cId="476608779" sldId="2147483901"/>
+          </pc:sldLayoutMkLst>
+        </pc:sldLayoutChg>
+        <pc:sldLayoutChg chg="modSp">
+          <pc:chgData name="James Bottari" userId="aa7a7255-5a07-4af6-b02d-40373b14c66b" providerId="ADAL" clId="{68B0AB2A-45B9-492D-99AC-8029653979EC}" dt="2024-12-10T02:52:54.169" v="7" actId="2711"/>
+          <pc:sldLayoutMkLst>
+            <pc:docMk/>
+            <pc:sldMasterMk cId="1096814676" sldId="2147483895"/>
+            <pc:sldLayoutMk cId="2939810570" sldId="2147483902"/>
+          </pc:sldLayoutMkLst>
+        </pc:sldLayoutChg>
+        <pc:sldLayoutChg chg="modSp">
+          <pc:chgData name="James Bottari" userId="aa7a7255-5a07-4af6-b02d-40373b14c66b" providerId="ADAL" clId="{68B0AB2A-45B9-492D-99AC-8029653979EC}" dt="2024-12-10T02:52:47.480" v="6" actId="2711"/>
+          <pc:sldLayoutMkLst>
+            <pc:docMk/>
+            <pc:sldMasterMk cId="1096814676" sldId="2147483895"/>
+            <pc:sldLayoutMk cId="3255171268" sldId="2147483971"/>
+          </pc:sldLayoutMkLst>
+        </pc:sldLayoutChg>
+        <pc:sldLayoutChg chg="modSp">
+          <pc:chgData name="James Bottari" userId="aa7a7255-5a07-4af6-b02d-40373b14c66b" providerId="ADAL" clId="{68B0AB2A-45B9-492D-99AC-8029653979EC}" dt="2024-12-10T02:53:11.961" v="9" actId="2711"/>
+          <pc:sldLayoutMkLst>
+            <pc:docMk/>
+            <pc:sldMasterMk cId="1096814676" sldId="2147483895"/>
+            <pc:sldLayoutMk cId="1554080316" sldId="2147483975"/>
+          </pc:sldLayoutMkLst>
+        </pc:sldLayoutChg>
+      </pc:sldMasterChg>
+      <pc:sldMasterChg chg="modSldLayout">
+        <pc:chgData name="James Bottari" userId="aa7a7255-5a07-4af6-b02d-40373b14c66b" providerId="ADAL" clId="{68B0AB2A-45B9-492D-99AC-8029653979EC}" dt="2024-12-10T02:58:21.732" v="102" actId="207"/>
+        <pc:sldMasterMkLst>
+          <pc:docMk/>
+          <pc:sldMasterMk cId="3870990250" sldId="2147483896"/>
+        </pc:sldMasterMkLst>
+        <pc:sldLayoutChg chg="addSp delSp modSp mod">
+          <pc:chgData name="James Bottari" userId="aa7a7255-5a07-4af6-b02d-40373b14c66b" providerId="ADAL" clId="{68B0AB2A-45B9-492D-99AC-8029653979EC}" dt="2024-12-10T02:58:10.980" v="96" actId="207"/>
+          <pc:sldLayoutMkLst>
+            <pc:docMk/>
+            <pc:sldMasterMk cId="3870990250" sldId="2147483896"/>
+            <pc:sldLayoutMk cId="3376014336" sldId="2147483649"/>
+          </pc:sldLayoutMkLst>
+        </pc:sldLayoutChg>
+        <pc:sldLayoutChg chg="addSp delSp modSp mod">
+          <pc:chgData name="James Bottari" userId="aa7a7255-5a07-4af6-b02d-40373b14c66b" providerId="ADAL" clId="{68B0AB2A-45B9-492D-99AC-8029653979EC}" dt="2024-12-10T02:58:21.732" v="102" actId="207"/>
+          <pc:sldLayoutMkLst>
+            <pc:docMk/>
+            <pc:sldMasterMk cId="3870990250" sldId="2147483896"/>
+            <pc:sldLayoutMk cId="3792869417" sldId="2147483897"/>
+          </pc:sldLayoutMkLst>
+        </pc:sldLayoutChg>
+        <pc:sldLayoutChg chg="addSp delSp modSp mod">
+          <pc:chgData name="James Bottari" userId="aa7a7255-5a07-4af6-b02d-40373b14c66b" providerId="ADAL" clId="{68B0AB2A-45B9-492D-99AC-8029653979EC}" dt="2024-12-10T02:58:16.586" v="99" actId="207"/>
+          <pc:sldLayoutMkLst>
+            <pc:docMk/>
+            <pc:sldMasterMk cId="3870990250" sldId="2147483896"/>
+            <pc:sldLayoutMk cId="1416010805" sldId="2147483900"/>
+          </pc:sldLayoutMkLst>
+        </pc:sldLayoutChg>
+      </pc:sldMasterChg>
+      <pc:sldMasterChg chg="modSldLayout">
+        <pc:chgData name="James Bottari" userId="aa7a7255-5a07-4af6-b02d-40373b14c66b" providerId="ADAL" clId="{68B0AB2A-45B9-492D-99AC-8029653979EC}" dt="2024-12-10T02:55:07.602" v="26" actId="207"/>
+        <pc:sldMasterMkLst>
+          <pc:docMk/>
+          <pc:sldMasterMk cId="1584904203" sldId="2147483904"/>
+        </pc:sldMasterMkLst>
+        <pc:sldLayoutChg chg="addSp delSp modSp mod">
+          <pc:chgData name="James Bottari" userId="aa7a7255-5a07-4af6-b02d-40373b14c66b" providerId="ADAL" clId="{68B0AB2A-45B9-492D-99AC-8029653979EC}" dt="2024-12-10T02:54:28.189" v="13" actId="207"/>
+          <pc:sldLayoutMkLst>
+            <pc:docMk/>
+            <pc:sldMasterMk cId="1584904203" sldId="2147483904"/>
+            <pc:sldLayoutMk cId="1393762226" sldId="2147483905"/>
+          </pc:sldLayoutMkLst>
+        </pc:sldLayoutChg>
+        <pc:sldLayoutChg chg="addSp delSp modSp mod">
+          <pc:chgData name="James Bottari" userId="aa7a7255-5a07-4af6-b02d-40373b14c66b" providerId="ADAL" clId="{68B0AB2A-45B9-492D-99AC-8029653979EC}" dt="2024-12-10T02:54:38.780" v="16" actId="207"/>
+          <pc:sldLayoutMkLst>
+            <pc:docMk/>
+            <pc:sldMasterMk cId="1584904203" sldId="2147483904"/>
+            <pc:sldLayoutMk cId="747897296" sldId="2147483906"/>
+          </pc:sldLayoutMkLst>
+        </pc:sldLayoutChg>
+        <pc:sldLayoutChg chg="addSp delSp modSp mod">
+          <pc:chgData name="James Bottari" userId="aa7a7255-5a07-4af6-b02d-40373b14c66b" providerId="ADAL" clId="{68B0AB2A-45B9-492D-99AC-8029653979EC}" dt="2024-12-10T02:55:00.137" v="23" actId="207"/>
+          <pc:sldLayoutMkLst>
+            <pc:docMk/>
+            <pc:sldMasterMk cId="1584904203" sldId="2147483904"/>
+            <pc:sldLayoutMk cId="3542484949" sldId="2147483907"/>
+          </pc:sldLayoutMkLst>
+        </pc:sldLayoutChg>
+        <pc:sldLayoutChg chg="addSp delSp modSp mod">
+          <pc:chgData name="James Bottari" userId="aa7a7255-5a07-4af6-b02d-40373b14c66b" providerId="ADAL" clId="{68B0AB2A-45B9-492D-99AC-8029653979EC}" dt="2024-12-10T02:55:07.602" v="26" actId="207"/>
+          <pc:sldLayoutMkLst>
+            <pc:docMk/>
+            <pc:sldMasterMk cId="1584904203" sldId="2147483904"/>
+            <pc:sldLayoutMk cId="3359192433" sldId="2147483910"/>
+          </pc:sldLayoutMkLst>
+        </pc:sldLayoutChg>
+        <pc:sldLayoutChg chg="addSp delSp modSp mod">
+          <pc:chgData name="James Bottari" userId="aa7a7255-5a07-4af6-b02d-40373b14c66b" providerId="ADAL" clId="{68B0AB2A-45B9-492D-99AC-8029653979EC}" dt="2024-12-10T02:54:53.491" v="20" actId="1076"/>
+          <pc:sldLayoutMkLst>
+            <pc:docMk/>
+            <pc:sldMasterMk cId="1584904203" sldId="2147483904"/>
+            <pc:sldLayoutMk cId="2925468937" sldId="2147483911"/>
+          </pc:sldLayoutMkLst>
+        </pc:sldLayoutChg>
+      </pc:sldMasterChg>
+      <pc:sldMasterChg chg="modSldLayout">
+        <pc:chgData name="James Bottari" userId="aa7a7255-5a07-4af6-b02d-40373b14c66b" providerId="ADAL" clId="{68B0AB2A-45B9-492D-99AC-8029653979EC}" dt="2024-12-10T03:23:09.075" v="106" actId="2711"/>
+        <pc:sldMasterMkLst>
+          <pc:docMk/>
+          <pc:sldMasterMk cId="2557689541" sldId="2147483924"/>
+        </pc:sldMasterMkLst>
+        <pc:sldLayoutChg chg="addSp delSp modSp mod">
+          <pc:chgData name="James Bottari" userId="aa7a7255-5a07-4af6-b02d-40373b14c66b" providerId="ADAL" clId="{68B0AB2A-45B9-492D-99AC-8029653979EC}" dt="2024-12-10T02:56:43.560" v="57" actId="207"/>
+          <pc:sldLayoutMkLst>
+            <pc:docMk/>
+            <pc:sldMasterMk cId="2557689541" sldId="2147483924"/>
+            <pc:sldLayoutMk cId="662095832" sldId="2147483926"/>
+          </pc:sldLayoutMkLst>
+        </pc:sldLayoutChg>
+        <pc:sldLayoutChg chg="addSp delSp modSp mod">
+          <pc:chgData name="James Bottari" userId="aa7a7255-5a07-4af6-b02d-40373b14c66b" providerId="ADAL" clId="{68B0AB2A-45B9-492D-99AC-8029653979EC}" dt="2024-12-10T02:57:06.876" v="65" actId="1076"/>
+          <pc:sldLayoutMkLst>
+            <pc:docMk/>
+            <pc:sldMasterMk cId="2557689541" sldId="2147483924"/>
+            <pc:sldLayoutMk cId="2136145471" sldId="2147483939"/>
+          </pc:sldLayoutMkLst>
+        </pc:sldLayoutChg>
+        <pc:sldLayoutChg chg="addSp delSp modSp mod">
+          <pc:chgData name="James Bottari" userId="aa7a7255-5a07-4af6-b02d-40373b14c66b" providerId="ADAL" clId="{68B0AB2A-45B9-492D-99AC-8029653979EC}" dt="2024-12-10T03:23:09.075" v="106" actId="2711"/>
+          <pc:sldLayoutMkLst>
+            <pc:docMk/>
+            <pc:sldMasterMk cId="2557689541" sldId="2147483924"/>
+            <pc:sldLayoutMk cId="2935727249" sldId="2147483953"/>
+          </pc:sldLayoutMkLst>
+        </pc:sldLayoutChg>
+        <pc:sldLayoutChg chg="addSp delSp modSp mod">
+          <pc:chgData name="James Bottari" userId="aa7a7255-5a07-4af6-b02d-40373b14c66b" providerId="ADAL" clId="{68B0AB2A-45B9-492D-99AC-8029653979EC}" dt="2024-12-10T02:55:35.030" v="41" actId="207"/>
+          <pc:sldLayoutMkLst>
+            <pc:docMk/>
+            <pc:sldMasterMk cId="2557689541" sldId="2147483924"/>
+            <pc:sldLayoutMk cId="3133591715" sldId="2147483954"/>
+          </pc:sldLayoutMkLst>
+        </pc:sldLayoutChg>
+        <pc:sldLayoutChg chg="addSp delSp modSp mod">
+          <pc:chgData name="James Bottari" userId="aa7a7255-5a07-4af6-b02d-40373b14c66b" providerId="ADAL" clId="{68B0AB2A-45B9-492D-99AC-8029653979EC}" dt="2024-12-10T02:57:50.142" v="84" actId="207"/>
+          <pc:sldLayoutMkLst>
+            <pc:docMk/>
+            <pc:sldMasterMk cId="2557689541" sldId="2147483924"/>
+            <pc:sldLayoutMk cId="2792437263" sldId="2147483955"/>
+          </pc:sldLayoutMkLst>
+        </pc:sldLayoutChg>
+        <pc:sldLayoutChg chg="addSp delSp modSp mod">
+          <pc:chgData name="James Bottari" userId="aa7a7255-5a07-4af6-b02d-40373b14c66b" providerId="ADAL" clId="{68B0AB2A-45B9-492D-99AC-8029653979EC}" dt="2024-12-10T02:58:05.489" v="93" actId="207"/>
+          <pc:sldLayoutMkLst>
+            <pc:docMk/>
+            <pc:sldMasterMk cId="2557689541" sldId="2147483924"/>
+            <pc:sldLayoutMk cId="1748968647" sldId="2147483956"/>
+          </pc:sldLayoutMkLst>
+        </pc:sldLayoutChg>
+        <pc:sldLayoutChg chg="addSp delSp modSp mod">
+          <pc:chgData name="James Bottari" userId="aa7a7255-5a07-4af6-b02d-40373b14c66b" providerId="ADAL" clId="{68B0AB2A-45B9-492D-99AC-8029653979EC}" dt="2024-12-10T02:57:33.466" v="75" actId="207"/>
+          <pc:sldLayoutMkLst>
+            <pc:docMk/>
+            <pc:sldMasterMk cId="2557689541" sldId="2147483924"/>
+            <pc:sldLayoutMk cId="1616492962" sldId="2147483957"/>
+          </pc:sldLayoutMkLst>
+        </pc:sldLayoutChg>
+        <pc:sldLayoutChg chg="addSp delSp modSp mod">
+          <pc:chgData name="James Bottari" userId="aa7a7255-5a07-4af6-b02d-40373b14c66b" providerId="ADAL" clId="{68B0AB2A-45B9-492D-99AC-8029653979EC}" dt="2024-12-10T02:56:38.466" v="54" actId="207"/>
+          <pc:sldLayoutMkLst>
+            <pc:docMk/>
+            <pc:sldMasterMk cId="2557689541" sldId="2147483924"/>
+            <pc:sldLayoutMk cId="2537478654" sldId="2147483958"/>
+          </pc:sldLayoutMkLst>
+        </pc:sldLayoutChg>
+        <pc:sldLayoutChg chg="addSp delSp modSp mod">
+          <pc:chgData name="James Bottari" userId="aa7a7255-5a07-4af6-b02d-40373b14c66b" providerId="ADAL" clId="{68B0AB2A-45B9-492D-99AC-8029653979EC}" dt="2024-12-10T02:56:56.954" v="61" actId="1076"/>
+          <pc:sldLayoutMkLst>
+            <pc:docMk/>
+            <pc:sldMasterMk cId="2557689541" sldId="2147483924"/>
+            <pc:sldLayoutMk cId="2255840168" sldId="2147483959"/>
+          </pc:sldLayoutMkLst>
+        </pc:sldLayoutChg>
+        <pc:sldLayoutChg chg="addSp delSp modSp mod">
+          <pc:chgData name="James Bottari" userId="aa7a7255-5a07-4af6-b02d-40373b14c66b" providerId="ADAL" clId="{68B0AB2A-45B9-492D-99AC-8029653979EC}" dt="2024-12-10T02:57:40.510" v="78" actId="207"/>
+          <pc:sldLayoutMkLst>
+            <pc:docMk/>
+            <pc:sldMasterMk cId="2557689541" sldId="2147483924"/>
+            <pc:sldLayoutMk cId="2905150168" sldId="2147483960"/>
+          </pc:sldLayoutMkLst>
+        </pc:sldLayoutChg>
+        <pc:sldLayoutChg chg="addSp delSp modSp mod">
+          <pc:chgData name="James Bottari" userId="aa7a7255-5a07-4af6-b02d-40373b14c66b" providerId="ADAL" clId="{68B0AB2A-45B9-492D-99AC-8029653979EC}" dt="2024-12-10T02:55:13.666" v="29" actId="207"/>
+          <pc:sldLayoutMkLst>
+            <pc:docMk/>
+            <pc:sldMasterMk cId="2557689541" sldId="2147483924"/>
+            <pc:sldLayoutMk cId="2560168924" sldId="2147483961"/>
+          </pc:sldLayoutMkLst>
+        </pc:sldLayoutChg>
+        <pc:sldLayoutChg chg="addSp delSp modSp mod">
+          <pc:chgData name="James Bottari" userId="aa7a7255-5a07-4af6-b02d-40373b14c66b" providerId="ADAL" clId="{68B0AB2A-45B9-492D-99AC-8029653979EC}" dt="2024-12-10T02:57:28.292" v="72" actId="207"/>
+          <pc:sldLayoutMkLst>
+            <pc:docMk/>
+            <pc:sldMasterMk cId="2557689541" sldId="2147483924"/>
+            <pc:sldLayoutMk cId="4002871511" sldId="2147483963"/>
+          </pc:sldLayoutMkLst>
+        </pc:sldLayoutChg>
+        <pc:sldLayoutChg chg="addSp delSp modSp mod">
+          <pc:chgData name="James Bottari" userId="aa7a7255-5a07-4af6-b02d-40373b14c66b" providerId="ADAL" clId="{68B0AB2A-45B9-492D-99AC-8029653979EC}" dt="2024-12-10T02:55:23.736" v="35" actId="207"/>
+          <pc:sldLayoutMkLst>
+            <pc:docMk/>
+            <pc:sldMasterMk cId="2557689541" sldId="2147483924"/>
+            <pc:sldLayoutMk cId="207074033" sldId="2147483964"/>
+          </pc:sldLayoutMkLst>
+        </pc:sldLayoutChg>
+        <pc:sldLayoutChg chg="addSp delSp modSp mod">
+          <pc:chgData name="James Bottari" userId="aa7a7255-5a07-4af6-b02d-40373b14c66b" providerId="ADAL" clId="{68B0AB2A-45B9-492D-99AC-8029653979EC}" dt="2024-12-10T02:57:45.409" v="81" actId="207"/>
+          <pc:sldLayoutMkLst>
+            <pc:docMk/>
+            <pc:sldMasterMk cId="2557689541" sldId="2147483924"/>
+            <pc:sldLayoutMk cId="2382353240" sldId="2147483965"/>
+          </pc:sldLayoutMkLst>
+        </pc:sldLayoutChg>
+        <pc:sldLayoutChg chg="addSp delSp modSp mod">
+          <pc:chgData name="James Bottari" userId="aa7a7255-5a07-4af6-b02d-40373b14c66b" providerId="ADAL" clId="{68B0AB2A-45B9-492D-99AC-8029653979EC}" dt="2024-12-10T02:56:08.763" v="46" actId="20577"/>
+          <pc:sldLayoutMkLst>
+            <pc:docMk/>
+            <pc:sldMasterMk cId="2557689541" sldId="2147483924"/>
+            <pc:sldLayoutMk cId="475247331" sldId="2147483966"/>
+          </pc:sldLayoutMkLst>
+        </pc:sldLayoutChg>
+        <pc:sldLayoutChg chg="addSp delSp modSp mod">
+          <pc:chgData name="James Bottari" userId="aa7a7255-5a07-4af6-b02d-40373b14c66b" providerId="ADAL" clId="{68B0AB2A-45B9-492D-99AC-8029653979EC}" dt="2024-12-10T02:56:31.292" v="51" actId="20577"/>
+          <pc:sldLayoutMkLst>
+            <pc:docMk/>
+            <pc:sldMasterMk cId="2557689541" sldId="2147483924"/>
+            <pc:sldLayoutMk cId="3845850737" sldId="2147483968"/>
+          </pc:sldLayoutMkLst>
+        </pc:sldLayoutChg>
+        <pc:sldLayoutChg chg="addSp delSp modSp mod">
+          <pc:chgData name="James Bottari" userId="aa7a7255-5a07-4af6-b02d-40373b14c66b" providerId="ADAL" clId="{68B0AB2A-45B9-492D-99AC-8029653979EC}" dt="2024-12-10T02:57:17.869" v="69" actId="1076"/>
+          <pc:sldLayoutMkLst>
+            <pc:docMk/>
+            <pc:sldMasterMk cId="2557689541" sldId="2147483924"/>
+            <pc:sldLayoutMk cId="3806122435" sldId="2147483969"/>
+          </pc:sldLayoutMkLst>
+        </pc:sldLayoutChg>
+        <pc:sldLayoutChg chg="addSp delSp modSp mod">
+          <pc:chgData name="James Bottari" userId="aa7a7255-5a07-4af6-b02d-40373b14c66b" providerId="ADAL" clId="{68B0AB2A-45B9-492D-99AC-8029653979EC}" dt="2024-12-10T02:55:19.175" v="32" actId="207"/>
+          <pc:sldLayoutMkLst>
+            <pc:docMk/>
+            <pc:sldMasterMk cId="2557689541" sldId="2147483924"/>
+            <pc:sldLayoutMk cId="1544716566" sldId="2147483970"/>
+          </pc:sldLayoutMkLst>
+        </pc:sldLayoutChg>
+        <pc:sldLayoutChg chg="addSp delSp modSp mod">
+          <pc:chgData name="James Bottari" userId="aa7a7255-5a07-4af6-b02d-40373b14c66b" providerId="ADAL" clId="{68B0AB2A-45B9-492D-99AC-8029653979EC}" dt="2024-12-10T02:57:56.094" v="87" actId="207"/>
+          <pc:sldLayoutMkLst>
+            <pc:docMk/>
+            <pc:sldMasterMk cId="2557689541" sldId="2147483924"/>
+            <pc:sldLayoutMk cId="2276701835" sldId="2147483973"/>
+          </pc:sldLayoutMkLst>
+        </pc:sldLayoutChg>
+        <pc:sldLayoutChg chg="addSp delSp modSp mod">
+          <pc:chgData name="James Bottari" userId="aa7a7255-5a07-4af6-b02d-40373b14c66b" providerId="ADAL" clId="{68B0AB2A-45B9-492D-99AC-8029653979EC}" dt="2024-12-10T02:58:00.932" v="90" actId="207"/>
+          <pc:sldLayoutMkLst>
+            <pc:docMk/>
+            <pc:sldMasterMk cId="2557689541" sldId="2147483924"/>
+            <pc:sldLayoutMk cId="2031086626" sldId="2147483974"/>
+          </pc:sldLayoutMkLst>
+        </pc:sldLayoutChg>
+      </pc:sldMasterChg>
+    </pc:docChg>
+  </pc:docChgLst>
+  <pc:docChgLst>
+    <pc:chgData name="James Bottari" userId="aa7a7255-5a07-4af6-b02d-40373b14c66b" providerId="ADAL" clId="{E99A5A20-6F92-4A74-A59F-D6FF4797BAE6}"/>
+    <pc:docChg chg="modSld">
+      <pc:chgData name="James Bottari" userId="aa7a7255-5a07-4af6-b02d-40373b14c66b" providerId="ADAL" clId="{E99A5A20-6F92-4A74-A59F-D6FF4797BAE6}" dt="2025-05-01T06:54:47.383" v="1"/>
+      <pc:docMkLst>
+        <pc:docMk/>
+      </pc:docMkLst>
+      <pc:sldChg chg="addSp modSp">
+        <pc:chgData name="James Bottari" userId="aa7a7255-5a07-4af6-b02d-40373b14c66b" providerId="ADAL" clId="{E99A5A20-6F92-4A74-A59F-D6FF4797BAE6}" dt="2025-05-01T06:54:47.383" v="1"/>
+        <pc:sldMkLst>
+          <pc:docMk/>
+          <pc:sldMk cId="4055861119" sldId="276"/>
+        </pc:sldMkLst>
+        <pc:picChg chg="add mod">
+          <ac:chgData name="James Bottari" userId="aa7a7255-5a07-4af6-b02d-40373b14c66b" providerId="ADAL" clId="{E99A5A20-6F92-4A74-A59F-D6FF4797BAE6}" dt="2025-05-01T06:54:47.383" v="1"/>
+          <ac:picMkLst>
+            <pc:docMk/>
+            <pc:sldMk cId="4055861119" sldId="276"/>
+            <ac:picMk id="2" creationId="{5FC2524E-137E-820A-03A2-FE3C8D61FDBD}"/>
+          </ac:picMkLst>
+        </pc:picChg>
+      </pc:sldChg>
+      <pc:sldChg chg="addSp modSp">
+        <pc:chgData name="James Bottari" userId="aa7a7255-5a07-4af6-b02d-40373b14c66b" providerId="ADAL" clId="{E99A5A20-6F92-4A74-A59F-D6FF4797BAE6}" dt="2025-05-01T06:54:38.731" v="0"/>
+        <pc:sldMkLst>
+          <pc:docMk/>
+          <pc:sldMk cId="3741084860" sldId="326"/>
+        </pc:sldMkLst>
+        <pc:picChg chg="add mod">
+          <ac:chgData name="James Bottari" userId="aa7a7255-5a07-4af6-b02d-40373b14c66b" providerId="ADAL" clId="{E99A5A20-6F92-4A74-A59F-D6FF4797BAE6}" dt="2025-05-01T06:54:38.731" v="0"/>
+          <ac:picMkLst>
+            <pc:docMk/>
+            <pc:sldMk cId="3741084860" sldId="326"/>
+            <ac:picMk id="2" creationId="{2B03A760-E40A-8A13-9BF7-4C9E8CA1461F}"/>
+          </ac:picMkLst>
+        </pc:picChg>
+      </pc:sldChg>
+    </pc:docChg>
+  </pc:docChgLst>
+  <pc:docChgLst>
+    <pc:chgData name="Yukiko Ito" userId="S::a000005@vsn.co.jp::e225ba00-d984-4bf8-b5a0-097f698f5af4" providerId="AD" clId="Web-{AF355848-89F5-6182-3938-F65D62EE12FB}"/>
+    <pc:docChg chg="addSld delSld">
+      <pc:chgData name="Yukiko Ito" userId="S::a000005@vsn.co.jp::e225ba00-d984-4bf8-b5a0-097f698f5af4" providerId="AD" clId="Web-{AF355848-89F5-6182-3938-F65D62EE12FB}" dt="2025-03-10T02:12:38.739" v="1"/>
+      <pc:docMkLst>
+        <pc:docMk/>
+      </pc:docMkLst>
+      <pc:sldChg chg="new del">
+        <pc:chgData name="Yukiko Ito" userId="S::a000005@vsn.co.jp::e225ba00-d984-4bf8-b5a0-097f698f5af4" providerId="AD" clId="Web-{AF355848-89F5-6182-3938-F65D62EE12FB}" dt="2025-03-10T02:12:38.739" v="1"/>
+        <pc:sldMkLst>
+          <pc:docMk/>
+          <pc:sldMk cId="321284399" sldId="327"/>
         </pc:sldMkLst>
       </pc:sldChg>
     </pc:docChg>
@@ -226,790 +878,9 @@
     </pc:docChg>
   </pc:docChgLst>
   <pc:docChgLst>
-    <pc:chgData name="James Bottari" userId="aa7a7255-5a07-4af6-b02d-40373b14c66b" providerId="ADAL" clId="{95FCC634-049A-42E8-9612-540A286D09B9}"/>
-    <pc:docChg chg="modSld">
-      <pc:chgData name="James Bottari" userId="aa7a7255-5a07-4af6-b02d-40373b14c66b" providerId="ADAL" clId="{95FCC634-049A-42E8-9612-540A286D09B9}" dt="2025-05-26T00:17:29.687" v="4" actId="20577"/>
-      <pc:docMkLst>
-        <pc:docMk/>
-      </pc:docMkLst>
-      <pc:sldChg chg="modSp mod">
-        <pc:chgData name="James Bottari" userId="aa7a7255-5a07-4af6-b02d-40373b14c66b" providerId="ADAL" clId="{95FCC634-049A-42E8-9612-540A286D09B9}" dt="2025-05-26T00:17:29.687" v="4" actId="20577"/>
-        <pc:sldMkLst>
-          <pc:docMk/>
-          <pc:sldMk cId="1876469223" sldId="327"/>
-        </pc:sldMkLst>
-        <pc:spChg chg="mod">
-          <ac:chgData name="James Bottari" userId="aa7a7255-5a07-4af6-b02d-40373b14c66b" providerId="ADAL" clId="{95FCC634-049A-42E8-9612-540A286D09B9}" dt="2025-05-26T00:17:29.687" v="4" actId="20577"/>
-          <ac:spMkLst>
-            <pc:docMk/>
-            <pc:sldMk cId="1876469223" sldId="327"/>
-            <ac:spMk id="2" creationId="{651D3DE5-1741-F13E-1CE8-400C6F362323}"/>
-          </ac:spMkLst>
-        </pc:spChg>
-        <pc:spChg chg="mod">
-          <ac:chgData name="James Bottari" userId="aa7a7255-5a07-4af6-b02d-40373b14c66b" providerId="ADAL" clId="{95FCC634-049A-42E8-9612-540A286D09B9}" dt="2025-05-26T00:17:21.461" v="2" actId="20577"/>
-          <ac:spMkLst>
-            <pc:docMk/>
-            <pc:sldMk cId="1876469223" sldId="327"/>
-            <ac:spMk id="3" creationId="{04CFFE83-435F-D674-D166-502C8FCF4D02}"/>
-          </ac:spMkLst>
-        </pc:spChg>
-        <pc:spChg chg="mod">
-          <ac:chgData name="James Bottari" userId="aa7a7255-5a07-4af6-b02d-40373b14c66b" providerId="ADAL" clId="{95FCC634-049A-42E8-9612-540A286D09B9}" dt="2025-05-26T00:17:14.620" v="0"/>
-          <ac:spMkLst>
-            <pc:docMk/>
-            <pc:sldMk cId="1876469223" sldId="327"/>
-            <ac:spMk id="4" creationId="{1770407E-AB1D-AC9F-741D-457A6343A5D2}"/>
-          </ac:spMkLst>
-        </pc:spChg>
-      </pc:sldChg>
-    </pc:docChg>
-  </pc:docChgLst>
-  <pc:docChgLst>
-    <pc:chgData name="James Bottari" userId="aa7a7255-5a07-4af6-b02d-40373b14c66b" providerId="ADAL" clId="{2A90D428-1A59-4DB9-A580-CD001627778A}"/>
-    <pc:docChg chg="modSld modMainMaster">
-      <pc:chgData name="James Bottari" userId="aa7a7255-5a07-4af6-b02d-40373b14c66b" providerId="ADAL" clId="{2A90D428-1A59-4DB9-A580-CD001627778A}" dt="2024-12-13T06:34:52.461" v="155"/>
-      <pc:docMkLst>
-        <pc:docMk/>
-      </pc:docMkLst>
-      <pc:sldChg chg="modTransition">
-        <pc:chgData name="James Bottari" userId="aa7a7255-5a07-4af6-b02d-40373b14c66b" providerId="ADAL" clId="{2A90D428-1A59-4DB9-A580-CD001627778A}" dt="2024-12-13T06:27:40.709" v="16"/>
-        <pc:sldMkLst>
-          <pc:docMk/>
-          <pc:sldMk cId="1269259594" sldId="270"/>
-        </pc:sldMkLst>
-      </pc:sldChg>
-      <pc:sldChg chg="modTransition modAnim">
-        <pc:chgData name="James Bottari" userId="aa7a7255-5a07-4af6-b02d-40373b14c66b" providerId="ADAL" clId="{2A90D428-1A59-4DB9-A580-CD001627778A}" dt="2024-12-13T06:28:23.354" v="122"/>
-        <pc:sldMkLst>
-          <pc:docMk/>
-          <pc:sldMk cId="4055861119" sldId="276"/>
-        </pc:sldMkLst>
-      </pc:sldChg>
-      <pc:sldChg chg="modTransition modAnim">
-        <pc:chgData name="James Bottari" userId="aa7a7255-5a07-4af6-b02d-40373b14c66b" providerId="ADAL" clId="{2A90D428-1A59-4DB9-A580-CD001627778A}" dt="2024-12-13T06:28:25.945" v="125"/>
-        <pc:sldMkLst>
-          <pc:docMk/>
-          <pc:sldMk cId="2076787606" sldId="294"/>
-        </pc:sldMkLst>
-      </pc:sldChg>
-      <pc:sldChg chg="modTransition">
-        <pc:chgData name="James Bottari" userId="aa7a7255-5a07-4af6-b02d-40373b14c66b" providerId="ADAL" clId="{2A90D428-1A59-4DB9-A580-CD001627778A}" dt="2024-12-13T06:27:52.450" v="32"/>
-        <pc:sldMkLst>
-          <pc:docMk/>
-          <pc:sldMk cId="2385859357" sldId="296"/>
-        </pc:sldMkLst>
-      </pc:sldChg>
-      <pc:sldChg chg="modTransition">
-        <pc:chgData name="James Bottari" userId="aa7a7255-5a07-4af6-b02d-40373b14c66b" providerId="ADAL" clId="{2A90D428-1A59-4DB9-A580-CD001627778A}" dt="2024-12-13T06:27:41.441" v="17"/>
-        <pc:sldMkLst>
-          <pc:docMk/>
-          <pc:sldMk cId="635136332" sldId="303"/>
-        </pc:sldMkLst>
-      </pc:sldChg>
-      <pc:sldChg chg="modTransition modAnim">
-        <pc:chgData name="James Bottari" userId="aa7a7255-5a07-4af6-b02d-40373b14c66b" providerId="ADAL" clId="{2A90D428-1A59-4DB9-A580-CD001627778A}" dt="2024-12-13T06:28:57.231" v="135"/>
-        <pc:sldMkLst>
-          <pc:docMk/>
-          <pc:sldMk cId="3563421687" sldId="307"/>
-        </pc:sldMkLst>
-      </pc:sldChg>
-      <pc:sldChg chg="modTransition">
-        <pc:chgData name="James Bottari" userId="aa7a7255-5a07-4af6-b02d-40373b14c66b" providerId="ADAL" clId="{2A90D428-1A59-4DB9-A580-CD001627778A}" dt="2024-12-13T06:27:46.323" v="24"/>
-        <pc:sldMkLst>
-          <pc:docMk/>
-          <pc:sldMk cId="2738745632" sldId="312"/>
-        </pc:sldMkLst>
-      </pc:sldChg>
-      <pc:sldChg chg="modTransition">
-        <pc:chgData name="James Bottari" userId="aa7a7255-5a07-4af6-b02d-40373b14c66b" providerId="ADAL" clId="{2A90D428-1A59-4DB9-A580-CD001627778A}" dt="2024-12-13T06:27:48.347" v="27"/>
-        <pc:sldMkLst>
-          <pc:docMk/>
-          <pc:sldMk cId="1086656556" sldId="317"/>
-        </pc:sldMkLst>
-      </pc:sldChg>
-      <pc:sldChg chg="modTransition modAnim">
-        <pc:chgData name="James Bottari" userId="aa7a7255-5a07-4af6-b02d-40373b14c66b" providerId="ADAL" clId="{2A90D428-1A59-4DB9-A580-CD001627778A}" dt="2024-12-13T06:34:52.461" v="155"/>
-        <pc:sldMkLst>
-          <pc:docMk/>
-          <pc:sldMk cId="429500297" sldId="318"/>
-        </pc:sldMkLst>
-      </pc:sldChg>
-      <pc:sldChg chg="modTransition modAnim">
-        <pc:chgData name="James Bottari" userId="aa7a7255-5a07-4af6-b02d-40373b14c66b" providerId="ADAL" clId="{2A90D428-1A59-4DB9-A580-CD001627778A}" dt="2024-12-13T06:34:46.219" v="153"/>
-        <pc:sldMkLst>
-          <pc:docMk/>
-          <pc:sldMk cId="2059184449" sldId="319"/>
-        </pc:sldMkLst>
-      </pc:sldChg>
-      <pc:sldChg chg="modTransition modAnim">
-        <pc:chgData name="James Bottari" userId="aa7a7255-5a07-4af6-b02d-40373b14c66b" providerId="ADAL" clId="{2A90D428-1A59-4DB9-A580-CD001627778A}" dt="2024-12-13T06:28:10.114" v="74"/>
-        <pc:sldMkLst>
-          <pc:docMk/>
-          <pc:sldMk cId="2099607510" sldId="321"/>
-        </pc:sldMkLst>
-      </pc:sldChg>
-      <pc:sldChg chg="modTransition modAnim">
-        <pc:chgData name="James Bottari" userId="aa7a7255-5a07-4af6-b02d-40373b14c66b" providerId="ADAL" clId="{2A90D428-1A59-4DB9-A580-CD001627778A}" dt="2024-12-13T06:28:07.578" v="63"/>
-        <pc:sldMkLst>
-          <pc:docMk/>
-          <pc:sldMk cId="3040465958" sldId="322"/>
-        </pc:sldMkLst>
-      </pc:sldChg>
-      <pc:sldChg chg="modTransition modAnim">
-        <pc:chgData name="James Bottari" userId="aa7a7255-5a07-4af6-b02d-40373b14c66b" providerId="ADAL" clId="{2A90D428-1A59-4DB9-A580-CD001627778A}" dt="2024-12-13T06:28:13.684" v="86"/>
-        <pc:sldMkLst>
-          <pc:docMk/>
-          <pc:sldMk cId="1826894909" sldId="323"/>
-        </pc:sldMkLst>
-      </pc:sldChg>
-      <pc:sldChg chg="modTransition modAnim">
-        <pc:chgData name="James Bottari" userId="aa7a7255-5a07-4af6-b02d-40373b14c66b" providerId="ADAL" clId="{2A90D428-1A59-4DB9-A580-CD001627778A}" dt="2024-12-13T06:28:16.783" v="103"/>
-        <pc:sldMkLst>
-          <pc:docMk/>
-          <pc:sldMk cId="1308982476" sldId="324"/>
-        </pc:sldMkLst>
-      </pc:sldChg>
-      <pc:sldChg chg="modTransition">
-        <pc:chgData name="James Bottari" userId="aa7a7255-5a07-4af6-b02d-40373b14c66b" providerId="ADAL" clId="{2A90D428-1A59-4DB9-A580-CD001627778A}" dt="2024-12-13T06:27:35.516" v="9"/>
-        <pc:sldMkLst>
-          <pc:docMk/>
-          <pc:sldMk cId="1705586881" sldId="325"/>
-        </pc:sldMkLst>
-      </pc:sldChg>
-      <pc:sldChg chg="modTransition modAnim">
-        <pc:chgData name="James Bottari" userId="aa7a7255-5a07-4af6-b02d-40373b14c66b" providerId="ADAL" clId="{2A90D428-1A59-4DB9-A580-CD001627778A}" dt="2024-12-13T06:28:32.574" v="126"/>
-        <pc:sldMkLst>
-          <pc:docMk/>
-          <pc:sldMk cId="3741084860" sldId="326"/>
-        </pc:sldMkLst>
-      </pc:sldChg>
-      <pc:sldMasterChg chg="modSldLayout">
-        <pc:chgData name="James Bottari" userId="aa7a7255-5a07-4af6-b02d-40373b14c66b" providerId="ADAL" clId="{2A90D428-1A59-4DB9-A580-CD001627778A}" dt="2024-12-13T06:28:10.114" v="74"/>
-        <pc:sldMasterMkLst>
-          <pc:docMk/>
-          <pc:sldMasterMk cId="1096814676" sldId="2147483895"/>
-        </pc:sldMasterMkLst>
-        <pc:sldLayoutChg chg="modTransition modAnim">
-          <pc:chgData name="James Bottari" userId="aa7a7255-5a07-4af6-b02d-40373b14c66b" providerId="ADAL" clId="{2A90D428-1A59-4DB9-A580-CD001627778A}" dt="2024-12-13T06:28:07.578" v="63"/>
-          <pc:sldLayoutMkLst>
-            <pc:docMk/>
-            <pc:sldMasterMk cId="1096814676" sldId="2147483895"/>
-            <pc:sldLayoutMk cId="476608779" sldId="2147483901"/>
-          </pc:sldLayoutMkLst>
-        </pc:sldLayoutChg>
-        <pc:sldLayoutChg chg="modTransition modAnim">
-          <pc:chgData name="James Bottari" userId="aa7a7255-5a07-4af6-b02d-40373b14c66b" providerId="ADAL" clId="{2A90D428-1A59-4DB9-A580-CD001627778A}" dt="2024-12-13T06:28:05.426" v="52"/>
-          <pc:sldLayoutMkLst>
-            <pc:docMk/>
-            <pc:sldMasterMk cId="1096814676" sldId="2147483895"/>
-            <pc:sldLayoutMk cId="2939810570" sldId="2147483902"/>
-          </pc:sldLayoutMkLst>
-        </pc:sldLayoutChg>
-        <pc:sldLayoutChg chg="modTransition modAnim">
-          <pc:chgData name="James Bottari" userId="aa7a7255-5a07-4af6-b02d-40373b14c66b" providerId="ADAL" clId="{2A90D428-1A59-4DB9-A580-CD001627778A}" dt="2024-12-13T06:28:02.361" v="42"/>
-          <pc:sldLayoutMkLst>
-            <pc:docMk/>
-            <pc:sldMasterMk cId="1096814676" sldId="2147483895"/>
-            <pc:sldLayoutMk cId="3255171268" sldId="2147483971"/>
-          </pc:sldLayoutMkLst>
-        </pc:sldLayoutChg>
-        <pc:sldLayoutChg chg="modTransition modAnim">
-          <pc:chgData name="James Bottari" userId="aa7a7255-5a07-4af6-b02d-40373b14c66b" providerId="ADAL" clId="{2A90D428-1A59-4DB9-A580-CD001627778A}" dt="2024-12-13T06:28:10.114" v="74"/>
-          <pc:sldLayoutMkLst>
-            <pc:docMk/>
-            <pc:sldMasterMk cId="1096814676" sldId="2147483895"/>
-            <pc:sldLayoutMk cId="1554080316" sldId="2147483975"/>
-          </pc:sldLayoutMkLst>
-        </pc:sldLayoutChg>
-      </pc:sldMasterChg>
-      <pc:sldMasterChg chg="modSldLayout">
-        <pc:chgData name="James Bottari" userId="aa7a7255-5a07-4af6-b02d-40373b14c66b" providerId="ADAL" clId="{2A90D428-1A59-4DB9-A580-CD001627778A}" dt="2024-12-13T06:29:02.942" v="141"/>
-        <pc:sldMasterMkLst>
-          <pc:docMk/>
-          <pc:sldMasterMk cId="3870990250" sldId="2147483896"/>
-        </pc:sldMasterMkLst>
-        <pc:sldLayoutChg chg="modTransition modAnim">
-          <pc:chgData name="James Bottari" userId="aa7a7255-5a07-4af6-b02d-40373b14c66b" providerId="ADAL" clId="{2A90D428-1A59-4DB9-A580-CD001627778A}" dt="2024-12-13T06:28:57.231" v="135"/>
-          <pc:sldLayoutMkLst>
-            <pc:docMk/>
-            <pc:sldMasterMk cId="3870990250" sldId="2147483896"/>
-            <pc:sldLayoutMk cId="3376014336" sldId="2147483649"/>
-          </pc:sldLayoutMkLst>
-        </pc:sldLayoutChg>
-        <pc:sldLayoutChg chg="modTransition modAnim">
-          <pc:chgData name="James Bottari" userId="aa7a7255-5a07-4af6-b02d-40373b14c66b" providerId="ADAL" clId="{2A90D428-1A59-4DB9-A580-CD001627778A}" dt="2024-12-13T06:29:02.942" v="141"/>
-          <pc:sldLayoutMkLst>
-            <pc:docMk/>
-            <pc:sldMasterMk cId="3870990250" sldId="2147483896"/>
-            <pc:sldLayoutMk cId="3792869417" sldId="2147483897"/>
-          </pc:sldLayoutMkLst>
-        </pc:sldLayoutChg>
-        <pc:sldLayoutChg chg="modTransition">
-          <pc:chgData name="James Bottari" userId="aa7a7255-5a07-4af6-b02d-40373b14c66b" providerId="ADAL" clId="{2A90D428-1A59-4DB9-A580-CD001627778A}" dt="2024-12-13T06:27:52.450" v="32"/>
-          <pc:sldLayoutMkLst>
-            <pc:docMk/>
-            <pc:sldMasterMk cId="3870990250" sldId="2147483896"/>
-            <pc:sldLayoutMk cId="2994822769" sldId="2147483898"/>
-          </pc:sldLayoutMkLst>
-        </pc:sldLayoutChg>
-        <pc:sldLayoutChg chg="modTransition modAnim">
-          <pc:chgData name="James Bottari" userId="aa7a7255-5a07-4af6-b02d-40373b14c66b" providerId="ADAL" clId="{2A90D428-1A59-4DB9-A580-CD001627778A}" dt="2024-12-13T06:29:00.277" v="139"/>
-          <pc:sldLayoutMkLst>
-            <pc:docMk/>
-            <pc:sldMasterMk cId="3870990250" sldId="2147483896"/>
-            <pc:sldLayoutMk cId="1416010805" sldId="2147483900"/>
-          </pc:sldLayoutMkLst>
-        </pc:sldLayoutChg>
-      </pc:sldMasterChg>
-      <pc:sldMasterChg chg="modSldLayout">
-        <pc:chgData name="James Bottari" userId="aa7a7255-5a07-4af6-b02d-40373b14c66b" providerId="ADAL" clId="{2A90D428-1A59-4DB9-A580-CD001627778A}" dt="2024-12-13T06:28:25.945" v="125"/>
-        <pc:sldMasterMkLst>
-          <pc:docMk/>
-          <pc:sldMasterMk cId="1584904203" sldId="2147483904"/>
-        </pc:sldMasterMkLst>
-        <pc:sldLayoutChg chg="modTransition modAnim">
-          <pc:chgData name="James Bottari" userId="aa7a7255-5a07-4af6-b02d-40373b14c66b" providerId="ADAL" clId="{2A90D428-1A59-4DB9-A580-CD001627778A}" dt="2024-12-13T06:28:13.684" v="86"/>
-          <pc:sldLayoutMkLst>
-            <pc:docMk/>
-            <pc:sldMasterMk cId="1584904203" sldId="2147483904"/>
-            <pc:sldLayoutMk cId="1393762226" sldId="2147483905"/>
-          </pc:sldLayoutMkLst>
-        </pc:sldLayoutChg>
-        <pc:sldLayoutChg chg="modTransition modAnim">
-          <pc:chgData name="James Bottari" userId="aa7a7255-5a07-4af6-b02d-40373b14c66b" providerId="ADAL" clId="{2A90D428-1A59-4DB9-A580-CD001627778A}" dt="2024-12-13T06:28:16.783" v="103"/>
-          <pc:sldLayoutMkLst>
-            <pc:docMk/>
-            <pc:sldMasterMk cId="1584904203" sldId="2147483904"/>
-            <pc:sldLayoutMk cId="747897296" sldId="2147483906"/>
-          </pc:sldLayoutMkLst>
-        </pc:sldLayoutChg>
-        <pc:sldLayoutChg chg="modTransition modAnim">
-          <pc:chgData name="James Bottari" userId="aa7a7255-5a07-4af6-b02d-40373b14c66b" providerId="ADAL" clId="{2A90D428-1A59-4DB9-A580-CD001627778A}" dt="2024-12-13T06:28:23.354" v="122"/>
-          <pc:sldLayoutMkLst>
-            <pc:docMk/>
-            <pc:sldMasterMk cId="1584904203" sldId="2147483904"/>
-            <pc:sldLayoutMk cId="3542484949" sldId="2147483907"/>
-          </pc:sldLayoutMkLst>
-        </pc:sldLayoutChg>
-        <pc:sldLayoutChg chg="modTransition modAnim">
-          <pc:chgData name="James Bottari" userId="aa7a7255-5a07-4af6-b02d-40373b14c66b" providerId="ADAL" clId="{2A90D428-1A59-4DB9-A580-CD001627778A}" dt="2024-12-13T06:28:25.945" v="125"/>
-          <pc:sldLayoutMkLst>
-            <pc:docMk/>
-            <pc:sldMasterMk cId="1584904203" sldId="2147483904"/>
-            <pc:sldLayoutMk cId="3359192433" sldId="2147483910"/>
-          </pc:sldLayoutMkLst>
-        </pc:sldLayoutChg>
-        <pc:sldLayoutChg chg="modTransition modAnim">
-          <pc:chgData name="James Bottari" userId="aa7a7255-5a07-4af6-b02d-40373b14c66b" providerId="ADAL" clId="{2A90D428-1A59-4DB9-A580-CD001627778A}" dt="2024-12-13T06:28:20.435" v="119"/>
-          <pc:sldLayoutMkLst>
-            <pc:docMk/>
-            <pc:sldMasterMk cId="1584904203" sldId="2147483904"/>
-            <pc:sldLayoutMk cId="2925468937" sldId="2147483911"/>
-          </pc:sldLayoutMkLst>
-        </pc:sldLayoutChg>
-      </pc:sldMasterChg>
-      <pc:sldMasterChg chg="modSldLayout">
-        <pc:chgData name="James Bottari" userId="aa7a7255-5a07-4af6-b02d-40373b14c66b" providerId="ADAL" clId="{2A90D428-1A59-4DB9-A580-CD001627778A}" dt="2024-12-13T06:28:49.743" v="131"/>
-        <pc:sldMasterMkLst>
-          <pc:docMk/>
-          <pc:sldMasterMk cId="2557689541" sldId="2147483924"/>
-        </pc:sldMasterMkLst>
-        <pc:sldLayoutChg chg="modTransition">
-          <pc:chgData name="James Bottari" userId="aa7a7255-5a07-4af6-b02d-40373b14c66b" providerId="ADAL" clId="{2A90D428-1A59-4DB9-A580-CD001627778A}" dt="2024-12-13T06:27:41.441" v="17"/>
-          <pc:sldLayoutMkLst>
-            <pc:docMk/>
-            <pc:sldMasterMk cId="2557689541" sldId="2147483924"/>
-            <pc:sldLayoutMk cId="662095832" sldId="2147483926"/>
-          </pc:sldLayoutMkLst>
-        </pc:sldLayoutChg>
-        <pc:sldLayoutChg chg="modTransition">
-          <pc:chgData name="James Bottari" userId="aa7a7255-5a07-4af6-b02d-40373b14c66b" providerId="ADAL" clId="{2A90D428-1A59-4DB9-A580-CD001627778A}" dt="2024-12-13T06:27:42.828" v="19"/>
-          <pc:sldLayoutMkLst>
-            <pc:docMk/>
-            <pc:sldMasterMk cId="2557689541" sldId="2147483924"/>
-            <pc:sldLayoutMk cId="2136145471" sldId="2147483939"/>
-          </pc:sldLayoutMkLst>
-        </pc:sldLayoutChg>
-        <pc:sldLayoutChg chg="modTransition">
-          <pc:chgData name="James Bottari" userId="aa7a7255-5a07-4af6-b02d-40373b14c66b" providerId="ADAL" clId="{2A90D428-1A59-4DB9-A580-CD001627778A}" dt="2024-12-13T06:27:37.809" v="12"/>
-          <pc:sldLayoutMkLst>
-            <pc:docMk/>
-            <pc:sldMasterMk cId="2557689541" sldId="2147483924"/>
-            <pc:sldLayoutMk cId="2935727249" sldId="2147483953"/>
-          </pc:sldLayoutMkLst>
-        </pc:sldLayoutChg>
-        <pc:sldLayoutChg chg="modTransition modAnim">
-          <pc:chgData name="James Bottari" userId="aa7a7255-5a07-4af6-b02d-40373b14c66b" providerId="ADAL" clId="{2A90D428-1A59-4DB9-A580-CD001627778A}" dt="2024-12-13T06:28:32.574" v="126"/>
-          <pc:sldLayoutMkLst>
-            <pc:docMk/>
-            <pc:sldMasterMk cId="2557689541" sldId="2147483924"/>
-            <pc:sldLayoutMk cId="3133591715" sldId="2147483954"/>
-          </pc:sldLayoutMkLst>
-        </pc:sldLayoutChg>
-        <pc:sldLayoutChg chg="modTransition">
-          <pc:chgData name="James Bottari" userId="aa7a7255-5a07-4af6-b02d-40373b14c66b" providerId="ADAL" clId="{2A90D428-1A59-4DB9-A580-CD001627778A}" dt="2024-12-13T06:27:46.975" v="25"/>
-          <pc:sldLayoutMkLst>
-            <pc:docMk/>
-            <pc:sldMasterMk cId="2557689541" sldId="2147483924"/>
-            <pc:sldLayoutMk cId="2792437263" sldId="2147483955"/>
-          </pc:sldLayoutMkLst>
-        </pc:sldLayoutChg>
-        <pc:sldLayoutChg chg="modTransition">
-          <pc:chgData name="James Bottari" userId="aa7a7255-5a07-4af6-b02d-40373b14c66b" providerId="ADAL" clId="{2A90D428-1A59-4DB9-A580-CD001627778A}" dt="2024-12-13T06:27:49.045" v="28"/>
-          <pc:sldLayoutMkLst>
-            <pc:docMk/>
-            <pc:sldMasterMk cId="2557689541" sldId="2147483924"/>
-            <pc:sldLayoutMk cId="1748968647" sldId="2147483956"/>
-          </pc:sldLayoutMkLst>
-        </pc:sldLayoutChg>
-        <pc:sldLayoutChg chg="modTransition">
-          <pc:chgData name="James Bottari" userId="aa7a7255-5a07-4af6-b02d-40373b14c66b" providerId="ADAL" clId="{2A90D428-1A59-4DB9-A580-CD001627778A}" dt="2024-12-13T06:27:44.920" v="22"/>
-          <pc:sldLayoutMkLst>
-            <pc:docMk/>
-            <pc:sldMasterMk cId="2557689541" sldId="2147483924"/>
-            <pc:sldLayoutMk cId="1616492962" sldId="2147483957"/>
-          </pc:sldLayoutMkLst>
-        </pc:sldLayoutChg>
-        <pc:sldLayoutChg chg="modTransition">
-          <pc:chgData name="James Bottari" userId="aa7a7255-5a07-4af6-b02d-40373b14c66b" providerId="ADAL" clId="{2A90D428-1A59-4DB9-A580-CD001627778A}" dt="2024-12-13T06:27:40.709" v="16"/>
-          <pc:sldLayoutMkLst>
-            <pc:docMk/>
-            <pc:sldMasterMk cId="2557689541" sldId="2147483924"/>
-            <pc:sldLayoutMk cId="2537478654" sldId="2147483958"/>
-          </pc:sldLayoutMkLst>
-        </pc:sldLayoutChg>
-        <pc:sldLayoutChg chg="modTransition">
-          <pc:chgData name="James Bottari" userId="aa7a7255-5a07-4af6-b02d-40373b14c66b" providerId="ADAL" clId="{2A90D428-1A59-4DB9-A580-CD001627778A}" dt="2024-12-13T06:27:42.095" v="18"/>
-          <pc:sldLayoutMkLst>
-            <pc:docMk/>
-            <pc:sldMasterMk cId="2557689541" sldId="2147483924"/>
-            <pc:sldLayoutMk cId="2255840168" sldId="2147483959"/>
-          </pc:sldLayoutMkLst>
-        </pc:sldLayoutChg>
-        <pc:sldLayoutChg chg="modTransition">
-          <pc:chgData name="James Bottari" userId="aa7a7255-5a07-4af6-b02d-40373b14c66b" providerId="ADAL" clId="{2A90D428-1A59-4DB9-A580-CD001627778A}" dt="2024-12-13T06:27:45.625" v="23"/>
-          <pc:sldLayoutMkLst>
-            <pc:docMk/>
-            <pc:sldMasterMk cId="2557689541" sldId="2147483924"/>
-            <pc:sldLayoutMk cId="2905150168" sldId="2147483960"/>
-          </pc:sldLayoutMkLst>
-        </pc:sldLayoutChg>
-        <pc:sldLayoutChg chg="modTransition">
-          <pc:chgData name="James Bottari" userId="aa7a7255-5a07-4af6-b02d-40373b14c66b" providerId="ADAL" clId="{2A90D428-1A59-4DB9-A580-CD001627778A}" dt="2024-12-13T06:27:35.516" v="9"/>
-          <pc:sldLayoutMkLst>
-            <pc:docMk/>
-            <pc:sldMasterMk cId="2557689541" sldId="2147483924"/>
-            <pc:sldLayoutMk cId="2560168924" sldId="2147483961"/>
-          </pc:sldLayoutMkLst>
-        </pc:sldLayoutChg>
-        <pc:sldLayoutChg chg="modTransition modAnim">
-          <pc:chgData name="James Bottari" userId="aa7a7255-5a07-4af6-b02d-40373b14c66b" providerId="ADAL" clId="{2A90D428-1A59-4DB9-A580-CD001627778A}" dt="2024-12-13T06:28:49.743" v="131"/>
-          <pc:sldLayoutMkLst>
-            <pc:docMk/>
-            <pc:sldMasterMk cId="2557689541" sldId="2147483924"/>
-            <pc:sldLayoutMk cId="4002871511" sldId="2147483963"/>
-          </pc:sldLayoutMkLst>
-        </pc:sldLayoutChg>
-        <pc:sldLayoutChg chg="modTransition">
-          <pc:chgData name="James Bottari" userId="aa7a7255-5a07-4af6-b02d-40373b14c66b" providerId="ADAL" clId="{2A90D428-1A59-4DB9-A580-CD001627778A}" dt="2024-12-13T06:27:37.049" v="11"/>
-          <pc:sldLayoutMkLst>
-            <pc:docMk/>
-            <pc:sldMasterMk cId="2557689541" sldId="2147483924"/>
-            <pc:sldLayoutMk cId="207074033" sldId="2147483964"/>
-          </pc:sldLayoutMkLst>
-        </pc:sldLayoutChg>
-        <pc:sldLayoutChg chg="modTransition">
-          <pc:chgData name="James Bottari" userId="aa7a7255-5a07-4af6-b02d-40373b14c66b" providerId="ADAL" clId="{2A90D428-1A59-4DB9-A580-CD001627778A}" dt="2024-12-13T06:27:46.323" v="24"/>
-          <pc:sldLayoutMkLst>
-            <pc:docMk/>
-            <pc:sldMasterMk cId="2557689541" sldId="2147483924"/>
-            <pc:sldLayoutMk cId="2382353240" sldId="2147483965"/>
-          </pc:sldLayoutMkLst>
-        </pc:sldLayoutChg>
-        <pc:sldLayoutChg chg="modTransition modAnim">
-          <pc:chgData name="James Bottari" userId="aa7a7255-5a07-4af6-b02d-40373b14c66b" providerId="ADAL" clId="{2A90D428-1A59-4DB9-A580-CD001627778A}" dt="2024-12-13T06:28:38.638" v="127"/>
-          <pc:sldLayoutMkLst>
-            <pc:docMk/>
-            <pc:sldMasterMk cId="2557689541" sldId="2147483924"/>
-            <pc:sldLayoutMk cId="475247331" sldId="2147483966"/>
-          </pc:sldLayoutMkLst>
-        </pc:sldLayoutChg>
-        <pc:sldLayoutChg chg="modTransition modAnim">
-          <pc:chgData name="James Bottari" userId="aa7a7255-5a07-4af6-b02d-40373b14c66b" providerId="ADAL" clId="{2A90D428-1A59-4DB9-A580-CD001627778A}" dt="2024-12-13T06:28:43.711" v="128"/>
-          <pc:sldLayoutMkLst>
-            <pc:docMk/>
-            <pc:sldMasterMk cId="2557689541" sldId="2147483924"/>
-            <pc:sldLayoutMk cId="3845850737" sldId="2147483968"/>
-          </pc:sldLayoutMkLst>
-        </pc:sldLayoutChg>
-        <pc:sldLayoutChg chg="modTransition">
-          <pc:chgData name="James Bottari" userId="aa7a7255-5a07-4af6-b02d-40373b14c66b" providerId="ADAL" clId="{2A90D428-1A59-4DB9-A580-CD001627778A}" dt="2024-12-13T06:27:43.496" v="20"/>
-          <pc:sldLayoutMkLst>
-            <pc:docMk/>
-            <pc:sldMasterMk cId="2557689541" sldId="2147483924"/>
-            <pc:sldLayoutMk cId="3806122435" sldId="2147483969"/>
-          </pc:sldLayoutMkLst>
-        </pc:sldLayoutChg>
-        <pc:sldLayoutChg chg="modTransition">
-          <pc:chgData name="James Bottari" userId="aa7a7255-5a07-4af6-b02d-40373b14c66b" providerId="ADAL" clId="{2A90D428-1A59-4DB9-A580-CD001627778A}" dt="2024-12-13T06:27:36.271" v="10"/>
-          <pc:sldLayoutMkLst>
-            <pc:docMk/>
-            <pc:sldMasterMk cId="2557689541" sldId="2147483924"/>
-            <pc:sldLayoutMk cId="1544716566" sldId="2147483970"/>
-          </pc:sldLayoutMkLst>
-        </pc:sldLayoutChg>
-        <pc:sldLayoutChg chg="modTransition">
-          <pc:chgData name="James Bottari" userId="aa7a7255-5a07-4af6-b02d-40373b14c66b" providerId="ADAL" clId="{2A90D428-1A59-4DB9-A580-CD001627778A}" dt="2024-12-13T06:27:47.665" v="26"/>
-          <pc:sldLayoutMkLst>
-            <pc:docMk/>
-            <pc:sldMasterMk cId="2557689541" sldId="2147483924"/>
-            <pc:sldLayoutMk cId="2276701835" sldId="2147483973"/>
-          </pc:sldLayoutMkLst>
-        </pc:sldLayoutChg>
-        <pc:sldLayoutChg chg="modTransition">
-          <pc:chgData name="James Bottari" userId="aa7a7255-5a07-4af6-b02d-40373b14c66b" providerId="ADAL" clId="{2A90D428-1A59-4DB9-A580-CD001627778A}" dt="2024-12-13T06:27:48.347" v="27"/>
-          <pc:sldLayoutMkLst>
-            <pc:docMk/>
-            <pc:sldMasterMk cId="2557689541" sldId="2147483924"/>
-            <pc:sldLayoutMk cId="2031086626" sldId="2147483974"/>
-          </pc:sldLayoutMkLst>
-        </pc:sldLayoutChg>
-      </pc:sldMasterChg>
-    </pc:docChg>
-  </pc:docChgLst>
-  <pc:docChgLst>
-    <pc:chgData name="James Bottari" userId="aa7a7255-5a07-4af6-b02d-40373b14c66b" providerId="ADAL" clId="{E2C29A58-B280-454D-8AE5-6B06D3726419}"/>
-    <pc:docChg chg="undo custSel delSld modSld modMainMaster">
-      <pc:chgData name="James Bottari" userId="aa7a7255-5a07-4af6-b02d-40373b14c66b" providerId="ADAL" clId="{E2C29A58-B280-454D-8AE5-6B06D3726419}" dt="2024-12-10T03:14:41.610" v="134" actId="47"/>
-      <pc:docMkLst>
-        <pc:docMk/>
-      </pc:docMkLst>
-      <pc:sldChg chg="modSp mod">
-        <pc:chgData name="James Bottari" userId="aa7a7255-5a07-4af6-b02d-40373b14c66b" providerId="ADAL" clId="{E2C29A58-B280-454D-8AE5-6B06D3726419}" dt="2024-12-10T03:12:40.111" v="125" actId="27636"/>
-        <pc:sldMkLst>
-          <pc:docMk/>
-          <pc:sldMk cId="1269259594" sldId="270"/>
-        </pc:sldMkLst>
-      </pc:sldChg>
-      <pc:sldChg chg="modSp mod">
-        <pc:chgData name="James Bottari" userId="aa7a7255-5a07-4af6-b02d-40373b14c66b" providerId="ADAL" clId="{E2C29A58-B280-454D-8AE5-6B06D3726419}" dt="2024-12-10T03:12:40.092" v="124" actId="27636"/>
-        <pc:sldMkLst>
-          <pc:docMk/>
-          <pc:sldMk cId="635136332" sldId="303"/>
-        </pc:sldMkLst>
-      </pc:sldChg>
-      <pc:sldChg chg="del">
-        <pc:chgData name="James Bottari" userId="aa7a7255-5a07-4af6-b02d-40373b14c66b" providerId="ADAL" clId="{E2C29A58-B280-454D-8AE5-6B06D3726419}" dt="2024-12-10T03:14:41.610" v="134" actId="47"/>
-        <pc:sldMkLst>
-          <pc:docMk/>
-          <pc:sldMk cId="893122604" sldId="313"/>
-        </pc:sldMkLst>
-      </pc:sldChg>
-      <pc:sldChg chg="del">
-        <pc:chgData name="James Bottari" userId="aa7a7255-5a07-4af6-b02d-40373b14c66b" providerId="ADAL" clId="{E2C29A58-B280-454D-8AE5-6B06D3726419}" dt="2024-12-10T03:14:40.713" v="133" actId="47"/>
-        <pc:sldMkLst>
-          <pc:docMk/>
-          <pc:sldMk cId="708943038" sldId="314"/>
-        </pc:sldMkLst>
-      </pc:sldChg>
-      <pc:sldChg chg="del">
-        <pc:chgData name="James Bottari" userId="aa7a7255-5a07-4af6-b02d-40373b14c66b" providerId="ADAL" clId="{E2C29A58-B280-454D-8AE5-6B06D3726419}" dt="2024-12-10T03:14:39.770" v="132" actId="47"/>
-        <pc:sldMkLst>
-          <pc:docMk/>
-          <pc:sldMk cId="2925611277" sldId="316"/>
-        </pc:sldMkLst>
-      </pc:sldChg>
-      <pc:sldMasterChg chg="addSp delSp modSp mod modSldLayout">
-        <pc:chgData name="James Bottari" userId="aa7a7255-5a07-4af6-b02d-40373b14c66b" providerId="ADAL" clId="{E2C29A58-B280-454D-8AE5-6B06D3726419}" dt="2024-12-10T03:13:08.326" v="129" actId="2711"/>
-        <pc:sldMasterMkLst>
-          <pc:docMk/>
-          <pc:sldMasterMk cId="1096814676" sldId="2147483895"/>
-        </pc:sldMasterMkLst>
-        <pc:sldLayoutChg chg="modSp">
-          <pc:chgData name="James Bottari" userId="aa7a7255-5a07-4af6-b02d-40373b14c66b" providerId="ADAL" clId="{E2C29A58-B280-454D-8AE5-6B06D3726419}" dt="2024-12-10T03:12:59.783" v="128" actId="2711"/>
-          <pc:sldLayoutMkLst>
-            <pc:docMk/>
-            <pc:sldMasterMk cId="1096814676" sldId="2147483895"/>
-            <pc:sldLayoutMk cId="476608779" sldId="2147483901"/>
-          </pc:sldLayoutMkLst>
-        </pc:sldLayoutChg>
-        <pc:sldLayoutChg chg="modSp">
-          <pc:chgData name="James Bottari" userId="aa7a7255-5a07-4af6-b02d-40373b14c66b" providerId="ADAL" clId="{E2C29A58-B280-454D-8AE5-6B06D3726419}" dt="2024-12-10T03:12:53.588" v="127" actId="2711"/>
-          <pc:sldLayoutMkLst>
-            <pc:docMk/>
-            <pc:sldMasterMk cId="1096814676" sldId="2147483895"/>
-            <pc:sldLayoutMk cId="2939810570" sldId="2147483902"/>
-          </pc:sldLayoutMkLst>
-        </pc:sldLayoutChg>
-        <pc:sldLayoutChg chg="modSp">
-          <pc:chgData name="James Bottari" userId="aa7a7255-5a07-4af6-b02d-40373b14c66b" providerId="ADAL" clId="{E2C29A58-B280-454D-8AE5-6B06D3726419}" dt="2024-12-10T03:12:47.433" v="126" actId="2711"/>
-          <pc:sldLayoutMkLst>
-            <pc:docMk/>
-            <pc:sldMasterMk cId="1096814676" sldId="2147483895"/>
-            <pc:sldLayoutMk cId="3255171268" sldId="2147483971"/>
-          </pc:sldLayoutMkLst>
-        </pc:sldLayoutChg>
-        <pc:sldLayoutChg chg="modSp">
-          <pc:chgData name="James Bottari" userId="aa7a7255-5a07-4af6-b02d-40373b14c66b" providerId="ADAL" clId="{E2C29A58-B280-454D-8AE5-6B06D3726419}" dt="2024-12-10T03:13:08.326" v="129" actId="2711"/>
-          <pc:sldLayoutMkLst>
-            <pc:docMk/>
-            <pc:sldMasterMk cId="1096814676" sldId="2147483895"/>
-            <pc:sldLayoutMk cId="1554080316" sldId="2147483975"/>
-          </pc:sldLayoutMkLst>
-        </pc:sldLayoutChg>
-      </pc:sldMasterChg>
-      <pc:sldMasterChg chg="addSp modSp modSldLayout">
-        <pc:chgData name="James Bottari" userId="aa7a7255-5a07-4af6-b02d-40373b14c66b" providerId="ADAL" clId="{E2C29A58-B280-454D-8AE5-6B06D3726419}" dt="2024-12-10T03:12:08.729" v="119"/>
-        <pc:sldMasterMkLst>
-          <pc:docMk/>
-          <pc:sldMasterMk cId="3870990250" sldId="2147483896"/>
-        </pc:sldMasterMkLst>
-        <pc:sldLayoutChg chg="addSp delSp modSp mod">
-          <pc:chgData name="James Bottari" userId="aa7a7255-5a07-4af6-b02d-40373b14c66b" providerId="ADAL" clId="{E2C29A58-B280-454D-8AE5-6B06D3726419}" dt="2024-12-10T03:12:01.311" v="115"/>
-          <pc:sldLayoutMkLst>
-            <pc:docMk/>
-            <pc:sldMasterMk cId="3870990250" sldId="2147483896"/>
-            <pc:sldLayoutMk cId="3376014336" sldId="2147483649"/>
-          </pc:sldLayoutMkLst>
-        </pc:sldLayoutChg>
-        <pc:sldLayoutChg chg="addSp delSp modSp mod">
-          <pc:chgData name="James Bottari" userId="aa7a7255-5a07-4af6-b02d-40373b14c66b" providerId="ADAL" clId="{E2C29A58-B280-454D-8AE5-6B06D3726419}" dt="2024-12-10T03:12:08.729" v="119"/>
-          <pc:sldLayoutMkLst>
-            <pc:docMk/>
-            <pc:sldMasterMk cId="3870990250" sldId="2147483896"/>
-            <pc:sldLayoutMk cId="3792869417" sldId="2147483897"/>
-          </pc:sldLayoutMkLst>
-        </pc:sldLayoutChg>
-        <pc:sldLayoutChg chg="addSp delSp modSp mod">
-          <pc:chgData name="James Bottari" userId="aa7a7255-5a07-4af6-b02d-40373b14c66b" providerId="ADAL" clId="{E2C29A58-B280-454D-8AE5-6B06D3726419}" dt="2024-12-10T03:12:04.912" v="117"/>
-          <pc:sldLayoutMkLst>
-            <pc:docMk/>
-            <pc:sldMasterMk cId="3870990250" sldId="2147483896"/>
-            <pc:sldLayoutMk cId="1416010805" sldId="2147483900"/>
-          </pc:sldLayoutMkLst>
-        </pc:sldLayoutChg>
-      </pc:sldMasterChg>
-      <pc:sldMasterChg chg="addSp delSp modSp mod modSldLayout">
-        <pc:chgData name="James Bottari" userId="aa7a7255-5a07-4af6-b02d-40373b14c66b" providerId="ADAL" clId="{E2C29A58-B280-454D-8AE5-6B06D3726419}" dt="2024-12-10T03:13:15.222" v="130" actId="14100"/>
-        <pc:sldMasterMkLst>
-          <pc:docMk/>
-          <pc:sldMasterMk cId="1584904203" sldId="2147483904"/>
-        </pc:sldMasterMkLst>
-        <pc:sldLayoutChg chg="addSp delSp modSp mod">
-          <pc:chgData name="James Bottari" userId="aa7a7255-5a07-4af6-b02d-40373b14c66b" providerId="ADAL" clId="{E2C29A58-B280-454D-8AE5-6B06D3726419}" dt="2024-12-10T03:13:15.222" v="130" actId="14100"/>
-          <pc:sldLayoutMkLst>
-            <pc:docMk/>
-            <pc:sldMasterMk cId="1584904203" sldId="2147483904"/>
-            <pc:sldLayoutMk cId="1393762226" sldId="2147483905"/>
-          </pc:sldLayoutMkLst>
-        </pc:sldLayoutChg>
-        <pc:sldLayoutChg chg="addSp delSp modSp mod">
-          <pc:chgData name="James Bottari" userId="aa7a7255-5a07-4af6-b02d-40373b14c66b" providerId="ADAL" clId="{E2C29A58-B280-454D-8AE5-6B06D3726419}" dt="2024-12-10T03:08:11.141" v="47"/>
-          <pc:sldLayoutMkLst>
-            <pc:docMk/>
-            <pc:sldMasterMk cId="1584904203" sldId="2147483904"/>
-            <pc:sldLayoutMk cId="747897296" sldId="2147483906"/>
-          </pc:sldLayoutMkLst>
-        </pc:sldLayoutChg>
-        <pc:sldLayoutChg chg="addSp delSp modSp mod">
-          <pc:chgData name="James Bottari" userId="aa7a7255-5a07-4af6-b02d-40373b14c66b" providerId="ADAL" clId="{E2C29A58-B280-454D-8AE5-6B06D3726419}" dt="2024-12-10T03:08:37.267" v="52"/>
-          <pc:sldLayoutMkLst>
-            <pc:docMk/>
-            <pc:sldMasterMk cId="1584904203" sldId="2147483904"/>
-            <pc:sldLayoutMk cId="3542484949" sldId="2147483907"/>
-          </pc:sldLayoutMkLst>
-        </pc:sldLayoutChg>
-        <pc:sldLayoutChg chg="addSp delSp modSp mod">
-          <pc:chgData name="James Bottari" userId="aa7a7255-5a07-4af6-b02d-40373b14c66b" providerId="ADAL" clId="{E2C29A58-B280-454D-8AE5-6B06D3726419}" dt="2024-12-10T03:08:40.790" v="54"/>
-          <pc:sldLayoutMkLst>
-            <pc:docMk/>
-            <pc:sldMasterMk cId="1584904203" sldId="2147483904"/>
-            <pc:sldLayoutMk cId="3359192433" sldId="2147483910"/>
-          </pc:sldLayoutMkLst>
-        </pc:sldLayoutChg>
-        <pc:sldLayoutChg chg="addSp delSp modSp mod">
-          <pc:chgData name="James Bottari" userId="aa7a7255-5a07-4af6-b02d-40373b14c66b" providerId="ADAL" clId="{E2C29A58-B280-454D-8AE5-6B06D3726419}" dt="2024-12-10T03:08:26.122" v="50" actId="1076"/>
-          <pc:sldLayoutMkLst>
-            <pc:docMk/>
-            <pc:sldMasterMk cId="1584904203" sldId="2147483904"/>
-            <pc:sldLayoutMk cId="2925468937" sldId="2147483911"/>
-          </pc:sldLayoutMkLst>
-        </pc:sldLayoutChg>
-      </pc:sldMasterChg>
-      <pc:sldMasterChg chg="addSp delSp modSp mod modSldLayout">
-        <pc:chgData name="James Bottari" userId="aa7a7255-5a07-4af6-b02d-40373b14c66b" providerId="ADAL" clId="{E2C29A58-B280-454D-8AE5-6B06D3726419}" dt="2024-12-10T03:13:34.615" v="131" actId="2711"/>
-        <pc:sldMasterMkLst>
-          <pc:docMk/>
-          <pc:sldMasterMk cId="2557689541" sldId="2147483924"/>
-        </pc:sldMasterMkLst>
-        <pc:sldLayoutChg chg="addSp delSp modSp mod">
-          <pc:chgData name="James Bottari" userId="aa7a7255-5a07-4af6-b02d-40373b14c66b" providerId="ADAL" clId="{E2C29A58-B280-454D-8AE5-6B06D3726419}" dt="2024-12-10T03:10:22.346" v="87"/>
-          <pc:sldLayoutMkLst>
-            <pc:docMk/>
-            <pc:sldMasterMk cId="2557689541" sldId="2147483924"/>
-            <pc:sldLayoutMk cId="662095832" sldId="2147483926"/>
-          </pc:sldLayoutMkLst>
-        </pc:sldLayoutChg>
-        <pc:sldLayoutChg chg="addSp delSp modSp mod">
-          <pc:chgData name="James Bottari" userId="aa7a7255-5a07-4af6-b02d-40373b14c66b" providerId="ADAL" clId="{E2C29A58-B280-454D-8AE5-6B06D3726419}" dt="2024-12-10T03:10:43.365" v="93" actId="1076"/>
-          <pc:sldLayoutMkLst>
-            <pc:docMk/>
-            <pc:sldMasterMk cId="2557689541" sldId="2147483924"/>
-            <pc:sldLayoutMk cId="2136145471" sldId="2147483939"/>
-          </pc:sldLayoutMkLst>
-        </pc:sldLayoutChg>
-        <pc:sldLayoutChg chg="addSp delSp modSp mod">
-          <pc:chgData name="James Bottari" userId="aa7a7255-5a07-4af6-b02d-40373b14c66b" providerId="ADAL" clId="{E2C29A58-B280-454D-8AE5-6B06D3726419}" dt="2024-12-10T03:13:34.615" v="131" actId="2711"/>
-          <pc:sldLayoutMkLst>
-            <pc:docMk/>
-            <pc:sldMasterMk cId="2557689541" sldId="2147483924"/>
-            <pc:sldLayoutMk cId="2935727249" sldId="2147483953"/>
-          </pc:sldLayoutMkLst>
-        </pc:sldLayoutChg>
-        <pc:sldLayoutChg chg="addSp delSp modSp mod">
-          <pc:chgData name="James Bottari" userId="aa7a7255-5a07-4af6-b02d-40373b14c66b" providerId="ADAL" clId="{E2C29A58-B280-454D-8AE5-6B06D3726419}" dt="2024-12-10T03:09:08.498" v="66"/>
-          <pc:sldLayoutMkLst>
-            <pc:docMk/>
-            <pc:sldMasterMk cId="2557689541" sldId="2147483924"/>
-            <pc:sldLayoutMk cId="3133591715" sldId="2147483954"/>
-          </pc:sldLayoutMkLst>
-        </pc:sldLayoutChg>
-        <pc:sldLayoutChg chg="addSp delSp modSp mod">
-          <pc:chgData name="James Bottari" userId="aa7a7255-5a07-4af6-b02d-40373b14c66b" providerId="ADAL" clId="{E2C29A58-B280-454D-8AE5-6B06D3726419}" dt="2024-12-10T03:11:40.066" v="106"/>
-          <pc:sldLayoutMkLst>
-            <pc:docMk/>
-            <pc:sldMasterMk cId="2557689541" sldId="2147483924"/>
-            <pc:sldLayoutMk cId="2792437263" sldId="2147483955"/>
-          </pc:sldLayoutMkLst>
-        </pc:sldLayoutChg>
-        <pc:sldLayoutChg chg="addSp delSp modSp mod">
-          <pc:chgData name="James Bottari" userId="aa7a7255-5a07-4af6-b02d-40373b14c66b" providerId="ADAL" clId="{E2C29A58-B280-454D-8AE5-6B06D3726419}" dt="2024-12-10T03:11:53.985" v="112"/>
-          <pc:sldLayoutMkLst>
-            <pc:docMk/>
-            <pc:sldMasterMk cId="2557689541" sldId="2147483924"/>
-            <pc:sldLayoutMk cId="1748968647" sldId="2147483956"/>
-          </pc:sldLayoutMkLst>
-        </pc:sldLayoutChg>
-        <pc:sldLayoutChg chg="addSp delSp modSp mod">
-          <pc:chgData name="James Bottari" userId="aa7a7255-5a07-4af6-b02d-40373b14c66b" providerId="ADAL" clId="{E2C29A58-B280-454D-8AE5-6B06D3726419}" dt="2024-12-10T03:11:28.513" v="100"/>
-          <pc:sldLayoutMkLst>
-            <pc:docMk/>
-            <pc:sldMasterMk cId="2557689541" sldId="2147483924"/>
-            <pc:sldLayoutMk cId="1616492962" sldId="2147483957"/>
-          </pc:sldLayoutMkLst>
-        </pc:sldLayoutChg>
-        <pc:sldLayoutChg chg="addSp delSp modSp mod">
-          <pc:chgData name="James Bottari" userId="aa7a7255-5a07-4af6-b02d-40373b14c66b" providerId="ADAL" clId="{E2C29A58-B280-454D-8AE5-6B06D3726419}" dt="2024-12-10T03:10:18.331" v="85"/>
-          <pc:sldLayoutMkLst>
-            <pc:docMk/>
-            <pc:sldMasterMk cId="2557689541" sldId="2147483924"/>
-            <pc:sldLayoutMk cId="2537478654" sldId="2147483958"/>
-          </pc:sldLayoutMkLst>
-        </pc:sldLayoutChg>
-        <pc:sldLayoutChg chg="addSp delSp modSp mod">
-          <pc:chgData name="James Bottari" userId="aa7a7255-5a07-4af6-b02d-40373b14c66b" providerId="ADAL" clId="{E2C29A58-B280-454D-8AE5-6B06D3726419}" dt="2024-12-10T03:10:34.816" v="90" actId="1076"/>
-          <pc:sldLayoutMkLst>
-            <pc:docMk/>
-            <pc:sldMasterMk cId="2557689541" sldId="2147483924"/>
-            <pc:sldLayoutMk cId="2255840168" sldId="2147483959"/>
-          </pc:sldLayoutMkLst>
-        </pc:sldLayoutChg>
-        <pc:sldLayoutChg chg="addSp delSp modSp mod">
-          <pc:chgData name="James Bottari" userId="aa7a7255-5a07-4af6-b02d-40373b14c66b" providerId="ADAL" clId="{E2C29A58-B280-454D-8AE5-6B06D3726419}" dt="2024-12-10T03:11:32.245" v="102"/>
-          <pc:sldLayoutMkLst>
-            <pc:docMk/>
-            <pc:sldMasterMk cId="2557689541" sldId="2147483924"/>
-            <pc:sldLayoutMk cId="2905150168" sldId="2147483960"/>
-          </pc:sldLayoutMkLst>
-        </pc:sldLayoutChg>
-        <pc:sldLayoutChg chg="addSp delSp modSp mod">
-          <pc:chgData name="James Bottari" userId="aa7a7255-5a07-4af6-b02d-40373b14c66b" providerId="ADAL" clId="{E2C29A58-B280-454D-8AE5-6B06D3726419}" dt="2024-12-10T03:08:48.303" v="58"/>
-          <pc:sldLayoutMkLst>
-            <pc:docMk/>
-            <pc:sldMasterMk cId="2557689541" sldId="2147483924"/>
-            <pc:sldLayoutMk cId="2560168924" sldId="2147483961"/>
-          </pc:sldLayoutMkLst>
-        </pc:sldLayoutChg>
-        <pc:sldLayoutChg chg="addSp delSp modSp mod">
-          <pc:chgData name="James Bottari" userId="aa7a7255-5a07-4af6-b02d-40373b14c66b" providerId="ADAL" clId="{E2C29A58-B280-454D-8AE5-6B06D3726419}" dt="2024-12-10T03:11:03.063" v="98"/>
-          <pc:sldLayoutMkLst>
-            <pc:docMk/>
-            <pc:sldMasterMk cId="2557689541" sldId="2147483924"/>
-            <pc:sldLayoutMk cId="4002871511" sldId="2147483963"/>
-          </pc:sldLayoutMkLst>
-        </pc:sldLayoutChg>
-        <pc:sldLayoutChg chg="addSp delSp modSp mod">
-          <pc:chgData name="James Bottari" userId="aa7a7255-5a07-4af6-b02d-40373b14c66b" providerId="ADAL" clId="{E2C29A58-B280-454D-8AE5-6B06D3726419}" dt="2024-12-10T03:08:57.027" v="62"/>
-          <pc:sldLayoutMkLst>
-            <pc:docMk/>
-            <pc:sldMasterMk cId="2557689541" sldId="2147483924"/>
-            <pc:sldLayoutMk cId="207074033" sldId="2147483964"/>
-          </pc:sldLayoutMkLst>
-        </pc:sldLayoutChg>
-        <pc:sldLayoutChg chg="addSp delSp modSp mod">
-          <pc:chgData name="James Bottari" userId="aa7a7255-5a07-4af6-b02d-40373b14c66b" providerId="ADAL" clId="{E2C29A58-B280-454D-8AE5-6B06D3726419}" dt="2024-12-10T03:11:36.577" v="104"/>
-          <pc:sldLayoutMkLst>
-            <pc:docMk/>
-            <pc:sldMasterMk cId="2557689541" sldId="2147483924"/>
-            <pc:sldLayoutMk cId="2382353240" sldId="2147483965"/>
-          </pc:sldLayoutMkLst>
-        </pc:sldLayoutChg>
-        <pc:sldLayoutChg chg="addSp delSp modSp mod">
-          <pc:chgData name="James Bottari" userId="aa7a7255-5a07-4af6-b02d-40373b14c66b" providerId="ADAL" clId="{E2C29A58-B280-454D-8AE5-6B06D3726419}" dt="2024-12-10T03:09:47.687" v="78" actId="6549"/>
-          <pc:sldLayoutMkLst>
-            <pc:docMk/>
-            <pc:sldMasterMk cId="2557689541" sldId="2147483924"/>
-            <pc:sldLayoutMk cId="475247331" sldId="2147483966"/>
-          </pc:sldLayoutMkLst>
-        </pc:sldLayoutChg>
-        <pc:sldLayoutChg chg="addSp delSp modSp mod">
-          <pc:chgData name="James Bottari" userId="aa7a7255-5a07-4af6-b02d-40373b14c66b" providerId="ADAL" clId="{E2C29A58-B280-454D-8AE5-6B06D3726419}" dt="2024-12-10T03:10:13.610" v="83" actId="207"/>
-          <pc:sldLayoutMkLst>
-            <pc:docMk/>
-            <pc:sldMasterMk cId="2557689541" sldId="2147483924"/>
-            <pc:sldLayoutMk cId="3845850737" sldId="2147483968"/>
-          </pc:sldLayoutMkLst>
-        </pc:sldLayoutChg>
-        <pc:sldLayoutChg chg="addSp delSp modSp mod">
-          <pc:chgData name="James Bottari" userId="aa7a7255-5a07-4af6-b02d-40373b14c66b" providerId="ADAL" clId="{E2C29A58-B280-454D-8AE5-6B06D3726419}" dt="2024-12-10T03:10:54.230" v="96" actId="1076"/>
-          <pc:sldLayoutMkLst>
-            <pc:docMk/>
-            <pc:sldMasterMk cId="2557689541" sldId="2147483924"/>
-            <pc:sldLayoutMk cId="3806122435" sldId="2147483969"/>
-          </pc:sldLayoutMkLst>
-        </pc:sldLayoutChg>
-        <pc:sldLayoutChg chg="addSp delSp modSp mod">
-          <pc:chgData name="James Bottari" userId="aa7a7255-5a07-4af6-b02d-40373b14c66b" providerId="ADAL" clId="{E2C29A58-B280-454D-8AE5-6B06D3726419}" dt="2024-12-10T03:08:53.234" v="60"/>
-          <pc:sldLayoutMkLst>
-            <pc:docMk/>
-            <pc:sldMasterMk cId="2557689541" sldId="2147483924"/>
-            <pc:sldLayoutMk cId="1544716566" sldId="2147483970"/>
-          </pc:sldLayoutMkLst>
-        </pc:sldLayoutChg>
-        <pc:sldLayoutChg chg="addSp delSp modSp mod">
-          <pc:chgData name="James Bottari" userId="aa7a7255-5a07-4af6-b02d-40373b14c66b" providerId="ADAL" clId="{E2C29A58-B280-454D-8AE5-6B06D3726419}" dt="2024-12-10T03:11:45.026" v="108"/>
-          <pc:sldLayoutMkLst>
-            <pc:docMk/>
-            <pc:sldMasterMk cId="2557689541" sldId="2147483924"/>
-            <pc:sldLayoutMk cId="2276701835" sldId="2147483973"/>
-          </pc:sldLayoutMkLst>
-        </pc:sldLayoutChg>
-        <pc:sldLayoutChg chg="addSp delSp modSp mod">
-          <pc:chgData name="James Bottari" userId="aa7a7255-5a07-4af6-b02d-40373b14c66b" providerId="ADAL" clId="{E2C29A58-B280-454D-8AE5-6B06D3726419}" dt="2024-12-10T03:11:48.945" v="110"/>
-          <pc:sldLayoutMkLst>
-            <pc:docMk/>
-            <pc:sldMasterMk cId="2557689541" sldId="2147483924"/>
-            <pc:sldLayoutMk cId="2031086626" sldId="2147483974"/>
-          </pc:sldLayoutMkLst>
-        </pc:sldLayoutChg>
-      </pc:sldMasterChg>
-    </pc:docChg>
-  </pc:docChgLst>
-  <pc:docChgLst>
     <pc:chgData name="James Bottari" userId="aa7a7255-5a07-4af6-b02d-40373b14c66b" providerId="ADAL" clId="{E9BB78DC-6604-4FD1-9EE9-045D7E77141F}"/>
     <pc:docChg chg="undo custSel modSld modMainMaster">
-      <pc:chgData name="James Bottari" userId="aa7a7255-5a07-4af6-b02d-40373b14c66b" providerId="ADAL" clId="{E9BB78DC-6604-4FD1-9EE9-045D7E77141F}" dt="2024-11-26T07:26:40.949" v="244" actId="12788"/>
+      <pc:chgData name="James Bottari" userId="aa7a7255-5a07-4af6-b02d-40373b14c66b" providerId="ADAL" clId="{E9BB78DC-6604-4FD1-9EE9-045D7E77141F}" dt="2024-11-26T04:38:32.513" v="166" actId="478"/>
       <pc:docMkLst>
         <pc:docMk/>
       </pc:docMkLst>
@@ -1025,13 +896,6 @@
         <pc:sldMkLst>
           <pc:docMk/>
           <pc:sldMk cId="2076787606" sldId="294"/>
-        </pc:sldMkLst>
-      </pc:sldChg>
-      <pc:sldChg chg="modAnim">
-        <pc:chgData name="James Bottari" userId="aa7a7255-5a07-4af6-b02d-40373b14c66b" providerId="ADAL" clId="{E9BB78DC-6604-4FD1-9EE9-045D7E77141F}" dt="2024-11-26T07:17:20.471" v="223"/>
-        <pc:sldMkLst>
-          <pc:docMk/>
-          <pc:sldMk cId="2385859357" sldId="296"/>
         </pc:sldMkLst>
       </pc:sldChg>
       <pc:sldChg chg="modSp mod">
@@ -1137,13 +1001,13 @@
         </pc:sldLayoutChg>
       </pc:sldMasterChg>
       <pc:sldMasterChg chg="addSp delSp modSp mod modSldLayout">
-        <pc:chgData name="James Bottari" userId="aa7a7255-5a07-4af6-b02d-40373b14c66b" providerId="ADAL" clId="{E9BB78DC-6604-4FD1-9EE9-045D7E77141F}" dt="2024-11-26T07:26:40.949" v="244" actId="12788"/>
+        <pc:chgData name="James Bottari" userId="aa7a7255-5a07-4af6-b02d-40373b14c66b" providerId="ADAL" clId="{E9BB78DC-6604-4FD1-9EE9-045D7E77141F}" dt="2024-11-26T04:38:32.513" v="166" actId="478"/>
         <pc:sldMasterMkLst>
           <pc:docMk/>
           <pc:sldMasterMk cId="3870990250" sldId="2147483896"/>
         </pc:sldMasterMkLst>
         <pc:sldLayoutChg chg="addSp delSp modSp mod">
-          <pc:chgData name="James Bottari" userId="aa7a7255-5a07-4af6-b02d-40373b14c66b" providerId="ADAL" clId="{E9BB78DC-6604-4FD1-9EE9-045D7E77141F}" dt="2024-11-26T04:51:03.877" v="199"/>
+          <pc:chgData name="James Bottari" userId="aa7a7255-5a07-4af6-b02d-40373b14c66b" providerId="ADAL" clId="{E9BB78DC-6604-4FD1-9EE9-045D7E77141F}" dt="2024-11-26T04:36:01.400" v="116" actId="207"/>
           <pc:sldLayoutMkLst>
             <pc:docMk/>
             <pc:sldMasterMk cId="3870990250" sldId="2147483896"/>
@@ -1151,15 +1015,15 @@
           </pc:sldLayoutMkLst>
         </pc:sldLayoutChg>
         <pc:sldLayoutChg chg="addSp delSp modSp mod">
-          <pc:chgData name="James Bottari" userId="aa7a7255-5a07-4af6-b02d-40373b14c66b" providerId="ADAL" clId="{E9BB78DC-6604-4FD1-9EE9-045D7E77141F}" dt="2024-11-26T07:21:59.675" v="240" actId="12788"/>
+          <pc:chgData name="James Bottari" userId="aa7a7255-5a07-4af6-b02d-40373b14c66b" providerId="ADAL" clId="{E9BB78DC-6604-4FD1-9EE9-045D7E77141F}" dt="2024-11-26T04:36:10.805" v="120"/>
           <pc:sldLayoutMkLst>
             <pc:docMk/>
             <pc:sldMasterMk cId="3870990250" sldId="2147483896"/>
             <pc:sldLayoutMk cId="3792869417" sldId="2147483897"/>
           </pc:sldLayoutMkLst>
         </pc:sldLayoutChg>
-        <pc:sldLayoutChg chg="addSp delSp modSp mod delAnim modAnim">
-          <pc:chgData name="James Bottari" userId="aa7a7255-5a07-4af6-b02d-40373b14c66b" providerId="ADAL" clId="{E9BB78DC-6604-4FD1-9EE9-045D7E77141F}" dt="2024-11-26T07:26:40.949" v="244" actId="12788"/>
+        <pc:sldLayoutChg chg="delSp mod delAnim">
+          <pc:chgData name="James Bottari" userId="aa7a7255-5a07-4af6-b02d-40373b14c66b" providerId="ADAL" clId="{E9BB78DC-6604-4FD1-9EE9-045D7E77141F}" dt="2024-11-26T04:32:29.945" v="84" actId="478"/>
           <pc:sldLayoutMkLst>
             <pc:docMk/>
             <pc:sldMasterMk cId="3870990250" sldId="2147483896"/>
@@ -1167,30 +1031,22 @@
           </pc:sldLayoutMkLst>
         </pc:sldLayoutChg>
         <pc:sldLayoutChg chg="addSp delSp modSp mod">
-          <pc:chgData name="James Bottari" userId="aa7a7255-5a07-4af6-b02d-40373b14c66b" providerId="ADAL" clId="{E9BB78DC-6604-4FD1-9EE9-045D7E77141F}" dt="2024-11-26T04:51:06.127" v="200"/>
+          <pc:chgData name="James Bottari" userId="aa7a7255-5a07-4af6-b02d-40373b14c66b" providerId="ADAL" clId="{E9BB78DC-6604-4FD1-9EE9-045D7E77141F}" dt="2024-11-26T04:36:05.797" v="118"/>
           <pc:sldLayoutMkLst>
             <pc:docMk/>
             <pc:sldMasterMk cId="3870990250" sldId="2147483896"/>
             <pc:sldLayoutMk cId="1416010805" sldId="2147483900"/>
           </pc:sldLayoutMkLst>
         </pc:sldLayoutChg>
-        <pc:sldLayoutChg chg="addSp modSp">
-          <pc:chgData name="James Bottari" userId="aa7a7255-5a07-4af6-b02d-40373b14c66b" providerId="ADAL" clId="{E9BB78DC-6604-4FD1-9EE9-045D7E77141F}" dt="2024-11-26T04:56:39.481" v="222"/>
-          <pc:sldLayoutMkLst>
-            <pc:docMk/>
-            <pc:sldMasterMk cId="3870990250" sldId="2147483896"/>
-            <pc:sldLayoutMk cId="1322610537" sldId="2147483976"/>
-          </pc:sldLayoutMkLst>
-        </pc:sldLayoutChg>
       </pc:sldMasterChg>
       <pc:sldMasterChg chg="addSp delSp modSp mod modSldLayout">
-        <pc:chgData name="James Bottari" userId="aa7a7255-5a07-4af6-b02d-40373b14c66b" providerId="ADAL" clId="{E9BB78DC-6604-4FD1-9EE9-045D7E77141F}" dt="2024-11-26T04:52:03.073" v="207"/>
+        <pc:chgData name="James Bottari" userId="aa7a7255-5a07-4af6-b02d-40373b14c66b" providerId="ADAL" clId="{E9BB78DC-6604-4FD1-9EE9-045D7E77141F}" dt="2024-11-26T04:36:56.295" v="131"/>
         <pc:sldMasterMkLst>
           <pc:docMk/>
           <pc:sldMasterMk cId="1584904203" sldId="2147483904"/>
         </pc:sldMasterMkLst>
         <pc:sldLayoutChg chg="addSp delSp modSp mod">
-          <pc:chgData name="James Bottari" userId="aa7a7255-5a07-4af6-b02d-40373b14c66b" providerId="ADAL" clId="{E9BB78DC-6604-4FD1-9EE9-045D7E77141F}" dt="2024-11-26T04:51:53.518" v="204" actId="1035"/>
+          <pc:chgData name="James Bottari" userId="aa7a7255-5a07-4af6-b02d-40373b14c66b" providerId="ADAL" clId="{E9BB78DC-6604-4FD1-9EE9-045D7E77141F}" dt="2024-11-26T04:36:28.984" v="124"/>
           <pc:sldLayoutMkLst>
             <pc:docMk/>
             <pc:sldMasterMk cId="1584904203" sldId="2147483904"/>
@@ -1198,7 +1054,7 @@
           </pc:sldLayoutMkLst>
         </pc:sldLayoutChg>
         <pc:sldLayoutChg chg="addSp delSp modSp mod">
-          <pc:chgData name="James Bottari" userId="aa7a7255-5a07-4af6-b02d-40373b14c66b" providerId="ADAL" clId="{E9BB78DC-6604-4FD1-9EE9-045D7E77141F}" dt="2024-11-26T04:51:56.607" v="205"/>
+          <pc:chgData name="James Bottari" userId="aa7a7255-5a07-4af6-b02d-40373b14c66b" providerId="ADAL" clId="{E9BB78DC-6604-4FD1-9EE9-045D7E77141F}" dt="2024-11-26T04:36:43.157" v="127"/>
           <pc:sldLayoutMkLst>
             <pc:docMk/>
             <pc:sldMasterMk cId="1584904203" sldId="2147483904"/>
@@ -1206,7 +1062,7 @@
           </pc:sldLayoutMkLst>
         </pc:sldLayoutChg>
         <pc:sldLayoutChg chg="addSp delSp modSp mod">
-          <pc:chgData name="James Bottari" userId="aa7a7255-5a07-4af6-b02d-40373b14c66b" providerId="ADAL" clId="{E9BB78DC-6604-4FD1-9EE9-045D7E77141F}" dt="2024-11-26T04:49:32.327" v="172"/>
+          <pc:chgData name="James Bottari" userId="aa7a7255-5a07-4af6-b02d-40373b14c66b" providerId="ADAL" clId="{E9BB78DC-6604-4FD1-9EE9-045D7E77141F}" dt="2024-11-26T04:36:49.110" v="129"/>
           <pc:sldLayoutMkLst>
             <pc:docMk/>
             <pc:sldMasterMk cId="1584904203" sldId="2147483904"/>
@@ -1214,15 +1070,15 @@
           </pc:sldLayoutMkLst>
         </pc:sldLayoutChg>
         <pc:sldLayoutChg chg="addSp delSp modSp mod">
-          <pc:chgData name="James Bottari" userId="aa7a7255-5a07-4af6-b02d-40373b14c66b" providerId="ADAL" clId="{E9BB78DC-6604-4FD1-9EE9-045D7E77141F}" dt="2024-11-26T04:52:03.073" v="207"/>
+          <pc:chgData name="James Bottari" userId="aa7a7255-5a07-4af6-b02d-40373b14c66b" providerId="ADAL" clId="{E9BB78DC-6604-4FD1-9EE9-045D7E77141F}" dt="2024-11-26T04:36:56.295" v="131"/>
           <pc:sldLayoutMkLst>
             <pc:docMk/>
             <pc:sldMasterMk cId="1584904203" sldId="2147483904"/>
             <pc:sldLayoutMk cId="3359192433" sldId="2147483910"/>
           </pc:sldLayoutMkLst>
         </pc:sldLayoutChg>
-        <pc:sldLayoutChg chg="addSp modSp">
-          <pc:chgData name="James Bottari" userId="aa7a7255-5a07-4af6-b02d-40373b14c66b" providerId="ADAL" clId="{E9BB78DC-6604-4FD1-9EE9-045D7E77141F}" dt="2024-11-26T04:51:58.592" v="206"/>
+        <pc:sldLayoutChg chg="modSp">
+          <pc:chgData name="James Bottari" userId="aa7a7255-5a07-4af6-b02d-40373b14c66b" providerId="ADAL" clId="{E9BB78DC-6604-4FD1-9EE9-045D7E77141F}" dt="2024-11-26T04:26:50.461" v="40" actId="404"/>
           <pc:sldLayoutMkLst>
             <pc:docMk/>
             <pc:sldMasterMk cId="1584904203" sldId="2147483904"/>
@@ -1231,29 +1087,21 @@
         </pc:sldLayoutChg>
       </pc:sldMasterChg>
       <pc:sldMasterChg chg="addSp delSp modSp mod modSldLayout">
-        <pc:chgData name="James Bottari" userId="aa7a7255-5a07-4af6-b02d-40373b14c66b" providerId="ADAL" clId="{E9BB78DC-6604-4FD1-9EE9-045D7E77141F}" dt="2024-11-26T04:52:31.537" v="220"/>
+        <pc:chgData name="James Bottari" userId="aa7a7255-5a07-4af6-b02d-40373b14c66b" providerId="ADAL" clId="{E9BB78DC-6604-4FD1-9EE9-045D7E77141F}" dt="2024-11-26T04:38:18.984" v="165"/>
         <pc:sldMasterMkLst>
           <pc:docMk/>
           <pc:sldMasterMk cId="2557689541" sldId="2147483924"/>
         </pc:sldMasterMkLst>
         <pc:sldLayoutChg chg="addSp delSp modSp mod">
-          <pc:chgData name="James Bottari" userId="aa7a7255-5a07-4af6-b02d-40373b14c66b" providerId="ADAL" clId="{E9BB78DC-6604-4FD1-9EE9-045D7E77141F}" dt="2024-11-26T04:52:15.747" v="211"/>
+          <pc:chgData name="James Bottari" userId="aa7a7255-5a07-4af6-b02d-40373b14c66b" providerId="ADAL" clId="{E9BB78DC-6604-4FD1-9EE9-045D7E77141F}" dt="2024-11-26T04:37:36.856" v="149"/>
           <pc:sldLayoutMkLst>
             <pc:docMk/>
             <pc:sldMasterMk cId="2557689541" sldId="2147483924"/>
             <pc:sldLayoutMk cId="662095832" sldId="2147483926"/>
           </pc:sldLayoutMkLst>
         </pc:sldLayoutChg>
-        <pc:sldLayoutChg chg="addSp modSp">
-          <pc:chgData name="James Bottari" userId="aa7a7255-5a07-4af6-b02d-40373b14c66b" providerId="ADAL" clId="{E9BB78DC-6604-4FD1-9EE9-045D7E77141F}" dt="2024-11-26T04:52:18.370" v="213"/>
-          <pc:sldLayoutMkLst>
-            <pc:docMk/>
-            <pc:sldMasterMk cId="2557689541" sldId="2147483924"/>
-            <pc:sldLayoutMk cId="2136145471" sldId="2147483939"/>
-          </pc:sldLayoutMkLst>
-        </pc:sldLayoutChg>
         <pc:sldLayoutChg chg="addSp delSp modSp mod">
-          <pc:chgData name="James Bottari" userId="aa7a7255-5a07-4af6-b02d-40373b14c66b" providerId="ADAL" clId="{E9BB78DC-6604-4FD1-9EE9-045D7E77141F}" dt="2024-11-26T04:52:09.779" v="210"/>
+          <pc:chgData name="James Bottari" userId="aa7a7255-5a07-4af6-b02d-40373b14c66b" providerId="ADAL" clId="{E9BB78DC-6604-4FD1-9EE9-045D7E77141F}" dt="2024-11-26T04:37:11.548" v="139"/>
           <pc:sldLayoutMkLst>
             <pc:docMk/>
             <pc:sldMasterMk cId="2557689541" sldId="2147483924"/>
@@ -1261,7 +1109,7 @@
           </pc:sldLayoutMkLst>
         </pc:sldLayoutChg>
         <pc:sldLayoutChg chg="addSp delSp modSp mod">
-          <pc:chgData name="James Bottari" userId="aa7a7255-5a07-4af6-b02d-40373b14c66b" providerId="ADAL" clId="{E9BB78DC-6604-4FD1-9EE9-045D7E77141F}" dt="2024-11-26T04:49:57.450" v="180"/>
+          <pc:chgData name="James Bottari" userId="aa7a7255-5a07-4af6-b02d-40373b14c66b" providerId="ADAL" clId="{E9BB78DC-6604-4FD1-9EE9-045D7E77141F}" dt="2024-11-26T04:37:15.654" v="141"/>
           <pc:sldLayoutMkLst>
             <pc:docMk/>
             <pc:sldMasterMk cId="2557689541" sldId="2147483924"/>
@@ -1269,7 +1117,7 @@
           </pc:sldLayoutMkLst>
         </pc:sldLayoutChg>
         <pc:sldLayoutChg chg="addSp delSp modSp mod">
-          <pc:chgData name="James Bottari" userId="aa7a7255-5a07-4af6-b02d-40373b14c66b" providerId="ADAL" clId="{E9BB78DC-6604-4FD1-9EE9-045D7E77141F}" dt="2024-11-26T04:52:27.552" v="219"/>
+          <pc:chgData name="James Bottari" userId="aa7a7255-5a07-4af6-b02d-40373b14c66b" providerId="ADAL" clId="{E9BB78DC-6604-4FD1-9EE9-045D7E77141F}" dt="2024-11-26T04:38:07.586" v="161"/>
           <pc:sldLayoutMkLst>
             <pc:docMk/>
             <pc:sldMasterMk cId="2557689541" sldId="2147483924"/>
@@ -1277,7 +1125,7 @@
           </pc:sldLayoutMkLst>
         </pc:sldLayoutChg>
         <pc:sldLayoutChg chg="addSp modSp">
-          <pc:chgData name="James Bottari" userId="aa7a7255-5a07-4af6-b02d-40373b14c66b" providerId="ADAL" clId="{E9BB78DC-6604-4FD1-9EE9-045D7E77141F}" dt="2024-11-26T04:52:31.537" v="220"/>
+          <pc:chgData name="James Bottari" userId="aa7a7255-5a07-4af6-b02d-40373b14c66b" providerId="ADAL" clId="{E9BB78DC-6604-4FD1-9EE9-045D7E77141F}" dt="2024-11-26T04:34:17.893" v="104"/>
           <pc:sldLayoutMkLst>
             <pc:docMk/>
             <pc:sldMasterMk cId="2557689541" sldId="2147483924"/>
@@ -1285,7 +1133,7 @@
           </pc:sldLayoutMkLst>
         </pc:sldLayoutChg>
         <pc:sldLayoutChg chg="addSp delSp modSp mod">
-          <pc:chgData name="James Bottari" userId="aa7a7255-5a07-4af6-b02d-40373b14c66b" providerId="ADAL" clId="{E9BB78DC-6604-4FD1-9EE9-045D7E77141F}" dt="2024-11-26T04:52:22.305" v="216"/>
+          <pc:chgData name="James Bottari" userId="aa7a7255-5a07-4af6-b02d-40373b14c66b" providerId="ADAL" clId="{E9BB78DC-6604-4FD1-9EE9-045D7E77141F}" dt="2024-11-26T04:37:46.382" v="151"/>
           <pc:sldLayoutMkLst>
             <pc:docMk/>
             <pc:sldMasterMk cId="2557689541" sldId="2147483924"/>
@@ -1293,23 +1141,15 @@
           </pc:sldLayoutMkLst>
         </pc:sldLayoutChg>
         <pc:sldLayoutChg chg="addSp delSp modSp mod">
-          <pc:chgData name="James Bottari" userId="aa7a7255-5a07-4af6-b02d-40373b14c66b" providerId="ADAL" clId="{E9BB78DC-6604-4FD1-9EE9-045D7E77141F}" dt="2024-11-26T04:50:13.494" v="185"/>
+          <pc:chgData name="James Bottari" userId="aa7a7255-5a07-4af6-b02d-40373b14c66b" providerId="ADAL" clId="{E9BB78DC-6604-4FD1-9EE9-045D7E77141F}" dt="2024-11-26T04:37:32.654" v="147"/>
           <pc:sldLayoutMkLst>
             <pc:docMk/>
             <pc:sldMasterMk cId="2557689541" sldId="2147483924"/>
             <pc:sldLayoutMk cId="2537478654" sldId="2147483958"/>
           </pc:sldLayoutMkLst>
         </pc:sldLayoutChg>
-        <pc:sldLayoutChg chg="addSp modSp">
-          <pc:chgData name="James Bottari" userId="aa7a7255-5a07-4af6-b02d-40373b14c66b" providerId="ADAL" clId="{E9BB78DC-6604-4FD1-9EE9-045D7E77141F}" dt="2024-11-26T04:52:16.903" v="212"/>
-          <pc:sldLayoutMkLst>
-            <pc:docMk/>
-            <pc:sldMasterMk cId="2557689541" sldId="2147483924"/>
-            <pc:sldLayoutMk cId="2255840168" sldId="2147483959"/>
-          </pc:sldLayoutMkLst>
-        </pc:sldLayoutChg>
         <pc:sldLayoutChg chg="addSp delSp modSp mod">
-          <pc:chgData name="James Bottari" userId="aa7a7255-5a07-4af6-b02d-40373b14c66b" providerId="ADAL" clId="{E9BB78DC-6604-4FD1-9EE9-045D7E77141F}" dt="2024-11-26T04:52:24.495" v="217"/>
+          <pc:chgData name="James Bottari" userId="aa7a7255-5a07-4af6-b02d-40373b14c66b" providerId="ADAL" clId="{E9BB78DC-6604-4FD1-9EE9-045D7E77141F}" dt="2024-11-26T04:37:58.593" v="157" actId="20577"/>
           <pc:sldLayoutMkLst>
             <pc:docMk/>
             <pc:sldMasterMk cId="2557689541" sldId="2147483924"/>
@@ -1317,23 +1157,15 @@
           </pc:sldLayoutMkLst>
         </pc:sldLayoutChg>
         <pc:sldLayoutChg chg="addSp delSp modSp mod">
-          <pc:chgData name="James Bottari" userId="aa7a7255-5a07-4af6-b02d-40373b14c66b" providerId="ADAL" clId="{E9BB78DC-6604-4FD1-9EE9-045D7E77141F}" dt="2024-11-26T04:52:05.107" v="208"/>
+          <pc:chgData name="James Bottari" userId="aa7a7255-5a07-4af6-b02d-40373b14c66b" providerId="ADAL" clId="{E9BB78DC-6604-4FD1-9EE9-045D7E77141F}" dt="2024-11-26T04:37:00.505" v="133"/>
           <pc:sldLayoutMkLst>
             <pc:docMk/>
             <pc:sldMasterMk cId="2557689541" sldId="2147483924"/>
             <pc:sldLayoutMk cId="2560168924" sldId="2147483961"/>
           </pc:sldLayoutMkLst>
         </pc:sldLayoutChg>
-        <pc:sldLayoutChg chg="addSp modSp">
-          <pc:chgData name="James Bottari" userId="aa7a7255-5a07-4af6-b02d-40373b14c66b" providerId="ADAL" clId="{E9BB78DC-6604-4FD1-9EE9-045D7E77141F}" dt="2024-11-26T04:52:21.042" v="215"/>
-          <pc:sldLayoutMkLst>
-            <pc:docMk/>
-            <pc:sldMasterMk cId="2557689541" sldId="2147483924"/>
-            <pc:sldLayoutMk cId="4002871511" sldId="2147483963"/>
-          </pc:sldLayoutMkLst>
-        </pc:sldLayoutChg>
         <pc:sldLayoutChg chg="addSp delSp modSp mod">
-          <pc:chgData name="James Bottari" userId="aa7a7255-5a07-4af6-b02d-40373b14c66b" providerId="ADAL" clId="{E9BB78DC-6604-4FD1-9EE9-045D7E77141F}" dt="2024-11-26T04:49:52.678" v="178"/>
+          <pc:chgData name="James Bottari" userId="aa7a7255-5a07-4af6-b02d-40373b14c66b" providerId="ADAL" clId="{E9BB78DC-6604-4FD1-9EE9-045D7E77141F}" dt="2024-11-26T04:37:07.893" v="137"/>
           <pc:sldLayoutMkLst>
             <pc:docMk/>
             <pc:sldMasterMk cId="2557689541" sldId="2147483924"/>
@@ -1341,7 +1173,7 @@
           </pc:sldLayoutMkLst>
         </pc:sldLayoutChg>
         <pc:sldLayoutChg chg="addSp delSp modSp mod">
-          <pc:chgData name="James Bottari" userId="aa7a7255-5a07-4af6-b02d-40373b14c66b" providerId="ADAL" clId="{E9BB78DC-6604-4FD1-9EE9-045D7E77141F}" dt="2024-11-26T04:52:25.580" v="218"/>
+          <pc:chgData name="James Bottari" userId="aa7a7255-5a07-4af6-b02d-40373b14c66b" providerId="ADAL" clId="{E9BB78DC-6604-4FD1-9EE9-045D7E77141F}" dt="2024-11-26T04:38:03.606" v="159"/>
           <pc:sldLayoutMkLst>
             <pc:docMk/>
             <pc:sldMasterMk cId="2557689541" sldId="2147483924"/>
@@ -1349,7 +1181,7 @@
           </pc:sldLayoutMkLst>
         </pc:sldLayoutChg>
         <pc:sldLayoutChg chg="addSp delSp modSp mod">
-          <pc:chgData name="James Bottari" userId="aa7a7255-5a07-4af6-b02d-40373b14c66b" providerId="ADAL" clId="{E9BB78DC-6604-4FD1-9EE9-045D7E77141F}" dt="2024-11-26T04:50:02.866" v="182" actId="207"/>
+          <pc:chgData name="James Bottari" userId="aa7a7255-5a07-4af6-b02d-40373b14c66b" providerId="ADAL" clId="{E9BB78DC-6604-4FD1-9EE9-045D7E77141F}" dt="2024-11-26T04:37:21.331" v="143"/>
           <pc:sldLayoutMkLst>
             <pc:docMk/>
             <pc:sldMasterMk cId="2557689541" sldId="2147483924"/>
@@ -1357,23 +1189,15 @@
           </pc:sldLayoutMkLst>
         </pc:sldLayoutChg>
         <pc:sldLayoutChg chg="addSp delSp modSp mod">
-          <pc:chgData name="James Bottari" userId="aa7a7255-5a07-4af6-b02d-40373b14c66b" providerId="ADAL" clId="{E9BB78DC-6604-4FD1-9EE9-045D7E77141F}" dt="2024-11-26T04:50:08.868" v="184" actId="207"/>
+          <pc:chgData name="James Bottari" userId="aa7a7255-5a07-4af6-b02d-40373b14c66b" providerId="ADAL" clId="{E9BB78DC-6604-4FD1-9EE9-045D7E77141F}" dt="2024-11-26T04:37:28.200" v="145"/>
           <pc:sldLayoutMkLst>
             <pc:docMk/>
             <pc:sldMasterMk cId="2557689541" sldId="2147483924"/>
             <pc:sldLayoutMk cId="3845850737" sldId="2147483968"/>
           </pc:sldLayoutMkLst>
         </pc:sldLayoutChg>
-        <pc:sldLayoutChg chg="addSp modSp">
-          <pc:chgData name="James Bottari" userId="aa7a7255-5a07-4af6-b02d-40373b14c66b" providerId="ADAL" clId="{E9BB78DC-6604-4FD1-9EE9-045D7E77141F}" dt="2024-11-26T04:52:19.987" v="214"/>
-          <pc:sldLayoutMkLst>
-            <pc:docMk/>
-            <pc:sldMasterMk cId="2557689541" sldId="2147483924"/>
-            <pc:sldLayoutMk cId="3806122435" sldId="2147483969"/>
-          </pc:sldLayoutMkLst>
-        </pc:sldLayoutChg>
         <pc:sldLayoutChg chg="addSp delSp modSp mod">
-          <pc:chgData name="James Bottari" userId="aa7a7255-5a07-4af6-b02d-40373b14c66b" providerId="ADAL" clId="{E9BB78DC-6604-4FD1-9EE9-045D7E77141F}" dt="2024-11-26T04:52:07.292" v="209"/>
+          <pc:chgData name="James Bottari" userId="aa7a7255-5a07-4af6-b02d-40373b14c66b" providerId="ADAL" clId="{E9BB78DC-6604-4FD1-9EE9-045D7E77141F}" dt="2024-11-26T04:37:04.255" v="135"/>
           <pc:sldLayoutMkLst>
             <pc:docMk/>
             <pc:sldMasterMk cId="2557689541" sldId="2147483924"/>
@@ -1381,7 +1205,7 @@
           </pc:sldLayoutMkLst>
         </pc:sldLayoutChg>
         <pc:sldLayoutChg chg="addSp delSp modSp mod">
-          <pc:chgData name="James Bottari" userId="aa7a7255-5a07-4af6-b02d-40373b14c66b" providerId="ADAL" clId="{E9BB78DC-6604-4FD1-9EE9-045D7E77141F}" dt="2024-11-26T04:50:45.250" v="195"/>
+          <pc:chgData name="James Bottari" userId="aa7a7255-5a07-4af6-b02d-40373b14c66b" providerId="ADAL" clId="{E9BB78DC-6604-4FD1-9EE9-045D7E77141F}" dt="2024-11-26T04:38:12.360" v="163"/>
           <pc:sldLayoutMkLst>
             <pc:docMk/>
             <pc:sldMasterMk cId="2557689541" sldId="2147483924"/>
@@ -1389,7 +1213,420 @@
           </pc:sldLayoutMkLst>
         </pc:sldLayoutChg>
         <pc:sldLayoutChg chg="addSp delSp modSp mod">
-          <pc:chgData name="James Bottari" userId="aa7a7255-5a07-4af6-b02d-40373b14c66b" providerId="ADAL" clId="{E9BB78DC-6604-4FD1-9EE9-045D7E77141F}" dt="2024-11-26T04:50:47.700" v="196"/>
+          <pc:chgData name="James Bottari" userId="aa7a7255-5a07-4af6-b02d-40373b14c66b" providerId="ADAL" clId="{E9BB78DC-6604-4FD1-9EE9-045D7E77141F}" dt="2024-11-26T04:38:18.984" v="165"/>
+          <pc:sldLayoutMkLst>
+            <pc:docMk/>
+            <pc:sldMasterMk cId="2557689541" sldId="2147483924"/>
+            <pc:sldLayoutMk cId="2031086626" sldId="2147483974"/>
+          </pc:sldLayoutMkLst>
+        </pc:sldLayoutChg>
+      </pc:sldMasterChg>
+    </pc:docChg>
+  </pc:docChgLst>
+  <pc:docChgLst>
+    <pc:chgData name="James Bottari" userId="aa7a7255-5a07-4af6-b02d-40373b14c66b" providerId="ADAL" clId="{644430C6-F457-48B9-9711-F4B4A1DF5F7E}"/>
+    <pc:docChg chg="modSld modMainMaster">
+      <pc:chgData name="James Bottari" userId="aa7a7255-5a07-4af6-b02d-40373b14c66b" providerId="ADAL" clId="{644430C6-F457-48B9-9711-F4B4A1DF5F7E}" dt="2024-12-13T06:34:04.695" v="155"/>
+      <pc:docMkLst>
+        <pc:docMk/>
+      </pc:docMkLst>
+      <pc:sldChg chg="modTransition">
+        <pc:chgData name="James Bottari" userId="aa7a7255-5a07-4af6-b02d-40373b14c66b" providerId="ADAL" clId="{644430C6-F457-48B9-9711-F4B4A1DF5F7E}" dt="2024-12-13T06:31:49.600" v="16"/>
+        <pc:sldMkLst>
+          <pc:docMk/>
+          <pc:sldMk cId="1269259594" sldId="270"/>
+        </pc:sldMkLst>
+      </pc:sldChg>
+      <pc:sldChg chg="modTransition modAnim">
+        <pc:chgData name="James Bottari" userId="aa7a7255-5a07-4af6-b02d-40373b14c66b" providerId="ADAL" clId="{644430C6-F457-48B9-9711-F4B4A1DF5F7E}" dt="2024-12-13T06:32:27.035" v="122"/>
+        <pc:sldMkLst>
+          <pc:docMk/>
+          <pc:sldMk cId="4055861119" sldId="276"/>
+        </pc:sldMkLst>
+      </pc:sldChg>
+      <pc:sldChg chg="modTransition modAnim">
+        <pc:chgData name="James Bottari" userId="aa7a7255-5a07-4af6-b02d-40373b14c66b" providerId="ADAL" clId="{644430C6-F457-48B9-9711-F4B4A1DF5F7E}" dt="2024-12-13T06:32:29.210" v="125"/>
+        <pc:sldMkLst>
+          <pc:docMk/>
+          <pc:sldMk cId="2076787606" sldId="294"/>
+        </pc:sldMkLst>
+      </pc:sldChg>
+      <pc:sldChg chg="modTransition">
+        <pc:chgData name="James Bottari" userId="aa7a7255-5a07-4af6-b02d-40373b14c66b" providerId="ADAL" clId="{644430C6-F457-48B9-9711-F4B4A1DF5F7E}" dt="2024-12-13T06:31:59.561" v="32"/>
+        <pc:sldMkLst>
+          <pc:docMk/>
+          <pc:sldMk cId="2385859357" sldId="296"/>
+        </pc:sldMkLst>
+      </pc:sldChg>
+      <pc:sldChg chg="modTransition">
+        <pc:chgData name="James Bottari" userId="aa7a7255-5a07-4af6-b02d-40373b14c66b" providerId="ADAL" clId="{644430C6-F457-48B9-9711-F4B4A1DF5F7E}" dt="2024-12-13T06:31:50.223" v="17"/>
+        <pc:sldMkLst>
+          <pc:docMk/>
+          <pc:sldMk cId="635136332" sldId="303"/>
+        </pc:sldMkLst>
+      </pc:sldChg>
+      <pc:sldChg chg="modTransition modAnim">
+        <pc:chgData name="James Bottari" userId="aa7a7255-5a07-4af6-b02d-40373b14c66b" providerId="ADAL" clId="{644430C6-F457-48B9-9711-F4B4A1DF5F7E}" dt="2024-12-13T06:32:52.380" v="135"/>
+        <pc:sldMkLst>
+          <pc:docMk/>
+          <pc:sldMk cId="3563421687" sldId="307"/>
+        </pc:sldMkLst>
+      </pc:sldChg>
+      <pc:sldChg chg="modTransition">
+        <pc:chgData name="James Bottari" userId="aa7a7255-5a07-4af6-b02d-40373b14c66b" providerId="ADAL" clId="{644430C6-F457-48B9-9711-F4B4A1DF5F7E}" dt="2024-12-13T06:31:54.220" v="24"/>
+        <pc:sldMkLst>
+          <pc:docMk/>
+          <pc:sldMk cId="2738745632" sldId="312"/>
+        </pc:sldMkLst>
+      </pc:sldChg>
+      <pc:sldChg chg="modTransition">
+        <pc:chgData name="James Bottari" userId="aa7a7255-5a07-4af6-b02d-40373b14c66b" providerId="ADAL" clId="{644430C6-F457-48B9-9711-F4B4A1DF5F7E}" dt="2024-12-13T06:31:56.060" v="27"/>
+        <pc:sldMkLst>
+          <pc:docMk/>
+          <pc:sldMk cId="1086656556" sldId="317"/>
+        </pc:sldMkLst>
+      </pc:sldChg>
+      <pc:sldChg chg="modTransition modAnim">
+        <pc:chgData name="James Bottari" userId="aa7a7255-5a07-4af6-b02d-40373b14c66b" providerId="ADAL" clId="{644430C6-F457-48B9-9711-F4B4A1DF5F7E}" dt="2024-12-13T06:34:04.695" v="155"/>
+        <pc:sldMkLst>
+          <pc:docMk/>
+          <pc:sldMk cId="429500297" sldId="318"/>
+        </pc:sldMkLst>
+      </pc:sldChg>
+      <pc:sldChg chg="modTransition modAnim">
+        <pc:chgData name="James Bottari" userId="aa7a7255-5a07-4af6-b02d-40373b14c66b" providerId="ADAL" clId="{644430C6-F457-48B9-9711-F4B4A1DF5F7E}" dt="2024-12-13T06:33:50.817" v="153"/>
+        <pc:sldMkLst>
+          <pc:docMk/>
+          <pc:sldMk cId="2059184449" sldId="319"/>
+        </pc:sldMkLst>
+      </pc:sldChg>
+      <pc:sldChg chg="modTransition modAnim">
+        <pc:chgData name="James Bottari" userId="aa7a7255-5a07-4af6-b02d-40373b14c66b" providerId="ADAL" clId="{644430C6-F457-48B9-9711-F4B4A1DF5F7E}" dt="2024-12-13T06:32:15.776" v="74"/>
+        <pc:sldMkLst>
+          <pc:docMk/>
+          <pc:sldMk cId="2099607510" sldId="321"/>
+        </pc:sldMkLst>
+      </pc:sldChg>
+      <pc:sldChg chg="modTransition modAnim">
+        <pc:chgData name="James Bottari" userId="aa7a7255-5a07-4af6-b02d-40373b14c66b" providerId="ADAL" clId="{644430C6-F457-48B9-9711-F4B4A1DF5F7E}" dt="2024-12-13T06:32:13.731" v="63"/>
+        <pc:sldMkLst>
+          <pc:docMk/>
+          <pc:sldMk cId="3040465958" sldId="322"/>
+        </pc:sldMkLst>
+      </pc:sldChg>
+      <pc:sldChg chg="modTransition modAnim">
+        <pc:chgData name="James Bottari" userId="aa7a7255-5a07-4af6-b02d-40373b14c66b" providerId="ADAL" clId="{644430C6-F457-48B9-9711-F4B4A1DF5F7E}" dt="2024-12-13T06:32:19.351" v="86"/>
+        <pc:sldMkLst>
+          <pc:docMk/>
+          <pc:sldMk cId="1826894909" sldId="323"/>
+        </pc:sldMkLst>
+      </pc:sldChg>
+      <pc:sldChg chg="modTransition modAnim">
+        <pc:chgData name="James Bottari" userId="aa7a7255-5a07-4af6-b02d-40373b14c66b" providerId="ADAL" clId="{644430C6-F457-48B9-9711-F4B4A1DF5F7E}" dt="2024-12-13T06:32:21.854" v="103"/>
+        <pc:sldMkLst>
+          <pc:docMk/>
+          <pc:sldMk cId="1308982476" sldId="324"/>
+        </pc:sldMkLst>
+      </pc:sldChg>
+      <pc:sldChg chg="modTransition">
+        <pc:chgData name="James Bottari" userId="aa7a7255-5a07-4af6-b02d-40373b14c66b" providerId="ADAL" clId="{644430C6-F457-48B9-9711-F4B4A1DF5F7E}" dt="2024-12-13T06:31:45.637" v="9"/>
+        <pc:sldMkLst>
+          <pc:docMk/>
+          <pc:sldMk cId="1705586881" sldId="325"/>
+        </pc:sldMkLst>
+      </pc:sldChg>
+      <pc:sldChg chg="modTransition modAnim">
+        <pc:chgData name="James Bottari" userId="aa7a7255-5a07-4af6-b02d-40373b14c66b" providerId="ADAL" clId="{644430C6-F457-48B9-9711-F4B4A1DF5F7E}" dt="2024-12-13T06:32:33.542" v="126"/>
+        <pc:sldMkLst>
+          <pc:docMk/>
+          <pc:sldMk cId="3741084860" sldId="326"/>
+        </pc:sldMkLst>
+      </pc:sldChg>
+      <pc:sldMasterChg chg="modSldLayout">
+        <pc:chgData name="James Bottari" userId="aa7a7255-5a07-4af6-b02d-40373b14c66b" providerId="ADAL" clId="{644430C6-F457-48B9-9711-F4B4A1DF5F7E}" dt="2024-12-13T06:32:15.776" v="74"/>
+        <pc:sldMasterMkLst>
+          <pc:docMk/>
+          <pc:sldMasterMk cId="1096814676" sldId="2147483895"/>
+        </pc:sldMasterMkLst>
+        <pc:sldLayoutChg chg="modTransition modAnim">
+          <pc:chgData name="James Bottari" userId="aa7a7255-5a07-4af6-b02d-40373b14c66b" providerId="ADAL" clId="{644430C6-F457-48B9-9711-F4B4A1DF5F7E}" dt="2024-12-13T06:32:13.731" v="63"/>
+          <pc:sldLayoutMkLst>
+            <pc:docMk/>
+            <pc:sldMasterMk cId="1096814676" sldId="2147483895"/>
+            <pc:sldLayoutMk cId="476608779" sldId="2147483901"/>
+          </pc:sldLayoutMkLst>
+        </pc:sldLayoutChg>
+        <pc:sldLayoutChg chg="modTransition modAnim">
+          <pc:chgData name="James Bottari" userId="aa7a7255-5a07-4af6-b02d-40373b14c66b" providerId="ADAL" clId="{644430C6-F457-48B9-9711-F4B4A1DF5F7E}" dt="2024-12-13T06:32:11.393" v="52"/>
+          <pc:sldLayoutMkLst>
+            <pc:docMk/>
+            <pc:sldMasterMk cId="1096814676" sldId="2147483895"/>
+            <pc:sldLayoutMk cId="2939810570" sldId="2147483902"/>
+          </pc:sldLayoutMkLst>
+        </pc:sldLayoutChg>
+        <pc:sldLayoutChg chg="modTransition modAnim">
+          <pc:chgData name="James Bottari" userId="aa7a7255-5a07-4af6-b02d-40373b14c66b" providerId="ADAL" clId="{644430C6-F457-48B9-9711-F4B4A1DF5F7E}" dt="2024-12-13T06:32:08.737" v="42"/>
+          <pc:sldLayoutMkLst>
+            <pc:docMk/>
+            <pc:sldMasterMk cId="1096814676" sldId="2147483895"/>
+            <pc:sldLayoutMk cId="3255171268" sldId="2147483971"/>
+          </pc:sldLayoutMkLst>
+        </pc:sldLayoutChg>
+        <pc:sldLayoutChg chg="modTransition modAnim">
+          <pc:chgData name="James Bottari" userId="aa7a7255-5a07-4af6-b02d-40373b14c66b" providerId="ADAL" clId="{644430C6-F457-48B9-9711-F4B4A1DF5F7E}" dt="2024-12-13T06:32:15.776" v="74"/>
+          <pc:sldLayoutMkLst>
+            <pc:docMk/>
+            <pc:sldMasterMk cId="1096814676" sldId="2147483895"/>
+            <pc:sldLayoutMk cId="1554080316" sldId="2147483975"/>
+          </pc:sldLayoutMkLst>
+        </pc:sldLayoutChg>
+      </pc:sldMasterChg>
+      <pc:sldMasterChg chg="modSldLayout">
+        <pc:chgData name="James Bottari" userId="aa7a7255-5a07-4af6-b02d-40373b14c66b" providerId="ADAL" clId="{644430C6-F457-48B9-9711-F4B4A1DF5F7E}" dt="2024-12-13T06:32:56.218" v="141"/>
+        <pc:sldMasterMkLst>
+          <pc:docMk/>
+          <pc:sldMasterMk cId="3870990250" sldId="2147483896"/>
+        </pc:sldMasterMkLst>
+        <pc:sldLayoutChg chg="modTransition modAnim">
+          <pc:chgData name="James Bottari" userId="aa7a7255-5a07-4af6-b02d-40373b14c66b" providerId="ADAL" clId="{644430C6-F457-48B9-9711-F4B4A1DF5F7E}" dt="2024-12-13T06:32:52.380" v="135"/>
+          <pc:sldLayoutMkLst>
+            <pc:docMk/>
+            <pc:sldMasterMk cId="3870990250" sldId="2147483896"/>
+            <pc:sldLayoutMk cId="3376014336" sldId="2147483649"/>
+          </pc:sldLayoutMkLst>
+        </pc:sldLayoutChg>
+        <pc:sldLayoutChg chg="modTransition modAnim">
+          <pc:chgData name="James Bottari" userId="aa7a7255-5a07-4af6-b02d-40373b14c66b" providerId="ADAL" clId="{644430C6-F457-48B9-9711-F4B4A1DF5F7E}" dt="2024-12-13T06:32:56.218" v="141"/>
+          <pc:sldLayoutMkLst>
+            <pc:docMk/>
+            <pc:sldMasterMk cId="3870990250" sldId="2147483896"/>
+            <pc:sldLayoutMk cId="3792869417" sldId="2147483897"/>
+          </pc:sldLayoutMkLst>
+        </pc:sldLayoutChg>
+        <pc:sldLayoutChg chg="modTransition">
+          <pc:chgData name="James Bottari" userId="aa7a7255-5a07-4af6-b02d-40373b14c66b" providerId="ADAL" clId="{644430C6-F457-48B9-9711-F4B4A1DF5F7E}" dt="2024-12-13T06:31:59.561" v="32"/>
+          <pc:sldLayoutMkLst>
+            <pc:docMk/>
+            <pc:sldMasterMk cId="3870990250" sldId="2147483896"/>
+            <pc:sldLayoutMk cId="2994822769" sldId="2147483898"/>
+          </pc:sldLayoutMkLst>
+        </pc:sldLayoutChg>
+        <pc:sldLayoutChg chg="modTransition modAnim">
+          <pc:chgData name="James Bottari" userId="aa7a7255-5a07-4af6-b02d-40373b14c66b" providerId="ADAL" clId="{644430C6-F457-48B9-9711-F4B4A1DF5F7E}" dt="2024-12-13T06:32:54.507" v="139"/>
+          <pc:sldLayoutMkLst>
+            <pc:docMk/>
+            <pc:sldMasterMk cId="3870990250" sldId="2147483896"/>
+            <pc:sldLayoutMk cId="1416010805" sldId="2147483900"/>
+          </pc:sldLayoutMkLst>
+        </pc:sldLayoutChg>
+      </pc:sldMasterChg>
+      <pc:sldMasterChg chg="modSldLayout">
+        <pc:chgData name="James Bottari" userId="aa7a7255-5a07-4af6-b02d-40373b14c66b" providerId="ADAL" clId="{644430C6-F457-48B9-9711-F4B4A1DF5F7E}" dt="2024-12-13T06:32:29.210" v="125"/>
+        <pc:sldMasterMkLst>
+          <pc:docMk/>
+          <pc:sldMasterMk cId="1584904203" sldId="2147483904"/>
+        </pc:sldMasterMkLst>
+        <pc:sldLayoutChg chg="modTransition modAnim">
+          <pc:chgData name="James Bottari" userId="aa7a7255-5a07-4af6-b02d-40373b14c66b" providerId="ADAL" clId="{644430C6-F457-48B9-9711-F4B4A1DF5F7E}" dt="2024-12-13T06:32:19.351" v="86"/>
+          <pc:sldLayoutMkLst>
+            <pc:docMk/>
+            <pc:sldMasterMk cId="1584904203" sldId="2147483904"/>
+            <pc:sldLayoutMk cId="1393762226" sldId="2147483905"/>
+          </pc:sldLayoutMkLst>
+        </pc:sldLayoutChg>
+        <pc:sldLayoutChg chg="modTransition modAnim">
+          <pc:chgData name="James Bottari" userId="aa7a7255-5a07-4af6-b02d-40373b14c66b" providerId="ADAL" clId="{644430C6-F457-48B9-9711-F4B4A1DF5F7E}" dt="2024-12-13T06:32:21.854" v="103"/>
+          <pc:sldLayoutMkLst>
+            <pc:docMk/>
+            <pc:sldMasterMk cId="1584904203" sldId="2147483904"/>
+            <pc:sldLayoutMk cId="747897296" sldId="2147483906"/>
+          </pc:sldLayoutMkLst>
+        </pc:sldLayoutChg>
+        <pc:sldLayoutChg chg="modTransition modAnim">
+          <pc:chgData name="James Bottari" userId="aa7a7255-5a07-4af6-b02d-40373b14c66b" providerId="ADAL" clId="{644430C6-F457-48B9-9711-F4B4A1DF5F7E}" dt="2024-12-13T06:32:27.035" v="122"/>
+          <pc:sldLayoutMkLst>
+            <pc:docMk/>
+            <pc:sldMasterMk cId="1584904203" sldId="2147483904"/>
+            <pc:sldLayoutMk cId="3542484949" sldId="2147483907"/>
+          </pc:sldLayoutMkLst>
+        </pc:sldLayoutChg>
+        <pc:sldLayoutChg chg="modTransition modAnim">
+          <pc:chgData name="James Bottari" userId="aa7a7255-5a07-4af6-b02d-40373b14c66b" providerId="ADAL" clId="{644430C6-F457-48B9-9711-F4B4A1DF5F7E}" dt="2024-12-13T06:32:29.210" v="125"/>
+          <pc:sldLayoutMkLst>
+            <pc:docMk/>
+            <pc:sldMasterMk cId="1584904203" sldId="2147483904"/>
+            <pc:sldLayoutMk cId="3359192433" sldId="2147483910"/>
+          </pc:sldLayoutMkLst>
+        </pc:sldLayoutChg>
+        <pc:sldLayoutChg chg="modTransition modAnim">
+          <pc:chgData name="James Bottari" userId="aa7a7255-5a07-4af6-b02d-40373b14c66b" providerId="ADAL" clId="{644430C6-F457-48B9-9711-F4B4A1DF5F7E}" dt="2024-12-13T06:32:24.532" v="119"/>
+          <pc:sldLayoutMkLst>
+            <pc:docMk/>
+            <pc:sldMasterMk cId="1584904203" sldId="2147483904"/>
+            <pc:sldLayoutMk cId="2925468937" sldId="2147483911"/>
+          </pc:sldLayoutMkLst>
+        </pc:sldLayoutChg>
+      </pc:sldMasterChg>
+      <pc:sldMasterChg chg="modSldLayout">
+        <pc:chgData name="James Bottari" userId="aa7a7255-5a07-4af6-b02d-40373b14c66b" providerId="ADAL" clId="{644430C6-F457-48B9-9711-F4B4A1DF5F7E}" dt="2024-12-13T06:32:43.861" v="131"/>
+        <pc:sldMasterMkLst>
+          <pc:docMk/>
+          <pc:sldMasterMk cId="2557689541" sldId="2147483924"/>
+        </pc:sldMasterMkLst>
+        <pc:sldLayoutChg chg="modTransition">
+          <pc:chgData name="James Bottari" userId="aa7a7255-5a07-4af6-b02d-40373b14c66b" providerId="ADAL" clId="{644430C6-F457-48B9-9711-F4B4A1DF5F7E}" dt="2024-12-13T06:31:50.223" v="17"/>
+          <pc:sldLayoutMkLst>
+            <pc:docMk/>
+            <pc:sldMasterMk cId="2557689541" sldId="2147483924"/>
+            <pc:sldLayoutMk cId="662095832" sldId="2147483926"/>
+          </pc:sldLayoutMkLst>
+        </pc:sldLayoutChg>
+        <pc:sldLayoutChg chg="modTransition">
+          <pc:chgData name="James Bottari" userId="aa7a7255-5a07-4af6-b02d-40373b14c66b" providerId="ADAL" clId="{644430C6-F457-48B9-9711-F4B4A1DF5F7E}" dt="2024-12-13T06:31:51.364" v="19"/>
+          <pc:sldLayoutMkLst>
+            <pc:docMk/>
+            <pc:sldMasterMk cId="2557689541" sldId="2147483924"/>
+            <pc:sldLayoutMk cId="2136145471" sldId="2147483939"/>
+          </pc:sldLayoutMkLst>
+        </pc:sldLayoutChg>
+        <pc:sldLayoutChg chg="modTransition">
+          <pc:chgData name="James Bottari" userId="aa7a7255-5a07-4af6-b02d-40373b14c66b" providerId="ADAL" clId="{644430C6-F457-48B9-9711-F4B4A1DF5F7E}" dt="2024-12-13T06:31:47.287" v="12"/>
+          <pc:sldLayoutMkLst>
+            <pc:docMk/>
+            <pc:sldMasterMk cId="2557689541" sldId="2147483924"/>
+            <pc:sldLayoutMk cId="2935727249" sldId="2147483953"/>
+          </pc:sldLayoutMkLst>
+        </pc:sldLayoutChg>
+        <pc:sldLayoutChg chg="modTransition modAnim">
+          <pc:chgData name="James Bottari" userId="aa7a7255-5a07-4af6-b02d-40373b14c66b" providerId="ADAL" clId="{644430C6-F457-48B9-9711-F4B4A1DF5F7E}" dt="2024-12-13T06:32:33.542" v="126"/>
+          <pc:sldLayoutMkLst>
+            <pc:docMk/>
+            <pc:sldMasterMk cId="2557689541" sldId="2147483924"/>
+            <pc:sldLayoutMk cId="3133591715" sldId="2147483954"/>
+          </pc:sldLayoutMkLst>
+        </pc:sldLayoutChg>
+        <pc:sldLayoutChg chg="modTransition">
+          <pc:chgData name="James Bottari" userId="aa7a7255-5a07-4af6-b02d-40373b14c66b" providerId="ADAL" clId="{644430C6-F457-48B9-9711-F4B4A1DF5F7E}" dt="2024-12-13T06:31:54.834" v="25"/>
+          <pc:sldLayoutMkLst>
+            <pc:docMk/>
+            <pc:sldMasterMk cId="2557689541" sldId="2147483924"/>
+            <pc:sldLayoutMk cId="2792437263" sldId="2147483955"/>
+          </pc:sldLayoutMkLst>
+        </pc:sldLayoutChg>
+        <pc:sldLayoutChg chg="modTransition">
+          <pc:chgData name="James Bottari" userId="aa7a7255-5a07-4af6-b02d-40373b14c66b" providerId="ADAL" clId="{644430C6-F457-48B9-9711-F4B4A1DF5F7E}" dt="2024-12-13T06:31:56.645" v="28"/>
+          <pc:sldLayoutMkLst>
+            <pc:docMk/>
+            <pc:sldMasterMk cId="2557689541" sldId="2147483924"/>
+            <pc:sldLayoutMk cId="1748968647" sldId="2147483956"/>
+          </pc:sldLayoutMkLst>
+        </pc:sldLayoutChg>
+        <pc:sldLayoutChg chg="modTransition">
+          <pc:chgData name="James Bottari" userId="aa7a7255-5a07-4af6-b02d-40373b14c66b" providerId="ADAL" clId="{644430C6-F457-48B9-9711-F4B4A1DF5F7E}" dt="2024-12-13T06:31:53.098" v="22"/>
+          <pc:sldLayoutMkLst>
+            <pc:docMk/>
+            <pc:sldMasterMk cId="2557689541" sldId="2147483924"/>
+            <pc:sldLayoutMk cId="1616492962" sldId="2147483957"/>
+          </pc:sldLayoutMkLst>
+        </pc:sldLayoutChg>
+        <pc:sldLayoutChg chg="modTransition">
+          <pc:chgData name="James Bottari" userId="aa7a7255-5a07-4af6-b02d-40373b14c66b" providerId="ADAL" clId="{644430C6-F457-48B9-9711-F4B4A1DF5F7E}" dt="2024-12-13T06:31:49.600" v="16"/>
+          <pc:sldLayoutMkLst>
+            <pc:docMk/>
+            <pc:sldMasterMk cId="2557689541" sldId="2147483924"/>
+            <pc:sldLayoutMk cId="2537478654" sldId="2147483958"/>
+          </pc:sldLayoutMkLst>
+        </pc:sldLayoutChg>
+        <pc:sldLayoutChg chg="modTransition">
+          <pc:chgData name="James Bottari" userId="aa7a7255-5a07-4af6-b02d-40373b14c66b" providerId="ADAL" clId="{644430C6-F457-48B9-9711-F4B4A1DF5F7E}" dt="2024-12-13T06:31:50.764" v="18"/>
+          <pc:sldLayoutMkLst>
+            <pc:docMk/>
+            <pc:sldMasterMk cId="2557689541" sldId="2147483924"/>
+            <pc:sldLayoutMk cId="2255840168" sldId="2147483959"/>
+          </pc:sldLayoutMkLst>
+        </pc:sldLayoutChg>
+        <pc:sldLayoutChg chg="modTransition">
+          <pc:chgData name="James Bottari" userId="aa7a7255-5a07-4af6-b02d-40373b14c66b" providerId="ADAL" clId="{644430C6-F457-48B9-9711-F4B4A1DF5F7E}" dt="2024-12-13T06:31:53.669" v="23"/>
+          <pc:sldLayoutMkLst>
+            <pc:docMk/>
+            <pc:sldMasterMk cId="2557689541" sldId="2147483924"/>
+            <pc:sldLayoutMk cId="2905150168" sldId="2147483960"/>
+          </pc:sldLayoutMkLst>
+        </pc:sldLayoutChg>
+        <pc:sldLayoutChg chg="modTransition">
+          <pc:chgData name="James Bottari" userId="aa7a7255-5a07-4af6-b02d-40373b14c66b" providerId="ADAL" clId="{644430C6-F457-48B9-9711-F4B4A1DF5F7E}" dt="2024-12-13T06:31:45.637" v="9"/>
+          <pc:sldLayoutMkLst>
+            <pc:docMk/>
+            <pc:sldMasterMk cId="2557689541" sldId="2147483924"/>
+            <pc:sldLayoutMk cId="2560168924" sldId="2147483961"/>
+          </pc:sldLayoutMkLst>
+        </pc:sldLayoutChg>
+        <pc:sldLayoutChg chg="modTransition modAnim">
+          <pc:chgData name="James Bottari" userId="aa7a7255-5a07-4af6-b02d-40373b14c66b" providerId="ADAL" clId="{644430C6-F457-48B9-9711-F4B4A1DF5F7E}" dt="2024-12-13T06:32:43.861" v="131"/>
+          <pc:sldLayoutMkLst>
+            <pc:docMk/>
+            <pc:sldMasterMk cId="2557689541" sldId="2147483924"/>
+            <pc:sldLayoutMk cId="4002871511" sldId="2147483963"/>
+          </pc:sldLayoutMkLst>
+        </pc:sldLayoutChg>
+        <pc:sldLayoutChg chg="modTransition">
+          <pc:chgData name="James Bottari" userId="aa7a7255-5a07-4af6-b02d-40373b14c66b" providerId="ADAL" clId="{644430C6-F457-48B9-9711-F4B4A1DF5F7E}" dt="2024-12-13T06:31:46.771" v="11"/>
+          <pc:sldLayoutMkLst>
+            <pc:docMk/>
+            <pc:sldMasterMk cId="2557689541" sldId="2147483924"/>
+            <pc:sldLayoutMk cId="207074033" sldId="2147483964"/>
+          </pc:sldLayoutMkLst>
+        </pc:sldLayoutChg>
+        <pc:sldLayoutChg chg="modTransition">
+          <pc:chgData name="James Bottari" userId="aa7a7255-5a07-4af6-b02d-40373b14c66b" providerId="ADAL" clId="{644430C6-F457-48B9-9711-F4B4A1DF5F7E}" dt="2024-12-13T06:31:54.220" v="24"/>
+          <pc:sldLayoutMkLst>
+            <pc:docMk/>
+            <pc:sldMasterMk cId="2557689541" sldId="2147483924"/>
+            <pc:sldLayoutMk cId="2382353240" sldId="2147483965"/>
+          </pc:sldLayoutMkLst>
+        </pc:sldLayoutChg>
+        <pc:sldLayoutChg chg="modTransition modAnim">
+          <pc:chgData name="James Bottari" userId="aa7a7255-5a07-4af6-b02d-40373b14c66b" providerId="ADAL" clId="{644430C6-F457-48B9-9711-F4B4A1DF5F7E}" dt="2024-12-13T06:32:36.229" v="127"/>
+          <pc:sldLayoutMkLst>
+            <pc:docMk/>
+            <pc:sldMasterMk cId="2557689541" sldId="2147483924"/>
+            <pc:sldLayoutMk cId="475247331" sldId="2147483966"/>
+          </pc:sldLayoutMkLst>
+        </pc:sldLayoutChg>
+        <pc:sldLayoutChg chg="modTransition modAnim">
+          <pc:chgData name="James Bottari" userId="aa7a7255-5a07-4af6-b02d-40373b14c66b" providerId="ADAL" clId="{644430C6-F457-48B9-9711-F4B4A1DF5F7E}" dt="2024-12-13T06:32:39.398" v="128"/>
+          <pc:sldLayoutMkLst>
+            <pc:docMk/>
+            <pc:sldMasterMk cId="2557689541" sldId="2147483924"/>
+            <pc:sldLayoutMk cId="3845850737" sldId="2147483968"/>
+          </pc:sldLayoutMkLst>
+        </pc:sldLayoutChg>
+        <pc:sldLayoutChg chg="modTransition">
+          <pc:chgData name="James Bottari" userId="aa7a7255-5a07-4af6-b02d-40373b14c66b" providerId="ADAL" clId="{644430C6-F457-48B9-9711-F4B4A1DF5F7E}" dt="2024-12-13T06:31:51.910" v="20"/>
+          <pc:sldLayoutMkLst>
+            <pc:docMk/>
+            <pc:sldMasterMk cId="2557689541" sldId="2147483924"/>
+            <pc:sldLayoutMk cId="3806122435" sldId="2147483969"/>
+          </pc:sldLayoutMkLst>
+        </pc:sldLayoutChg>
+        <pc:sldLayoutChg chg="modTransition">
+          <pc:chgData name="James Bottari" userId="aa7a7255-5a07-4af6-b02d-40373b14c66b" providerId="ADAL" clId="{644430C6-F457-48B9-9711-F4B4A1DF5F7E}" dt="2024-12-13T06:31:46.197" v="10"/>
+          <pc:sldLayoutMkLst>
+            <pc:docMk/>
+            <pc:sldMasterMk cId="2557689541" sldId="2147483924"/>
+            <pc:sldLayoutMk cId="1544716566" sldId="2147483970"/>
+          </pc:sldLayoutMkLst>
+        </pc:sldLayoutChg>
+        <pc:sldLayoutChg chg="modTransition">
+          <pc:chgData name="James Bottari" userId="aa7a7255-5a07-4af6-b02d-40373b14c66b" providerId="ADAL" clId="{644430C6-F457-48B9-9711-F4B4A1DF5F7E}" dt="2024-12-13T06:31:55.445" v="26"/>
+          <pc:sldLayoutMkLst>
+            <pc:docMk/>
+            <pc:sldMasterMk cId="2557689541" sldId="2147483924"/>
+            <pc:sldLayoutMk cId="2276701835" sldId="2147483973"/>
+          </pc:sldLayoutMkLst>
+        </pc:sldLayoutChg>
+        <pc:sldLayoutChg chg="modTransition">
+          <pc:chgData name="James Bottari" userId="aa7a7255-5a07-4af6-b02d-40373b14c66b" providerId="ADAL" clId="{644430C6-F457-48B9-9711-F4B4A1DF5F7E}" dt="2024-12-13T06:31:56.060" v="27"/>
           <pc:sldLayoutMkLst>
             <pc:docMk/>
             <pc:sldMasterMk cId="2557689541" sldId="2147483924"/>
@@ -1496,7 +1733,7 @@
           <a:p>
             <a:fld id="{341C3C91-DD13-404D-8C62-0A4BF608F54D}" type="datetimeFigureOut">
               <a:rPr lang="en-US" smtClean="0"/>
-              <a:t>5/26/2025</a:t>
+              <a:t>5/25/2025</a:t>
             </a:fld>
             <a:endParaRPr lang="en-US"/>
           </a:p>
@@ -1695,7 +1932,7 @@
           <a:p>
             <a:fld id="{81541D36-1697-495B-BB41-2F1AD1ECA732}" type="datetimeFigureOut">
               <a:rPr lang="en-GB" smtClean="0"/>
-              <a:t>26/05/2025</a:t>
+              <a:t>25/05/2025</a:t>
             </a:fld>
             <a:endParaRPr lang="en-GB"/>
           </a:p>
@@ -2291,7 +2528,7 @@
           <a:p>
             <a:pPr lvl="0"/>
             <a:r>
-              <a:rPr lang="en-US" noProof="0"/>
+              <a:rPr lang="en-US" noProof="0" dirty="0"/>
               <a:t>Modify the Subtitle</a:t>
             </a:r>
           </a:p>
@@ -2338,67 +2575,18 @@
           </a:lstStyle>
           <a:p>
             <a:r>
-              <a:rPr lang="en-US" noProof="0"/>
+              <a:rPr lang="en-US" noProof="0" dirty="0"/>
               <a:t>Modify the Title</a:t>
-            </a:r>
-          </a:p>
-        </p:txBody>
-      </p:sp>
-      <p:sp>
-        <p:nvSpPr>
-          <p:cNvPr id="3" name="テキスト ボックス 2">
-            <a:extLst>
-              <a:ext uri="{FF2B5EF4-FFF2-40B4-BE49-F238E27FC236}">
-                <a16:creationId xmlns:a16="http://schemas.microsoft.com/office/drawing/2014/main" id="{3A37003B-42F8-60C1-C754-D7ADFEEBFD8D}"/>
-              </a:ext>
-            </a:extLst>
-          </p:cNvPr>
-          <p:cNvSpPr txBox="1"/>
-          <p:nvPr userDrawn="1"/>
-        </p:nvSpPr>
-        <p:spPr>
-          <a:xfrm>
-            <a:off x="313426" y="355959"/>
-            <a:ext cx="878216" cy="338554"/>
-          </a:xfrm>
-          <a:prstGeom prst="rect">
-            <a:avLst/>
-          </a:prstGeom>
-          <a:solidFill>
-            <a:schemeClr val="tx1"/>
-          </a:solidFill>
-          <a:ln w="28575">
-            <a:noFill/>
-          </a:ln>
-        </p:spPr>
-        <p:txBody>
-          <a:bodyPr wrap="square" rtlCol="0">
-            <a:spAutoFit/>
-          </a:bodyPr>
-          <a:lstStyle/>
-          <a:p>
-            <a:pPr marL="0" indent="0" algn="ctr">
-              <a:buNone/>
-            </a:pPr>
-            <a:r>
-              <a:rPr kumimoji="1" lang="ja-JP" altLang="en-US" b="1" dirty="0">
-                <a:solidFill>
-                  <a:schemeClr val="tx2"/>
-                </a:solidFill>
-                <a:latin typeface="Meiryo UI" panose="020B0604030504040204" pitchFamily="50" charset="-128"/>
-                <a:ea typeface="Meiryo UI" panose="020B0604030504040204" pitchFamily="50" charset="-128"/>
-              </a:rPr>
-              <a:t>社外秘</a:t>
             </a:r>
           </a:p>
         </p:txBody>
       </p:sp>
       <p:pic>
         <p:nvPicPr>
-          <p:cNvPr id="4" name="グラフィックス 3">
+          <p:cNvPr id="3" name="グラフィックス 2">
             <a:extLst>
               <a:ext uri="{FF2B5EF4-FFF2-40B4-BE49-F238E27FC236}">
-                <a16:creationId xmlns:a16="http://schemas.microsoft.com/office/drawing/2014/main" id="{BD0BA144-5C1C-85EA-17DA-43F78476334B}"/>
+                <a16:creationId xmlns:a16="http://schemas.microsoft.com/office/drawing/2014/main" id="{82C4568B-6A0C-0CD0-4D28-E072C9A4AD02}"/>
               </a:ext>
             </a:extLst>
           </p:cNvPr>
@@ -2862,82 +3050,10 @@
       </p:sp>
       <p:sp>
         <p:nvSpPr>
-          <p:cNvPr id="4" name="テキスト ボックス 3">
+          <p:cNvPr id="6" name="TXT_@Akkodis">
             <a:extLst>
               <a:ext uri="{FF2B5EF4-FFF2-40B4-BE49-F238E27FC236}">
-                <a16:creationId xmlns:a16="http://schemas.microsoft.com/office/drawing/2014/main" id="{AD4634DC-A486-E279-6D5D-7DAEA982CE39}"/>
-              </a:ext>
-            </a:extLst>
-          </p:cNvPr>
-          <p:cNvSpPr txBox="1"/>
-          <p:nvPr userDrawn="1">
-            <p:extLst>
-              <p:ext uri="{1162E1C5-73C7-4A58-AE30-91384D911F3F}">
-                <p184:classification xmlns:p184="http://schemas.microsoft.com/office/powerpoint/2018/4/main" val="hdr"/>
-              </p:ext>
-            </p:extLst>
-          </p:nvPr>
-        </p:nvSpPr>
-        <p:spPr>
-          <a:xfrm>
-            <a:off x="63500" y="63500"/>
-            <a:ext cx="663575" cy="153888"/>
-          </a:xfrm>
-          <a:prstGeom prst="rect">
-            <a:avLst/>
-          </a:prstGeom>
-        </p:spPr>
-        <p:txBody>
-          <a:bodyPr horzOverflow="overflow" lIns="0" tIns="0" rIns="0" bIns="0">
-            <a:spAutoFit/>
-          </a:bodyPr>
-          <a:lstStyle/>
-          <a:p>
-            <a:pPr marL="0" indent="0" algn="l">
-              <a:buNone/>
-            </a:pPr>
-            <a:r>
-              <a:rPr lang="en-US" sz="1000" dirty="0">
-                <a:solidFill>
-                  <a:srgbClr val="000000"/>
-                </a:solidFill>
-                <a:latin typeface="+mj-ea"/>
-                <a:ea typeface="+mj-ea"/>
-                <a:cs typeface="Calibri" panose="020F0502020204030204" pitchFamily="34" charset="0"/>
-              </a:rPr>
-              <a:t>【</a:t>
-            </a:r>
-            <a:r>
-              <a:rPr lang="en-US" sz="1000" dirty="0" err="1">
-                <a:solidFill>
-                  <a:srgbClr val="000000"/>
-                </a:solidFill>
-                <a:latin typeface="+mj-ea"/>
-                <a:ea typeface="+mj-ea"/>
-                <a:cs typeface="Calibri" panose="020F0502020204030204" pitchFamily="34" charset="0"/>
-              </a:rPr>
-              <a:t>社外秘</a:t>
-            </a:r>
-            <a:r>
-              <a:rPr lang="en-US" sz="1000" dirty="0">
-                <a:solidFill>
-                  <a:srgbClr val="000000"/>
-                </a:solidFill>
-                <a:latin typeface="+mj-ea"/>
-                <a:ea typeface="+mj-ea"/>
-                <a:cs typeface="Calibri" panose="020F0502020204030204" pitchFamily="34" charset="0"/>
-              </a:rPr>
-              <a:t>】</a:t>
-            </a:r>
-          </a:p>
-        </p:txBody>
-      </p:sp>
-      <p:sp>
-        <p:nvSpPr>
-          <p:cNvPr id="8" name="TXT_@Akkodis">
-            <a:extLst>
-              <a:ext uri="{FF2B5EF4-FFF2-40B4-BE49-F238E27FC236}">
-                <a16:creationId xmlns:a16="http://schemas.microsoft.com/office/drawing/2014/main" id="{DB33A265-A39F-8F58-5972-B38807E5D49F}"/>
+                <a16:creationId xmlns:a16="http://schemas.microsoft.com/office/drawing/2014/main" id="{F99A58E2-7DAB-6C28-1EFC-96B56863E081}"/>
               </a:ext>
             </a:extLst>
           </p:cNvPr>
@@ -2946,7 +3062,7 @@
         </p:nvSpPr>
         <p:spPr>
           <a:xfrm>
-            <a:off x="5115358" y="6436014"/>
+            <a:off x="5115358" y="6420738"/>
             <a:ext cx="1961284" cy="421986"/>
           </a:xfrm>
           <a:prstGeom prst="rect">
@@ -3059,10 +3175,10 @@
       </p:sp>
       <p:sp>
         <p:nvSpPr>
-          <p:cNvPr id="9" name="TXT_@Akkodis">
+          <p:cNvPr id="8" name="TXT_@Akkodis">
             <a:extLst>
               <a:ext uri="{FF2B5EF4-FFF2-40B4-BE49-F238E27FC236}">
-                <a16:creationId xmlns:a16="http://schemas.microsoft.com/office/drawing/2014/main" id="{05BC51D6-01A7-D7FE-9CB1-CA3BB3E02B81}"/>
+                <a16:creationId xmlns:a16="http://schemas.microsoft.com/office/drawing/2014/main" id="{7076B0EE-20B1-717A-8CD4-456DC3705A15}"/>
               </a:ext>
             </a:extLst>
           </p:cNvPr>
@@ -3071,8 +3187,8 @@
         </p:nvSpPr>
         <p:spPr>
           <a:xfrm>
-            <a:off x="0" y="6436014"/>
-            <a:ext cx="4114800" cy="421986"/>
+            <a:off x="0" y="6420738"/>
+            <a:ext cx="4480560" cy="421986"/>
           </a:xfrm>
           <a:prstGeom prst="rect">
             <a:avLst/>
@@ -3115,7 +3231,7 @@
               <a:buNone/>
             </a:pPr>
             <a:r>
-              <a:rPr kumimoji="0" lang="ja-JP" altLang="en-US" sz="700" b="0" i="0" u="none" strike="noStrike" kern="0" cap="none" spc="0" normalizeH="0" baseline="0" noProof="0" dirty="0">
+              <a:rPr kumimoji="0" lang="ja-JP" altLang="en-US" sz="600" b="0" i="0" u="none" strike="noStrike" kern="0" cap="none" spc="0" normalizeH="0" baseline="0" noProof="0" dirty="0">
                 <a:ln>
                   <a:noFill/>
                 </a:ln>
@@ -3125,11 +3241,45 @@
                 <a:effectLst/>
                 <a:uLnTx/>
                 <a:uFillTx/>
-                <a:latin typeface="Arial"/>
+                <a:latin typeface="+mj-lt"/>
                 <a:ea typeface="+mn-ea"/>
                 <a:cs typeface="Arial"/>
               </a:rPr>
-              <a:t>この情報は機密情報です。事前の書面による同意を得ずに組織外に開示することを禁じます。</a:t>
+              <a:t>この資料は関係者限りの厳秘の資料であり、</a:t>
+            </a:r>
+            <a:r>
+              <a:rPr kumimoji="0" lang="en-US" altLang="ja-JP" sz="600" b="0" i="0" u="none" strike="noStrike" kern="0" cap="none" spc="0" normalizeH="0" baseline="0" noProof="0" dirty="0">
+                <a:ln>
+                  <a:noFill/>
+                </a:ln>
+                <a:solidFill>
+                  <a:schemeClr val="tx1"/>
+                </a:solidFill>
+                <a:effectLst/>
+                <a:uLnTx/>
+                <a:uFillTx/>
+                <a:latin typeface="+mj-lt"/>
+                <a:ea typeface="+mn-ea"/>
+                <a:cs typeface="Arial"/>
+              </a:rPr>
+              <a:t>AKKODiS</a:t>
+            </a:r>
+            <a:r>
+              <a:rPr kumimoji="0" lang="ja-JP" altLang="en-US" sz="600" b="0" i="0" u="none" strike="noStrike" kern="0" cap="none" spc="0" normalizeH="0" baseline="0" noProof="0" dirty="0">
+                <a:ln>
+                  <a:noFill/>
+                </a:ln>
+                <a:solidFill>
+                  <a:schemeClr val="tx1"/>
+                </a:solidFill>
+                <a:effectLst/>
+                <a:uLnTx/>
+                <a:uFillTx/>
+                <a:latin typeface="+mj-lt"/>
+                <a:ea typeface="+mn-ea"/>
+                <a:cs typeface="Arial"/>
+              </a:rPr>
+              <a:t>コンサルティング株式会社に無断での使用・開示を禁じます。</a:t>
             </a:r>
           </a:p>
         </p:txBody>
@@ -3139,7 +3289,7 @@
           <p:cNvPr id="2" name="グラフィックス 1">
             <a:extLst>
               <a:ext uri="{FF2B5EF4-FFF2-40B4-BE49-F238E27FC236}">
-                <a16:creationId xmlns:a16="http://schemas.microsoft.com/office/drawing/2014/main" id="{049FFC57-6DC3-8037-82E4-0925604AD1A4}"/>
+                <a16:creationId xmlns:a16="http://schemas.microsoft.com/office/drawing/2014/main" id="{B9F84C29-FB86-4878-6735-5D78B2CB3DA6}"/>
               </a:ext>
             </a:extLst>
           </p:cNvPr>
@@ -3705,82 +3855,10 @@
       </p:sp>
       <p:sp>
         <p:nvSpPr>
-          <p:cNvPr id="5" name="テキスト ボックス 4">
+          <p:cNvPr id="7" name="TXT_@Akkodis">
             <a:extLst>
               <a:ext uri="{FF2B5EF4-FFF2-40B4-BE49-F238E27FC236}">
-                <a16:creationId xmlns:a16="http://schemas.microsoft.com/office/drawing/2014/main" id="{A6D54134-7F98-6F73-2F8B-FBB09B5D581E}"/>
-              </a:ext>
-            </a:extLst>
-          </p:cNvPr>
-          <p:cNvSpPr txBox="1"/>
-          <p:nvPr userDrawn="1">
-            <p:extLst>
-              <p:ext uri="{1162E1C5-73C7-4A58-AE30-91384D911F3F}">
-                <p184:classification xmlns:p184="http://schemas.microsoft.com/office/powerpoint/2018/4/main" val="hdr"/>
-              </p:ext>
-            </p:extLst>
-          </p:nvPr>
-        </p:nvSpPr>
-        <p:spPr>
-          <a:xfrm>
-            <a:off x="63500" y="63500"/>
-            <a:ext cx="663575" cy="153888"/>
-          </a:xfrm>
-          <a:prstGeom prst="rect">
-            <a:avLst/>
-          </a:prstGeom>
-        </p:spPr>
-        <p:txBody>
-          <a:bodyPr horzOverflow="overflow" lIns="0" tIns="0" rIns="0" bIns="0">
-            <a:spAutoFit/>
-          </a:bodyPr>
-          <a:lstStyle/>
-          <a:p>
-            <a:pPr marL="0" indent="0" algn="l">
-              <a:buNone/>
-            </a:pPr>
-            <a:r>
-              <a:rPr lang="en-US" sz="1000" dirty="0">
-                <a:solidFill>
-                  <a:srgbClr val="000000"/>
-                </a:solidFill>
-                <a:latin typeface="+mj-ea"/>
-                <a:ea typeface="+mj-ea"/>
-                <a:cs typeface="Calibri" panose="020F0502020204030204" pitchFamily="34" charset="0"/>
-              </a:rPr>
-              <a:t>【</a:t>
-            </a:r>
-            <a:r>
-              <a:rPr lang="en-US" sz="1000" dirty="0" err="1">
-                <a:solidFill>
-                  <a:srgbClr val="000000"/>
-                </a:solidFill>
-                <a:latin typeface="+mj-ea"/>
-                <a:ea typeface="+mj-ea"/>
-                <a:cs typeface="Calibri" panose="020F0502020204030204" pitchFamily="34" charset="0"/>
-              </a:rPr>
-              <a:t>社外秘</a:t>
-            </a:r>
-            <a:r>
-              <a:rPr lang="en-US" sz="1000" dirty="0">
-                <a:solidFill>
-                  <a:srgbClr val="000000"/>
-                </a:solidFill>
-                <a:latin typeface="+mj-ea"/>
-                <a:ea typeface="+mj-ea"/>
-                <a:cs typeface="Calibri" panose="020F0502020204030204" pitchFamily="34" charset="0"/>
-              </a:rPr>
-              <a:t>】</a:t>
-            </a:r>
-          </a:p>
-        </p:txBody>
-      </p:sp>
-      <p:sp>
-        <p:nvSpPr>
-          <p:cNvPr id="8" name="TXT_@Akkodis">
-            <a:extLst>
-              <a:ext uri="{FF2B5EF4-FFF2-40B4-BE49-F238E27FC236}">
-                <a16:creationId xmlns:a16="http://schemas.microsoft.com/office/drawing/2014/main" id="{1E35E9B1-C2A1-9A91-0AC4-B5945E8D79EE}"/>
+                <a16:creationId xmlns:a16="http://schemas.microsoft.com/office/drawing/2014/main" id="{5C7E3102-47B2-4724-2556-424B62044C89}"/>
               </a:ext>
             </a:extLst>
           </p:cNvPr>
@@ -3789,7 +3867,7 @@
         </p:nvSpPr>
         <p:spPr>
           <a:xfrm>
-            <a:off x="5115358" y="6436014"/>
+            <a:off x="5115358" y="6420738"/>
             <a:ext cx="1961284" cy="421986"/>
           </a:xfrm>
           <a:prstGeom prst="rect">
@@ -3902,10 +3980,10 @@
       </p:sp>
       <p:sp>
         <p:nvSpPr>
-          <p:cNvPr id="9" name="TXT_@Akkodis">
+          <p:cNvPr id="8" name="TXT_@Akkodis">
             <a:extLst>
               <a:ext uri="{FF2B5EF4-FFF2-40B4-BE49-F238E27FC236}">
-                <a16:creationId xmlns:a16="http://schemas.microsoft.com/office/drawing/2014/main" id="{D56D09E9-7648-8CE0-512E-5542AB0F486A}"/>
+                <a16:creationId xmlns:a16="http://schemas.microsoft.com/office/drawing/2014/main" id="{BE0620B1-BC64-2607-A2FA-8EB7F0B0A2DF}"/>
               </a:ext>
             </a:extLst>
           </p:cNvPr>
@@ -3914,8 +3992,8 @@
         </p:nvSpPr>
         <p:spPr>
           <a:xfrm>
-            <a:off x="0" y="6436014"/>
-            <a:ext cx="4114800" cy="421986"/>
+            <a:off x="0" y="6420738"/>
+            <a:ext cx="4480560" cy="421986"/>
           </a:xfrm>
           <a:prstGeom prst="rect">
             <a:avLst/>
@@ -3958,7 +4036,7 @@
               <a:buNone/>
             </a:pPr>
             <a:r>
-              <a:rPr kumimoji="0" lang="ja-JP" altLang="en-US" sz="700" b="0" i="0" u="none" strike="noStrike" kern="0" cap="none" spc="0" normalizeH="0" baseline="0" noProof="0" dirty="0">
+              <a:rPr kumimoji="0" lang="ja-JP" altLang="en-US" sz="600" b="0" i="0" u="none" strike="noStrike" kern="0" cap="none" spc="0" normalizeH="0" baseline="0" noProof="0" dirty="0">
                 <a:ln>
                   <a:noFill/>
                 </a:ln>
@@ -3968,11 +4046,45 @@
                 <a:effectLst/>
                 <a:uLnTx/>
                 <a:uFillTx/>
-                <a:latin typeface="Arial"/>
+                <a:latin typeface="+mj-lt"/>
                 <a:ea typeface="+mn-ea"/>
                 <a:cs typeface="Arial"/>
               </a:rPr>
-              <a:t>この情報は機密情報です。事前の書面による同意を得ずに組織外に開示することを禁じます。</a:t>
+              <a:t>この資料は関係者限りの厳秘の資料であり、</a:t>
+            </a:r>
+            <a:r>
+              <a:rPr kumimoji="0" lang="en-US" altLang="ja-JP" sz="600" b="0" i="0" u="none" strike="noStrike" kern="0" cap="none" spc="0" normalizeH="0" baseline="0" noProof="0" dirty="0">
+                <a:ln>
+                  <a:noFill/>
+                </a:ln>
+                <a:solidFill>
+                  <a:schemeClr val="tx1"/>
+                </a:solidFill>
+                <a:effectLst/>
+                <a:uLnTx/>
+                <a:uFillTx/>
+                <a:latin typeface="+mj-lt"/>
+                <a:ea typeface="+mn-ea"/>
+                <a:cs typeface="Arial"/>
+              </a:rPr>
+              <a:t>AKKODiS</a:t>
+            </a:r>
+            <a:r>
+              <a:rPr kumimoji="0" lang="ja-JP" altLang="en-US" sz="600" b="0" i="0" u="none" strike="noStrike" kern="0" cap="none" spc="0" normalizeH="0" baseline="0" noProof="0" dirty="0">
+                <a:ln>
+                  <a:noFill/>
+                </a:ln>
+                <a:solidFill>
+                  <a:schemeClr val="tx1"/>
+                </a:solidFill>
+                <a:effectLst/>
+                <a:uLnTx/>
+                <a:uFillTx/>
+                <a:latin typeface="+mj-lt"/>
+                <a:ea typeface="+mn-ea"/>
+                <a:cs typeface="Arial"/>
+              </a:rPr>
+              <a:t>コンサルティング株式会社に無断での使用・開示を禁じます。</a:t>
             </a:r>
           </a:p>
         </p:txBody>
@@ -3982,7 +4094,7 @@
           <p:cNvPr id="3" name="グラフィックス 2">
             <a:extLst>
               <a:ext uri="{FF2B5EF4-FFF2-40B4-BE49-F238E27FC236}">
-                <a16:creationId xmlns:a16="http://schemas.microsoft.com/office/drawing/2014/main" id="{11F0D020-0C3B-6FBF-2D52-43912A4DBBBA}"/>
+                <a16:creationId xmlns:a16="http://schemas.microsoft.com/office/drawing/2014/main" id="{2B62A2B6-F78E-602C-98C9-59F7EB40217F}"/>
               </a:ext>
             </a:extLst>
           </p:cNvPr>
@@ -4625,82 +4737,10 @@
       </p:sp>
       <p:sp>
         <p:nvSpPr>
-          <p:cNvPr id="8" name="テキスト ボックス 7">
+          <p:cNvPr id="5" name="TXT_@Akkodis">
             <a:extLst>
               <a:ext uri="{FF2B5EF4-FFF2-40B4-BE49-F238E27FC236}">
-                <a16:creationId xmlns:a16="http://schemas.microsoft.com/office/drawing/2014/main" id="{1B0A9A45-B514-2B0E-AE9F-485CA272FA60}"/>
-              </a:ext>
-            </a:extLst>
-          </p:cNvPr>
-          <p:cNvSpPr txBox="1"/>
-          <p:nvPr userDrawn="1">
-            <p:extLst>
-              <p:ext uri="{1162E1C5-73C7-4A58-AE30-91384D911F3F}">
-                <p184:classification xmlns:p184="http://schemas.microsoft.com/office/powerpoint/2018/4/main" val="hdr"/>
-              </p:ext>
-            </p:extLst>
-          </p:nvPr>
-        </p:nvSpPr>
-        <p:spPr>
-          <a:xfrm>
-            <a:off x="63500" y="63500"/>
-            <a:ext cx="663575" cy="153888"/>
-          </a:xfrm>
-          <a:prstGeom prst="rect">
-            <a:avLst/>
-          </a:prstGeom>
-        </p:spPr>
-        <p:txBody>
-          <a:bodyPr horzOverflow="overflow" lIns="0" tIns="0" rIns="0" bIns="0">
-            <a:spAutoFit/>
-          </a:bodyPr>
-          <a:lstStyle/>
-          <a:p>
-            <a:pPr marL="0" indent="0" algn="l">
-              <a:buNone/>
-            </a:pPr>
-            <a:r>
-              <a:rPr lang="en-US" sz="1000" dirty="0">
-                <a:solidFill>
-                  <a:srgbClr val="000000"/>
-                </a:solidFill>
-                <a:latin typeface="+mj-ea"/>
-                <a:ea typeface="+mj-ea"/>
-                <a:cs typeface="Calibri" panose="020F0502020204030204" pitchFamily="34" charset="0"/>
-              </a:rPr>
-              <a:t>【</a:t>
-            </a:r>
-            <a:r>
-              <a:rPr lang="en-US" sz="1000" dirty="0" err="1">
-                <a:solidFill>
-                  <a:srgbClr val="000000"/>
-                </a:solidFill>
-                <a:latin typeface="+mj-ea"/>
-                <a:ea typeface="+mj-ea"/>
-                <a:cs typeface="Calibri" panose="020F0502020204030204" pitchFamily="34" charset="0"/>
-              </a:rPr>
-              <a:t>社外秘</a:t>
-            </a:r>
-            <a:r>
-              <a:rPr lang="en-US" sz="1000" dirty="0">
-                <a:solidFill>
-                  <a:srgbClr val="000000"/>
-                </a:solidFill>
-                <a:latin typeface="+mj-ea"/>
-                <a:ea typeface="+mj-ea"/>
-                <a:cs typeface="Calibri" panose="020F0502020204030204" pitchFamily="34" charset="0"/>
-              </a:rPr>
-              <a:t>】</a:t>
-            </a:r>
-          </a:p>
-        </p:txBody>
-      </p:sp>
-      <p:sp>
-        <p:nvSpPr>
-          <p:cNvPr id="9" name="TXT_@Akkodis">
-            <a:extLst>
-              <a:ext uri="{FF2B5EF4-FFF2-40B4-BE49-F238E27FC236}">
-                <a16:creationId xmlns:a16="http://schemas.microsoft.com/office/drawing/2014/main" id="{5AD0B36A-4869-74E1-E3DB-39E9CA258F83}"/>
+                <a16:creationId xmlns:a16="http://schemas.microsoft.com/office/drawing/2014/main" id="{285DCCC3-78C8-DD50-883C-B599FA6E2252}"/>
               </a:ext>
             </a:extLst>
           </p:cNvPr>
@@ -4709,7 +4749,7 @@
         </p:nvSpPr>
         <p:spPr>
           <a:xfrm>
-            <a:off x="5115358" y="6436014"/>
+            <a:off x="5115358" y="6420738"/>
             <a:ext cx="1961284" cy="421986"/>
           </a:xfrm>
           <a:prstGeom prst="rect">
@@ -4822,10 +4862,10 @@
       </p:sp>
       <p:sp>
         <p:nvSpPr>
-          <p:cNvPr id="10" name="TXT_@Akkodis">
+          <p:cNvPr id="9" name="TXT_@Akkodis">
             <a:extLst>
               <a:ext uri="{FF2B5EF4-FFF2-40B4-BE49-F238E27FC236}">
-                <a16:creationId xmlns:a16="http://schemas.microsoft.com/office/drawing/2014/main" id="{96A5306F-48BA-608C-AF82-FCB5C1DEAE5E}"/>
+                <a16:creationId xmlns:a16="http://schemas.microsoft.com/office/drawing/2014/main" id="{3036E8BE-5B02-6066-F5D5-A74D991E1FDD}"/>
               </a:ext>
             </a:extLst>
           </p:cNvPr>
@@ -4834,8 +4874,8 @@
         </p:nvSpPr>
         <p:spPr>
           <a:xfrm>
-            <a:off x="0" y="6436014"/>
-            <a:ext cx="4114800" cy="421986"/>
+            <a:off x="0" y="6420738"/>
+            <a:ext cx="4480560" cy="421986"/>
           </a:xfrm>
           <a:prstGeom prst="rect">
             <a:avLst/>
@@ -4878,7 +4918,7 @@
               <a:buNone/>
             </a:pPr>
             <a:r>
-              <a:rPr kumimoji="0" lang="ja-JP" altLang="en-US" sz="700" b="0" i="0" u="none" strike="noStrike" kern="0" cap="none" spc="0" normalizeH="0" baseline="0" noProof="0" dirty="0">
+              <a:rPr kumimoji="0" lang="ja-JP" altLang="en-US" sz="600" b="0" i="0" u="none" strike="noStrike" kern="0" cap="none" spc="0" normalizeH="0" baseline="0" noProof="0" dirty="0">
                 <a:ln>
                   <a:noFill/>
                 </a:ln>
@@ -4888,21 +4928,55 @@
                 <a:effectLst/>
                 <a:uLnTx/>
                 <a:uFillTx/>
-                <a:latin typeface="Arial"/>
+                <a:latin typeface="+mj-lt"/>
                 <a:ea typeface="+mn-ea"/>
                 <a:cs typeface="Arial"/>
               </a:rPr>
-              <a:t>この情報は機密情報です。事前の書面による同意を得ずに組織外に開示することを禁じます。</a:t>
+              <a:t>この資料は関係者限りの厳秘の資料であり、</a:t>
+            </a:r>
+            <a:r>
+              <a:rPr kumimoji="0" lang="en-US" altLang="ja-JP" sz="600" b="0" i="0" u="none" strike="noStrike" kern="0" cap="none" spc="0" normalizeH="0" baseline="0" noProof="0" dirty="0">
+                <a:ln>
+                  <a:noFill/>
+                </a:ln>
+                <a:solidFill>
+                  <a:schemeClr val="tx1"/>
+                </a:solidFill>
+                <a:effectLst/>
+                <a:uLnTx/>
+                <a:uFillTx/>
+                <a:latin typeface="+mj-lt"/>
+                <a:ea typeface="+mn-ea"/>
+                <a:cs typeface="Arial"/>
+              </a:rPr>
+              <a:t>AKKODiS</a:t>
+            </a:r>
+            <a:r>
+              <a:rPr kumimoji="0" lang="ja-JP" altLang="en-US" sz="600" b="0" i="0" u="none" strike="noStrike" kern="0" cap="none" spc="0" normalizeH="0" baseline="0" noProof="0" dirty="0">
+                <a:ln>
+                  <a:noFill/>
+                </a:ln>
+                <a:solidFill>
+                  <a:schemeClr val="tx1"/>
+                </a:solidFill>
+                <a:effectLst/>
+                <a:uLnTx/>
+                <a:uFillTx/>
+                <a:latin typeface="+mj-lt"/>
+                <a:ea typeface="+mn-ea"/>
+                <a:cs typeface="Arial"/>
+              </a:rPr>
+              <a:t>コンサルティング株式会社に無断での使用・開示を禁じます。</a:t>
             </a:r>
           </a:p>
         </p:txBody>
       </p:sp>
       <p:pic>
         <p:nvPicPr>
-          <p:cNvPr id="5" name="グラフィックス 4">
+          <p:cNvPr id="6" name="グラフィックス 5">
             <a:extLst>
               <a:ext uri="{FF2B5EF4-FFF2-40B4-BE49-F238E27FC236}">
-                <a16:creationId xmlns:a16="http://schemas.microsoft.com/office/drawing/2014/main" id="{D38C7FAA-5254-435B-8235-12E1AA9635D7}"/>
+                <a16:creationId xmlns:a16="http://schemas.microsoft.com/office/drawing/2014/main" id="{01CCA8BA-DB18-FAD7-7A17-44C62FA2F767}"/>
               </a:ext>
             </a:extLst>
           </p:cNvPr>
@@ -5244,7 +5318,7 @@
           <a:p>
             <a:pPr lvl="0"/>
             <a:r>
-              <a:rPr lang="en-GB" dirty="0"/>
+              <a:rPr lang="en-GB"/>
               <a:t>Click to add Subtitle </a:t>
             </a:r>
           </a:p>
@@ -5445,82 +5519,10 @@
       </p:sp>
       <p:sp>
         <p:nvSpPr>
-          <p:cNvPr id="6" name="テキスト ボックス 5">
+          <p:cNvPr id="8" name="TXT_@Akkodis">
             <a:extLst>
               <a:ext uri="{FF2B5EF4-FFF2-40B4-BE49-F238E27FC236}">
-                <a16:creationId xmlns:a16="http://schemas.microsoft.com/office/drawing/2014/main" id="{7A263970-F6C1-2D7A-46E9-FEF9B820009B}"/>
-              </a:ext>
-            </a:extLst>
-          </p:cNvPr>
-          <p:cNvSpPr txBox="1"/>
-          <p:nvPr userDrawn="1">
-            <p:extLst>
-              <p:ext uri="{1162E1C5-73C7-4A58-AE30-91384D911F3F}">
-                <p184:classification xmlns:p184="http://schemas.microsoft.com/office/powerpoint/2018/4/main" val="hdr"/>
-              </p:ext>
-            </p:extLst>
-          </p:nvPr>
-        </p:nvSpPr>
-        <p:spPr>
-          <a:xfrm>
-            <a:off x="63500" y="63500"/>
-            <a:ext cx="663575" cy="153888"/>
-          </a:xfrm>
-          <a:prstGeom prst="rect">
-            <a:avLst/>
-          </a:prstGeom>
-        </p:spPr>
-        <p:txBody>
-          <a:bodyPr horzOverflow="overflow" lIns="0" tIns="0" rIns="0" bIns="0">
-            <a:spAutoFit/>
-          </a:bodyPr>
-          <a:lstStyle/>
-          <a:p>
-            <a:pPr marL="0" indent="0" algn="l">
-              <a:buNone/>
-            </a:pPr>
-            <a:r>
-              <a:rPr lang="en-US" sz="1000" dirty="0">
-                <a:solidFill>
-                  <a:srgbClr val="000000"/>
-                </a:solidFill>
-                <a:latin typeface="+mj-ea"/>
-                <a:ea typeface="+mj-ea"/>
-                <a:cs typeface="Calibri" panose="020F0502020204030204" pitchFamily="34" charset="0"/>
-              </a:rPr>
-              <a:t>【</a:t>
-            </a:r>
-            <a:r>
-              <a:rPr lang="en-US" sz="1000" dirty="0" err="1">
-                <a:solidFill>
-                  <a:srgbClr val="000000"/>
-                </a:solidFill>
-                <a:latin typeface="+mj-ea"/>
-                <a:ea typeface="+mj-ea"/>
-                <a:cs typeface="Calibri" panose="020F0502020204030204" pitchFamily="34" charset="0"/>
-              </a:rPr>
-              <a:t>社外秘</a:t>
-            </a:r>
-            <a:r>
-              <a:rPr lang="en-US" sz="1000" dirty="0">
-                <a:solidFill>
-                  <a:srgbClr val="000000"/>
-                </a:solidFill>
-                <a:latin typeface="+mj-ea"/>
-                <a:ea typeface="+mj-ea"/>
-                <a:cs typeface="Calibri" panose="020F0502020204030204" pitchFamily="34" charset="0"/>
-              </a:rPr>
-              <a:t>】</a:t>
-            </a:r>
-          </a:p>
-        </p:txBody>
-      </p:sp>
-      <p:sp>
-        <p:nvSpPr>
-          <p:cNvPr id="9" name="TXT_@Akkodis">
-            <a:extLst>
-              <a:ext uri="{FF2B5EF4-FFF2-40B4-BE49-F238E27FC236}">
-                <a16:creationId xmlns:a16="http://schemas.microsoft.com/office/drawing/2014/main" id="{3096ECFB-C6A8-8E82-5838-31E20462A79B}"/>
+                <a16:creationId xmlns:a16="http://schemas.microsoft.com/office/drawing/2014/main" id="{C35384B9-8408-F95C-CDBB-0E2B5EF7ACAB}"/>
               </a:ext>
             </a:extLst>
           </p:cNvPr>
@@ -5529,7 +5531,7 @@
         </p:nvSpPr>
         <p:spPr>
           <a:xfrm>
-            <a:off x="5115358" y="6436014"/>
+            <a:off x="5115358" y="6420738"/>
             <a:ext cx="1961284" cy="421986"/>
           </a:xfrm>
           <a:prstGeom prst="rect">
@@ -5642,10 +5644,10 @@
       </p:sp>
       <p:sp>
         <p:nvSpPr>
-          <p:cNvPr id="10" name="TXT_@Akkodis">
+          <p:cNvPr id="9" name="TXT_@Akkodis">
             <a:extLst>
               <a:ext uri="{FF2B5EF4-FFF2-40B4-BE49-F238E27FC236}">
-                <a16:creationId xmlns:a16="http://schemas.microsoft.com/office/drawing/2014/main" id="{B0B21068-3173-3203-60B7-48D641CF0DAF}"/>
+                <a16:creationId xmlns:a16="http://schemas.microsoft.com/office/drawing/2014/main" id="{F00522D0-B2F4-8238-4B9F-989256D9EAC3}"/>
               </a:ext>
             </a:extLst>
           </p:cNvPr>
@@ -5654,8 +5656,8 @@
         </p:nvSpPr>
         <p:spPr>
           <a:xfrm>
-            <a:off x="0" y="6436014"/>
-            <a:ext cx="4114800" cy="421986"/>
+            <a:off x="0" y="6420738"/>
+            <a:ext cx="4480560" cy="421986"/>
           </a:xfrm>
           <a:prstGeom prst="rect">
             <a:avLst/>
@@ -5698,7 +5700,7 @@
               <a:buNone/>
             </a:pPr>
             <a:r>
-              <a:rPr kumimoji="0" lang="ja-JP" altLang="en-US" sz="700" b="0" i="0" u="none" strike="noStrike" kern="0" cap="none" spc="0" normalizeH="0" baseline="0" noProof="0" dirty="0">
+              <a:rPr kumimoji="0" lang="ja-JP" altLang="en-US" sz="600" b="0" i="0" u="none" strike="noStrike" kern="0" cap="none" spc="0" normalizeH="0" baseline="0" noProof="0" dirty="0">
                 <a:ln>
                   <a:noFill/>
                 </a:ln>
@@ -5708,11 +5710,45 @@
                 <a:effectLst/>
                 <a:uLnTx/>
                 <a:uFillTx/>
-                <a:latin typeface="Arial"/>
+                <a:latin typeface="+mj-lt"/>
                 <a:ea typeface="+mn-ea"/>
                 <a:cs typeface="Arial"/>
               </a:rPr>
-              <a:t>この情報は機密情報です。事前の書面による同意を得ずに組織外に開示することを禁じます。</a:t>
+              <a:t>この資料は関係者限りの厳秘の資料であり、</a:t>
+            </a:r>
+            <a:r>
+              <a:rPr kumimoji="0" lang="en-US" altLang="ja-JP" sz="600" b="0" i="0" u="none" strike="noStrike" kern="0" cap="none" spc="0" normalizeH="0" baseline="0" noProof="0" dirty="0">
+                <a:ln>
+                  <a:noFill/>
+                </a:ln>
+                <a:solidFill>
+                  <a:schemeClr val="tx1"/>
+                </a:solidFill>
+                <a:effectLst/>
+                <a:uLnTx/>
+                <a:uFillTx/>
+                <a:latin typeface="+mj-lt"/>
+                <a:ea typeface="+mn-ea"/>
+                <a:cs typeface="Arial"/>
+              </a:rPr>
+              <a:t>AKKODiS</a:t>
+            </a:r>
+            <a:r>
+              <a:rPr kumimoji="0" lang="ja-JP" altLang="en-US" sz="600" b="0" i="0" u="none" strike="noStrike" kern="0" cap="none" spc="0" normalizeH="0" baseline="0" noProof="0" dirty="0">
+                <a:ln>
+                  <a:noFill/>
+                </a:ln>
+                <a:solidFill>
+                  <a:schemeClr val="tx1"/>
+                </a:solidFill>
+                <a:effectLst/>
+                <a:uLnTx/>
+                <a:uFillTx/>
+                <a:latin typeface="+mj-lt"/>
+                <a:ea typeface="+mn-ea"/>
+                <a:cs typeface="Arial"/>
+              </a:rPr>
+              <a:t>コンサルティング株式会社に無断での使用・開示を禁じます。</a:t>
             </a:r>
           </a:p>
         </p:txBody>
@@ -5722,7 +5758,7 @@
           <p:cNvPr id="3" name="グラフィックス 2">
             <a:extLst>
               <a:ext uri="{FF2B5EF4-FFF2-40B4-BE49-F238E27FC236}">
-                <a16:creationId xmlns:a16="http://schemas.microsoft.com/office/drawing/2014/main" id="{1D9F8D40-1C4B-7173-D8F1-C0255AE21508}"/>
+                <a16:creationId xmlns:a16="http://schemas.microsoft.com/office/drawing/2014/main" id="{8BA2B51A-7C0B-8ADC-2C94-B16FA36A1291}"/>
               </a:ext>
             </a:extLst>
           </p:cNvPr>
@@ -6887,82 +6923,10 @@
       </p:sp>
       <p:sp>
         <p:nvSpPr>
-          <p:cNvPr id="12" name="テキスト ボックス 11">
+          <p:cNvPr id="8" name="TXT_@Akkodis">
             <a:extLst>
               <a:ext uri="{FF2B5EF4-FFF2-40B4-BE49-F238E27FC236}">
-                <a16:creationId xmlns:a16="http://schemas.microsoft.com/office/drawing/2014/main" id="{03BEBF5F-3844-F3E4-3241-14AE2F767D2A}"/>
-              </a:ext>
-            </a:extLst>
-          </p:cNvPr>
-          <p:cNvSpPr txBox="1"/>
-          <p:nvPr userDrawn="1">
-            <p:extLst>
-              <p:ext uri="{1162E1C5-73C7-4A58-AE30-91384D911F3F}">
-                <p184:classification xmlns:p184="http://schemas.microsoft.com/office/powerpoint/2018/4/main" val="hdr"/>
-              </p:ext>
-            </p:extLst>
-          </p:nvPr>
-        </p:nvSpPr>
-        <p:spPr>
-          <a:xfrm>
-            <a:off x="63500" y="63500"/>
-            <a:ext cx="663575" cy="153888"/>
-          </a:xfrm>
-          <a:prstGeom prst="rect">
-            <a:avLst/>
-          </a:prstGeom>
-        </p:spPr>
-        <p:txBody>
-          <a:bodyPr horzOverflow="overflow" lIns="0" tIns="0" rIns="0" bIns="0">
-            <a:spAutoFit/>
-          </a:bodyPr>
-          <a:lstStyle/>
-          <a:p>
-            <a:pPr marL="0" indent="0" algn="l">
-              <a:buNone/>
-            </a:pPr>
-            <a:r>
-              <a:rPr lang="en-US" sz="1000" dirty="0">
-                <a:solidFill>
-                  <a:srgbClr val="000000"/>
-                </a:solidFill>
-                <a:latin typeface="+mj-ea"/>
-                <a:ea typeface="+mj-ea"/>
-                <a:cs typeface="Calibri" panose="020F0502020204030204" pitchFamily="34" charset="0"/>
-              </a:rPr>
-              <a:t>【</a:t>
-            </a:r>
-            <a:r>
-              <a:rPr lang="en-US" sz="1000" dirty="0" err="1">
-                <a:solidFill>
-                  <a:srgbClr val="000000"/>
-                </a:solidFill>
-                <a:latin typeface="+mj-ea"/>
-                <a:ea typeface="+mj-ea"/>
-                <a:cs typeface="Calibri" panose="020F0502020204030204" pitchFamily="34" charset="0"/>
-              </a:rPr>
-              <a:t>社外秘</a:t>
-            </a:r>
-            <a:r>
-              <a:rPr lang="en-US" sz="1000" dirty="0">
-                <a:solidFill>
-                  <a:srgbClr val="000000"/>
-                </a:solidFill>
-                <a:latin typeface="+mj-ea"/>
-                <a:ea typeface="+mj-ea"/>
-                <a:cs typeface="Calibri" panose="020F0502020204030204" pitchFamily="34" charset="0"/>
-              </a:rPr>
-              <a:t>】</a:t>
-            </a:r>
-          </a:p>
-        </p:txBody>
-      </p:sp>
-      <p:sp>
-        <p:nvSpPr>
-          <p:cNvPr id="19" name="TXT_@Akkodis">
-            <a:extLst>
-              <a:ext uri="{FF2B5EF4-FFF2-40B4-BE49-F238E27FC236}">
-                <a16:creationId xmlns:a16="http://schemas.microsoft.com/office/drawing/2014/main" id="{9A260606-9CAB-510B-418A-1560CFCDE300}"/>
+                <a16:creationId xmlns:a16="http://schemas.microsoft.com/office/drawing/2014/main" id="{8D858A43-E40A-3156-0797-39675B769F55}"/>
               </a:ext>
             </a:extLst>
           </p:cNvPr>
@@ -6971,7 +6935,7 @@
         </p:nvSpPr>
         <p:spPr>
           <a:xfrm>
-            <a:off x="5115358" y="6436014"/>
+            <a:off x="5115358" y="6420738"/>
             <a:ext cx="1961284" cy="421986"/>
           </a:xfrm>
           <a:prstGeom prst="rect">
@@ -7084,10 +7048,10 @@
       </p:sp>
       <p:sp>
         <p:nvSpPr>
-          <p:cNvPr id="20" name="TXT_@Akkodis">
+          <p:cNvPr id="19" name="TXT_@Akkodis">
             <a:extLst>
               <a:ext uri="{FF2B5EF4-FFF2-40B4-BE49-F238E27FC236}">
-                <a16:creationId xmlns:a16="http://schemas.microsoft.com/office/drawing/2014/main" id="{AE7CDD05-09F8-9922-48DD-EC2CC91D7D13}"/>
+                <a16:creationId xmlns:a16="http://schemas.microsoft.com/office/drawing/2014/main" id="{478CD009-3257-E197-3C94-7ADEA2524331}"/>
               </a:ext>
             </a:extLst>
           </p:cNvPr>
@@ -7096,8 +7060,8 @@
         </p:nvSpPr>
         <p:spPr>
           <a:xfrm>
-            <a:off x="0" y="6436014"/>
-            <a:ext cx="4114800" cy="421986"/>
+            <a:off x="0" y="6420738"/>
+            <a:ext cx="4480560" cy="421986"/>
           </a:xfrm>
           <a:prstGeom prst="rect">
             <a:avLst/>
@@ -7140,7 +7104,7 @@
               <a:buNone/>
             </a:pPr>
             <a:r>
-              <a:rPr kumimoji="0" lang="ja-JP" altLang="en-US" sz="700" b="0" i="0" u="none" strike="noStrike" kern="0" cap="none" spc="0" normalizeH="0" baseline="0" noProof="0" dirty="0">
+              <a:rPr kumimoji="0" lang="ja-JP" altLang="en-US" sz="600" b="0" i="0" u="none" strike="noStrike" kern="0" cap="none" spc="0" normalizeH="0" baseline="0" noProof="0" dirty="0">
                 <a:ln>
                   <a:noFill/>
                 </a:ln>
@@ -7150,21 +7114,55 @@
                 <a:effectLst/>
                 <a:uLnTx/>
                 <a:uFillTx/>
-                <a:latin typeface="Arial"/>
+                <a:latin typeface="+mj-lt"/>
                 <a:ea typeface="+mn-ea"/>
                 <a:cs typeface="Arial"/>
               </a:rPr>
-              <a:t>この情報は機密情報です。事前の書面による同意を得ずに組織外に開示することを禁じます。</a:t>
+              <a:t>この資料は関係者限りの厳秘の資料であり、</a:t>
+            </a:r>
+            <a:r>
+              <a:rPr kumimoji="0" lang="en-US" altLang="ja-JP" sz="600" b="0" i="0" u="none" strike="noStrike" kern="0" cap="none" spc="0" normalizeH="0" baseline="0" noProof="0" dirty="0">
+                <a:ln>
+                  <a:noFill/>
+                </a:ln>
+                <a:solidFill>
+                  <a:schemeClr val="tx1"/>
+                </a:solidFill>
+                <a:effectLst/>
+                <a:uLnTx/>
+                <a:uFillTx/>
+                <a:latin typeface="+mj-lt"/>
+                <a:ea typeface="+mn-ea"/>
+                <a:cs typeface="Arial"/>
+              </a:rPr>
+              <a:t>AKKODiS</a:t>
+            </a:r>
+            <a:r>
+              <a:rPr kumimoji="0" lang="ja-JP" altLang="en-US" sz="600" b="0" i="0" u="none" strike="noStrike" kern="0" cap="none" spc="0" normalizeH="0" baseline="0" noProof="0" dirty="0">
+                <a:ln>
+                  <a:noFill/>
+                </a:ln>
+                <a:solidFill>
+                  <a:schemeClr val="tx1"/>
+                </a:solidFill>
+                <a:effectLst/>
+                <a:uLnTx/>
+                <a:uFillTx/>
+                <a:latin typeface="+mj-lt"/>
+                <a:ea typeface="+mn-ea"/>
+                <a:cs typeface="Arial"/>
+              </a:rPr>
+              <a:t>コンサルティング株式会社に無断での使用・開示を禁じます。</a:t>
             </a:r>
           </a:p>
         </p:txBody>
       </p:sp>
       <p:pic>
         <p:nvPicPr>
-          <p:cNvPr id="8" name="グラフィックス 7">
+          <p:cNvPr id="12" name="グラフィックス 11">
             <a:extLst>
               <a:ext uri="{FF2B5EF4-FFF2-40B4-BE49-F238E27FC236}">
-                <a16:creationId xmlns:a16="http://schemas.microsoft.com/office/drawing/2014/main" id="{F409673D-2F7F-E72C-6E8F-37E5042DE766}"/>
+                <a16:creationId xmlns:a16="http://schemas.microsoft.com/office/drawing/2014/main" id="{4A1BA447-79B0-EF1F-82EE-4BD2C164FAE9}"/>
               </a:ext>
             </a:extLst>
           </p:cNvPr>
@@ -8233,82 +8231,10 @@
       </p:sp>
       <p:sp>
         <p:nvSpPr>
-          <p:cNvPr id="12" name="テキスト ボックス 11">
+          <p:cNvPr id="7" name="TXT_@Akkodis">
             <a:extLst>
               <a:ext uri="{FF2B5EF4-FFF2-40B4-BE49-F238E27FC236}">
-                <a16:creationId xmlns:a16="http://schemas.microsoft.com/office/drawing/2014/main" id="{496EAED7-B4A1-34D4-C9B2-B735369CA323}"/>
-              </a:ext>
-            </a:extLst>
-          </p:cNvPr>
-          <p:cNvSpPr txBox="1"/>
-          <p:nvPr userDrawn="1">
-            <p:extLst>
-              <p:ext uri="{1162E1C5-73C7-4A58-AE30-91384D911F3F}">
-                <p184:classification xmlns:p184="http://schemas.microsoft.com/office/powerpoint/2018/4/main" val="hdr"/>
-              </p:ext>
-            </p:extLst>
-          </p:nvPr>
-        </p:nvSpPr>
-        <p:spPr>
-          <a:xfrm>
-            <a:off x="63500" y="63500"/>
-            <a:ext cx="663575" cy="153888"/>
-          </a:xfrm>
-          <a:prstGeom prst="rect">
-            <a:avLst/>
-          </a:prstGeom>
-        </p:spPr>
-        <p:txBody>
-          <a:bodyPr horzOverflow="overflow" lIns="0" tIns="0" rIns="0" bIns="0">
-            <a:spAutoFit/>
-          </a:bodyPr>
-          <a:lstStyle/>
-          <a:p>
-            <a:pPr marL="0" indent="0" algn="l">
-              <a:buNone/>
-            </a:pPr>
-            <a:r>
-              <a:rPr lang="en-US" sz="1000" dirty="0">
-                <a:solidFill>
-                  <a:schemeClr val="bg1"/>
-                </a:solidFill>
-                <a:latin typeface="+mj-ea"/>
-                <a:ea typeface="+mj-ea"/>
-                <a:cs typeface="Calibri" panose="020F0502020204030204" pitchFamily="34" charset="0"/>
-              </a:rPr>
-              <a:t>【</a:t>
-            </a:r>
-            <a:r>
-              <a:rPr lang="en-US" sz="1000" dirty="0" err="1">
-                <a:solidFill>
-                  <a:schemeClr val="bg1"/>
-                </a:solidFill>
-                <a:latin typeface="+mj-ea"/>
-                <a:ea typeface="+mj-ea"/>
-                <a:cs typeface="Calibri" panose="020F0502020204030204" pitchFamily="34" charset="0"/>
-              </a:rPr>
-              <a:t>社外秘</a:t>
-            </a:r>
-            <a:r>
-              <a:rPr lang="en-US" sz="1000" dirty="0">
-                <a:solidFill>
-                  <a:schemeClr val="bg1"/>
-                </a:solidFill>
-                <a:latin typeface="+mj-ea"/>
-                <a:ea typeface="+mj-ea"/>
-                <a:cs typeface="Calibri" panose="020F0502020204030204" pitchFamily="34" charset="0"/>
-              </a:rPr>
-              <a:t>】</a:t>
-            </a:r>
-          </a:p>
-        </p:txBody>
-      </p:sp>
-      <p:sp>
-        <p:nvSpPr>
-          <p:cNvPr id="21" name="TXT_@Akkodis">
-            <a:extLst>
-              <a:ext uri="{FF2B5EF4-FFF2-40B4-BE49-F238E27FC236}">
-                <a16:creationId xmlns:a16="http://schemas.microsoft.com/office/drawing/2014/main" id="{2D4AD4BE-62D3-8509-BA5E-BB76F1E2C084}"/>
+                <a16:creationId xmlns:a16="http://schemas.microsoft.com/office/drawing/2014/main" id="{88FFDEF2-C443-E953-FE54-FCD13A620CB9}"/>
               </a:ext>
             </a:extLst>
           </p:cNvPr>
@@ -8317,7 +8243,7 @@
         </p:nvSpPr>
         <p:spPr>
           <a:xfrm>
-            <a:off x="5115358" y="6436014"/>
+            <a:off x="5115358" y="6420738"/>
             <a:ext cx="1961284" cy="421986"/>
           </a:xfrm>
           <a:prstGeom prst="rect">
@@ -8430,10 +8356,10 @@
       </p:sp>
       <p:sp>
         <p:nvSpPr>
-          <p:cNvPr id="22" name="TXT_@Akkodis">
+          <p:cNvPr id="19" name="TXT_@Akkodis">
             <a:extLst>
               <a:ext uri="{FF2B5EF4-FFF2-40B4-BE49-F238E27FC236}">
-                <a16:creationId xmlns:a16="http://schemas.microsoft.com/office/drawing/2014/main" id="{33624CC1-68D7-DEE3-E5FF-DABA040E3EE7}"/>
+                <a16:creationId xmlns:a16="http://schemas.microsoft.com/office/drawing/2014/main" id="{83271F87-E40D-71CD-F0BA-3BAA0BC414D7}"/>
               </a:ext>
             </a:extLst>
           </p:cNvPr>
@@ -8442,8 +8368,8 @@
         </p:nvSpPr>
         <p:spPr>
           <a:xfrm>
-            <a:off x="0" y="6436014"/>
-            <a:ext cx="4114800" cy="421986"/>
+            <a:off x="0" y="6420738"/>
+            <a:ext cx="4480560" cy="421986"/>
           </a:xfrm>
           <a:prstGeom prst="rect">
             <a:avLst/>
@@ -8486,7 +8412,7 @@
               <a:buNone/>
             </a:pPr>
             <a:r>
-              <a:rPr kumimoji="0" lang="ja-JP" altLang="en-US" sz="700" b="0" i="0" u="none" strike="noStrike" kern="0" cap="none" spc="0" normalizeH="0" baseline="0" noProof="0" dirty="0">
+              <a:rPr kumimoji="0" lang="ja-JP" altLang="en-US" sz="600" b="0" i="0" u="none" strike="noStrike" kern="0" cap="none" spc="0" normalizeH="0" baseline="0" noProof="0" dirty="0">
                 <a:ln>
                   <a:noFill/>
                 </a:ln>
@@ -8496,14 +8422,14 @@
                 <a:effectLst/>
                 <a:uLnTx/>
                 <a:uFillTx/>
-                <a:latin typeface="Arial"/>
+                <a:latin typeface="+mj-lt"/>
                 <a:ea typeface="+mn-ea"/>
                 <a:cs typeface="Arial"/>
               </a:rPr>
-              <a:t>この情報は機密情報です。</a:t>
-            </a:r>
-            <a:br>
-              <a:rPr kumimoji="0" lang="en-US" altLang="ja-JP" sz="700" b="0" i="0" u="none" strike="noStrike" kern="0" cap="none" spc="0" normalizeH="0" baseline="0" noProof="0" dirty="0">
+              <a:t>この資料は関係者限りの厳秘の資料であり、</a:t>
+            </a:r>
+            <a:r>
+              <a:rPr kumimoji="0" lang="en-US" altLang="ja-JP" sz="600" b="0" i="0" u="none" strike="noStrike" kern="0" cap="none" spc="0" normalizeH="0" baseline="0" noProof="0" dirty="0">
                 <a:ln>
                   <a:noFill/>
                 </a:ln>
@@ -8513,13 +8439,47 @@
                 <a:effectLst/>
                 <a:uLnTx/>
                 <a:uFillTx/>
-                <a:latin typeface="Arial"/>
+                <a:latin typeface="+mj-lt"/>
+                <a:ea typeface="+mn-ea"/>
+                <a:cs typeface="Arial"/>
+              </a:rPr>
+              <a:t>AKKODiS</a:t>
+            </a:r>
+            <a:r>
+              <a:rPr kumimoji="0" lang="ja-JP" altLang="en-US" sz="600" b="0" i="0" u="none" strike="noStrike" kern="0" cap="none" spc="0" normalizeH="0" baseline="0" noProof="0" dirty="0">
+                <a:ln>
+                  <a:noFill/>
+                </a:ln>
+                <a:solidFill>
+                  <a:schemeClr val="bg1"/>
+                </a:solidFill>
+                <a:effectLst/>
+                <a:uLnTx/>
+                <a:uFillTx/>
+                <a:latin typeface="+mj-lt"/>
+                <a:ea typeface="+mn-ea"/>
+                <a:cs typeface="Arial"/>
+              </a:rPr>
+              <a:t>コンサルティング株式会社に</a:t>
+            </a:r>
+            <a:br>
+              <a:rPr kumimoji="0" lang="en-US" altLang="ja-JP" sz="600" b="0" i="0" u="none" strike="noStrike" kern="0" cap="none" spc="0" normalizeH="0" baseline="0" noProof="0" dirty="0">
+                <a:ln>
+                  <a:noFill/>
+                </a:ln>
+                <a:solidFill>
+                  <a:schemeClr val="bg1"/>
+                </a:solidFill>
+                <a:effectLst/>
+                <a:uLnTx/>
+                <a:uFillTx/>
+                <a:latin typeface="+mj-lt"/>
                 <a:ea typeface="+mn-ea"/>
                 <a:cs typeface="Arial"/>
               </a:rPr>
             </a:br>
             <a:r>
-              <a:rPr kumimoji="0" lang="ja-JP" altLang="en-US" sz="700" b="0" i="0" u="none" strike="noStrike" kern="0" cap="none" spc="0" normalizeH="0" baseline="0" noProof="0" dirty="0">
+              <a:rPr kumimoji="0" lang="ja-JP" altLang="en-US" sz="600" b="0" i="0" u="none" strike="noStrike" kern="0" cap="none" spc="0" normalizeH="0" baseline="0" noProof="0" dirty="0">
                 <a:ln>
                   <a:noFill/>
                 </a:ln>
@@ -8529,21 +8489,21 @@
                 <a:effectLst/>
                 <a:uLnTx/>
                 <a:uFillTx/>
-                <a:latin typeface="Arial"/>
+                <a:latin typeface="+mj-lt"/>
                 <a:ea typeface="+mn-ea"/>
                 <a:cs typeface="Arial"/>
               </a:rPr>
-              <a:t>事前の書面による同意を得ずに組織外に開示することを禁じます。</a:t>
+              <a:t>無断での使用・開示を禁じます。</a:t>
             </a:r>
           </a:p>
         </p:txBody>
       </p:sp>
       <p:pic>
         <p:nvPicPr>
-          <p:cNvPr id="7" name="グラフィックス 6">
+          <p:cNvPr id="8" name="グラフィックス 7">
             <a:extLst>
               <a:ext uri="{FF2B5EF4-FFF2-40B4-BE49-F238E27FC236}">
-                <a16:creationId xmlns:a16="http://schemas.microsoft.com/office/drawing/2014/main" id="{1E908239-B634-8423-FC04-F39B0EB8FAFD}"/>
+                <a16:creationId xmlns:a16="http://schemas.microsoft.com/office/drawing/2014/main" id="{8623ECE5-504C-3793-74E8-19C1EED6B550}"/>
               </a:ext>
             </a:extLst>
           </p:cNvPr>
@@ -9522,82 +9482,10 @@
       </p:sp>
       <p:sp>
         <p:nvSpPr>
-          <p:cNvPr id="9" name="テキスト ボックス 8">
+          <p:cNvPr id="2" name="TXT_@Akkodis">
             <a:extLst>
               <a:ext uri="{FF2B5EF4-FFF2-40B4-BE49-F238E27FC236}">
-                <a16:creationId xmlns:a16="http://schemas.microsoft.com/office/drawing/2014/main" id="{43AA0033-DD37-F613-B500-196ED814EC8E}"/>
-              </a:ext>
-            </a:extLst>
-          </p:cNvPr>
-          <p:cNvSpPr txBox="1"/>
-          <p:nvPr userDrawn="1">
-            <p:extLst>
-              <p:ext uri="{1162E1C5-73C7-4A58-AE30-91384D911F3F}">
-                <p184:classification xmlns:p184="http://schemas.microsoft.com/office/powerpoint/2018/4/main" val="hdr"/>
-              </p:ext>
-            </p:extLst>
-          </p:nvPr>
-        </p:nvSpPr>
-        <p:spPr>
-          <a:xfrm>
-            <a:off x="63500" y="63500"/>
-            <a:ext cx="663575" cy="153888"/>
-          </a:xfrm>
-          <a:prstGeom prst="rect">
-            <a:avLst/>
-          </a:prstGeom>
-        </p:spPr>
-        <p:txBody>
-          <a:bodyPr horzOverflow="overflow" lIns="0" tIns="0" rIns="0" bIns="0">
-            <a:spAutoFit/>
-          </a:bodyPr>
-          <a:lstStyle/>
-          <a:p>
-            <a:pPr marL="0" indent="0" algn="l">
-              <a:buNone/>
-            </a:pPr>
-            <a:r>
-              <a:rPr lang="en-US" sz="1000" dirty="0">
-                <a:solidFill>
-                  <a:schemeClr val="bg1"/>
-                </a:solidFill>
-                <a:latin typeface="+mj-ea"/>
-                <a:ea typeface="+mj-ea"/>
-                <a:cs typeface="Calibri" panose="020F0502020204030204" pitchFamily="34" charset="0"/>
-              </a:rPr>
-              <a:t>【</a:t>
-            </a:r>
-            <a:r>
-              <a:rPr lang="en-US" sz="1000" dirty="0" err="1">
-                <a:solidFill>
-                  <a:schemeClr val="bg1"/>
-                </a:solidFill>
-                <a:latin typeface="+mj-ea"/>
-                <a:ea typeface="+mj-ea"/>
-                <a:cs typeface="Calibri" panose="020F0502020204030204" pitchFamily="34" charset="0"/>
-              </a:rPr>
-              <a:t>社外秘</a:t>
-            </a:r>
-            <a:r>
-              <a:rPr lang="en-US" sz="1000" dirty="0">
-                <a:solidFill>
-                  <a:schemeClr val="bg1"/>
-                </a:solidFill>
-                <a:latin typeface="+mj-ea"/>
-                <a:ea typeface="+mj-ea"/>
-                <a:cs typeface="Calibri" panose="020F0502020204030204" pitchFamily="34" charset="0"/>
-              </a:rPr>
-              <a:t>】</a:t>
-            </a:r>
-          </a:p>
-        </p:txBody>
-      </p:sp>
-      <p:sp>
-        <p:nvSpPr>
-          <p:cNvPr id="12" name="TXT_@Akkodis">
-            <a:extLst>
-              <a:ext uri="{FF2B5EF4-FFF2-40B4-BE49-F238E27FC236}">
-                <a16:creationId xmlns:a16="http://schemas.microsoft.com/office/drawing/2014/main" id="{758FDE66-5D18-A611-6206-D75714581AD1}"/>
+                <a16:creationId xmlns:a16="http://schemas.microsoft.com/office/drawing/2014/main" id="{C0338ECA-4566-5F65-BE02-3D605EE77225}"/>
               </a:ext>
             </a:extLst>
           </p:cNvPr>
@@ -9606,7 +9494,7 @@
         </p:nvSpPr>
         <p:spPr>
           <a:xfrm>
-            <a:off x="5115358" y="6436014"/>
+            <a:off x="5115358" y="6420738"/>
             <a:ext cx="1961284" cy="421986"/>
           </a:xfrm>
           <a:prstGeom prst="rect">
@@ -9719,10 +9607,10 @@
       </p:sp>
       <p:sp>
         <p:nvSpPr>
-          <p:cNvPr id="13" name="TXT_@Akkodis">
+          <p:cNvPr id="12" name="TXT_@Akkodis">
             <a:extLst>
               <a:ext uri="{FF2B5EF4-FFF2-40B4-BE49-F238E27FC236}">
-                <a16:creationId xmlns:a16="http://schemas.microsoft.com/office/drawing/2014/main" id="{DFCFA87E-B7BD-73F9-D3DE-59A9EE95886F}"/>
+                <a16:creationId xmlns:a16="http://schemas.microsoft.com/office/drawing/2014/main" id="{587E626F-7AE7-3642-9661-E21EA045CDB5}"/>
               </a:ext>
             </a:extLst>
           </p:cNvPr>
@@ -9731,8 +9619,8 @@
         </p:nvSpPr>
         <p:spPr>
           <a:xfrm>
-            <a:off x="0" y="6436014"/>
-            <a:ext cx="4114800" cy="421986"/>
+            <a:off x="0" y="6420738"/>
+            <a:ext cx="4480560" cy="421986"/>
           </a:xfrm>
           <a:prstGeom prst="rect">
             <a:avLst/>
@@ -9775,7 +9663,7 @@
               <a:buNone/>
             </a:pPr>
             <a:r>
-              <a:rPr kumimoji="0" lang="ja-JP" altLang="en-US" sz="700" b="0" i="0" u="none" strike="noStrike" kern="0" cap="none" spc="0" normalizeH="0" baseline="0" noProof="0" dirty="0">
+              <a:rPr kumimoji="0" lang="ja-JP" altLang="en-US" sz="600" b="0" i="0" u="none" strike="noStrike" kern="0" cap="none" spc="0" normalizeH="0" baseline="0" noProof="0" dirty="0">
                 <a:ln>
                   <a:noFill/>
                 </a:ln>
@@ -9785,14 +9673,14 @@
                 <a:effectLst/>
                 <a:uLnTx/>
                 <a:uFillTx/>
-                <a:latin typeface="Arial"/>
+                <a:latin typeface="+mj-lt"/>
                 <a:ea typeface="+mn-ea"/>
                 <a:cs typeface="Arial"/>
               </a:rPr>
-              <a:t>この情報は機密情報です。</a:t>
-            </a:r>
-            <a:br>
-              <a:rPr kumimoji="0" lang="en-US" altLang="ja-JP" sz="700" b="0" i="0" u="none" strike="noStrike" kern="0" cap="none" spc="0" normalizeH="0" baseline="0" noProof="0" dirty="0">
+              <a:t>この資料は関係者限りの厳秘の資料であり、</a:t>
+            </a:r>
+            <a:r>
+              <a:rPr kumimoji="0" lang="en-US" altLang="ja-JP" sz="600" b="0" i="0" u="none" strike="noStrike" kern="0" cap="none" spc="0" normalizeH="0" baseline="0" noProof="0" dirty="0">
                 <a:ln>
                   <a:noFill/>
                 </a:ln>
@@ -9802,13 +9690,47 @@
                 <a:effectLst/>
                 <a:uLnTx/>
                 <a:uFillTx/>
-                <a:latin typeface="Arial"/>
+                <a:latin typeface="+mj-lt"/>
+                <a:ea typeface="+mn-ea"/>
+                <a:cs typeface="Arial"/>
+              </a:rPr>
+              <a:t>AKKODiS</a:t>
+            </a:r>
+            <a:r>
+              <a:rPr kumimoji="0" lang="ja-JP" altLang="en-US" sz="600" b="0" i="0" u="none" strike="noStrike" kern="0" cap="none" spc="0" normalizeH="0" baseline="0" noProof="0" dirty="0">
+                <a:ln>
+                  <a:noFill/>
+                </a:ln>
+                <a:solidFill>
+                  <a:schemeClr val="bg1"/>
+                </a:solidFill>
+                <a:effectLst/>
+                <a:uLnTx/>
+                <a:uFillTx/>
+                <a:latin typeface="+mj-lt"/>
+                <a:ea typeface="+mn-ea"/>
+                <a:cs typeface="Arial"/>
+              </a:rPr>
+              <a:t>コンサルティング株式会社に</a:t>
+            </a:r>
+            <a:br>
+              <a:rPr kumimoji="0" lang="en-US" altLang="ja-JP" sz="600" b="0" i="0" u="none" strike="noStrike" kern="0" cap="none" spc="0" normalizeH="0" baseline="0" noProof="0" dirty="0">
+                <a:ln>
+                  <a:noFill/>
+                </a:ln>
+                <a:solidFill>
+                  <a:schemeClr val="bg1"/>
+                </a:solidFill>
+                <a:effectLst/>
+                <a:uLnTx/>
+                <a:uFillTx/>
+                <a:latin typeface="+mj-lt"/>
                 <a:ea typeface="+mn-ea"/>
                 <a:cs typeface="Arial"/>
               </a:rPr>
             </a:br>
             <a:r>
-              <a:rPr kumimoji="0" lang="ja-JP" altLang="en-US" sz="700" b="0" i="0" u="none" strike="noStrike" kern="0" cap="none" spc="0" normalizeH="0" baseline="0" noProof="0" dirty="0">
+              <a:rPr kumimoji="0" lang="ja-JP" altLang="en-US" sz="600" b="0" i="0" u="none" strike="noStrike" kern="0" cap="none" spc="0" normalizeH="0" baseline="0" noProof="0" dirty="0">
                 <a:ln>
                   <a:noFill/>
                 </a:ln>
@@ -9818,21 +9740,21 @@
                 <a:effectLst/>
                 <a:uLnTx/>
                 <a:uFillTx/>
-                <a:latin typeface="Arial"/>
+                <a:latin typeface="+mj-lt"/>
                 <a:ea typeface="+mn-ea"/>
                 <a:cs typeface="Arial"/>
               </a:rPr>
-              <a:t>事前の書面による同意を得ずに組織外に開示することを禁じます。</a:t>
+              <a:t>無断での使用・開示を禁じます。</a:t>
             </a:r>
           </a:p>
         </p:txBody>
       </p:sp>
       <p:pic>
         <p:nvPicPr>
-          <p:cNvPr id="2" name="グラフィックス 1">
+          <p:cNvPr id="7" name="グラフィックス 6">
             <a:extLst>
               <a:ext uri="{FF2B5EF4-FFF2-40B4-BE49-F238E27FC236}">
-                <a16:creationId xmlns:a16="http://schemas.microsoft.com/office/drawing/2014/main" id="{FF8D73E4-F720-AE52-AC6E-6614714B8D75}"/>
+                <a16:creationId xmlns:a16="http://schemas.microsoft.com/office/drawing/2014/main" id="{F43FB422-611A-9ACF-8B53-1BA85B1B0542}"/>
               </a:ext>
             </a:extLst>
           </p:cNvPr>
@@ -10430,82 +10352,10 @@
       </p:sp>
       <p:sp>
         <p:nvSpPr>
-          <p:cNvPr id="9" name="テキスト ボックス 8">
+          <p:cNvPr id="5" name="TXT_@Akkodis">
             <a:extLst>
               <a:ext uri="{FF2B5EF4-FFF2-40B4-BE49-F238E27FC236}">
-                <a16:creationId xmlns:a16="http://schemas.microsoft.com/office/drawing/2014/main" id="{7A91FAE7-9323-E3B2-C8DF-86BAECD2870C}"/>
-              </a:ext>
-            </a:extLst>
-          </p:cNvPr>
-          <p:cNvSpPr txBox="1"/>
-          <p:nvPr userDrawn="1">
-            <p:extLst>
-              <p:ext uri="{1162E1C5-73C7-4A58-AE30-91384D911F3F}">
-                <p184:classification xmlns:p184="http://schemas.microsoft.com/office/powerpoint/2018/4/main" val="hdr"/>
-              </p:ext>
-            </p:extLst>
-          </p:nvPr>
-        </p:nvSpPr>
-        <p:spPr>
-          <a:xfrm>
-            <a:off x="63500" y="63500"/>
-            <a:ext cx="663575" cy="153888"/>
-          </a:xfrm>
-          <a:prstGeom prst="rect">
-            <a:avLst/>
-          </a:prstGeom>
-        </p:spPr>
-        <p:txBody>
-          <a:bodyPr horzOverflow="overflow" lIns="0" tIns="0" rIns="0" bIns="0">
-            <a:spAutoFit/>
-          </a:bodyPr>
-          <a:lstStyle/>
-          <a:p>
-            <a:pPr marL="0" indent="0" algn="l">
-              <a:buNone/>
-            </a:pPr>
-            <a:r>
-              <a:rPr lang="en-US" sz="1000" dirty="0">
-                <a:solidFill>
-                  <a:srgbClr val="000000"/>
-                </a:solidFill>
-                <a:latin typeface="+mj-ea"/>
-                <a:ea typeface="+mj-ea"/>
-                <a:cs typeface="Calibri" panose="020F0502020204030204" pitchFamily="34" charset="0"/>
-              </a:rPr>
-              <a:t>【</a:t>
-            </a:r>
-            <a:r>
-              <a:rPr lang="en-US" sz="1000" dirty="0" err="1">
-                <a:solidFill>
-                  <a:srgbClr val="000000"/>
-                </a:solidFill>
-                <a:latin typeface="+mj-ea"/>
-                <a:ea typeface="+mj-ea"/>
-                <a:cs typeface="Calibri" panose="020F0502020204030204" pitchFamily="34" charset="0"/>
-              </a:rPr>
-              <a:t>社外秘</a:t>
-            </a:r>
-            <a:r>
-              <a:rPr lang="en-US" sz="1000" dirty="0">
-                <a:solidFill>
-                  <a:srgbClr val="000000"/>
-                </a:solidFill>
-                <a:latin typeface="+mj-ea"/>
-                <a:ea typeface="+mj-ea"/>
-                <a:cs typeface="Calibri" panose="020F0502020204030204" pitchFamily="34" charset="0"/>
-              </a:rPr>
-              <a:t>】</a:t>
-            </a:r>
-          </a:p>
-        </p:txBody>
-      </p:sp>
-      <p:sp>
-        <p:nvSpPr>
-          <p:cNvPr id="10" name="TXT_@Akkodis">
-            <a:extLst>
-              <a:ext uri="{FF2B5EF4-FFF2-40B4-BE49-F238E27FC236}">
-                <a16:creationId xmlns:a16="http://schemas.microsoft.com/office/drawing/2014/main" id="{0055F8EA-A33B-772B-7377-3C3FD58E44E4}"/>
+                <a16:creationId xmlns:a16="http://schemas.microsoft.com/office/drawing/2014/main" id="{7D75E647-5648-FD73-B31D-077D89ED30EA}"/>
               </a:ext>
             </a:extLst>
           </p:cNvPr>
@@ -10514,7 +10364,7 @@
         </p:nvSpPr>
         <p:spPr>
           <a:xfrm>
-            <a:off x="5115358" y="6436014"/>
+            <a:off x="5115358" y="6420738"/>
             <a:ext cx="1961284" cy="421986"/>
           </a:xfrm>
           <a:prstGeom prst="rect">
@@ -10627,10 +10477,10 @@
       </p:sp>
       <p:sp>
         <p:nvSpPr>
-          <p:cNvPr id="11" name="TXT_@Akkodis">
+          <p:cNvPr id="10" name="TXT_@Akkodis">
             <a:extLst>
               <a:ext uri="{FF2B5EF4-FFF2-40B4-BE49-F238E27FC236}">
-                <a16:creationId xmlns:a16="http://schemas.microsoft.com/office/drawing/2014/main" id="{0553682E-718C-88E0-B326-F907FA24A653}"/>
+                <a16:creationId xmlns:a16="http://schemas.microsoft.com/office/drawing/2014/main" id="{3E458BDF-131D-31FF-2544-135D40AE8946}"/>
               </a:ext>
             </a:extLst>
           </p:cNvPr>
@@ -10639,8 +10489,8 @@
         </p:nvSpPr>
         <p:spPr>
           <a:xfrm>
-            <a:off x="0" y="6436014"/>
-            <a:ext cx="4114800" cy="421986"/>
+            <a:off x="0" y="6420738"/>
+            <a:ext cx="4480560" cy="421986"/>
           </a:xfrm>
           <a:prstGeom prst="rect">
             <a:avLst/>
@@ -10683,7 +10533,7 @@
               <a:buNone/>
             </a:pPr>
             <a:r>
-              <a:rPr kumimoji="0" lang="ja-JP" altLang="en-US" sz="700" b="0" i="0" u="none" strike="noStrike" kern="0" cap="none" spc="0" normalizeH="0" baseline="0" noProof="0" dirty="0">
+              <a:rPr kumimoji="0" lang="ja-JP" altLang="en-US" sz="600" b="0" i="0" u="none" strike="noStrike" kern="0" cap="none" spc="0" normalizeH="0" baseline="0" noProof="0" dirty="0">
                 <a:ln>
                   <a:noFill/>
                 </a:ln>
@@ -10693,21 +10543,55 @@
                 <a:effectLst/>
                 <a:uLnTx/>
                 <a:uFillTx/>
-                <a:latin typeface="Arial"/>
+                <a:latin typeface="+mj-lt"/>
                 <a:ea typeface="+mn-ea"/>
                 <a:cs typeface="Arial"/>
               </a:rPr>
-              <a:t>この情報は機密情報です。事前の書面による同意を得ずに組織外に開示することを禁じます。</a:t>
+              <a:t>この資料は関係者限りの厳秘の資料であり、</a:t>
+            </a:r>
+            <a:r>
+              <a:rPr kumimoji="0" lang="en-US" altLang="ja-JP" sz="600" b="0" i="0" u="none" strike="noStrike" kern="0" cap="none" spc="0" normalizeH="0" baseline="0" noProof="0" dirty="0">
+                <a:ln>
+                  <a:noFill/>
+                </a:ln>
+                <a:solidFill>
+                  <a:schemeClr val="tx1"/>
+                </a:solidFill>
+                <a:effectLst/>
+                <a:uLnTx/>
+                <a:uFillTx/>
+                <a:latin typeface="+mj-lt"/>
+                <a:ea typeface="+mn-ea"/>
+                <a:cs typeface="Arial"/>
+              </a:rPr>
+              <a:t>AKKODiS</a:t>
+            </a:r>
+            <a:r>
+              <a:rPr kumimoji="0" lang="ja-JP" altLang="en-US" sz="600" b="0" i="0" u="none" strike="noStrike" kern="0" cap="none" spc="0" normalizeH="0" baseline="0" noProof="0" dirty="0">
+                <a:ln>
+                  <a:noFill/>
+                </a:ln>
+                <a:solidFill>
+                  <a:schemeClr val="tx1"/>
+                </a:solidFill>
+                <a:effectLst/>
+                <a:uLnTx/>
+                <a:uFillTx/>
+                <a:latin typeface="+mj-lt"/>
+                <a:ea typeface="+mn-ea"/>
+                <a:cs typeface="Arial"/>
+              </a:rPr>
+              <a:t>コンサルティング株式会社に無断での使用・開示を禁じます。</a:t>
             </a:r>
           </a:p>
         </p:txBody>
       </p:sp>
       <p:pic>
         <p:nvPicPr>
-          <p:cNvPr id="5" name="グラフィックス 4">
+          <p:cNvPr id="7" name="グラフィックス 6">
             <a:extLst>
               <a:ext uri="{FF2B5EF4-FFF2-40B4-BE49-F238E27FC236}">
-                <a16:creationId xmlns:a16="http://schemas.microsoft.com/office/drawing/2014/main" id="{3C1A5567-5BAB-95CC-C2CA-088D72397E04}"/>
+                <a16:creationId xmlns:a16="http://schemas.microsoft.com/office/drawing/2014/main" id="{0EDA8355-9AAF-6026-5322-EA0122DD7B11}"/>
               </a:ext>
             </a:extLst>
           </p:cNvPr>
@@ -12195,82 +12079,10 @@
       </p:sp>
       <p:sp>
         <p:nvSpPr>
-          <p:cNvPr id="4" name="テキスト ボックス 3">
+          <p:cNvPr id="12" name="TXT_@Akkodis">
             <a:extLst>
               <a:ext uri="{FF2B5EF4-FFF2-40B4-BE49-F238E27FC236}">
-                <a16:creationId xmlns:a16="http://schemas.microsoft.com/office/drawing/2014/main" id="{CA3EF335-6A8F-292A-63CB-0E09E218E4F1}"/>
-              </a:ext>
-            </a:extLst>
-          </p:cNvPr>
-          <p:cNvSpPr txBox="1"/>
-          <p:nvPr userDrawn="1">
-            <p:extLst>
-              <p:ext uri="{1162E1C5-73C7-4A58-AE30-91384D911F3F}">
-                <p184:classification xmlns:p184="http://schemas.microsoft.com/office/powerpoint/2018/4/main" val="hdr"/>
-              </p:ext>
-            </p:extLst>
-          </p:nvPr>
-        </p:nvSpPr>
-        <p:spPr>
-          <a:xfrm>
-            <a:off x="63500" y="63500"/>
-            <a:ext cx="663575" cy="153888"/>
-          </a:xfrm>
-          <a:prstGeom prst="rect">
-            <a:avLst/>
-          </a:prstGeom>
-        </p:spPr>
-        <p:txBody>
-          <a:bodyPr horzOverflow="overflow" lIns="0" tIns="0" rIns="0" bIns="0">
-            <a:spAutoFit/>
-          </a:bodyPr>
-          <a:lstStyle/>
-          <a:p>
-            <a:pPr marL="0" indent="0" algn="l">
-              <a:buNone/>
-            </a:pPr>
-            <a:r>
-              <a:rPr lang="en-US" sz="1000" dirty="0">
-                <a:solidFill>
-                  <a:srgbClr val="000000"/>
-                </a:solidFill>
-                <a:latin typeface="+mj-ea"/>
-                <a:ea typeface="+mj-ea"/>
-                <a:cs typeface="Calibri" panose="020F0502020204030204" pitchFamily="34" charset="0"/>
-              </a:rPr>
-              <a:t>【</a:t>
-            </a:r>
-            <a:r>
-              <a:rPr lang="en-US" sz="1000" dirty="0" err="1">
-                <a:solidFill>
-                  <a:srgbClr val="000000"/>
-                </a:solidFill>
-                <a:latin typeface="+mj-ea"/>
-                <a:ea typeface="+mj-ea"/>
-                <a:cs typeface="Calibri" panose="020F0502020204030204" pitchFamily="34" charset="0"/>
-              </a:rPr>
-              <a:t>社外秘</a:t>
-            </a:r>
-            <a:r>
-              <a:rPr lang="en-US" sz="1000" dirty="0">
-                <a:solidFill>
-                  <a:srgbClr val="000000"/>
-                </a:solidFill>
-                <a:latin typeface="+mj-ea"/>
-                <a:ea typeface="+mj-ea"/>
-                <a:cs typeface="Calibri" panose="020F0502020204030204" pitchFamily="34" charset="0"/>
-              </a:rPr>
-              <a:t>】</a:t>
-            </a:r>
-          </a:p>
-        </p:txBody>
-      </p:sp>
-      <p:sp>
-        <p:nvSpPr>
-          <p:cNvPr id="13" name="TXT_@Akkodis">
-            <a:extLst>
-              <a:ext uri="{FF2B5EF4-FFF2-40B4-BE49-F238E27FC236}">
-                <a16:creationId xmlns:a16="http://schemas.microsoft.com/office/drawing/2014/main" id="{0F41A7C9-EBF4-34E9-B949-86C477C532C7}"/>
+                <a16:creationId xmlns:a16="http://schemas.microsoft.com/office/drawing/2014/main" id="{D380E873-2B9D-5F21-1A9E-4B87FE9D0106}"/>
               </a:ext>
             </a:extLst>
           </p:cNvPr>
@@ -12279,7 +12091,7 @@
         </p:nvSpPr>
         <p:spPr>
           <a:xfrm>
-            <a:off x="5115358" y="6436014"/>
+            <a:off x="5115358" y="6420738"/>
             <a:ext cx="1961284" cy="421986"/>
           </a:xfrm>
           <a:prstGeom prst="rect">
@@ -12392,10 +12204,10 @@
       </p:sp>
       <p:sp>
         <p:nvSpPr>
-          <p:cNvPr id="15" name="TXT_@Akkodis">
+          <p:cNvPr id="13" name="TXT_@Akkodis">
             <a:extLst>
               <a:ext uri="{FF2B5EF4-FFF2-40B4-BE49-F238E27FC236}">
-                <a16:creationId xmlns:a16="http://schemas.microsoft.com/office/drawing/2014/main" id="{121B3E94-4224-D0CE-13A9-537E32A90121}"/>
+                <a16:creationId xmlns:a16="http://schemas.microsoft.com/office/drawing/2014/main" id="{A2799C40-0F2A-5937-2924-3F2885F09A71}"/>
               </a:ext>
             </a:extLst>
           </p:cNvPr>
@@ -12404,8 +12216,8 @@
         </p:nvSpPr>
         <p:spPr>
           <a:xfrm>
-            <a:off x="0" y="6436014"/>
-            <a:ext cx="4114800" cy="421986"/>
+            <a:off x="0" y="6420738"/>
+            <a:ext cx="4480560" cy="421986"/>
           </a:xfrm>
           <a:prstGeom prst="rect">
             <a:avLst/>
@@ -12448,7 +12260,7 @@
               <a:buNone/>
             </a:pPr>
             <a:r>
-              <a:rPr kumimoji="0" lang="ja-JP" altLang="en-US" sz="700" b="0" i="0" u="none" strike="noStrike" kern="0" cap="none" spc="0" normalizeH="0" baseline="0" noProof="0" dirty="0">
+              <a:rPr kumimoji="0" lang="ja-JP" altLang="en-US" sz="600" b="0" i="0" u="none" strike="noStrike" kern="0" cap="none" spc="0" normalizeH="0" baseline="0" noProof="0" dirty="0">
                 <a:ln>
                   <a:noFill/>
                 </a:ln>
@@ -12458,21 +12270,55 @@
                 <a:effectLst/>
                 <a:uLnTx/>
                 <a:uFillTx/>
-                <a:latin typeface="Arial"/>
+                <a:latin typeface="+mj-lt"/>
                 <a:ea typeface="+mn-ea"/>
                 <a:cs typeface="Arial"/>
               </a:rPr>
-              <a:t>この情報は機密情報です。事前の書面による同意を得ずに組織外に開示することを禁じます。</a:t>
+              <a:t>この資料は関係者限りの厳秘の資料であり、</a:t>
+            </a:r>
+            <a:r>
+              <a:rPr kumimoji="0" lang="en-US" altLang="ja-JP" sz="600" b="0" i="0" u="none" strike="noStrike" kern="0" cap="none" spc="0" normalizeH="0" baseline="0" noProof="0" dirty="0">
+                <a:ln>
+                  <a:noFill/>
+                </a:ln>
+                <a:solidFill>
+                  <a:schemeClr val="tx1"/>
+                </a:solidFill>
+                <a:effectLst/>
+                <a:uLnTx/>
+                <a:uFillTx/>
+                <a:latin typeface="+mj-lt"/>
+                <a:ea typeface="+mn-ea"/>
+                <a:cs typeface="Arial"/>
+              </a:rPr>
+              <a:t>AKKODiS</a:t>
+            </a:r>
+            <a:r>
+              <a:rPr kumimoji="0" lang="ja-JP" altLang="en-US" sz="600" b="0" i="0" u="none" strike="noStrike" kern="0" cap="none" spc="0" normalizeH="0" baseline="0" noProof="0" dirty="0">
+                <a:ln>
+                  <a:noFill/>
+                </a:ln>
+                <a:solidFill>
+                  <a:schemeClr val="tx1"/>
+                </a:solidFill>
+                <a:effectLst/>
+                <a:uLnTx/>
+                <a:uFillTx/>
+                <a:latin typeface="+mj-lt"/>
+                <a:ea typeface="+mn-ea"/>
+                <a:cs typeface="Arial"/>
+              </a:rPr>
+              <a:t>コンサルティング株式会社に無断での使用・開示を禁じます。</a:t>
             </a:r>
           </a:p>
         </p:txBody>
       </p:sp>
       <p:pic>
         <p:nvPicPr>
-          <p:cNvPr id="5" name="グラフィックス 4">
+          <p:cNvPr id="4" name="グラフィックス 3">
             <a:extLst>
               <a:ext uri="{FF2B5EF4-FFF2-40B4-BE49-F238E27FC236}">
-                <a16:creationId xmlns:a16="http://schemas.microsoft.com/office/drawing/2014/main" id="{2137C1D1-1B4F-3C37-CF97-5A6A86779F3C}"/>
+                <a16:creationId xmlns:a16="http://schemas.microsoft.com/office/drawing/2014/main" id="{5F06D864-AE8F-9389-99F3-8A4AC1172097}"/>
               </a:ext>
             </a:extLst>
           </p:cNvPr>
@@ -12947,82 +12793,10 @@
       </p:sp>
       <p:sp>
         <p:nvSpPr>
-          <p:cNvPr id="5" name="テキスト ボックス 4">
+          <p:cNvPr id="8" name="TXT_@Akkodis">
             <a:extLst>
               <a:ext uri="{FF2B5EF4-FFF2-40B4-BE49-F238E27FC236}">
-                <a16:creationId xmlns:a16="http://schemas.microsoft.com/office/drawing/2014/main" id="{0A503F38-4DA5-B595-C63E-1D31FA5019B2}"/>
-              </a:ext>
-            </a:extLst>
-          </p:cNvPr>
-          <p:cNvSpPr txBox="1"/>
-          <p:nvPr userDrawn="1">
-            <p:extLst>
-              <p:ext uri="{1162E1C5-73C7-4A58-AE30-91384D911F3F}">
-                <p184:classification xmlns:p184="http://schemas.microsoft.com/office/powerpoint/2018/4/main" val="hdr"/>
-              </p:ext>
-            </p:extLst>
-          </p:nvPr>
-        </p:nvSpPr>
-        <p:spPr>
-          <a:xfrm>
-            <a:off x="63500" y="63500"/>
-            <a:ext cx="663575" cy="153888"/>
-          </a:xfrm>
-          <a:prstGeom prst="rect">
-            <a:avLst/>
-          </a:prstGeom>
-        </p:spPr>
-        <p:txBody>
-          <a:bodyPr horzOverflow="overflow" lIns="0" tIns="0" rIns="0" bIns="0">
-            <a:spAutoFit/>
-          </a:bodyPr>
-          <a:lstStyle/>
-          <a:p>
-            <a:pPr marL="0" indent="0" algn="l">
-              <a:buNone/>
-            </a:pPr>
-            <a:r>
-              <a:rPr lang="en-US" sz="1000" dirty="0">
-                <a:solidFill>
-                  <a:srgbClr val="000000"/>
-                </a:solidFill>
-                <a:latin typeface="+mj-ea"/>
-                <a:ea typeface="+mj-ea"/>
-                <a:cs typeface="Calibri" panose="020F0502020204030204" pitchFamily="34" charset="0"/>
-              </a:rPr>
-              <a:t>【</a:t>
-            </a:r>
-            <a:r>
-              <a:rPr lang="en-US" sz="1000" dirty="0" err="1">
-                <a:solidFill>
-                  <a:srgbClr val="000000"/>
-                </a:solidFill>
-                <a:latin typeface="+mj-ea"/>
-                <a:ea typeface="+mj-ea"/>
-                <a:cs typeface="Calibri" panose="020F0502020204030204" pitchFamily="34" charset="0"/>
-              </a:rPr>
-              <a:t>社外秘</a:t>
-            </a:r>
-            <a:r>
-              <a:rPr lang="en-US" sz="1000" dirty="0">
-                <a:solidFill>
-                  <a:srgbClr val="000000"/>
-                </a:solidFill>
-                <a:latin typeface="+mj-ea"/>
-                <a:ea typeface="+mj-ea"/>
-                <a:cs typeface="Calibri" panose="020F0502020204030204" pitchFamily="34" charset="0"/>
-              </a:rPr>
-              <a:t>】</a:t>
-            </a:r>
-          </a:p>
-        </p:txBody>
-      </p:sp>
-      <p:sp>
-        <p:nvSpPr>
-          <p:cNvPr id="9" name="TXT_@Akkodis">
-            <a:extLst>
-              <a:ext uri="{FF2B5EF4-FFF2-40B4-BE49-F238E27FC236}">
-                <a16:creationId xmlns:a16="http://schemas.microsoft.com/office/drawing/2014/main" id="{D317B4DD-63E0-0D9A-9F2C-68C923D14F4E}"/>
+                <a16:creationId xmlns:a16="http://schemas.microsoft.com/office/drawing/2014/main" id="{CD5862E9-8DCD-7714-36ED-401C73D8F379}"/>
               </a:ext>
             </a:extLst>
           </p:cNvPr>
@@ -13031,7 +12805,7 @@
         </p:nvSpPr>
         <p:spPr>
           <a:xfrm>
-            <a:off x="4134716" y="6436014"/>
+            <a:off x="4134716" y="6420738"/>
             <a:ext cx="1961284" cy="421986"/>
           </a:xfrm>
           <a:prstGeom prst="rect">
@@ -13144,10 +12918,10 @@
       </p:sp>
       <p:sp>
         <p:nvSpPr>
-          <p:cNvPr id="11" name="TXT_@Akkodis">
+          <p:cNvPr id="9" name="TXT_@Akkodis">
             <a:extLst>
               <a:ext uri="{FF2B5EF4-FFF2-40B4-BE49-F238E27FC236}">
-                <a16:creationId xmlns:a16="http://schemas.microsoft.com/office/drawing/2014/main" id="{29AAFF51-FBE7-AF91-93FF-B9C79BF75C75}"/>
+                <a16:creationId xmlns:a16="http://schemas.microsoft.com/office/drawing/2014/main" id="{A23C843E-9FD5-2F69-BE17-CCF26556F436}"/>
               </a:ext>
             </a:extLst>
           </p:cNvPr>
@@ -13156,8 +12930,8 @@
         </p:nvSpPr>
         <p:spPr>
           <a:xfrm>
-            <a:off x="0" y="6436014"/>
-            <a:ext cx="4114800" cy="421986"/>
+            <a:off x="0" y="6420738"/>
+            <a:ext cx="4480560" cy="421986"/>
           </a:xfrm>
           <a:prstGeom prst="rect">
             <a:avLst/>
@@ -13200,7 +12974,7 @@
               <a:buNone/>
             </a:pPr>
             <a:r>
-              <a:rPr kumimoji="0" lang="ja-JP" altLang="en-US" sz="700" b="0" i="0" u="none" strike="noStrike" kern="0" cap="none" spc="0" normalizeH="0" baseline="0" noProof="0" dirty="0">
+              <a:rPr kumimoji="0" lang="ja-JP" altLang="en-US" sz="600" b="0" i="0" u="none" strike="noStrike" kern="0" cap="none" spc="0" normalizeH="0" baseline="0" noProof="0" dirty="0">
                 <a:ln>
                   <a:noFill/>
                 </a:ln>
@@ -13210,11 +12984,45 @@
                 <a:effectLst/>
                 <a:uLnTx/>
                 <a:uFillTx/>
-                <a:latin typeface="Arial"/>
+                <a:latin typeface="+mj-lt"/>
                 <a:ea typeface="+mn-ea"/>
                 <a:cs typeface="Arial"/>
               </a:rPr>
-              <a:t>この情報は機密情報です。事前の書面による同意を得ずに組織外に開示することを禁じます。</a:t>
+              <a:t>この資料は関係者限りの厳秘の資料であり、</a:t>
+            </a:r>
+            <a:r>
+              <a:rPr kumimoji="0" lang="en-US" altLang="ja-JP" sz="600" b="0" i="0" u="none" strike="noStrike" kern="0" cap="none" spc="0" normalizeH="0" baseline="0" noProof="0" dirty="0">
+                <a:ln>
+                  <a:noFill/>
+                </a:ln>
+                <a:solidFill>
+                  <a:schemeClr val="tx1"/>
+                </a:solidFill>
+                <a:effectLst/>
+                <a:uLnTx/>
+                <a:uFillTx/>
+                <a:latin typeface="+mj-lt"/>
+                <a:ea typeface="+mn-ea"/>
+                <a:cs typeface="Arial"/>
+              </a:rPr>
+              <a:t>AKKODiS</a:t>
+            </a:r>
+            <a:r>
+              <a:rPr kumimoji="0" lang="ja-JP" altLang="en-US" sz="600" b="0" i="0" u="none" strike="noStrike" kern="0" cap="none" spc="0" normalizeH="0" baseline="0" noProof="0" dirty="0">
+                <a:ln>
+                  <a:noFill/>
+                </a:ln>
+                <a:solidFill>
+                  <a:schemeClr val="tx1"/>
+                </a:solidFill>
+                <a:effectLst/>
+                <a:uLnTx/>
+                <a:uFillTx/>
+                <a:latin typeface="+mj-lt"/>
+                <a:ea typeface="+mn-ea"/>
+                <a:cs typeface="Arial"/>
+              </a:rPr>
+              <a:t>コンサルティング株式会社に無断での使用・開示を禁じます。</a:t>
             </a:r>
           </a:p>
         </p:txBody>
@@ -13265,41 +13073,6 @@
           <a:chExt cx="0" cy="0"/>
         </a:xfrm>
       </p:grpSpPr>
-      <p:pic>
-        <p:nvPicPr>
-          <p:cNvPr id="9" name="IMG_Back">
-            <a:extLst>
-              <a:ext uri="{FF2B5EF4-FFF2-40B4-BE49-F238E27FC236}">
-                <a16:creationId xmlns:a16="http://schemas.microsoft.com/office/drawing/2014/main" id="{9008214D-B784-B570-F58F-EF90B42BD2F8}"/>
-              </a:ext>
-            </a:extLst>
-          </p:cNvPr>
-          <p:cNvPicPr>
-            <a:picLocks noChangeAspect="1"/>
-          </p:cNvPicPr>
-          <p:nvPr userDrawn="1"/>
-        </p:nvPicPr>
-        <p:blipFill rotWithShape="1">
-          <a:blip r:embed="rId2">
-            <a:extLst>
-              <a:ext uri="{28A0092B-C50C-407E-A947-70E740481C1C}">
-                <a14:useLocalDpi xmlns:a14="http://schemas.microsoft.com/office/drawing/2010/main"/>
-              </a:ext>
-            </a:extLst>
-          </a:blip>
-          <a:srcRect b="17825"/>
-          <a:stretch/>
-        </p:blipFill>
-        <p:spPr>
-          <a:xfrm>
-            <a:off x="0" y="3930650"/>
-            <a:ext cx="12192000" cy="2927350"/>
-          </a:xfrm>
-          <a:prstGeom prst="rect">
-            <a:avLst/>
-          </a:prstGeom>
-        </p:spPr>
-      </p:pic>
       <p:cxnSp>
         <p:nvCxnSpPr>
           <p:cNvPr id="4" name="Line orange">
@@ -13543,67 +13316,18 @@
           </a:lstStyle>
           <a:p>
             <a:r>
-              <a:rPr lang="en-US" noProof="0"/>
+              <a:rPr lang="en-US" noProof="0" dirty="0"/>
               <a:t>Modify the Title</a:t>
-            </a:r>
-          </a:p>
-        </p:txBody>
-      </p:sp>
-      <p:sp>
-        <p:nvSpPr>
-          <p:cNvPr id="3" name="テキスト ボックス 2">
-            <a:extLst>
-              <a:ext uri="{FF2B5EF4-FFF2-40B4-BE49-F238E27FC236}">
-                <a16:creationId xmlns:a16="http://schemas.microsoft.com/office/drawing/2014/main" id="{83124558-86B5-EF59-1AA8-196F07800A2C}"/>
-              </a:ext>
-            </a:extLst>
-          </p:cNvPr>
-          <p:cNvSpPr txBox="1"/>
-          <p:nvPr userDrawn="1"/>
-        </p:nvSpPr>
-        <p:spPr>
-          <a:xfrm>
-            <a:off x="313426" y="355959"/>
-            <a:ext cx="878216" cy="338554"/>
-          </a:xfrm>
-          <a:prstGeom prst="rect">
-            <a:avLst/>
-          </a:prstGeom>
-          <a:solidFill>
-            <a:schemeClr val="tx1"/>
-          </a:solidFill>
-          <a:ln w="28575">
-            <a:noFill/>
-          </a:ln>
-        </p:spPr>
-        <p:txBody>
-          <a:bodyPr wrap="square" rtlCol="0">
-            <a:spAutoFit/>
-          </a:bodyPr>
-          <a:lstStyle/>
-          <a:p>
-            <a:pPr marL="0" indent="0" algn="ctr">
-              <a:buNone/>
-            </a:pPr>
-            <a:r>
-              <a:rPr kumimoji="1" lang="ja-JP" altLang="en-US" b="1" dirty="0">
-                <a:solidFill>
-                  <a:schemeClr val="tx2"/>
-                </a:solidFill>
-                <a:latin typeface="Meiryo UI" panose="020B0604030504040204" pitchFamily="50" charset="-128"/>
-                <a:ea typeface="Meiryo UI" panose="020B0604030504040204" pitchFamily="50" charset="-128"/>
-              </a:rPr>
-              <a:t>社外秘</a:t>
             </a:r>
           </a:p>
         </p:txBody>
       </p:sp>
       <p:pic>
         <p:nvPicPr>
-          <p:cNvPr id="5" name="グラフィックス 4">
+          <p:cNvPr id="3" name="グラフィックス 2">
             <a:extLst>
               <a:ext uri="{FF2B5EF4-FFF2-40B4-BE49-F238E27FC236}">
-                <a16:creationId xmlns:a16="http://schemas.microsoft.com/office/drawing/2014/main" id="{0B2E4D34-8631-3647-CD37-E89B9EA613C5}"/>
+                <a16:creationId xmlns:a16="http://schemas.microsoft.com/office/drawing/2014/main" id="{84AE907C-AD2A-348E-E5C0-3EF22AA84B6E}"/>
               </a:ext>
             </a:extLst>
           </p:cNvPr>
@@ -15888,82 +15612,10 @@
       </p:sp>
       <p:sp>
         <p:nvSpPr>
-          <p:cNvPr id="8" name="テキスト ボックス 7">
+          <p:cNvPr id="10" name="TXT_@Akkodis">
             <a:extLst>
               <a:ext uri="{FF2B5EF4-FFF2-40B4-BE49-F238E27FC236}">
-                <a16:creationId xmlns:a16="http://schemas.microsoft.com/office/drawing/2014/main" id="{C166B6E2-6286-2826-255D-A1DB646869CD}"/>
-              </a:ext>
-            </a:extLst>
-          </p:cNvPr>
-          <p:cNvSpPr txBox="1"/>
-          <p:nvPr userDrawn="1">
-            <p:extLst>
-              <p:ext uri="{1162E1C5-73C7-4A58-AE30-91384D911F3F}">
-                <p184:classification xmlns:p184="http://schemas.microsoft.com/office/powerpoint/2018/4/main" val="hdr"/>
-              </p:ext>
-            </p:extLst>
-          </p:nvPr>
-        </p:nvSpPr>
-        <p:spPr>
-          <a:xfrm>
-            <a:off x="63500" y="63500"/>
-            <a:ext cx="663575" cy="153888"/>
-          </a:xfrm>
-          <a:prstGeom prst="rect">
-            <a:avLst/>
-          </a:prstGeom>
-        </p:spPr>
-        <p:txBody>
-          <a:bodyPr horzOverflow="overflow" lIns="0" tIns="0" rIns="0" bIns="0">
-            <a:spAutoFit/>
-          </a:bodyPr>
-          <a:lstStyle/>
-          <a:p>
-            <a:pPr marL="0" indent="0" algn="l">
-              <a:buNone/>
-            </a:pPr>
-            <a:r>
-              <a:rPr lang="en-US" sz="1000" dirty="0">
-                <a:solidFill>
-                  <a:srgbClr val="000000"/>
-                </a:solidFill>
-                <a:latin typeface="+mj-ea"/>
-                <a:ea typeface="+mj-ea"/>
-                <a:cs typeface="Calibri" panose="020F0502020204030204" pitchFamily="34" charset="0"/>
-              </a:rPr>
-              <a:t>【</a:t>
-            </a:r>
-            <a:r>
-              <a:rPr lang="en-US" sz="1000" dirty="0" err="1">
-                <a:solidFill>
-                  <a:srgbClr val="000000"/>
-                </a:solidFill>
-                <a:latin typeface="+mj-ea"/>
-                <a:ea typeface="+mj-ea"/>
-                <a:cs typeface="Calibri" panose="020F0502020204030204" pitchFamily="34" charset="0"/>
-              </a:rPr>
-              <a:t>社外秘</a:t>
-            </a:r>
-            <a:r>
-              <a:rPr lang="en-US" sz="1000" dirty="0">
-                <a:solidFill>
-                  <a:srgbClr val="000000"/>
-                </a:solidFill>
-                <a:latin typeface="+mj-ea"/>
-                <a:ea typeface="+mj-ea"/>
-                <a:cs typeface="Calibri" panose="020F0502020204030204" pitchFamily="34" charset="0"/>
-              </a:rPr>
-              <a:t>】</a:t>
-            </a:r>
-          </a:p>
-        </p:txBody>
-      </p:sp>
-      <p:sp>
-        <p:nvSpPr>
-          <p:cNvPr id="11" name="TXT_@Akkodis">
-            <a:extLst>
-              <a:ext uri="{FF2B5EF4-FFF2-40B4-BE49-F238E27FC236}">
-                <a16:creationId xmlns:a16="http://schemas.microsoft.com/office/drawing/2014/main" id="{659CBA03-1D89-2773-3AA1-81EBD0725513}"/>
+                <a16:creationId xmlns:a16="http://schemas.microsoft.com/office/drawing/2014/main" id="{C1A24C46-EB66-BBAA-A571-C1FA7114B95F}"/>
               </a:ext>
             </a:extLst>
           </p:cNvPr>
@@ -15972,7 +15624,7 @@
         </p:nvSpPr>
         <p:spPr>
           <a:xfrm>
-            <a:off x="4134716" y="6436014"/>
+            <a:off x="4134716" y="6420738"/>
             <a:ext cx="1961284" cy="421986"/>
           </a:xfrm>
           <a:prstGeom prst="rect">
@@ -16085,10 +15737,10 @@
       </p:sp>
       <p:sp>
         <p:nvSpPr>
-          <p:cNvPr id="12" name="TXT_@Akkodis">
+          <p:cNvPr id="11" name="TXT_@Akkodis">
             <a:extLst>
               <a:ext uri="{FF2B5EF4-FFF2-40B4-BE49-F238E27FC236}">
-                <a16:creationId xmlns:a16="http://schemas.microsoft.com/office/drawing/2014/main" id="{A7FA0525-4083-8D20-1409-130EA56EA2D4}"/>
+                <a16:creationId xmlns:a16="http://schemas.microsoft.com/office/drawing/2014/main" id="{635E0E80-F9C5-D486-37DC-BEB45EACCDA0}"/>
               </a:ext>
             </a:extLst>
           </p:cNvPr>
@@ -16097,8 +15749,8 @@
         </p:nvSpPr>
         <p:spPr>
           <a:xfrm>
-            <a:off x="0" y="6436014"/>
-            <a:ext cx="4114800" cy="421986"/>
+            <a:off x="0" y="6420738"/>
+            <a:ext cx="4480560" cy="421986"/>
           </a:xfrm>
           <a:prstGeom prst="rect">
             <a:avLst/>
@@ -16141,7 +15793,7 @@
               <a:buNone/>
             </a:pPr>
             <a:r>
-              <a:rPr kumimoji="0" lang="ja-JP" altLang="en-US" sz="700" b="0" i="0" u="none" strike="noStrike" kern="0" cap="none" spc="0" normalizeH="0" baseline="0" noProof="0" dirty="0">
+              <a:rPr kumimoji="0" lang="ja-JP" altLang="en-US" sz="600" b="0" i="0" u="none" strike="noStrike" kern="0" cap="none" spc="0" normalizeH="0" baseline="0" noProof="0" dirty="0">
                 <a:ln>
                   <a:noFill/>
                 </a:ln>
@@ -16151,11 +15803,45 @@
                 <a:effectLst/>
                 <a:uLnTx/>
                 <a:uFillTx/>
-                <a:latin typeface="Arial"/>
+                <a:latin typeface="+mj-lt"/>
                 <a:ea typeface="+mn-ea"/>
                 <a:cs typeface="Arial"/>
               </a:rPr>
-              <a:t>この情報は機密情報です。事前の書面による同意を得ずに組織外に開示することを禁じます。</a:t>
+              <a:t>この資料は関係者限りの厳秘の資料であり、</a:t>
+            </a:r>
+            <a:r>
+              <a:rPr kumimoji="0" lang="en-US" altLang="ja-JP" sz="600" b="0" i="0" u="none" strike="noStrike" kern="0" cap="none" spc="0" normalizeH="0" baseline="0" noProof="0" dirty="0">
+                <a:ln>
+                  <a:noFill/>
+                </a:ln>
+                <a:solidFill>
+                  <a:schemeClr val="tx1"/>
+                </a:solidFill>
+                <a:effectLst/>
+                <a:uLnTx/>
+                <a:uFillTx/>
+                <a:latin typeface="+mj-lt"/>
+                <a:ea typeface="+mn-ea"/>
+                <a:cs typeface="Arial"/>
+              </a:rPr>
+              <a:t>AKKODiS</a:t>
+            </a:r>
+            <a:r>
+              <a:rPr kumimoji="0" lang="ja-JP" altLang="en-US" sz="600" b="0" i="0" u="none" strike="noStrike" kern="0" cap="none" spc="0" normalizeH="0" baseline="0" noProof="0" dirty="0">
+                <a:ln>
+                  <a:noFill/>
+                </a:ln>
+                <a:solidFill>
+                  <a:schemeClr val="tx1"/>
+                </a:solidFill>
+                <a:effectLst/>
+                <a:uLnTx/>
+                <a:uFillTx/>
+                <a:latin typeface="+mj-lt"/>
+                <a:ea typeface="+mn-ea"/>
+                <a:cs typeface="Arial"/>
+              </a:rPr>
+              <a:t>コンサルティング株式会社に無断での使用・開示を禁じます。</a:t>
             </a:r>
           </a:p>
         </p:txBody>
@@ -18330,82 +18016,10 @@
       </p:sp>
       <p:sp>
         <p:nvSpPr>
-          <p:cNvPr id="5" name="テキスト ボックス 4">
+          <p:cNvPr id="8" name="TXT_@Akkodis">
             <a:extLst>
               <a:ext uri="{FF2B5EF4-FFF2-40B4-BE49-F238E27FC236}">
-                <a16:creationId xmlns:a16="http://schemas.microsoft.com/office/drawing/2014/main" id="{A7DC667A-11D6-5DD2-F0C4-E8B1DD971FE4}"/>
-              </a:ext>
-            </a:extLst>
-          </p:cNvPr>
-          <p:cNvSpPr txBox="1"/>
-          <p:nvPr userDrawn="1">
-            <p:extLst>
-              <p:ext uri="{1162E1C5-73C7-4A58-AE30-91384D911F3F}">
-                <p184:classification xmlns:p184="http://schemas.microsoft.com/office/powerpoint/2018/4/main" val="hdr"/>
-              </p:ext>
-            </p:extLst>
-          </p:nvPr>
-        </p:nvSpPr>
-        <p:spPr>
-          <a:xfrm>
-            <a:off x="63500" y="63500"/>
-            <a:ext cx="663575" cy="153888"/>
-          </a:xfrm>
-          <a:prstGeom prst="rect">
-            <a:avLst/>
-          </a:prstGeom>
-        </p:spPr>
-        <p:txBody>
-          <a:bodyPr horzOverflow="overflow" lIns="0" tIns="0" rIns="0" bIns="0">
-            <a:spAutoFit/>
-          </a:bodyPr>
-          <a:lstStyle/>
-          <a:p>
-            <a:pPr marL="0" indent="0" algn="l">
-              <a:buNone/>
-            </a:pPr>
-            <a:r>
-              <a:rPr lang="en-US" sz="1000" dirty="0">
-                <a:solidFill>
-                  <a:srgbClr val="000000"/>
-                </a:solidFill>
-                <a:latin typeface="+mj-ea"/>
-                <a:ea typeface="+mj-ea"/>
-                <a:cs typeface="Calibri" panose="020F0502020204030204" pitchFamily="34" charset="0"/>
-              </a:rPr>
-              <a:t>【</a:t>
-            </a:r>
-            <a:r>
-              <a:rPr lang="en-US" sz="1000" dirty="0" err="1">
-                <a:solidFill>
-                  <a:srgbClr val="000000"/>
-                </a:solidFill>
-                <a:latin typeface="+mj-ea"/>
-                <a:ea typeface="+mj-ea"/>
-                <a:cs typeface="Calibri" panose="020F0502020204030204" pitchFamily="34" charset="0"/>
-              </a:rPr>
-              <a:t>社外秘</a:t>
-            </a:r>
-            <a:r>
-              <a:rPr lang="en-US" sz="1000" dirty="0">
-                <a:solidFill>
-                  <a:srgbClr val="000000"/>
-                </a:solidFill>
-                <a:latin typeface="+mj-ea"/>
-                <a:ea typeface="+mj-ea"/>
-                <a:cs typeface="Calibri" panose="020F0502020204030204" pitchFamily="34" charset="0"/>
-              </a:rPr>
-              <a:t>】</a:t>
-            </a:r>
-          </a:p>
-        </p:txBody>
-      </p:sp>
-      <p:sp>
-        <p:nvSpPr>
-          <p:cNvPr id="10" name="TXT_@Akkodis">
-            <a:extLst>
-              <a:ext uri="{FF2B5EF4-FFF2-40B4-BE49-F238E27FC236}">
-                <a16:creationId xmlns:a16="http://schemas.microsoft.com/office/drawing/2014/main" id="{77082E10-E49C-8DEF-9746-42741E5EEEE6}"/>
+                <a16:creationId xmlns:a16="http://schemas.microsoft.com/office/drawing/2014/main" id="{E070AEAC-44A3-5F3F-1811-E95AE39682D1}"/>
               </a:ext>
             </a:extLst>
           </p:cNvPr>
@@ -18414,7 +18028,7 @@
         </p:nvSpPr>
         <p:spPr>
           <a:xfrm>
-            <a:off x="4134716" y="6436014"/>
+            <a:off x="4134716" y="6420738"/>
             <a:ext cx="1961284" cy="421986"/>
           </a:xfrm>
           <a:prstGeom prst="rect">
@@ -18527,10 +18141,10 @@
       </p:sp>
       <p:sp>
         <p:nvSpPr>
-          <p:cNvPr id="11" name="TXT_@Akkodis">
+          <p:cNvPr id="10" name="TXT_@Akkodis">
             <a:extLst>
               <a:ext uri="{FF2B5EF4-FFF2-40B4-BE49-F238E27FC236}">
-                <a16:creationId xmlns:a16="http://schemas.microsoft.com/office/drawing/2014/main" id="{1A3DBFFB-E315-F1C8-706F-2DDD35248F30}"/>
+                <a16:creationId xmlns:a16="http://schemas.microsoft.com/office/drawing/2014/main" id="{89E212C1-ACE8-E722-C23A-E2E37F828CF0}"/>
               </a:ext>
             </a:extLst>
           </p:cNvPr>
@@ -18539,8 +18153,8 @@
         </p:nvSpPr>
         <p:spPr>
           <a:xfrm>
-            <a:off x="0" y="6436014"/>
-            <a:ext cx="4114800" cy="421986"/>
+            <a:off x="0" y="6420738"/>
+            <a:ext cx="4480560" cy="421986"/>
           </a:xfrm>
           <a:prstGeom prst="rect">
             <a:avLst/>
@@ -18583,7 +18197,7 @@
               <a:buNone/>
             </a:pPr>
             <a:r>
-              <a:rPr kumimoji="0" lang="ja-JP" altLang="en-US" sz="700" b="0" i="0" u="none" strike="noStrike" kern="0" cap="none" spc="0" normalizeH="0" baseline="0" noProof="0" dirty="0">
+              <a:rPr kumimoji="0" lang="ja-JP" altLang="en-US" sz="600" b="0" i="0" u="none" strike="noStrike" kern="0" cap="none" spc="0" normalizeH="0" baseline="0" noProof="0" dirty="0">
                 <a:ln>
                   <a:noFill/>
                 </a:ln>
@@ -18593,11 +18207,45 @@
                 <a:effectLst/>
                 <a:uLnTx/>
                 <a:uFillTx/>
-                <a:latin typeface="Arial"/>
+                <a:latin typeface="+mj-lt"/>
                 <a:ea typeface="+mn-ea"/>
                 <a:cs typeface="Arial"/>
               </a:rPr>
-              <a:t>この情報は機密情報です。事前の書面による同意を得ずに組織外に開示することを禁じます。</a:t>
+              <a:t>この資料は関係者限りの厳秘の資料であり、</a:t>
+            </a:r>
+            <a:r>
+              <a:rPr kumimoji="0" lang="en-US" altLang="ja-JP" sz="600" b="0" i="0" u="none" strike="noStrike" kern="0" cap="none" spc="0" normalizeH="0" baseline="0" noProof="0" dirty="0">
+                <a:ln>
+                  <a:noFill/>
+                </a:ln>
+                <a:solidFill>
+                  <a:schemeClr val="tx1"/>
+                </a:solidFill>
+                <a:effectLst/>
+                <a:uLnTx/>
+                <a:uFillTx/>
+                <a:latin typeface="+mj-lt"/>
+                <a:ea typeface="+mn-ea"/>
+                <a:cs typeface="Arial"/>
+              </a:rPr>
+              <a:t>AKKODiS</a:t>
+            </a:r>
+            <a:r>
+              <a:rPr kumimoji="0" lang="ja-JP" altLang="en-US" sz="600" b="0" i="0" u="none" strike="noStrike" kern="0" cap="none" spc="0" normalizeH="0" baseline="0" noProof="0" dirty="0">
+                <a:ln>
+                  <a:noFill/>
+                </a:ln>
+                <a:solidFill>
+                  <a:schemeClr val="tx1"/>
+                </a:solidFill>
+                <a:effectLst/>
+                <a:uLnTx/>
+                <a:uFillTx/>
+                <a:latin typeface="+mj-lt"/>
+                <a:ea typeface="+mn-ea"/>
+                <a:cs typeface="Arial"/>
+              </a:rPr>
+              <a:t>コンサルティング株式会社に無断での使用・開示を禁じます。</a:t>
             </a:r>
           </a:p>
         </p:txBody>
@@ -19459,82 +19107,10 @@
       </p:sp>
       <p:sp>
         <p:nvSpPr>
-          <p:cNvPr id="4" name="テキスト ボックス 3">
+          <p:cNvPr id="5" name="TXT_@Akkodis">
             <a:extLst>
               <a:ext uri="{FF2B5EF4-FFF2-40B4-BE49-F238E27FC236}">
-                <a16:creationId xmlns:a16="http://schemas.microsoft.com/office/drawing/2014/main" id="{191E99E3-1265-3098-8ACD-C22B88DC8135}"/>
-              </a:ext>
-            </a:extLst>
-          </p:cNvPr>
-          <p:cNvSpPr txBox="1"/>
-          <p:nvPr userDrawn="1">
-            <p:extLst>
-              <p:ext uri="{1162E1C5-73C7-4A58-AE30-91384D911F3F}">
-                <p184:classification xmlns:p184="http://schemas.microsoft.com/office/powerpoint/2018/4/main" val="hdr"/>
-              </p:ext>
-            </p:extLst>
-          </p:nvPr>
-        </p:nvSpPr>
-        <p:spPr>
-          <a:xfrm>
-            <a:off x="63500" y="63500"/>
-            <a:ext cx="663575" cy="153888"/>
-          </a:xfrm>
-          <a:prstGeom prst="rect">
-            <a:avLst/>
-          </a:prstGeom>
-        </p:spPr>
-        <p:txBody>
-          <a:bodyPr horzOverflow="overflow" lIns="0" tIns="0" rIns="0" bIns="0">
-            <a:spAutoFit/>
-          </a:bodyPr>
-          <a:lstStyle/>
-          <a:p>
-            <a:pPr marL="0" indent="0" algn="l">
-              <a:buNone/>
-            </a:pPr>
-            <a:r>
-              <a:rPr lang="en-US" sz="1000" dirty="0">
-                <a:solidFill>
-                  <a:srgbClr val="000000"/>
-                </a:solidFill>
-                <a:latin typeface="+mj-ea"/>
-                <a:ea typeface="+mj-ea"/>
-                <a:cs typeface="Calibri" panose="020F0502020204030204" pitchFamily="34" charset="0"/>
-              </a:rPr>
-              <a:t>【</a:t>
-            </a:r>
-            <a:r>
-              <a:rPr lang="en-US" sz="1000" dirty="0" err="1">
-                <a:solidFill>
-                  <a:srgbClr val="000000"/>
-                </a:solidFill>
-                <a:latin typeface="+mj-ea"/>
-                <a:ea typeface="+mj-ea"/>
-                <a:cs typeface="Calibri" panose="020F0502020204030204" pitchFamily="34" charset="0"/>
-              </a:rPr>
-              <a:t>社外秘</a:t>
-            </a:r>
-            <a:r>
-              <a:rPr lang="en-US" sz="1000" dirty="0">
-                <a:solidFill>
-                  <a:srgbClr val="000000"/>
-                </a:solidFill>
-                <a:latin typeface="+mj-ea"/>
-                <a:ea typeface="+mj-ea"/>
-                <a:cs typeface="Calibri" panose="020F0502020204030204" pitchFamily="34" charset="0"/>
-              </a:rPr>
-              <a:t>】</a:t>
-            </a:r>
-          </a:p>
-        </p:txBody>
-      </p:sp>
-      <p:sp>
-        <p:nvSpPr>
-          <p:cNvPr id="6" name="TXT_@Akkodis">
-            <a:extLst>
-              <a:ext uri="{FF2B5EF4-FFF2-40B4-BE49-F238E27FC236}">
-                <a16:creationId xmlns:a16="http://schemas.microsoft.com/office/drawing/2014/main" id="{7809337D-0C7F-4999-BB5F-5CA4D05A3AEB}"/>
+                <a16:creationId xmlns:a16="http://schemas.microsoft.com/office/drawing/2014/main" id="{593E00B4-BFE5-4B5A-9419-9945EC32B716}"/>
               </a:ext>
             </a:extLst>
           </p:cNvPr>
@@ -19543,7 +19119,7 @@
         </p:nvSpPr>
         <p:spPr>
           <a:xfrm>
-            <a:off x="5115358" y="6436014"/>
+            <a:off x="5115358" y="6420738"/>
             <a:ext cx="1961284" cy="421986"/>
           </a:xfrm>
           <a:prstGeom prst="rect">
@@ -19656,10 +19232,10 @@
       </p:sp>
       <p:sp>
         <p:nvSpPr>
-          <p:cNvPr id="7" name="TXT_@Akkodis">
+          <p:cNvPr id="6" name="TXT_@Akkodis">
             <a:extLst>
               <a:ext uri="{FF2B5EF4-FFF2-40B4-BE49-F238E27FC236}">
-                <a16:creationId xmlns:a16="http://schemas.microsoft.com/office/drawing/2014/main" id="{FAAF412B-CB7C-3A74-E285-C536576424C6}"/>
+                <a16:creationId xmlns:a16="http://schemas.microsoft.com/office/drawing/2014/main" id="{06E0DDAC-293D-84FB-9B1C-B21F567D9341}"/>
               </a:ext>
             </a:extLst>
           </p:cNvPr>
@@ -19668,8 +19244,8 @@
         </p:nvSpPr>
         <p:spPr>
           <a:xfrm>
-            <a:off x="0" y="6436014"/>
-            <a:ext cx="4114800" cy="421986"/>
+            <a:off x="0" y="6420738"/>
+            <a:ext cx="4480560" cy="421986"/>
           </a:xfrm>
           <a:prstGeom prst="rect">
             <a:avLst/>
@@ -19712,7 +19288,7 @@
               <a:buNone/>
             </a:pPr>
             <a:r>
-              <a:rPr kumimoji="0" lang="ja-JP" altLang="en-US" sz="700" b="0" i="0" u="none" strike="noStrike" kern="0" cap="none" spc="0" normalizeH="0" baseline="0" noProof="0" dirty="0">
+              <a:rPr kumimoji="0" lang="ja-JP" altLang="en-US" sz="600" b="0" i="0" u="none" strike="noStrike" kern="0" cap="none" spc="0" normalizeH="0" baseline="0" noProof="0" dirty="0">
                 <a:ln>
                   <a:noFill/>
                 </a:ln>
@@ -19722,11 +19298,45 @@
                 <a:effectLst/>
                 <a:uLnTx/>
                 <a:uFillTx/>
-                <a:latin typeface="Arial"/>
+                <a:latin typeface="+mj-lt"/>
                 <a:ea typeface="+mn-ea"/>
                 <a:cs typeface="Arial"/>
               </a:rPr>
-              <a:t>この情報は機密情報です。事前の書面による同意を得ずに組織外に開示することを禁じます。</a:t>
+              <a:t>この資料は関係者限りの厳秘の資料であり、</a:t>
+            </a:r>
+            <a:r>
+              <a:rPr kumimoji="0" lang="en-US" altLang="ja-JP" sz="600" b="0" i="0" u="none" strike="noStrike" kern="0" cap="none" spc="0" normalizeH="0" baseline="0" noProof="0" dirty="0">
+                <a:ln>
+                  <a:noFill/>
+                </a:ln>
+                <a:solidFill>
+                  <a:schemeClr val="tx1"/>
+                </a:solidFill>
+                <a:effectLst/>
+                <a:uLnTx/>
+                <a:uFillTx/>
+                <a:latin typeface="+mj-lt"/>
+                <a:ea typeface="+mn-ea"/>
+                <a:cs typeface="Arial"/>
+              </a:rPr>
+              <a:t>AKKODiS</a:t>
+            </a:r>
+            <a:r>
+              <a:rPr kumimoji="0" lang="ja-JP" altLang="en-US" sz="600" b="0" i="0" u="none" strike="noStrike" kern="0" cap="none" spc="0" normalizeH="0" baseline="0" noProof="0" dirty="0">
+                <a:ln>
+                  <a:noFill/>
+                </a:ln>
+                <a:solidFill>
+                  <a:schemeClr val="tx1"/>
+                </a:solidFill>
+                <a:effectLst/>
+                <a:uLnTx/>
+                <a:uFillTx/>
+                <a:latin typeface="+mj-lt"/>
+                <a:ea typeface="+mn-ea"/>
+                <a:cs typeface="Arial"/>
+              </a:rPr>
+              <a:t>コンサルティング株式会社に無断での使用・開示を禁じます。</a:t>
             </a:r>
           </a:p>
         </p:txBody>
@@ -21004,82 +20614,10 @@
       </p:sp>
       <p:sp>
         <p:nvSpPr>
-          <p:cNvPr id="7" name="テキスト ボックス 6">
+          <p:cNvPr id="8" name="TXT_@Akkodis">
             <a:extLst>
               <a:ext uri="{FF2B5EF4-FFF2-40B4-BE49-F238E27FC236}">
-                <a16:creationId xmlns:a16="http://schemas.microsoft.com/office/drawing/2014/main" id="{8CCA30AC-A279-BEBF-292C-AD32A47BB28A}"/>
-              </a:ext>
-            </a:extLst>
-          </p:cNvPr>
-          <p:cNvSpPr txBox="1"/>
-          <p:nvPr userDrawn="1">
-            <p:extLst>
-              <p:ext uri="{1162E1C5-73C7-4A58-AE30-91384D911F3F}">
-                <p184:classification xmlns:p184="http://schemas.microsoft.com/office/powerpoint/2018/4/main" val="hdr"/>
-              </p:ext>
-            </p:extLst>
-          </p:nvPr>
-        </p:nvSpPr>
-        <p:spPr>
-          <a:xfrm>
-            <a:off x="63500" y="63500"/>
-            <a:ext cx="663575" cy="153888"/>
-          </a:xfrm>
-          <a:prstGeom prst="rect">
-            <a:avLst/>
-          </a:prstGeom>
-        </p:spPr>
-        <p:txBody>
-          <a:bodyPr horzOverflow="overflow" lIns="0" tIns="0" rIns="0" bIns="0">
-            <a:spAutoFit/>
-          </a:bodyPr>
-          <a:lstStyle/>
-          <a:p>
-            <a:pPr marL="0" indent="0" algn="l">
-              <a:buNone/>
-            </a:pPr>
-            <a:r>
-              <a:rPr lang="en-US" sz="1000" dirty="0">
-                <a:solidFill>
-                  <a:srgbClr val="000000"/>
-                </a:solidFill>
-                <a:latin typeface="+mj-ea"/>
-                <a:ea typeface="+mj-ea"/>
-                <a:cs typeface="Calibri" panose="020F0502020204030204" pitchFamily="34" charset="0"/>
-              </a:rPr>
-              <a:t>【</a:t>
-            </a:r>
-            <a:r>
-              <a:rPr lang="en-US" sz="1000" dirty="0" err="1">
-                <a:solidFill>
-                  <a:srgbClr val="000000"/>
-                </a:solidFill>
-                <a:latin typeface="+mj-ea"/>
-                <a:ea typeface="+mj-ea"/>
-                <a:cs typeface="Calibri" panose="020F0502020204030204" pitchFamily="34" charset="0"/>
-              </a:rPr>
-              <a:t>社外秘</a:t>
-            </a:r>
-            <a:r>
-              <a:rPr lang="en-US" sz="1000" dirty="0">
-                <a:solidFill>
-                  <a:srgbClr val="000000"/>
-                </a:solidFill>
-                <a:latin typeface="+mj-ea"/>
-                <a:ea typeface="+mj-ea"/>
-                <a:cs typeface="Calibri" panose="020F0502020204030204" pitchFamily="34" charset="0"/>
-              </a:rPr>
-              <a:t>】</a:t>
-            </a:r>
-          </a:p>
-        </p:txBody>
-      </p:sp>
-      <p:sp>
-        <p:nvSpPr>
-          <p:cNvPr id="12" name="TXT_@Akkodis">
-            <a:extLst>
-              <a:ext uri="{FF2B5EF4-FFF2-40B4-BE49-F238E27FC236}">
-                <a16:creationId xmlns:a16="http://schemas.microsoft.com/office/drawing/2014/main" id="{F1F4F52C-D548-A0B1-0E1D-BA7278065064}"/>
+                <a16:creationId xmlns:a16="http://schemas.microsoft.com/office/drawing/2014/main" id="{BBF5E555-92F9-FEDE-381E-678DBE907FDB}"/>
               </a:ext>
             </a:extLst>
           </p:cNvPr>
@@ -21088,7 +20626,7 @@
         </p:nvSpPr>
         <p:spPr>
           <a:xfrm>
-            <a:off x="5115358" y="6436014"/>
+            <a:off x="5115358" y="6420738"/>
             <a:ext cx="1961284" cy="421986"/>
           </a:xfrm>
           <a:prstGeom prst="rect">
@@ -21201,10 +20739,10 @@
       </p:sp>
       <p:sp>
         <p:nvSpPr>
-          <p:cNvPr id="13" name="TXT_@Akkodis">
+          <p:cNvPr id="12" name="TXT_@Akkodis">
             <a:extLst>
               <a:ext uri="{FF2B5EF4-FFF2-40B4-BE49-F238E27FC236}">
-                <a16:creationId xmlns:a16="http://schemas.microsoft.com/office/drawing/2014/main" id="{D0260245-AF43-FBA9-CD92-4FE543211B36}"/>
+                <a16:creationId xmlns:a16="http://schemas.microsoft.com/office/drawing/2014/main" id="{983A885B-4792-3B58-79CD-AE1A539BFAB8}"/>
               </a:ext>
             </a:extLst>
           </p:cNvPr>
@@ -21213,8 +20751,8 @@
         </p:nvSpPr>
         <p:spPr>
           <a:xfrm>
-            <a:off x="0" y="6436014"/>
-            <a:ext cx="4114800" cy="421986"/>
+            <a:off x="0" y="6420738"/>
+            <a:ext cx="4480560" cy="421986"/>
           </a:xfrm>
           <a:prstGeom prst="rect">
             <a:avLst/>
@@ -21257,7 +20795,7 @@
               <a:buNone/>
             </a:pPr>
             <a:r>
-              <a:rPr kumimoji="0" lang="ja-JP" altLang="en-US" sz="700" b="0" i="0" u="none" strike="noStrike" kern="0" cap="none" spc="0" normalizeH="0" baseline="0" noProof="0" dirty="0">
+              <a:rPr kumimoji="0" lang="ja-JP" altLang="en-US" sz="600" b="0" i="0" u="none" strike="noStrike" kern="0" cap="none" spc="0" normalizeH="0" baseline="0" noProof="0" dirty="0">
                 <a:ln>
                   <a:noFill/>
                 </a:ln>
@@ -21267,11 +20805,45 @@
                 <a:effectLst/>
                 <a:uLnTx/>
                 <a:uFillTx/>
-                <a:latin typeface="Arial"/>
+                <a:latin typeface="+mj-lt"/>
                 <a:ea typeface="+mn-ea"/>
                 <a:cs typeface="Arial"/>
               </a:rPr>
-              <a:t>この情報は機密情報です。事前の書面による同意を得ずに組織外に開示することを禁じます。</a:t>
+              <a:t>この資料は関係者限りの厳秘の資料であり、</a:t>
+            </a:r>
+            <a:r>
+              <a:rPr kumimoji="0" lang="en-US" altLang="ja-JP" sz="600" b="0" i="0" u="none" strike="noStrike" kern="0" cap="none" spc="0" normalizeH="0" baseline="0" noProof="0" dirty="0">
+                <a:ln>
+                  <a:noFill/>
+                </a:ln>
+                <a:solidFill>
+                  <a:schemeClr val="tx1"/>
+                </a:solidFill>
+                <a:effectLst/>
+                <a:uLnTx/>
+                <a:uFillTx/>
+                <a:latin typeface="+mj-lt"/>
+                <a:ea typeface="+mn-ea"/>
+                <a:cs typeface="Arial"/>
+              </a:rPr>
+              <a:t>AKKODiS</a:t>
+            </a:r>
+            <a:r>
+              <a:rPr kumimoji="0" lang="ja-JP" altLang="en-US" sz="600" b="0" i="0" u="none" strike="noStrike" kern="0" cap="none" spc="0" normalizeH="0" baseline="0" noProof="0" dirty="0">
+                <a:ln>
+                  <a:noFill/>
+                </a:ln>
+                <a:solidFill>
+                  <a:schemeClr val="tx1"/>
+                </a:solidFill>
+                <a:effectLst/>
+                <a:uLnTx/>
+                <a:uFillTx/>
+                <a:latin typeface="+mj-lt"/>
+                <a:ea typeface="+mn-ea"/>
+                <a:cs typeface="Arial"/>
+              </a:rPr>
+              <a:t>コンサルティング株式会社に無断での使用・開示を禁じます。</a:t>
             </a:r>
           </a:p>
         </p:txBody>
@@ -21281,7 +20853,7 @@
           <p:cNvPr id="6" name="グラフィックス 5">
             <a:extLst>
               <a:ext uri="{FF2B5EF4-FFF2-40B4-BE49-F238E27FC236}">
-                <a16:creationId xmlns:a16="http://schemas.microsoft.com/office/drawing/2014/main" id="{B9DDA43F-F922-6118-98EA-06090A1F3487}"/>
+                <a16:creationId xmlns:a16="http://schemas.microsoft.com/office/drawing/2014/main" id="{B51767FD-C892-D7FE-F105-085AA4A70E3B}"/>
               </a:ext>
             </a:extLst>
           </p:cNvPr>
@@ -21845,12 +21417,12 @@
               <a:defRPr/>
             </a:pPr>
             <a:r>
-              <a:rPr lang="en-US" noProof="0" dirty="0"/>
+              <a:rPr lang="en-US" noProof="0"/>
               <a:t>Click to add Text</a:t>
             </a:r>
           </a:p>
           <a:p>
-            <a:endParaRPr lang="en-US" noProof="0" dirty="0"/>
+            <a:endParaRPr lang="en-US" noProof="0"/>
           </a:p>
         </p:txBody>
       </p:sp>
@@ -21905,7 +21477,7 @@
           </a:lstStyle>
           <a:p>
             <a:r>
-              <a:rPr lang="en-US" noProof="0" dirty="0"/>
+              <a:rPr lang="en-US" noProof="0"/>
               <a:t>Click to add Text</a:t>
             </a:r>
           </a:p>
@@ -22730,82 +22302,10 @@
       </p:sp>
       <p:sp>
         <p:nvSpPr>
-          <p:cNvPr id="5" name="テキスト ボックス 4">
+          <p:cNvPr id="7" name="TXT_@Akkodis">
             <a:extLst>
               <a:ext uri="{FF2B5EF4-FFF2-40B4-BE49-F238E27FC236}">
-                <a16:creationId xmlns:a16="http://schemas.microsoft.com/office/drawing/2014/main" id="{3DD3EC41-681C-7F32-4944-AD2E8FD2C23C}"/>
-              </a:ext>
-            </a:extLst>
-          </p:cNvPr>
-          <p:cNvSpPr txBox="1"/>
-          <p:nvPr userDrawn="1">
-            <p:extLst>
-              <p:ext uri="{1162E1C5-73C7-4A58-AE30-91384D911F3F}">
-                <p184:classification xmlns:p184="http://schemas.microsoft.com/office/powerpoint/2018/4/main" val="hdr"/>
-              </p:ext>
-            </p:extLst>
-          </p:nvPr>
-        </p:nvSpPr>
-        <p:spPr>
-          <a:xfrm>
-            <a:off x="63500" y="63500"/>
-            <a:ext cx="663575" cy="153888"/>
-          </a:xfrm>
-          <a:prstGeom prst="rect">
-            <a:avLst/>
-          </a:prstGeom>
-        </p:spPr>
-        <p:txBody>
-          <a:bodyPr horzOverflow="overflow" lIns="0" tIns="0" rIns="0" bIns="0">
-            <a:spAutoFit/>
-          </a:bodyPr>
-          <a:lstStyle/>
-          <a:p>
-            <a:pPr marL="0" indent="0" algn="l">
-              <a:buNone/>
-            </a:pPr>
-            <a:r>
-              <a:rPr lang="en-US" sz="1000" dirty="0">
-                <a:solidFill>
-                  <a:srgbClr val="000000"/>
-                </a:solidFill>
-                <a:latin typeface="+mj-ea"/>
-                <a:ea typeface="+mj-ea"/>
-                <a:cs typeface="Calibri" panose="020F0502020204030204" pitchFamily="34" charset="0"/>
-              </a:rPr>
-              <a:t>【</a:t>
-            </a:r>
-            <a:r>
-              <a:rPr lang="en-US" sz="1000" dirty="0" err="1">
-                <a:solidFill>
-                  <a:srgbClr val="000000"/>
-                </a:solidFill>
-                <a:latin typeface="+mj-ea"/>
-                <a:ea typeface="+mj-ea"/>
-                <a:cs typeface="Calibri" panose="020F0502020204030204" pitchFamily="34" charset="0"/>
-              </a:rPr>
-              <a:t>社外秘</a:t>
-            </a:r>
-            <a:r>
-              <a:rPr lang="en-US" sz="1000" dirty="0">
-                <a:solidFill>
-                  <a:srgbClr val="000000"/>
-                </a:solidFill>
-                <a:latin typeface="+mj-ea"/>
-                <a:ea typeface="+mj-ea"/>
-                <a:cs typeface="Calibri" panose="020F0502020204030204" pitchFamily="34" charset="0"/>
-              </a:rPr>
-              <a:t>】</a:t>
-            </a:r>
-          </a:p>
-        </p:txBody>
-      </p:sp>
-      <p:sp>
-        <p:nvSpPr>
-          <p:cNvPr id="8" name="TXT_@Akkodis">
-            <a:extLst>
-              <a:ext uri="{FF2B5EF4-FFF2-40B4-BE49-F238E27FC236}">
-                <a16:creationId xmlns:a16="http://schemas.microsoft.com/office/drawing/2014/main" id="{F91CCCCA-A631-1B00-1FDC-EEADF6B03D34}"/>
+                <a16:creationId xmlns:a16="http://schemas.microsoft.com/office/drawing/2014/main" id="{5E9352FC-9A53-0FA1-4189-C9CB6AC95863}"/>
               </a:ext>
             </a:extLst>
           </p:cNvPr>
@@ -22814,7 +22314,7 @@
         </p:nvSpPr>
         <p:spPr>
           <a:xfrm>
-            <a:off x="5115358" y="6436014"/>
+            <a:off x="5115358" y="6420738"/>
             <a:ext cx="1961284" cy="421986"/>
           </a:xfrm>
           <a:prstGeom prst="rect">
@@ -22927,10 +22427,10 @@
       </p:sp>
       <p:sp>
         <p:nvSpPr>
-          <p:cNvPr id="9" name="TXT_@Akkodis">
+          <p:cNvPr id="8" name="TXT_@Akkodis">
             <a:extLst>
               <a:ext uri="{FF2B5EF4-FFF2-40B4-BE49-F238E27FC236}">
-                <a16:creationId xmlns:a16="http://schemas.microsoft.com/office/drawing/2014/main" id="{F3178563-1783-E03A-52F6-1CD186D8031E}"/>
+                <a16:creationId xmlns:a16="http://schemas.microsoft.com/office/drawing/2014/main" id="{45882B97-4BDF-CF12-5AB0-535645CFC289}"/>
               </a:ext>
             </a:extLst>
           </p:cNvPr>
@@ -22939,8 +22439,8 @@
         </p:nvSpPr>
         <p:spPr>
           <a:xfrm>
-            <a:off x="0" y="6436014"/>
-            <a:ext cx="4114800" cy="421986"/>
+            <a:off x="0" y="6420738"/>
+            <a:ext cx="4480560" cy="421986"/>
           </a:xfrm>
           <a:prstGeom prst="rect">
             <a:avLst/>
@@ -22983,7 +22483,7 @@
               <a:buNone/>
             </a:pPr>
             <a:r>
-              <a:rPr kumimoji="0" lang="ja-JP" altLang="en-US" sz="700" b="0" i="0" u="none" strike="noStrike" kern="0" cap="none" spc="0" normalizeH="0" baseline="0" noProof="0" dirty="0">
+              <a:rPr kumimoji="0" lang="ja-JP" altLang="en-US" sz="600" b="0" i="0" u="none" strike="noStrike" kern="0" cap="none" spc="0" normalizeH="0" baseline="0" noProof="0" dirty="0">
                 <a:ln>
                   <a:noFill/>
                 </a:ln>
@@ -22993,11 +22493,45 @@
                 <a:effectLst/>
                 <a:uLnTx/>
                 <a:uFillTx/>
-                <a:latin typeface="Arial"/>
+                <a:latin typeface="+mj-lt"/>
                 <a:ea typeface="+mn-ea"/>
                 <a:cs typeface="Arial"/>
               </a:rPr>
-              <a:t>この情報は機密情報です。事前の書面による同意を得ずに組織外に開示することを禁じます。</a:t>
+              <a:t>この資料は関係者限りの厳秘の資料であり、</a:t>
+            </a:r>
+            <a:r>
+              <a:rPr kumimoji="0" lang="en-US" altLang="ja-JP" sz="600" b="0" i="0" u="none" strike="noStrike" kern="0" cap="none" spc="0" normalizeH="0" baseline="0" noProof="0" dirty="0">
+                <a:ln>
+                  <a:noFill/>
+                </a:ln>
+                <a:solidFill>
+                  <a:schemeClr val="tx1"/>
+                </a:solidFill>
+                <a:effectLst/>
+                <a:uLnTx/>
+                <a:uFillTx/>
+                <a:latin typeface="+mj-lt"/>
+                <a:ea typeface="+mn-ea"/>
+                <a:cs typeface="Arial"/>
+              </a:rPr>
+              <a:t>AKKODiS</a:t>
+            </a:r>
+            <a:r>
+              <a:rPr kumimoji="0" lang="ja-JP" altLang="en-US" sz="600" b="0" i="0" u="none" strike="noStrike" kern="0" cap="none" spc="0" normalizeH="0" baseline="0" noProof="0" dirty="0">
+                <a:ln>
+                  <a:noFill/>
+                </a:ln>
+                <a:solidFill>
+                  <a:schemeClr val="tx1"/>
+                </a:solidFill>
+                <a:effectLst/>
+                <a:uLnTx/>
+                <a:uFillTx/>
+                <a:latin typeface="+mj-lt"/>
+                <a:ea typeface="+mn-ea"/>
+                <a:cs typeface="Arial"/>
+              </a:rPr>
+              <a:t>コンサルティング株式会社に無断での使用・開示を禁じます。</a:t>
             </a:r>
           </a:p>
         </p:txBody>
@@ -23007,7 +22541,7 @@
           <p:cNvPr id="3" name="グラフィックス 2">
             <a:extLst>
               <a:ext uri="{FF2B5EF4-FFF2-40B4-BE49-F238E27FC236}">
-                <a16:creationId xmlns:a16="http://schemas.microsoft.com/office/drawing/2014/main" id="{937BCE20-0995-E53E-0A00-6BD4067426B7}"/>
+                <a16:creationId xmlns:a16="http://schemas.microsoft.com/office/drawing/2014/main" id="{FA57A244-10A4-F99A-FF74-5A2BE25D0132}"/>
               </a:ext>
             </a:extLst>
           </p:cNvPr>
@@ -23598,82 +23132,10 @@
       </p:sp>
       <p:sp>
         <p:nvSpPr>
-          <p:cNvPr id="10" name="テキスト ボックス 9">
+          <p:cNvPr id="5" name="TXT_@Akkodis">
             <a:extLst>
               <a:ext uri="{FF2B5EF4-FFF2-40B4-BE49-F238E27FC236}">
-                <a16:creationId xmlns:a16="http://schemas.microsoft.com/office/drawing/2014/main" id="{36B0CB9A-2735-E60E-922A-D5DBF98F6B75}"/>
-              </a:ext>
-            </a:extLst>
-          </p:cNvPr>
-          <p:cNvSpPr txBox="1"/>
-          <p:nvPr userDrawn="1">
-            <p:extLst>
-              <p:ext uri="{1162E1C5-73C7-4A58-AE30-91384D911F3F}">
-                <p184:classification xmlns:p184="http://schemas.microsoft.com/office/powerpoint/2018/4/main" val="hdr"/>
-              </p:ext>
-            </p:extLst>
-          </p:nvPr>
-        </p:nvSpPr>
-        <p:spPr>
-          <a:xfrm>
-            <a:off x="63500" y="63500"/>
-            <a:ext cx="663575" cy="153888"/>
-          </a:xfrm>
-          <a:prstGeom prst="rect">
-            <a:avLst/>
-          </a:prstGeom>
-        </p:spPr>
-        <p:txBody>
-          <a:bodyPr horzOverflow="overflow" lIns="0" tIns="0" rIns="0" bIns="0">
-            <a:spAutoFit/>
-          </a:bodyPr>
-          <a:lstStyle/>
-          <a:p>
-            <a:pPr marL="0" indent="0" algn="l">
-              <a:buNone/>
-            </a:pPr>
-            <a:r>
-              <a:rPr lang="en-US" sz="1000" dirty="0">
-                <a:solidFill>
-                  <a:srgbClr val="000000"/>
-                </a:solidFill>
-                <a:latin typeface="+mj-ea"/>
-                <a:ea typeface="+mj-ea"/>
-                <a:cs typeface="Calibri" panose="020F0502020204030204" pitchFamily="34" charset="0"/>
-              </a:rPr>
-              <a:t>【</a:t>
-            </a:r>
-            <a:r>
-              <a:rPr lang="en-US" sz="1000" dirty="0" err="1">
-                <a:solidFill>
-                  <a:srgbClr val="000000"/>
-                </a:solidFill>
-                <a:latin typeface="+mj-ea"/>
-                <a:ea typeface="+mj-ea"/>
-                <a:cs typeface="Calibri" panose="020F0502020204030204" pitchFamily="34" charset="0"/>
-              </a:rPr>
-              <a:t>社外秘</a:t>
-            </a:r>
-            <a:r>
-              <a:rPr lang="en-US" sz="1000" dirty="0">
-                <a:solidFill>
-                  <a:srgbClr val="000000"/>
-                </a:solidFill>
-                <a:latin typeface="+mj-ea"/>
-                <a:ea typeface="+mj-ea"/>
-                <a:cs typeface="Calibri" panose="020F0502020204030204" pitchFamily="34" charset="0"/>
-              </a:rPr>
-              <a:t>】</a:t>
-            </a:r>
-          </a:p>
-        </p:txBody>
-      </p:sp>
-      <p:sp>
-        <p:nvSpPr>
-          <p:cNvPr id="11" name="TXT_@Akkodis">
-            <a:extLst>
-              <a:ext uri="{FF2B5EF4-FFF2-40B4-BE49-F238E27FC236}">
-                <a16:creationId xmlns:a16="http://schemas.microsoft.com/office/drawing/2014/main" id="{318EFAC2-1DA8-17D7-696E-3ACEAD62FB74}"/>
+                <a16:creationId xmlns:a16="http://schemas.microsoft.com/office/drawing/2014/main" id="{670D7CB1-1A4B-55AB-3667-91775256A7B5}"/>
               </a:ext>
             </a:extLst>
           </p:cNvPr>
@@ -23682,7 +23144,7 @@
         </p:nvSpPr>
         <p:spPr>
           <a:xfrm>
-            <a:off x="5115358" y="6436014"/>
+            <a:off x="5115358" y="6420738"/>
             <a:ext cx="1961284" cy="421986"/>
           </a:xfrm>
           <a:prstGeom prst="rect">
@@ -23795,10 +23257,10 @@
       </p:sp>
       <p:sp>
         <p:nvSpPr>
-          <p:cNvPr id="12" name="TXT_@Akkodis">
+          <p:cNvPr id="11" name="TXT_@Akkodis">
             <a:extLst>
               <a:ext uri="{FF2B5EF4-FFF2-40B4-BE49-F238E27FC236}">
-                <a16:creationId xmlns:a16="http://schemas.microsoft.com/office/drawing/2014/main" id="{EAFA678C-118F-72C6-1848-E8767549E8D0}"/>
+                <a16:creationId xmlns:a16="http://schemas.microsoft.com/office/drawing/2014/main" id="{5DB76ED1-A1A8-4FF2-E6E6-A7AC0E0AFA66}"/>
               </a:ext>
             </a:extLst>
           </p:cNvPr>
@@ -23807,8 +23269,8 @@
         </p:nvSpPr>
         <p:spPr>
           <a:xfrm>
-            <a:off x="0" y="6436014"/>
-            <a:ext cx="4114800" cy="421986"/>
+            <a:off x="0" y="6420738"/>
+            <a:ext cx="4480560" cy="421986"/>
           </a:xfrm>
           <a:prstGeom prst="rect">
             <a:avLst/>
@@ -23851,7 +23313,7 @@
               <a:buNone/>
             </a:pPr>
             <a:r>
-              <a:rPr kumimoji="0" lang="ja-JP" altLang="en-US" sz="700" b="0" i="0" u="none" strike="noStrike" kern="0" cap="none" spc="0" normalizeH="0" baseline="0" noProof="0" dirty="0">
+              <a:rPr kumimoji="0" lang="ja-JP" altLang="en-US" sz="600" b="0" i="0" u="none" strike="noStrike" kern="0" cap="none" spc="0" normalizeH="0" baseline="0" noProof="0" dirty="0">
                 <a:ln>
                   <a:noFill/>
                 </a:ln>
@@ -23861,21 +23323,55 @@
                 <a:effectLst/>
                 <a:uLnTx/>
                 <a:uFillTx/>
-                <a:latin typeface="Arial"/>
+                <a:latin typeface="+mj-lt"/>
                 <a:ea typeface="+mn-ea"/>
                 <a:cs typeface="Arial"/>
               </a:rPr>
-              <a:t>この情報は機密情報です。事前の書面による同意を得ずに組織外に開示することを禁じます。</a:t>
+              <a:t>この資料は関係者限りの厳秘の資料であり、</a:t>
+            </a:r>
+            <a:r>
+              <a:rPr kumimoji="0" lang="en-US" altLang="ja-JP" sz="600" b="0" i="0" u="none" strike="noStrike" kern="0" cap="none" spc="0" normalizeH="0" baseline="0" noProof="0" dirty="0">
+                <a:ln>
+                  <a:noFill/>
+                </a:ln>
+                <a:solidFill>
+                  <a:schemeClr val="tx1"/>
+                </a:solidFill>
+                <a:effectLst/>
+                <a:uLnTx/>
+                <a:uFillTx/>
+                <a:latin typeface="+mj-lt"/>
+                <a:ea typeface="+mn-ea"/>
+                <a:cs typeface="Arial"/>
+              </a:rPr>
+              <a:t>AKKODiS</a:t>
+            </a:r>
+            <a:r>
+              <a:rPr kumimoji="0" lang="ja-JP" altLang="en-US" sz="600" b="0" i="0" u="none" strike="noStrike" kern="0" cap="none" spc="0" normalizeH="0" baseline="0" noProof="0" dirty="0">
+                <a:ln>
+                  <a:noFill/>
+                </a:ln>
+                <a:solidFill>
+                  <a:schemeClr val="tx1"/>
+                </a:solidFill>
+                <a:effectLst/>
+                <a:uLnTx/>
+                <a:uFillTx/>
+                <a:latin typeface="+mj-lt"/>
+                <a:ea typeface="+mn-ea"/>
+                <a:cs typeface="Arial"/>
+              </a:rPr>
+              <a:t>コンサルティング株式会社に無断での使用・開示を禁じます。</a:t>
             </a:r>
           </a:p>
         </p:txBody>
       </p:sp>
       <p:pic>
         <p:nvPicPr>
-          <p:cNvPr id="5" name="グラフィックス 4">
+          <p:cNvPr id="6" name="グラフィックス 5">
             <a:extLst>
               <a:ext uri="{FF2B5EF4-FFF2-40B4-BE49-F238E27FC236}">
-                <a16:creationId xmlns:a16="http://schemas.microsoft.com/office/drawing/2014/main" id="{C89CD2FD-EDC7-6F8A-2A9B-490A7129F42F}"/>
+                <a16:creationId xmlns:a16="http://schemas.microsoft.com/office/drawing/2014/main" id="{BE19276A-4034-B91E-A035-8B5FA820D86F}"/>
               </a:ext>
             </a:extLst>
           </p:cNvPr>
@@ -24277,82 +23773,10 @@
       </p:sp>
       <p:sp>
         <p:nvSpPr>
-          <p:cNvPr id="4" name="テキスト ボックス 3">
+          <p:cNvPr id="6" name="TXT_@Akkodis">
             <a:extLst>
               <a:ext uri="{FF2B5EF4-FFF2-40B4-BE49-F238E27FC236}">
-                <a16:creationId xmlns:a16="http://schemas.microsoft.com/office/drawing/2014/main" id="{53786D29-C9C2-D86B-EC08-6BE6A665569B}"/>
-              </a:ext>
-            </a:extLst>
-          </p:cNvPr>
-          <p:cNvSpPr txBox="1"/>
-          <p:nvPr userDrawn="1">
-            <p:extLst>
-              <p:ext uri="{1162E1C5-73C7-4A58-AE30-91384D911F3F}">
-                <p184:classification xmlns:p184="http://schemas.microsoft.com/office/powerpoint/2018/4/main" val="hdr"/>
-              </p:ext>
-            </p:extLst>
-          </p:nvPr>
-        </p:nvSpPr>
-        <p:spPr>
-          <a:xfrm>
-            <a:off x="63500" y="63500"/>
-            <a:ext cx="663575" cy="153888"/>
-          </a:xfrm>
-          <a:prstGeom prst="rect">
-            <a:avLst/>
-          </a:prstGeom>
-        </p:spPr>
-        <p:txBody>
-          <a:bodyPr horzOverflow="overflow" lIns="0" tIns="0" rIns="0" bIns="0">
-            <a:spAutoFit/>
-          </a:bodyPr>
-          <a:lstStyle/>
-          <a:p>
-            <a:pPr marL="0" indent="0" algn="l">
-              <a:buNone/>
-            </a:pPr>
-            <a:r>
-              <a:rPr lang="en-US" sz="1000" dirty="0">
-                <a:solidFill>
-                  <a:srgbClr val="000000"/>
-                </a:solidFill>
-                <a:latin typeface="+mj-ea"/>
-                <a:ea typeface="+mj-ea"/>
-                <a:cs typeface="Calibri" panose="020F0502020204030204" pitchFamily="34" charset="0"/>
-              </a:rPr>
-              <a:t>【</a:t>
-            </a:r>
-            <a:r>
-              <a:rPr lang="en-US" sz="1000" dirty="0" err="1">
-                <a:solidFill>
-                  <a:srgbClr val="000000"/>
-                </a:solidFill>
-                <a:latin typeface="+mj-ea"/>
-                <a:ea typeface="+mj-ea"/>
-                <a:cs typeface="Calibri" panose="020F0502020204030204" pitchFamily="34" charset="0"/>
-              </a:rPr>
-              <a:t>社外秘</a:t>
-            </a:r>
-            <a:r>
-              <a:rPr lang="en-US" sz="1000" dirty="0">
-                <a:solidFill>
-                  <a:srgbClr val="000000"/>
-                </a:solidFill>
-                <a:latin typeface="+mj-ea"/>
-                <a:ea typeface="+mj-ea"/>
-                <a:cs typeface="Calibri" panose="020F0502020204030204" pitchFamily="34" charset="0"/>
-              </a:rPr>
-              <a:t>】</a:t>
-            </a:r>
-          </a:p>
-        </p:txBody>
-      </p:sp>
-      <p:sp>
-        <p:nvSpPr>
-          <p:cNvPr id="7" name="TXT_@Akkodis">
-            <a:extLst>
-              <a:ext uri="{FF2B5EF4-FFF2-40B4-BE49-F238E27FC236}">
-                <a16:creationId xmlns:a16="http://schemas.microsoft.com/office/drawing/2014/main" id="{23D58445-2658-0A92-020D-9702407A161B}"/>
+                <a16:creationId xmlns:a16="http://schemas.microsoft.com/office/drawing/2014/main" id="{1E3ED7E8-6D4F-EFB1-C256-AC7E081F79FF}"/>
               </a:ext>
             </a:extLst>
           </p:cNvPr>
@@ -24361,7 +23785,7 @@
         </p:nvSpPr>
         <p:spPr>
           <a:xfrm>
-            <a:off x="5115358" y="6436014"/>
+            <a:off x="5115358" y="6420738"/>
             <a:ext cx="1961284" cy="421986"/>
           </a:xfrm>
           <a:prstGeom prst="rect">
@@ -24474,10 +23898,10 @@
       </p:sp>
       <p:sp>
         <p:nvSpPr>
-          <p:cNvPr id="8" name="TXT_@Akkodis">
+          <p:cNvPr id="7" name="TXT_@Akkodis">
             <a:extLst>
               <a:ext uri="{FF2B5EF4-FFF2-40B4-BE49-F238E27FC236}">
-                <a16:creationId xmlns:a16="http://schemas.microsoft.com/office/drawing/2014/main" id="{03F24E26-9899-78D1-2BE1-A576C155DE69}"/>
+                <a16:creationId xmlns:a16="http://schemas.microsoft.com/office/drawing/2014/main" id="{E67CDC09-5BDE-7B5D-D062-E89371D89157}"/>
               </a:ext>
             </a:extLst>
           </p:cNvPr>
@@ -24486,8 +23910,8 @@
         </p:nvSpPr>
         <p:spPr>
           <a:xfrm>
-            <a:off x="0" y="6436014"/>
-            <a:ext cx="4114800" cy="421986"/>
+            <a:off x="0" y="6420738"/>
+            <a:ext cx="4480560" cy="421986"/>
           </a:xfrm>
           <a:prstGeom prst="rect">
             <a:avLst/>
@@ -24530,7 +23954,7 @@
               <a:buNone/>
             </a:pPr>
             <a:r>
-              <a:rPr kumimoji="0" lang="ja-JP" altLang="en-US" sz="700" b="0" i="0" u="none" strike="noStrike" kern="0" cap="none" spc="0" normalizeH="0" baseline="0" noProof="0" dirty="0">
+              <a:rPr kumimoji="0" lang="ja-JP" altLang="en-US" sz="600" b="0" i="0" u="none" strike="noStrike" kern="0" cap="none" spc="0" normalizeH="0" baseline="0" noProof="0" dirty="0">
                 <a:ln>
                   <a:noFill/>
                 </a:ln>
@@ -24540,11 +23964,45 @@
                 <a:effectLst/>
                 <a:uLnTx/>
                 <a:uFillTx/>
-                <a:latin typeface="Arial"/>
+                <a:latin typeface="+mj-lt"/>
                 <a:ea typeface="+mn-ea"/>
                 <a:cs typeface="Arial"/>
               </a:rPr>
-              <a:t>この情報は機密情報です。事前の書面による同意を得ずに組織外に開示することを禁じます。</a:t>
+              <a:t>この資料は関係者限りの厳秘の資料であり、</a:t>
+            </a:r>
+            <a:r>
+              <a:rPr kumimoji="0" lang="en-US" altLang="ja-JP" sz="600" b="0" i="0" u="none" strike="noStrike" kern="0" cap="none" spc="0" normalizeH="0" baseline="0" noProof="0" dirty="0">
+                <a:ln>
+                  <a:noFill/>
+                </a:ln>
+                <a:solidFill>
+                  <a:schemeClr val="tx1"/>
+                </a:solidFill>
+                <a:effectLst/>
+                <a:uLnTx/>
+                <a:uFillTx/>
+                <a:latin typeface="+mj-lt"/>
+                <a:ea typeface="+mn-ea"/>
+                <a:cs typeface="Arial"/>
+              </a:rPr>
+              <a:t>AKKODiS</a:t>
+            </a:r>
+            <a:r>
+              <a:rPr kumimoji="0" lang="ja-JP" altLang="en-US" sz="600" b="0" i="0" u="none" strike="noStrike" kern="0" cap="none" spc="0" normalizeH="0" baseline="0" noProof="0" dirty="0">
+                <a:ln>
+                  <a:noFill/>
+                </a:ln>
+                <a:solidFill>
+                  <a:schemeClr val="tx1"/>
+                </a:solidFill>
+                <a:effectLst/>
+                <a:uLnTx/>
+                <a:uFillTx/>
+                <a:latin typeface="+mj-lt"/>
+                <a:ea typeface="+mn-ea"/>
+                <a:cs typeface="Arial"/>
+              </a:rPr>
+              <a:t>コンサルティング株式会社に無断での使用・開示を禁じます。</a:t>
             </a:r>
           </a:p>
         </p:txBody>
@@ -24554,7 +24012,7 @@
           <p:cNvPr id="3" name="グラフィックス 2">
             <a:extLst>
               <a:ext uri="{FF2B5EF4-FFF2-40B4-BE49-F238E27FC236}">
-                <a16:creationId xmlns:a16="http://schemas.microsoft.com/office/drawing/2014/main" id="{742FAF19-8299-F623-3697-6FEDF38308DF}"/>
+                <a16:creationId xmlns:a16="http://schemas.microsoft.com/office/drawing/2014/main" id="{0DC6CF6D-9961-3FA1-2FB9-1833233B48C2}"/>
               </a:ext>
             </a:extLst>
           </p:cNvPr>
@@ -25021,82 +24479,10 @@
       </p:sp>
       <p:sp>
         <p:nvSpPr>
-          <p:cNvPr id="8" name="テキスト ボックス 7">
+          <p:cNvPr id="3" name="TXT_@Akkodis">
             <a:extLst>
               <a:ext uri="{FF2B5EF4-FFF2-40B4-BE49-F238E27FC236}">
-                <a16:creationId xmlns:a16="http://schemas.microsoft.com/office/drawing/2014/main" id="{3009B01E-0DE6-0933-4EAC-E8FCE0798BD9}"/>
-              </a:ext>
-            </a:extLst>
-          </p:cNvPr>
-          <p:cNvSpPr txBox="1"/>
-          <p:nvPr userDrawn="1">
-            <p:extLst>
-              <p:ext uri="{1162E1C5-73C7-4A58-AE30-91384D911F3F}">
-                <p184:classification xmlns:p184="http://schemas.microsoft.com/office/powerpoint/2018/4/main" val="hdr"/>
-              </p:ext>
-            </p:extLst>
-          </p:nvPr>
-        </p:nvSpPr>
-        <p:spPr>
-          <a:xfrm>
-            <a:off x="63500" y="63500"/>
-            <a:ext cx="663575" cy="153888"/>
-          </a:xfrm>
-          <a:prstGeom prst="rect">
-            <a:avLst/>
-          </a:prstGeom>
-        </p:spPr>
-        <p:txBody>
-          <a:bodyPr horzOverflow="overflow" lIns="0" tIns="0" rIns="0" bIns="0">
-            <a:spAutoFit/>
-          </a:bodyPr>
-          <a:lstStyle/>
-          <a:p>
-            <a:pPr marL="0" indent="0" algn="l">
-              <a:buNone/>
-            </a:pPr>
-            <a:r>
-              <a:rPr lang="en-US" sz="1000" dirty="0">
-                <a:solidFill>
-                  <a:srgbClr val="000000"/>
-                </a:solidFill>
-                <a:latin typeface="+mj-ea"/>
-                <a:ea typeface="+mj-ea"/>
-                <a:cs typeface="Calibri" panose="020F0502020204030204" pitchFamily="34" charset="0"/>
-              </a:rPr>
-              <a:t>【</a:t>
-            </a:r>
-            <a:r>
-              <a:rPr lang="en-US" sz="1000" dirty="0" err="1">
-                <a:solidFill>
-                  <a:srgbClr val="000000"/>
-                </a:solidFill>
-                <a:latin typeface="+mj-ea"/>
-                <a:ea typeface="+mj-ea"/>
-                <a:cs typeface="Calibri" panose="020F0502020204030204" pitchFamily="34" charset="0"/>
-              </a:rPr>
-              <a:t>社外秘</a:t>
-            </a:r>
-            <a:r>
-              <a:rPr lang="en-US" sz="1000" dirty="0">
-                <a:solidFill>
-                  <a:srgbClr val="000000"/>
-                </a:solidFill>
-                <a:latin typeface="+mj-ea"/>
-                <a:ea typeface="+mj-ea"/>
-                <a:cs typeface="Calibri" panose="020F0502020204030204" pitchFamily="34" charset="0"/>
-              </a:rPr>
-              <a:t>】</a:t>
-            </a:r>
-          </a:p>
-        </p:txBody>
-      </p:sp>
-      <p:sp>
-        <p:nvSpPr>
-          <p:cNvPr id="9" name="TXT_@Akkodis">
-            <a:extLst>
-              <a:ext uri="{FF2B5EF4-FFF2-40B4-BE49-F238E27FC236}">
-                <a16:creationId xmlns:a16="http://schemas.microsoft.com/office/drawing/2014/main" id="{D2528818-6EA0-922D-7FAB-0B7E0F16ADA2}"/>
+                <a16:creationId xmlns:a16="http://schemas.microsoft.com/office/drawing/2014/main" id="{B1E02491-E537-ED41-2A3E-49C0BF2F4055}"/>
               </a:ext>
             </a:extLst>
           </p:cNvPr>
@@ -25105,7 +24491,7 @@
         </p:nvSpPr>
         <p:spPr>
           <a:xfrm>
-            <a:off x="5115358" y="6436014"/>
+            <a:off x="5115358" y="6420738"/>
             <a:ext cx="1961284" cy="421986"/>
           </a:xfrm>
           <a:prstGeom prst="rect">
@@ -25218,10 +24604,10 @@
       </p:sp>
       <p:sp>
         <p:nvSpPr>
-          <p:cNvPr id="10" name="TXT_@Akkodis">
+          <p:cNvPr id="9" name="TXT_@Akkodis">
             <a:extLst>
               <a:ext uri="{FF2B5EF4-FFF2-40B4-BE49-F238E27FC236}">
-                <a16:creationId xmlns:a16="http://schemas.microsoft.com/office/drawing/2014/main" id="{507F63DD-370F-4B66-BEDC-3678472D3483}"/>
+                <a16:creationId xmlns:a16="http://schemas.microsoft.com/office/drawing/2014/main" id="{E1C4C718-BABD-3D2A-23A2-7D39168ACA46}"/>
               </a:ext>
             </a:extLst>
           </p:cNvPr>
@@ -25230,8 +24616,8 @@
         </p:nvSpPr>
         <p:spPr>
           <a:xfrm>
-            <a:off x="0" y="6436014"/>
-            <a:ext cx="4114800" cy="421986"/>
+            <a:off x="0" y="6420738"/>
+            <a:ext cx="4480560" cy="421986"/>
           </a:xfrm>
           <a:prstGeom prst="rect">
             <a:avLst/>
@@ -25274,7 +24660,7 @@
               <a:buNone/>
             </a:pPr>
             <a:r>
-              <a:rPr kumimoji="0" lang="ja-JP" altLang="en-US" sz="700" b="0" i="0" u="none" strike="noStrike" kern="0" cap="none" spc="0" normalizeH="0" baseline="0" noProof="0" dirty="0">
+              <a:rPr kumimoji="0" lang="ja-JP" altLang="en-US" sz="600" b="0" i="0" u="none" strike="noStrike" kern="0" cap="none" spc="0" normalizeH="0" baseline="0" noProof="0" dirty="0">
                 <a:ln>
                   <a:noFill/>
                 </a:ln>
@@ -25284,21 +24670,55 @@
                 <a:effectLst/>
                 <a:uLnTx/>
                 <a:uFillTx/>
-                <a:latin typeface="Arial"/>
+                <a:latin typeface="+mj-lt"/>
                 <a:ea typeface="+mn-ea"/>
                 <a:cs typeface="Arial"/>
               </a:rPr>
-              <a:t>この情報は機密情報です。事前の書面による同意を得ずに組織外に開示することを禁じます。</a:t>
+              <a:t>この資料は関係者限りの厳秘の資料であり、</a:t>
+            </a:r>
+            <a:r>
+              <a:rPr kumimoji="0" lang="en-US" altLang="ja-JP" sz="600" b="0" i="0" u="none" strike="noStrike" kern="0" cap="none" spc="0" normalizeH="0" baseline="0" noProof="0" dirty="0">
+                <a:ln>
+                  <a:noFill/>
+                </a:ln>
+                <a:solidFill>
+                  <a:schemeClr val="tx1"/>
+                </a:solidFill>
+                <a:effectLst/>
+                <a:uLnTx/>
+                <a:uFillTx/>
+                <a:latin typeface="+mj-lt"/>
+                <a:ea typeface="+mn-ea"/>
+                <a:cs typeface="Arial"/>
+              </a:rPr>
+              <a:t>AKKODiS</a:t>
+            </a:r>
+            <a:r>
+              <a:rPr kumimoji="0" lang="ja-JP" altLang="en-US" sz="600" b="0" i="0" u="none" strike="noStrike" kern="0" cap="none" spc="0" normalizeH="0" baseline="0" noProof="0" dirty="0">
+                <a:ln>
+                  <a:noFill/>
+                </a:ln>
+                <a:solidFill>
+                  <a:schemeClr val="tx1"/>
+                </a:solidFill>
+                <a:effectLst/>
+                <a:uLnTx/>
+                <a:uFillTx/>
+                <a:latin typeface="+mj-lt"/>
+                <a:ea typeface="+mn-ea"/>
+                <a:cs typeface="Arial"/>
+              </a:rPr>
+              <a:t>コンサルティング株式会社に無断での使用・開示を禁じます。</a:t>
             </a:r>
           </a:p>
         </p:txBody>
       </p:sp>
       <p:pic>
         <p:nvPicPr>
-          <p:cNvPr id="3" name="グラフィックス 2">
+          <p:cNvPr id="4" name="グラフィックス 3">
             <a:extLst>
               <a:ext uri="{FF2B5EF4-FFF2-40B4-BE49-F238E27FC236}">
-                <a16:creationId xmlns:a16="http://schemas.microsoft.com/office/drawing/2014/main" id="{EE146C66-E620-1A4A-B485-FED1593D9C51}"/>
+                <a16:creationId xmlns:a16="http://schemas.microsoft.com/office/drawing/2014/main" id="{D812CAE5-6D2F-E098-74BE-9A9E4A3CB53F}"/>
               </a:ext>
             </a:extLst>
           </p:cNvPr>
@@ -25730,82 +25150,10 @@
       </p:sp>
       <p:sp>
         <p:nvSpPr>
-          <p:cNvPr id="7" name="テキスト ボックス 6">
+          <p:cNvPr id="3" name="TXT_@Akkodis">
             <a:extLst>
               <a:ext uri="{FF2B5EF4-FFF2-40B4-BE49-F238E27FC236}">
-                <a16:creationId xmlns:a16="http://schemas.microsoft.com/office/drawing/2014/main" id="{73B8C6EF-0DFD-3500-A841-35521DF83427}"/>
-              </a:ext>
-            </a:extLst>
-          </p:cNvPr>
-          <p:cNvSpPr txBox="1"/>
-          <p:nvPr userDrawn="1">
-            <p:extLst>
-              <p:ext uri="{1162E1C5-73C7-4A58-AE30-91384D911F3F}">
-                <p184:classification xmlns:p184="http://schemas.microsoft.com/office/powerpoint/2018/4/main" val="hdr"/>
-              </p:ext>
-            </p:extLst>
-          </p:nvPr>
-        </p:nvSpPr>
-        <p:spPr>
-          <a:xfrm>
-            <a:off x="63500" y="63500"/>
-            <a:ext cx="663575" cy="153888"/>
-          </a:xfrm>
-          <a:prstGeom prst="rect">
-            <a:avLst/>
-          </a:prstGeom>
-        </p:spPr>
-        <p:txBody>
-          <a:bodyPr horzOverflow="overflow" lIns="0" tIns="0" rIns="0" bIns="0">
-            <a:spAutoFit/>
-          </a:bodyPr>
-          <a:lstStyle/>
-          <a:p>
-            <a:pPr marL="0" indent="0" algn="l">
-              <a:buNone/>
-            </a:pPr>
-            <a:r>
-              <a:rPr lang="en-US" sz="1000" dirty="0">
-                <a:solidFill>
-                  <a:srgbClr val="000000"/>
-                </a:solidFill>
-                <a:latin typeface="+mj-ea"/>
-                <a:ea typeface="+mj-ea"/>
-                <a:cs typeface="Calibri" panose="020F0502020204030204" pitchFamily="34" charset="0"/>
-              </a:rPr>
-              <a:t>【</a:t>
-            </a:r>
-            <a:r>
-              <a:rPr lang="en-US" sz="1000" dirty="0" err="1">
-                <a:solidFill>
-                  <a:srgbClr val="000000"/>
-                </a:solidFill>
-                <a:latin typeface="+mj-ea"/>
-                <a:ea typeface="+mj-ea"/>
-                <a:cs typeface="Calibri" panose="020F0502020204030204" pitchFamily="34" charset="0"/>
-              </a:rPr>
-              <a:t>社外秘</a:t>
-            </a:r>
-            <a:r>
-              <a:rPr lang="en-US" sz="1000" dirty="0">
-                <a:solidFill>
-                  <a:srgbClr val="000000"/>
-                </a:solidFill>
-                <a:latin typeface="+mj-ea"/>
-                <a:ea typeface="+mj-ea"/>
-                <a:cs typeface="Calibri" panose="020F0502020204030204" pitchFamily="34" charset="0"/>
-              </a:rPr>
-              <a:t>】</a:t>
-            </a:r>
-          </a:p>
-        </p:txBody>
-      </p:sp>
-      <p:sp>
-        <p:nvSpPr>
-          <p:cNvPr id="8" name="TXT_@Akkodis">
-            <a:extLst>
-              <a:ext uri="{FF2B5EF4-FFF2-40B4-BE49-F238E27FC236}">
-                <a16:creationId xmlns:a16="http://schemas.microsoft.com/office/drawing/2014/main" id="{3DBE6BA0-5A40-43E2-546D-5CC993A4247F}"/>
+                <a16:creationId xmlns:a16="http://schemas.microsoft.com/office/drawing/2014/main" id="{8B6FBACF-8A55-0780-4BCB-2F36C9448592}"/>
               </a:ext>
             </a:extLst>
           </p:cNvPr>
@@ -25814,7 +25162,7 @@
         </p:nvSpPr>
         <p:spPr>
           <a:xfrm>
-            <a:off x="5115358" y="6436014"/>
+            <a:off x="5115358" y="6420738"/>
             <a:ext cx="1961284" cy="421986"/>
           </a:xfrm>
           <a:prstGeom prst="rect">
@@ -25927,10 +25275,10 @@
       </p:sp>
       <p:sp>
         <p:nvSpPr>
-          <p:cNvPr id="9" name="TXT_@Akkodis">
+          <p:cNvPr id="8" name="TXT_@Akkodis">
             <a:extLst>
               <a:ext uri="{FF2B5EF4-FFF2-40B4-BE49-F238E27FC236}">
-                <a16:creationId xmlns:a16="http://schemas.microsoft.com/office/drawing/2014/main" id="{039DD7E8-56D1-8EDD-2755-C0E42C38DC9F}"/>
+                <a16:creationId xmlns:a16="http://schemas.microsoft.com/office/drawing/2014/main" id="{96E152D4-B259-DB8F-84E5-314FABEC7D72}"/>
               </a:ext>
             </a:extLst>
           </p:cNvPr>
@@ -25939,8 +25287,8 @@
         </p:nvSpPr>
         <p:spPr>
           <a:xfrm>
-            <a:off x="0" y="6436014"/>
-            <a:ext cx="4114800" cy="421986"/>
+            <a:off x="0" y="6420738"/>
+            <a:ext cx="4480560" cy="421986"/>
           </a:xfrm>
           <a:prstGeom prst="rect">
             <a:avLst/>
@@ -25983,7 +25331,7 @@
               <a:buNone/>
             </a:pPr>
             <a:r>
-              <a:rPr kumimoji="0" lang="ja-JP" altLang="en-US" sz="700" b="0" i="0" u="none" strike="noStrike" kern="0" cap="none" spc="0" normalizeH="0" baseline="0" noProof="0" dirty="0">
+              <a:rPr kumimoji="0" lang="ja-JP" altLang="en-US" sz="600" b="0" i="0" u="none" strike="noStrike" kern="0" cap="none" spc="0" normalizeH="0" baseline="0" noProof="0" dirty="0">
                 <a:ln>
                   <a:noFill/>
                 </a:ln>
@@ -25993,11 +25341,45 @@
                 <a:effectLst/>
                 <a:uLnTx/>
                 <a:uFillTx/>
-                <a:latin typeface="Arial"/>
+                <a:latin typeface="+mj-lt"/>
                 <a:ea typeface="+mn-ea"/>
                 <a:cs typeface="Arial"/>
               </a:rPr>
-              <a:t>この情報は機密情報です。事前の書面による同意を得ずに組織外に開示することを禁じます。</a:t>
+              <a:t>この資料は関係者限りの厳秘の資料であり、</a:t>
+            </a:r>
+            <a:r>
+              <a:rPr kumimoji="0" lang="en-US" altLang="ja-JP" sz="600" b="0" i="0" u="none" strike="noStrike" kern="0" cap="none" spc="0" normalizeH="0" baseline="0" noProof="0" dirty="0">
+                <a:ln>
+                  <a:noFill/>
+                </a:ln>
+                <a:solidFill>
+                  <a:schemeClr val="tx1"/>
+                </a:solidFill>
+                <a:effectLst/>
+                <a:uLnTx/>
+                <a:uFillTx/>
+                <a:latin typeface="+mj-lt"/>
+                <a:ea typeface="+mn-ea"/>
+                <a:cs typeface="Arial"/>
+              </a:rPr>
+              <a:t>AKKODiS</a:t>
+            </a:r>
+            <a:r>
+              <a:rPr kumimoji="0" lang="ja-JP" altLang="en-US" sz="600" b="0" i="0" u="none" strike="noStrike" kern="0" cap="none" spc="0" normalizeH="0" baseline="0" noProof="0" dirty="0">
+                <a:ln>
+                  <a:noFill/>
+                </a:ln>
+                <a:solidFill>
+                  <a:schemeClr val="tx1"/>
+                </a:solidFill>
+                <a:effectLst/>
+                <a:uLnTx/>
+                <a:uFillTx/>
+                <a:latin typeface="+mj-lt"/>
+                <a:ea typeface="+mn-ea"/>
+                <a:cs typeface="Arial"/>
+              </a:rPr>
+              <a:t>コンサルティング株式会社に無断での使用・開示を禁じます。</a:t>
             </a:r>
           </a:p>
         </p:txBody>
@@ -26007,7 +25389,7 @@
           <p:cNvPr id="5" name="グラフィックス 4">
             <a:extLst>
               <a:ext uri="{FF2B5EF4-FFF2-40B4-BE49-F238E27FC236}">
-                <a16:creationId xmlns:a16="http://schemas.microsoft.com/office/drawing/2014/main" id="{F3087B4C-87D4-8409-AB3F-84C81D1CE433}"/>
+                <a16:creationId xmlns:a16="http://schemas.microsoft.com/office/drawing/2014/main" id="{DA84391E-0004-8D0F-C8E4-1E853EEE2E5B}"/>
               </a:ext>
             </a:extLst>
           </p:cNvPr>
@@ -26242,82 +25624,10 @@
       </p:sp>
       <p:sp>
         <p:nvSpPr>
-          <p:cNvPr id="2" name="テキスト ボックス 1">
+          <p:cNvPr id="4" name="TXT_@Akkodis">
             <a:extLst>
               <a:ext uri="{FF2B5EF4-FFF2-40B4-BE49-F238E27FC236}">
-                <a16:creationId xmlns:a16="http://schemas.microsoft.com/office/drawing/2014/main" id="{A2F75AA8-7075-A839-384A-0A41C350AA1C}"/>
-              </a:ext>
-            </a:extLst>
-          </p:cNvPr>
-          <p:cNvSpPr txBox="1"/>
-          <p:nvPr userDrawn="1">
-            <p:extLst>
-              <p:ext uri="{1162E1C5-73C7-4A58-AE30-91384D911F3F}">
-                <p184:classification xmlns:p184="http://schemas.microsoft.com/office/powerpoint/2018/4/main" val="hdr"/>
-              </p:ext>
-            </p:extLst>
-          </p:nvPr>
-        </p:nvSpPr>
-        <p:spPr>
-          <a:xfrm>
-            <a:off x="63500" y="63500"/>
-            <a:ext cx="663575" cy="153888"/>
-          </a:xfrm>
-          <a:prstGeom prst="rect">
-            <a:avLst/>
-          </a:prstGeom>
-        </p:spPr>
-        <p:txBody>
-          <a:bodyPr horzOverflow="overflow" lIns="0" tIns="0" rIns="0" bIns="0">
-            <a:spAutoFit/>
-          </a:bodyPr>
-          <a:lstStyle/>
-          <a:p>
-            <a:pPr marL="0" indent="0" algn="l">
-              <a:buNone/>
-            </a:pPr>
-            <a:r>
-              <a:rPr lang="en-US" sz="1000" dirty="0">
-                <a:solidFill>
-                  <a:srgbClr val="000000"/>
-                </a:solidFill>
-                <a:latin typeface="+mj-ea"/>
-                <a:ea typeface="+mj-ea"/>
-                <a:cs typeface="Calibri" panose="020F0502020204030204" pitchFamily="34" charset="0"/>
-              </a:rPr>
-              <a:t>【</a:t>
-            </a:r>
-            <a:r>
-              <a:rPr lang="en-US" sz="1000" dirty="0" err="1">
-                <a:solidFill>
-                  <a:srgbClr val="000000"/>
-                </a:solidFill>
-                <a:latin typeface="+mj-ea"/>
-                <a:ea typeface="+mj-ea"/>
-                <a:cs typeface="Calibri" panose="020F0502020204030204" pitchFamily="34" charset="0"/>
-              </a:rPr>
-              <a:t>社外秘</a:t>
-            </a:r>
-            <a:r>
-              <a:rPr lang="en-US" sz="1000" dirty="0">
-                <a:solidFill>
-                  <a:srgbClr val="000000"/>
-                </a:solidFill>
-                <a:latin typeface="+mj-ea"/>
-                <a:ea typeface="+mj-ea"/>
-                <a:cs typeface="Calibri" panose="020F0502020204030204" pitchFamily="34" charset="0"/>
-              </a:rPr>
-              <a:t>】</a:t>
-            </a:r>
-          </a:p>
-        </p:txBody>
-      </p:sp>
-      <p:sp>
-        <p:nvSpPr>
-          <p:cNvPr id="5" name="TXT_@Akkodis">
-            <a:extLst>
-              <a:ext uri="{FF2B5EF4-FFF2-40B4-BE49-F238E27FC236}">
-                <a16:creationId xmlns:a16="http://schemas.microsoft.com/office/drawing/2014/main" id="{6A8B6281-535D-D880-296E-DC455CDC485C}"/>
+                <a16:creationId xmlns:a16="http://schemas.microsoft.com/office/drawing/2014/main" id="{47986B04-5620-B742-7733-293D587C5559}"/>
               </a:ext>
             </a:extLst>
           </p:cNvPr>
@@ -26326,7 +25636,7 @@
         </p:nvSpPr>
         <p:spPr>
           <a:xfrm>
-            <a:off x="5115358" y="6436014"/>
+            <a:off x="5115358" y="6420738"/>
             <a:ext cx="1961284" cy="421986"/>
           </a:xfrm>
           <a:prstGeom prst="rect">
@@ -26439,10 +25749,10 @@
       </p:sp>
       <p:sp>
         <p:nvSpPr>
-          <p:cNvPr id="6" name="TXT_@Akkodis">
+          <p:cNvPr id="5" name="TXT_@Akkodis">
             <a:extLst>
               <a:ext uri="{FF2B5EF4-FFF2-40B4-BE49-F238E27FC236}">
-                <a16:creationId xmlns:a16="http://schemas.microsoft.com/office/drawing/2014/main" id="{CC5C1D59-9055-7B49-EA22-5D75BA6B734C}"/>
+                <a16:creationId xmlns:a16="http://schemas.microsoft.com/office/drawing/2014/main" id="{13E2D2E3-547B-8502-B36D-C96D6D5D4133}"/>
               </a:ext>
             </a:extLst>
           </p:cNvPr>
@@ -26451,8 +25761,8 @@
         </p:nvSpPr>
         <p:spPr>
           <a:xfrm>
-            <a:off x="0" y="6436014"/>
-            <a:ext cx="4114800" cy="421986"/>
+            <a:off x="0" y="6420738"/>
+            <a:ext cx="4480560" cy="421986"/>
           </a:xfrm>
           <a:prstGeom prst="rect">
             <a:avLst/>
@@ -26495,7 +25805,7 @@
               <a:buNone/>
             </a:pPr>
             <a:r>
-              <a:rPr kumimoji="0" lang="ja-JP" altLang="en-US" sz="700" b="0" i="0" u="none" strike="noStrike" kern="0" cap="none" spc="0" normalizeH="0" baseline="0" noProof="0" dirty="0">
+              <a:rPr kumimoji="0" lang="ja-JP" altLang="en-US" sz="600" b="0" i="0" u="none" strike="noStrike" kern="0" cap="none" spc="0" normalizeH="0" baseline="0" noProof="0" dirty="0">
                 <a:ln>
                   <a:noFill/>
                 </a:ln>
@@ -26505,11 +25815,45 @@
                 <a:effectLst/>
                 <a:uLnTx/>
                 <a:uFillTx/>
-                <a:latin typeface="Arial"/>
+                <a:latin typeface="+mj-lt"/>
                 <a:ea typeface="+mn-ea"/>
                 <a:cs typeface="Arial"/>
               </a:rPr>
-              <a:t>この情報は機密情報です。事前の書面による同意を得ずに組織外に開示することを禁じます。</a:t>
+              <a:t>この資料は関係者限りの厳秘の資料であり、</a:t>
+            </a:r>
+            <a:r>
+              <a:rPr kumimoji="0" lang="en-US" altLang="ja-JP" sz="600" b="0" i="0" u="none" strike="noStrike" kern="0" cap="none" spc="0" normalizeH="0" baseline="0" noProof="0" dirty="0">
+                <a:ln>
+                  <a:noFill/>
+                </a:ln>
+                <a:solidFill>
+                  <a:schemeClr val="tx1"/>
+                </a:solidFill>
+                <a:effectLst/>
+                <a:uLnTx/>
+                <a:uFillTx/>
+                <a:latin typeface="+mj-lt"/>
+                <a:ea typeface="+mn-ea"/>
+                <a:cs typeface="Arial"/>
+              </a:rPr>
+              <a:t>AKKODiS</a:t>
+            </a:r>
+            <a:r>
+              <a:rPr kumimoji="0" lang="ja-JP" altLang="en-US" sz="600" b="0" i="0" u="none" strike="noStrike" kern="0" cap="none" spc="0" normalizeH="0" baseline="0" noProof="0" dirty="0">
+                <a:ln>
+                  <a:noFill/>
+                </a:ln>
+                <a:solidFill>
+                  <a:schemeClr val="tx1"/>
+                </a:solidFill>
+                <a:effectLst/>
+                <a:uLnTx/>
+                <a:uFillTx/>
+                <a:latin typeface="+mj-lt"/>
+                <a:ea typeface="+mn-ea"/>
+                <a:cs typeface="Arial"/>
+              </a:rPr>
+              <a:t>コンサルティング株式会社に無断での使用・開示を禁じます。</a:t>
             </a:r>
           </a:p>
         </p:txBody>
@@ -26873,67 +26217,18 @@
           </a:lstStyle>
           <a:p>
             <a:r>
-              <a:rPr lang="en-US" noProof="0"/>
+              <a:rPr lang="en-US" noProof="0" dirty="0"/>
               <a:t>Modify the Title</a:t>
-            </a:r>
-          </a:p>
-        </p:txBody>
-      </p:sp>
-      <p:sp>
-        <p:nvSpPr>
-          <p:cNvPr id="8" name="テキスト ボックス 7">
-            <a:extLst>
-              <a:ext uri="{FF2B5EF4-FFF2-40B4-BE49-F238E27FC236}">
-                <a16:creationId xmlns:a16="http://schemas.microsoft.com/office/drawing/2014/main" id="{5F9800F2-6602-7E58-3085-37A71052D029}"/>
-              </a:ext>
-            </a:extLst>
-          </p:cNvPr>
-          <p:cNvSpPr txBox="1"/>
-          <p:nvPr userDrawn="1"/>
-        </p:nvSpPr>
-        <p:spPr>
-          <a:xfrm>
-            <a:off x="313426" y="355959"/>
-            <a:ext cx="878216" cy="338554"/>
-          </a:xfrm>
-          <a:prstGeom prst="rect">
-            <a:avLst/>
-          </a:prstGeom>
-          <a:solidFill>
-            <a:schemeClr val="tx1"/>
-          </a:solidFill>
-          <a:ln w="28575">
-            <a:noFill/>
-          </a:ln>
-        </p:spPr>
-        <p:txBody>
-          <a:bodyPr wrap="square" rtlCol="0">
-            <a:spAutoFit/>
-          </a:bodyPr>
-          <a:lstStyle/>
-          <a:p>
-            <a:pPr marL="0" indent="0" algn="ctr">
-              <a:buNone/>
-            </a:pPr>
-            <a:r>
-              <a:rPr kumimoji="1" lang="ja-JP" altLang="en-US" b="1" dirty="0">
-                <a:solidFill>
-                  <a:schemeClr val="tx2"/>
-                </a:solidFill>
-                <a:latin typeface="Meiryo UI" panose="020B0604030504040204" pitchFamily="50" charset="-128"/>
-                <a:ea typeface="Meiryo UI" panose="020B0604030504040204" pitchFamily="50" charset="-128"/>
-              </a:rPr>
-              <a:t>社外秘</a:t>
             </a:r>
           </a:p>
         </p:txBody>
       </p:sp>
       <p:pic>
         <p:nvPicPr>
-          <p:cNvPr id="10" name="グラフィックス 9">
+          <p:cNvPr id="8" name="グラフィックス 7">
             <a:extLst>
               <a:ext uri="{FF2B5EF4-FFF2-40B4-BE49-F238E27FC236}">
-                <a16:creationId xmlns:a16="http://schemas.microsoft.com/office/drawing/2014/main" id="{B1EBBAA5-5C14-7565-5309-35F3543415F9}"/>
+                <a16:creationId xmlns:a16="http://schemas.microsoft.com/office/drawing/2014/main" id="{FDB29CA1-4B2B-6A36-FE89-425D6F727F62}"/>
               </a:ext>
             </a:extLst>
           </p:cNvPr>
@@ -27467,82 +26762,10 @@
       </p:sp>
       <p:sp>
         <p:nvSpPr>
-          <p:cNvPr id="4" name="テキスト ボックス 3">
+          <p:cNvPr id="5" name="TXT_@Akkodis">
             <a:extLst>
               <a:ext uri="{FF2B5EF4-FFF2-40B4-BE49-F238E27FC236}">
-                <a16:creationId xmlns:a16="http://schemas.microsoft.com/office/drawing/2014/main" id="{D07A0AC9-23C4-7FD8-DA57-8A63CC0481D9}"/>
-              </a:ext>
-            </a:extLst>
-          </p:cNvPr>
-          <p:cNvSpPr txBox="1"/>
-          <p:nvPr userDrawn="1">
-            <p:extLst>
-              <p:ext uri="{1162E1C5-73C7-4A58-AE30-91384D911F3F}">
-                <p184:classification xmlns:p184="http://schemas.microsoft.com/office/powerpoint/2018/4/main" val="hdr"/>
-              </p:ext>
-            </p:extLst>
-          </p:nvPr>
-        </p:nvSpPr>
-        <p:spPr>
-          <a:xfrm>
-            <a:off x="63500" y="63500"/>
-            <a:ext cx="663575" cy="153888"/>
-          </a:xfrm>
-          <a:prstGeom prst="rect">
-            <a:avLst/>
-          </a:prstGeom>
-        </p:spPr>
-        <p:txBody>
-          <a:bodyPr horzOverflow="overflow" lIns="0" tIns="0" rIns="0" bIns="0">
-            <a:spAutoFit/>
-          </a:bodyPr>
-          <a:lstStyle/>
-          <a:p>
-            <a:pPr marL="0" indent="0" algn="l">
-              <a:buNone/>
-            </a:pPr>
-            <a:r>
-              <a:rPr lang="en-US" sz="1000" dirty="0">
-                <a:solidFill>
-                  <a:srgbClr val="000000"/>
-                </a:solidFill>
-                <a:latin typeface="+mj-ea"/>
-                <a:ea typeface="+mj-ea"/>
-                <a:cs typeface="Calibri" panose="020F0502020204030204" pitchFamily="34" charset="0"/>
-              </a:rPr>
-              <a:t>【</a:t>
-            </a:r>
-            <a:r>
-              <a:rPr lang="en-US" sz="1000" dirty="0" err="1">
-                <a:solidFill>
-                  <a:srgbClr val="000000"/>
-                </a:solidFill>
-                <a:latin typeface="+mj-ea"/>
-                <a:ea typeface="+mj-ea"/>
-                <a:cs typeface="Calibri" panose="020F0502020204030204" pitchFamily="34" charset="0"/>
-              </a:rPr>
-              <a:t>社外秘</a:t>
-            </a:r>
-            <a:r>
-              <a:rPr lang="en-US" sz="1000" dirty="0">
-                <a:solidFill>
-                  <a:srgbClr val="000000"/>
-                </a:solidFill>
-                <a:latin typeface="+mj-ea"/>
-                <a:ea typeface="+mj-ea"/>
-                <a:cs typeface="Calibri" panose="020F0502020204030204" pitchFamily="34" charset="0"/>
-              </a:rPr>
-              <a:t>】</a:t>
-            </a:r>
-          </a:p>
-        </p:txBody>
-      </p:sp>
-      <p:sp>
-        <p:nvSpPr>
-          <p:cNvPr id="7" name="TXT_@Akkodis">
-            <a:extLst>
-              <a:ext uri="{FF2B5EF4-FFF2-40B4-BE49-F238E27FC236}">
-                <a16:creationId xmlns:a16="http://schemas.microsoft.com/office/drawing/2014/main" id="{E74B0400-0A3F-B094-5744-3B7DA5282486}"/>
+                <a16:creationId xmlns:a16="http://schemas.microsoft.com/office/drawing/2014/main" id="{6F14B78C-948F-710F-9E43-FAFE7E2FBBA0}"/>
               </a:ext>
             </a:extLst>
           </p:cNvPr>
@@ -27551,7 +26774,7 @@
         </p:nvSpPr>
         <p:spPr>
           <a:xfrm>
-            <a:off x="5115358" y="6436014"/>
+            <a:off x="5115358" y="6420738"/>
             <a:ext cx="1961284" cy="421986"/>
           </a:xfrm>
           <a:prstGeom prst="rect">
@@ -27664,10 +26887,10 @@
       </p:sp>
       <p:sp>
         <p:nvSpPr>
-          <p:cNvPr id="9" name="TXT_@Akkodis">
+          <p:cNvPr id="7" name="TXT_@Akkodis">
             <a:extLst>
               <a:ext uri="{FF2B5EF4-FFF2-40B4-BE49-F238E27FC236}">
-                <a16:creationId xmlns:a16="http://schemas.microsoft.com/office/drawing/2014/main" id="{1C71C6D6-39D3-88F0-0FCA-73ECF07E9FE8}"/>
+                <a16:creationId xmlns:a16="http://schemas.microsoft.com/office/drawing/2014/main" id="{B475B39D-1506-775E-9BD6-C51301950E75}"/>
               </a:ext>
             </a:extLst>
           </p:cNvPr>
@@ -27676,8 +26899,8 @@
         </p:nvSpPr>
         <p:spPr>
           <a:xfrm>
-            <a:off x="0" y="6436014"/>
-            <a:ext cx="4114800" cy="421986"/>
+            <a:off x="0" y="6420738"/>
+            <a:ext cx="4480560" cy="421986"/>
           </a:xfrm>
           <a:prstGeom prst="rect">
             <a:avLst/>
@@ -27720,7 +26943,7 @@
               <a:buNone/>
             </a:pPr>
             <a:r>
-              <a:rPr kumimoji="0" lang="ja-JP" altLang="en-US" sz="700" b="0" i="0" u="none" strike="noStrike" kern="0" cap="none" spc="0" normalizeH="0" baseline="0" noProof="0" dirty="0">
+              <a:rPr kumimoji="0" lang="ja-JP" altLang="en-US" sz="600" b="0" i="0" u="none" strike="noStrike" kern="0" cap="none" spc="0" normalizeH="0" baseline="0" noProof="0" dirty="0">
                 <a:ln>
                   <a:noFill/>
                 </a:ln>
@@ -27730,21 +26953,55 @@
                 <a:effectLst/>
                 <a:uLnTx/>
                 <a:uFillTx/>
-                <a:latin typeface="Arial"/>
+                <a:latin typeface="+mj-lt"/>
                 <a:ea typeface="+mn-ea"/>
                 <a:cs typeface="Arial"/>
               </a:rPr>
-              <a:t>この情報は機密情報です。事前の書面による同意を得ずに組織外に開示することを禁じます。</a:t>
+              <a:t>この資料は関係者限りの厳秘の資料であり、</a:t>
+            </a:r>
+            <a:r>
+              <a:rPr kumimoji="0" lang="en-US" altLang="ja-JP" sz="600" b="0" i="0" u="none" strike="noStrike" kern="0" cap="none" spc="0" normalizeH="0" baseline="0" noProof="0" dirty="0">
+                <a:ln>
+                  <a:noFill/>
+                </a:ln>
+                <a:solidFill>
+                  <a:schemeClr val="tx1"/>
+                </a:solidFill>
+                <a:effectLst/>
+                <a:uLnTx/>
+                <a:uFillTx/>
+                <a:latin typeface="+mj-lt"/>
+                <a:ea typeface="+mn-ea"/>
+                <a:cs typeface="Arial"/>
+              </a:rPr>
+              <a:t>AKKODiS</a:t>
+            </a:r>
+            <a:r>
+              <a:rPr kumimoji="0" lang="ja-JP" altLang="en-US" sz="600" b="0" i="0" u="none" strike="noStrike" kern="0" cap="none" spc="0" normalizeH="0" baseline="0" noProof="0" dirty="0">
+                <a:ln>
+                  <a:noFill/>
+                </a:ln>
+                <a:solidFill>
+                  <a:schemeClr val="tx1"/>
+                </a:solidFill>
+                <a:effectLst/>
+                <a:uLnTx/>
+                <a:uFillTx/>
+                <a:latin typeface="+mj-lt"/>
+                <a:ea typeface="+mn-ea"/>
+                <a:cs typeface="Arial"/>
+              </a:rPr>
+              <a:t>コンサルティング株式会社に無断での使用・開示を禁じます。</a:t>
             </a:r>
           </a:p>
         </p:txBody>
       </p:sp>
       <p:pic>
         <p:nvPicPr>
-          <p:cNvPr id="5" name="グラフィックス 4">
+          <p:cNvPr id="4" name="グラフィックス 3">
             <a:extLst>
               <a:ext uri="{FF2B5EF4-FFF2-40B4-BE49-F238E27FC236}">
-                <a16:creationId xmlns:a16="http://schemas.microsoft.com/office/drawing/2014/main" id="{D3C2AE86-EE45-B6C7-3FA8-7EA5C02FA143}"/>
+                <a16:creationId xmlns:a16="http://schemas.microsoft.com/office/drawing/2014/main" id="{F64EE889-AFE1-FFC5-C476-C2ED022A366D}"/>
               </a:ext>
             </a:extLst>
           </p:cNvPr>
@@ -28239,82 +27496,10 @@
       </p:sp>
       <p:sp>
         <p:nvSpPr>
-          <p:cNvPr id="7" name="テキスト ボックス 6">
+          <p:cNvPr id="2" name="TXT_@Akkodis">
             <a:extLst>
               <a:ext uri="{FF2B5EF4-FFF2-40B4-BE49-F238E27FC236}">
-                <a16:creationId xmlns:a16="http://schemas.microsoft.com/office/drawing/2014/main" id="{A28D4783-93E5-4D99-091A-C1175C14EC7F}"/>
-              </a:ext>
-            </a:extLst>
-          </p:cNvPr>
-          <p:cNvSpPr txBox="1"/>
-          <p:nvPr userDrawn="1">
-            <p:extLst>
-              <p:ext uri="{1162E1C5-73C7-4A58-AE30-91384D911F3F}">
-                <p184:classification xmlns:p184="http://schemas.microsoft.com/office/powerpoint/2018/4/main" val="hdr"/>
-              </p:ext>
-            </p:extLst>
-          </p:nvPr>
-        </p:nvSpPr>
-        <p:spPr>
-          <a:xfrm>
-            <a:off x="63500" y="63500"/>
-            <a:ext cx="663575" cy="153888"/>
-          </a:xfrm>
-          <a:prstGeom prst="rect">
-            <a:avLst/>
-          </a:prstGeom>
-        </p:spPr>
-        <p:txBody>
-          <a:bodyPr horzOverflow="overflow" lIns="0" tIns="0" rIns="0" bIns="0">
-            <a:spAutoFit/>
-          </a:bodyPr>
-          <a:lstStyle/>
-          <a:p>
-            <a:pPr marL="0" indent="0" algn="l">
-              <a:buNone/>
-            </a:pPr>
-            <a:r>
-              <a:rPr lang="en-US" sz="1000" dirty="0">
-                <a:solidFill>
-                  <a:srgbClr val="000000"/>
-                </a:solidFill>
-                <a:latin typeface="+mj-ea"/>
-                <a:ea typeface="+mj-ea"/>
-                <a:cs typeface="Calibri" panose="020F0502020204030204" pitchFamily="34" charset="0"/>
-              </a:rPr>
-              <a:t>【</a:t>
-            </a:r>
-            <a:r>
-              <a:rPr lang="en-US" sz="1000" dirty="0" err="1">
-                <a:solidFill>
-                  <a:srgbClr val="000000"/>
-                </a:solidFill>
-                <a:latin typeface="+mj-ea"/>
-                <a:ea typeface="+mj-ea"/>
-                <a:cs typeface="Calibri" panose="020F0502020204030204" pitchFamily="34" charset="0"/>
-              </a:rPr>
-              <a:t>社外秘</a:t>
-            </a:r>
-            <a:r>
-              <a:rPr lang="en-US" sz="1000" dirty="0">
-                <a:solidFill>
-                  <a:srgbClr val="000000"/>
-                </a:solidFill>
-                <a:latin typeface="+mj-ea"/>
-                <a:ea typeface="+mj-ea"/>
-                <a:cs typeface="Calibri" panose="020F0502020204030204" pitchFamily="34" charset="0"/>
-              </a:rPr>
-              <a:t>】</a:t>
-            </a:r>
-          </a:p>
-        </p:txBody>
-      </p:sp>
-      <p:sp>
-        <p:nvSpPr>
-          <p:cNvPr id="8" name="TXT_@Akkodis">
-            <a:extLst>
-              <a:ext uri="{FF2B5EF4-FFF2-40B4-BE49-F238E27FC236}">
-                <a16:creationId xmlns:a16="http://schemas.microsoft.com/office/drawing/2014/main" id="{3E8D2B6A-2D47-85F6-8A95-19DC177EFB6E}"/>
+                <a16:creationId xmlns:a16="http://schemas.microsoft.com/office/drawing/2014/main" id="{53F6DC0E-43DB-E917-D043-F03CB8563800}"/>
               </a:ext>
             </a:extLst>
           </p:cNvPr>
@@ -28323,7 +27508,7 @@
         </p:nvSpPr>
         <p:spPr>
           <a:xfrm>
-            <a:off x="5115358" y="6436014"/>
+            <a:off x="5115358" y="6420738"/>
             <a:ext cx="1961284" cy="421986"/>
           </a:xfrm>
           <a:prstGeom prst="rect">
@@ -28436,10 +27621,10 @@
       </p:sp>
       <p:sp>
         <p:nvSpPr>
-          <p:cNvPr id="9" name="TXT_@Akkodis">
+          <p:cNvPr id="8" name="TXT_@Akkodis">
             <a:extLst>
               <a:ext uri="{FF2B5EF4-FFF2-40B4-BE49-F238E27FC236}">
-                <a16:creationId xmlns:a16="http://schemas.microsoft.com/office/drawing/2014/main" id="{C7DF34AB-21E4-76F7-3B43-05FC14415849}"/>
+                <a16:creationId xmlns:a16="http://schemas.microsoft.com/office/drawing/2014/main" id="{0D6F6F6A-910F-84EE-E4C1-2C198F8564C2}"/>
               </a:ext>
             </a:extLst>
           </p:cNvPr>
@@ -28448,8 +27633,8 @@
         </p:nvSpPr>
         <p:spPr>
           <a:xfrm>
-            <a:off x="0" y="6436014"/>
-            <a:ext cx="4114800" cy="421986"/>
+            <a:off x="0" y="6420738"/>
+            <a:ext cx="4480560" cy="421986"/>
           </a:xfrm>
           <a:prstGeom prst="rect">
             <a:avLst/>
@@ -28492,7 +27677,7 @@
               <a:buNone/>
             </a:pPr>
             <a:r>
-              <a:rPr kumimoji="0" lang="ja-JP" altLang="en-US" sz="700" b="0" i="0" u="none" strike="noStrike" kern="0" cap="none" spc="0" normalizeH="0" baseline="0" noProof="0" dirty="0">
+              <a:rPr kumimoji="0" lang="ja-JP" altLang="en-US" sz="600" b="0" i="0" u="none" strike="noStrike" kern="0" cap="none" spc="0" normalizeH="0" baseline="0" noProof="0" dirty="0">
                 <a:ln>
                   <a:noFill/>
                 </a:ln>
@@ -28502,21 +27687,55 @@
                 <a:effectLst/>
                 <a:uLnTx/>
                 <a:uFillTx/>
-                <a:latin typeface="Arial"/>
+                <a:latin typeface="+mj-lt"/>
                 <a:ea typeface="+mn-ea"/>
                 <a:cs typeface="Arial"/>
               </a:rPr>
-              <a:t>この情報は機密情報です。事前の書面による同意を得ずに組織外に開示することを禁じます。</a:t>
+              <a:t>この資料は関係者限りの厳秘の資料であり、</a:t>
+            </a:r>
+            <a:r>
+              <a:rPr kumimoji="0" lang="en-US" altLang="ja-JP" sz="600" b="0" i="0" u="none" strike="noStrike" kern="0" cap="none" spc="0" normalizeH="0" baseline="0" noProof="0" dirty="0">
+                <a:ln>
+                  <a:noFill/>
+                </a:ln>
+                <a:solidFill>
+                  <a:schemeClr val="tx1"/>
+                </a:solidFill>
+                <a:effectLst/>
+                <a:uLnTx/>
+                <a:uFillTx/>
+                <a:latin typeface="+mj-lt"/>
+                <a:ea typeface="+mn-ea"/>
+                <a:cs typeface="Arial"/>
+              </a:rPr>
+              <a:t>AKKODiS</a:t>
+            </a:r>
+            <a:r>
+              <a:rPr kumimoji="0" lang="ja-JP" altLang="en-US" sz="600" b="0" i="0" u="none" strike="noStrike" kern="0" cap="none" spc="0" normalizeH="0" baseline="0" noProof="0" dirty="0">
+                <a:ln>
+                  <a:noFill/>
+                </a:ln>
+                <a:solidFill>
+                  <a:schemeClr val="tx1"/>
+                </a:solidFill>
+                <a:effectLst/>
+                <a:uLnTx/>
+                <a:uFillTx/>
+                <a:latin typeface="+mj-lt"/>
+                <a:ea typeface="+mn-ea"/>
+                <a:cs typeface="Arial"/>
+              </a:rPr>
+              <a:t>コンサルティング株式会社に無断での使用・開示を禁じます。</a:t>
             </a:r>
           </a:p>
         </p:txBody>
       </p:sp>
       <p:pic>
         <p:nvPicPr>
-          <p:cNvPr id="2" name="グラフィックス 1">
+          <p:cNvPr id="5" name="グラフィックス 4">
             <a:extLst>
               <a:ext uri="{FF2B5EF4-FFF2-40B4-BE49-F238E27FC236}">
-                <a16:creationId xmlns:a16="http://schemas.microsoft.com/office/drawing/2014/main" id="{78CB9C35-2F00-7D60-365E-4DDD4E678F8B}"/>
+                <a16:creationId xmlns:a16="http://schemas.microsoft.com/office/drawing/2014/main" id="{5E682588-EFD5-B594-A347-FDFDAB642F32}"/>
               </a:ext>
             </a:extLst>
           </p:cNvPr>
@@ -28651,7 +27870,7 @@
               <a:buNone/>
             </a:pPr>
             <a:r>
-              <a:rPr lang="en-US" sz="4800" dirty="0">
+              <a:rPr lang="en-US" sz="4800">
                 <a:solidFill>
                   <a:schemeClr val="tx1"/>
                 </a:solidFill>
@@ -28942,82 +28161,10 @@
       </p:sp>
       <p:sp>
         <p:nvSpPr>
-          <p:cNvPr id="8" name="テキスト ボックス 7">
+          <p:cNvPr id="2" name="TXT_@Akkodis">
             <a:extLst>
               <a:ext uri="{FF2B5EF4-FFF2-40B4-BE49-F238E27FC236}">
-                <a16:creationId xmlns:a16="http://schemas.microsoft.com/office/drawing/2014/main" id="{E7EB2EAB-3CE4-757C-D04E-712B03E75968}"/>
-              </a:ext>
-            </a:extLst>
-          </p:cNvPr>
-          <p:cNvSpPr txBox="1"/>
-          <p:nvPr userDrawn="1">
-            <p:extLst>
-              <p:ext uri="{1162E1C5-73C7-4A58-AE30-91384D911F3F}">
-                <p184:classification xmlns:p184="http://schemas.microsoft.com/office/powerpoint/2018/4/main" val="hdr"/>
-              </p:ext>
-            </p:extLst>
-          </p:nvPr>
-        </p:nvSpPr>
-        <p:spPr>
-          <a:xfrm>
-            <a:off x="63500" y="63500"/>
-            <a:ext cx="663575" cy="153888"/>
-          </a:xfrm>
-          <a:prstGeom prst="rect">
-            <a:avLst/>
-          </a:prstGeom>
-        </p:spPr>
-        <p:txBody>
-          <a:bodyPr horzOverflow="overflow" lIns="0" tIns="0" rIns="0" bIns="0">
-            <a:spAutoFit/>
-          </a:bodyPr>
-          <a:lstStyle/>
-          <a:p>
-            <a:pPr marL="0" indent="0" algn="l">
-              <a:buNone/>
-            </a:pPr>
-            <a:r>
-              <a:rPr lang="en-US" sz="1000" dirty="0">
-                <a:solidFill>
-                  <a:srgbClr val="000000"/>
-                </a:solidFill>
-                <a:latin typeface="+mj-ea"/>
-                <a:ea typeface="+mj-ea"/>
-                <a:cs typeface="Calibri" panose="020F0502020204030204" pitchFamily="34" charset="0"/>
-              </a:rPr>
-              <a:t>【</a:t>
-            </a:r>
-            <a:r>
-              <a:rPr lang="en-US" sz="1000" dirty="0" err="1">
-                <a:solidFill>
-                  <a:srgbClr val="000000"/>
-                </a:solidFill>
-                <a:latin typeface="+mj-ea"/>
-                <a:ea typeface="+mj-ea"/>
-                <a:cs typeface="Calibri" panose="020F0502020204030204" pitchFamily="34" charset="0"/>
-              </a:rPr>
-              <a:t>社外秘</a:t>
-            </a:r>
-            <a:r>
-              <a:rPr lang="en-US" sz="1000" dirty="0">
-                <a:solidFill>
-                  <a:srgbClr val="000000"/>
-                </a:solidFill>
-                <a:latin typeface="+mj-ea"/>
-                <a:ea typeface="+mj-ea"/>
-                <a:cs typeface="Calibri" panose="020F0502020204030204" pitchFamily="34" charset="0"/>
-              </a:rPr>
-              <a:t>】</a:t>
-            </a:r>
-          </a:p>
-        </p:txBody>
-      </p:sp>
-      <p:sp>
-        <p:nvSpPr>
-          <p:cNvPr id="9" name="TXT_@Akkodis">
-            <a:extLst>
-              <a:ext uri="{FF2B5EF4-FFF2-40B4-BE49-F238E27FC236}">
-                <a16:creationId xmlns:a16="http://schemas.microsoft.com/office/drawing/2014/main" id="{E9C49050-5C24-FDF5-6A47-C5A2DE77CC7D}"/>
+                <a16:creationId xmlns:a16="http://schemas.microsoft.com/office/drawing/2014/main" id="{C226CFF9-F526-22FA-4A13-A20A5AA4504C}"/>
               </a:ext>
             </a:extLst>
           </p:cNvPr>
@@ -29026,7 +28173,7 @@
         </p:nvSpPr>
         <p:spPr>
           <a:xfrm>
-            <a:off x="5115358" y="6436014"/>
+            <a:off x="5115358" y="6420738"/>
             <a:ext cx="1961284" cy="421986"/>
           </a:xfrm>
           <a:prstGeom prst="rect">
@@ -29139,10 +28286,10 @@
       </p:sp>
       <p:sp>
         <p:nvSpPr>
-          <p:cNvPr id="10" name="TXT_@Akkodis">
+          <p:cNvPr id="9" name="TXT_@Akkodis">
             <a:extLst>
               <a:ext uri="{FF2B5EF4-FFF2-40B4-BE49-F238E27FC236}">
-                <a16:creationId xmlns:a16="http://schemas.microsoft.com/office/drawing/2014/main" id="{741878ED-67F9-3873-F1EA-3295573DD645}"/>
+                <a16:creationId xmlns:a16="http://schemas.microsoft.com/office/drawing/2014/main" id="{C9316E91-A1AE-E484-6C5A-DA8EEF85BB6C}"/>
               </a:ext>
             </a:extLst>
           </p:cNvPr>
@@ -29151,8 +28298,8 @@
         </p:nvSpPr>
         <p:spPr>
           <a:xfrm>
-            <a:off x="0" y="6436014"/>
-            <a:ext cx="4114800" cy="421986"/>
+            <a:off x="0" y="6420738"/>
+            <a:ext cx="4480560" cy="421986"/>
           </a:xfrm>
           <a:prstGeom prst="rect">
             <a:avLst/>
@@ -29195,7 +28342,7 @@
               <a:buNone/>
             </a:pPr>
             <a:r>
-              <a:rPr kumimoji="0" lang="ja-JP" altLang="en-US" sz="700" b="0" i="0" u="none" strike="noStrike" kern="0" cap="none" spc="0" normalizeH="0" baseline="0" noProof="0" dirty="0">
+              <a:rPr kumimoji="0" lang="ja-JP" altLang="en-US" sz="600" b="0" i="0" u="none" strike="noStrike" kern="0" cap="none" spc="0" normalizeH="0" baseline="0" noProof="0" dirty="0">
                 <a:ln>
                   <a:noFill/>
                 </a:ln>
@@ -29205,21 +28352,55 @@
                 <a:effectLst/>
                 <a:uLnTx/>
                 <a:uFillTx/>
-                <a:latin typeface="Arial"/>
+                <a:latin typeface="+mj-lt"/>
                 <a:ea typeface="+mn-ea"/>
                 <a:cs typeface="Arial"/>
               </a:rPr>
-              <a:t>この情報は機密情報です。事前の書面による同意を得ずに組織外に開示することを禁じます。</a:t>
+              <a:t>この資料は関係者限りの厳秘の資料であり、</a:t>
+            </a:r>
+            <a:r>
+              <a:rPr kumimoji="0" lang="en-US" altLang="ja-JP" sz="600" b="0" i="0" u="none" strike="noStrike" kern="0" cap="none" spc="0" normalizeH="0" baseline="0" noProof="0" dirty="0">
+                <a:ln>
+                  <a:noFill/>
+                </a:ln>
+                <a:solidFill>
+                  <a:schemeClr val="tx1"/>
+                </a:solidFill>
+                <a:effectLst/>
+                <a:uLnTx/>
+                <a:uFillTx/>
+                <a:latin typeface="+mj-lt"/>
+                <a:ea typeface="+mn-ea"/>
+                <a:cs typeface="Arial"/>
+              </a:rPr>
+              <a:t>AKKODiS</a:t>
+            </a:r>
+            <a:r>
+              <a:rPr kumimoji="0" lang="ja-JP" altLang="en-US" sz="600" b="0" i="0" u="none" strike="noStrike" kern="0" cap="none" spc="0" normalizeH="0" baseline="0" noProof="0" dirty="0">
+                <a:ln>
+                  <a:noFill/>
+                </a:ln>
+                <a:solidFill>
+                  <a:schemeClr val="tx1"/>
+                </a:solidFill>
+                <a:effectLst/>
+                <a:uLnTx/>
+                <a:uFillTx/>
+                <a:latin typeface="+mj-lt"/>
+                <a:ea typeface="+mn-ea"/>
+                <a:cs typeface="Arial"/>
+              </a:rPr>
+              <a:t>コンサルティング株式会社に無断での使用・開示を禁じます。</a:t>
             </a:r>
           </a:p>
         </p:txBody>
       </p:sp>
       <p:pic>
         <p:nvPicPr>
-          <p:cNvPr id="2" name="グラフィックス 1">
+          <p:cNvPr id="6" name="グラフィックス 5">
             <a:extLst>
               <a:ext uri="{FF2B5EF4-FFF2-40B4-BE49-F238E27FC236}">
-                <a16:creationId xmlns:a16="http://schemas.microsoft.com/office/drawing/2014/main" id="{4FC2BBCD-067F-34AB-D091-30FBC9868AC5}"/>
+                <a16:creationId xmlns:a16="http://schemas.microsoft.com/office/drawing/2014/main" id="{D2DB961E-1E30-DA56-485A-714C57C39271}"/>
               </a:ext>
             </a:extLst>
           </p:cNvPr>
@@ -29328,84 +28509,12 @@
           </a:prstGeom>
         </p:spPr>
       </p:pic>
-      <p:sp>
-        <p:nvSpPr>
-          <p:cNvPr id="2" name="テキスト ボックス 1">
-            <a:extLst>
-              <a:ext uri="{FF2B5EF4-FFF2-40B4-BE49-F238E27FC236}">
-                <a16:creationId xmlns:a16="http://schemas.microsoft.com/office/drawing/2014/main" id="{5DEF3AC8-6EC9-B65B-78E5-FDE956929240}"/>
-              </a:ext>
-            </a:extLst>
-          </p:cNvPr>
-          <p:cNvSpPr txBox="1"/>
-          <p:nvPr userDrawn="1">
-            <p:extLst>
-              <p:ext uri="{1162E1C5-73C7-4A58-AE30-91384D911F3F}">
-                <p184:classification xmlns:p184="http://schemas.microsoft.com/office/powerpoint/2018/4/main" val="hdr"/>
-              </p:ext>
-            </p:extLst>
-          </p:nvPr>
-        </p:nvSpPr>
-        <p:spPr>
-          <a:xfrm>
-            <a:off x="63500" y="63500"/>
-            <a:ext cx="663575" cy="153888"/>
-          </a:xfrm>
-          <a:prstGeom prst="rect">
-            <a:avLst/>
-          </a:prstGeom>
-        </p:spPr>
-        <p:txBody>
-          <a:bodyPr horzOverflow="overflow" lIns="0" tIns="0" rIns="0" bIns="0">
-            <a:spAutoFit/>
-          </a:bodyPr>
-          <a:lstStyle/>
-          <a:p>
-            <a:pPr marL="0" indent="0" algn="l">
-              <a:buNone/>
-            </a:pPr>
-            <a:r>
-              <a:rPr lang="en-US" sz="1000" dirty="0">
-                <a:solidFill>
-                  <a:srgbClr val="000000"/>
-                </a:solidFill>
-                <a:latin typeface="+mj-ea"/>
-                <a:ea typeface="+mj-ea"/>
-                <a:cs typeface="Calibri" panose="020F0502020204030204" pitchFamily="34" charset="0"/>
-              </a:rPr>
-              <a:t>【</a:t>
-            </a:r>
-            <a:r>
-              <a:rPr lang="en-US" sz="1000" dirty="0" err="1">
-                <a:solidFill>
-                  <a:srgbClr val="000000"/>
-                </a:solidFill>
-                <a:latin typeface="+mj-ea"/>
-                <a:ea typeface="+mj-ea"/>
-                <a:cs typeface="Calibri" panose="020F0502020204030204" pitchFamily="34" charset="0"/>
-              </a:rPr>
-              <a:t>社外秘</a:t>
-            </a:r>
-            <a:r>
-              <a:rPr lang="en-US" sz="1000" dirty="0">
-                <a:solidFill>
-                  <a:srgbClr val="000000"/>
-                </a:solidFill>
-                <a:latin typeface="+mj-ea"/>
-                <a:ea typeface="+mj-ea"/>
-                <a:cs typeface="Calibri" panose="020F0502020204030204" pitchFamily="34" charset="0"/>
-              </a:rPr>
-              <a:t>】</a:t>
-            </a:r>
-          </a:p>
-        </p:txBody>
-      </p:sp>
       <p:grpSp>
         <p:nvGrpSpPr>
-          <p:cNvPr id="3" name="グループ化 2">
+          <p:cNvPr id="2" name="グループ化 1">
             <a:extLst>
               <a:ext uri="{FF2B5EF4-FFF2-40B4-BE49-F238E27FC236}">
-                <a16:creationId xmlns:a16="http://schemas.microsoft.com/office/drawing/2014/main" id="{29618AFD-4268-ADBE-B368-025F10F42074}"/>
+                <a16:creationId xmlns:a16="http://schemas.microsoft.com/office/drawing/2014/main" id="{2EA1096F-A293-BE4D-A265-A681C3EA2179}"/>
               </a:ext>
             </a:extLst>
           </p:cNvPr>
@@ -29422,10 +28531,10 @@
         </p:grpSpPr>
         <p:pic>
           <p:nvPicPr>
-            <p:cNvPr id="8" name="Logo The Adecco Group" descr="Une image contenant Police, Graphique, blanc, graphisme&#10;&#10;Description générée automatiquement">
+            <p:cNvPr id="25" name="Logo The Adecco Group" descr="Une image contenant Police, Graphique, blanc, graphisme&#10;&#10;Description générée automatiquement">
               <a:extLst>
                 <a:ext uri="{FF2B5EF4-FFF2-40B4-BE49-F238E27FC236}">
-                  <a16:creationId xmlns:a16="http://schemas.microsoft.com/office/drawing/2014/main" id="{7687AFF8-DFDC-3FA8-CA8D-B5A02060D9F1}"/>
+                  <a16:creationId xmlns:a16="http://schemas.microsoft.com/office/drawing/2014/main" id="{6241775C-A147-AD0C-663F-21B26FCFBBDB}"/>
                 </a:ext>
               </a:extLst>
             </p:cNvPr>
@@ -29468,10 +28577,10 @@
         </p:pic>
         <p:pic>
           <p:nvPicPr>
-            <p:cNvPr id="14" name="IMG_Akkodis is part">
+            <p:cNvPr id="26" name="IMG_Akkodis is part">
               <a:extLst>
                 <a:ext uri="{FF2B5EF4-FFF2-40B4-BE49-F238E27FC236}">
-                  <a16:creationId xmlns:a16="http://schemas.microsoft.com/office/drawing/2014/main" id="{4D725098-1159-800A-60EB-9F8323CE9E3A}"/>
+                  <a16:creationId xmlns:a16="http://schemas.microsoft.com/office/drawing/2014/main" id="{1084AFB9-696C-427C-653B-F39DF2C3DA75}"/>
                 </a:ext>
               </a:extLst>
             </p:cNvPr>
@@ -29506,10 +28615,10 @@
       </p:grpSp>
       <p:pic>
         <p:nvPicPr>
-          <p:cNvPr id="5" name="図 4" descr="挿絵 が含まれている画像&#10;&#10;自動的に生成された説明">
+          <p:cNvPr id="27" name="図 26" descr="挿絵 が含まれている画像&#10;&#10;自動的に生成された説明">
             <a:extLst>
               <a:ext uri="{FF2B5EF4-FFF2-40B4-BE49-F238E27FC236}">
-                <a16:creationId xmlns:a16="http://schemas.microsoft.com/office/drawing/2014/main" id="{4442D6EC-3147-16D7-44A8-D146151A795F}"/>
+                <a16:creationId xmlns:a16="http://schemas.microsoft.com/office/drawing/2014/main" id="{B8A881F6-C91F-068E-FCAB-2363BE99C4B8}"/>
               </a:ext>
             </a:extLst>
           </p:cNvPr>
@@ -29875,61 +28984,12 @@
           </a:p>
         </p:txBody>
       </p:sp>
-      <p:sp>
-        <p:nvSpPr>
-          <p:cNvPr id="5" name="テキスト ボックス 4">
-            <a:extLst>
-              <a:ext uri="{FF2B5EF4-FFF2-40B4-BE49-F238E27FC236}">
-                <a16:creationId xmlns:a16="http://schemas.microsoft.com/office/drawing/2014/main" id="{393DE6C6-49D0-5323-96E7-A029A118351D}"/>
-              </a:ext>
-            </a:extLst>
-          </p:cNvPr>
-          <p:cNvSpPr txBox="1"/>
-          <p:nvPr userDrawn="1"/>
-        </p:nvSpPr>
-        <p:spPr>
-          <a:xfrm>
-            <a:off x="313426" y="355959"/>
-            <a:ext cx="878216" cy="338554"/>
-          </a:xfrm>
-          <a:prstGeom prst="rect">
-            <a:avLst/>
-          </a:prstGeom>
-          <a:solidFill>
-            <a:schemeClr val="bg1"/>
-          </a:solidFill>
-          <a:ln w="28575">
-            <a:noFill/>
-          </a:ln>
-        </p:spPr>
-        <p:txBody>
-          <a:bodyPr wrap="square" rtlCol="0">
-            <a:spAutoFit/>
-          </a:bodyPr>
-          <a:lstStyle/>
-          <a:p>
-            <a:pPr marL="0" indent="0" algn="ctr">
-              <a:buNone/>
-            </a:pPr>
-            <a:r>
-              <a:rPr kumimoji="1" lang="ja-JP" altLang="en-US" b="1" dirty="0">
-                <a:solidFill>
-                  <a:schemeClr val="tx1"/>
-                </a:solidFill>
-                <a:latin typeface="Meiryo UI" panose="020B0604030504040204" pitchFamily="50" charset="-128"/>
-                <a:ea typeface="Meiryo UI" panose="020B0604030504040204" pitchFamily="50" charset="-128"/>
-              </a:rPr>
-              <a:t>社外秘</a:t>
-            </a:r>
-          </a:p>
-        </p:txBody>
-      </p:sp>
       <p:pic>
         <p:nvPicPr>
-          <p:cNvPr id="6" name="グラフィックス 5">
+          <p:cNvPr id="5" name="グラフィックス 4">
             <a:extLst>
               <a:ext uri="{FF2B5EF4-FFF2-40B4-BE49-F238E27FC236}">
-                <a16:creationId xmlns:a16="http://schemas.microsoft.com/office/drawing/2014/main" id="{63016DE8-026C-41E9-350A-4C24E777FF36}"/>
+                <a16:creationId xmlns:a16="http://schemas.microsoft.com/office/drawing/2014/main" id="{C5F026E4-ADE3-BD13-2D59-71323F94CA63}"/>
               </a:ext>
             </a:extLst>
           </p:cNvPr>
@@ -30907,7 +29967,7 @@
               <a:defRPr/>
             </a:pPr>
             <a:r>
-              <a:rPr lang="fr-FR" dirty="0"/>
+              <a:rPr lang="fr-FR"/>
               <a:t>Insert Number and Chapter Title</a:t>
             </a:r>
           </a:p>
@@ -31200,10 +30260,10 @@
           <a:p>
             <a:pPr lvl="0"/>
             <a:r>
-              <a:rPr lang="fr-FR" dirty="0"/>
+              <a:rPr lang="fr-FR"/>
               <a:t>1</a:t>
             </a:r>
-            <a:endParaRPr lang="en-US" dirty="0"/>
+            <a:endParaRPr lang="en-US"/>
           </a:p>
         </p:txBody>
       </p:sp>
@@ -31249,91 +30309,19 @@
           <a:p>
             <a:pPr lvl="0"/>
             <a:r>
-              <a:rPr lang="fr-FR" dirty="0"/>
+              <a:rPr lang="fr-FR"/>
               <a:t>Click to insert a Title</a:t>
             </a:r>
-            <a:endParaRPr lang="en-US" dirty="0"/>
+            <a:endParaRPr lang="en-US"/>
           </a:p>
         </p:txBody>
       </p:sp>
       <p:sp>
         <p:nvSpPr>
-          <p:cNvPr id="4" name="テキスト ボックス 3">
+          <p:cNvPr id="6" name="TXT_@Akkodis">
             <a:extLst>
               <a:ext uri="{FF2B5EF4-FFF2-40B4-BE49-F238E27FC236}">
-                <a16:creationId xmlns:a16="http://schemas.microsoft.com/office/drawing/2014/main" id="{3BCCA48A-5907-963C-ED9D-740E5051AC16}"/>
-              </a:ext>
-            </a:extLst>
-          </p:cNvPr>
-          <p:cNvSpPr txBox="1"/>
-          <p:nvPr userDrawn="1">
-            <p:extLst>
-              <p:ext uri="{1162E1C5-73C7-4A58-AE30-91384D911F3F}">
-                <p184:classification xmlns:p184="http://schemas.microsoft.com/office/powerpoint/2018/4/main" val="hdr"/>
-              </p:ext>
-            </p:extLst>
-          </p:nvPr>
-        </p:nvSpPr>
-        <p:spPr>
-          <a:xfrm>
-            <a:off x="63500" y="63500"/>
-            <a:ext cx="663575" cy="153888"/>
-          </a:xfrm>
-          <a:prstGeom prst="rect">
-            <a:avLst/>
-          </a:prstGeom>
-        </p:spPr>
-        <p:txBody>
-          <a:bodyPr horzOverflow="overflow" lIns="0" tIns="0" rIns="0" bIns="0">
-            <a:spAutoFit/>
-          </a:bodyPr>
-          <a:lstStyle/>
-          <a:p>
-            <a:pPr marL="0" indent="0" algn="l">
-              <a:buNone/>
-            </a:pPr>
-            <a:r>
-              <a:rPr lang="en-US" sz="1000" dirty="0">
-                <a:solidFill>
-                  <a:srgbClr val="000000"/>
-                </a:solidFill>
-                <a:latin typeface="+mj-ea"/>
-                <a:ea typeface="+mj-ea"/>
-                <a:cs typeface="Calibri" panose="020F0502020204030204" pitchFamily="34" charset="0"/>
-              </a:rPr>
-              <a:t>【</a:t>
-            </a:r>
-            <a:r>
-              <a:rPr lang="en-US" sz="1000" dirty="0" err="1">
-                <a:solidFill>
-                  <a:srgbClr val="000000"/>
-                </a:solidFill>
-                <a:latin typeface="+mj-ea"/>
-                <a:ea typeface="+mj-ea"/>
-                <a:cs typeface="Calibri" panose="020F0502020204030204" pitchFamily="34" charset="0"/>
-              </a:rPr>
-              <a:t>社外秘</a:t>
-            </a:r>
-            <a:r>
-              <a:rPr lang="en-US" sz="1000" dirty="0">
-                <a:solidFill>
-                  <a:srgbClr val="000000"/>
-                </a:solidFill>
-                <a:latin typeface="+mj-ea"/>
-                <a:ea typeface="+mj-ea"/>
-                <a:cs typeface="Calibri" panose="020F0502020204030204" pitchFamily="34" charset="0"/>
-              </a:rPr>
-              <a:t>】</a:t>
-            </a:r>
-          </a:p>
-        </p:txBody>
-      </p:sp>
-      <p:sp>
-        <p:nvSpPr>
-          <p:cNvPr id="14" name="TXT_@Akkodis">
-            <a:extLst>
-              <a:ext uri="{FF2B5EF4-FFF2-40B4-BE49-F238E27FC236}">
-                <a16:creationId xmlns:a16="http://schemas.microsoft.com/office/drawing/2014/main" id="{501F030A-0410-ED6E-3923-D38083709AF3}"/>
+                <a16:creationId xmlns:a16="http://schemas.microsoft.com/office/drawing/2014/main" id="{8C4DB780-101A-B1D7-280D-5DA360343B6B}"/>
               </a:ext>
             </a:extLst>
           </p:cNvPr>
@@ -31342,7 +30330,7 @@
         </p:nvSpPr>
         <p:spPr>
           <a:xfrm>
-            <a:off x="5115358" y="6436014"/>
+            <a:off x="5115358" y="6420738"/>
             <a:ext cx="1961284" cy="421986"/>
           </a:xfrm>
           <a:prstGeom prst="rect">
@@ -31455,10 +30443,10 @@
       </p:sp>
       <p:sp>
         <p:nvSpPr>
-          <p:cNvPr id="15" name="TXT_@Akkodis">
+          <p:cNvPr id="14" name="TXT_@Akkodis">
             <a:extLst>
               <a:ext uri="{FF2B5EF4-FFF2-40B4-BE49-F238E27FC236}">
-                <a16:creationId xmlns:a16="http://schemas.microsoft.com/office/drawing/2014/main" id="{1052A332-745B-13DF-B2CD-8F7FB11D5CA8}"/>
+                <a16:creationId xmlns:a16="http://schemas.microsoft.com/office/drawing/2014/main" id="{CBB1C061-75DF-5C26-A0FC-4C11A4346293}"/>
               </a:ext>
             </a:extLst>
           </p:cNvPr>
@@ -31467,8 +30455,8 @@
         </p:nvSpPr>
         <p:spPr>
           <a:xfrm>
-            <a:off x="0" y="6436014"/>
-            <a:ext cx="4114800" cy="421986"/>
+            <a:off x="0" y="6420738"/>
+            <a:ext cx="4480560" cy="421986"/>
           </a:xfrm>
           <a:prstGeom prst="rect">
             <a:avLst/>
@@ -31511,7 +30499,7 @@
               <a:buNone/>
             </a:pPr>
             <a:r>
-              <a:rPr kumimoji="0" lang="ja-JP" altLang="en-US" sz="700" b="0" i="0" u="none" strike="noStrike" kern="0" cap="none" spc="0" normalizeH="0" baseline="0" noProof="0" dirty="0">
+              <a:rPr kumimoji="0" lang="ja-JP" altLang="en-US" sz="600" b="0" i="0" u="none" strike="noStrike" kern="0" cap="none" spc="0" normalizeH="0" baseline="0" noProof="0" dirty="0">
                 <a:ln>
                   <a:noFill/>
                 </a:ln>
@@ -31521,21 +30509,55 @@
                 <a:effectLst/>
                 <a:uLnTx/>
                 <a:uFillTx/>
-                <a:latin typeface="Arial"/>
+                <a:latin typeface="+mj-lt"/>
                 <a:ea typeface="+mn-ea"/>
                 <a:cs typeface="Arial"/>
               </a:rPr>
-              <a:t>この情報は機密情報です。事前の書面による同意を得ずに組織外に開示することを禁じます。</a:t>
+              <a:t>この資料は関係者限りの厳秘の資料であり、</a:t>
+            </a:r>
+            <a:r>
+              <a:rPr kumimoji="0" lang="en-US" altLang="ja-JP" sz="600" b="0" i="0" u="none" strike="noStrike" kern="0" cap="none" spc="0" normalizeH="0" baseline="0" noProof="0" dirty="0">
+                <a:ln>
+                  <a:noFill/>
+                </a:ln>
+                <a:solidFill>
+                  <a:schemeClr val="tx1"/>
+                </a:solidFill>
+                <a:effectLst/>
+                <a:uLnTx/>
+                <a:uFillTx/>
+                <a:latin typeface="+mj-lt"/>
+                <a:ea typeface="+mn-ea"/>
+                <a:cs typeface="Arial"/>
+              </a:rPr>
+              <a:t>AKKODiS</a:t>
+            </a:r>
+            <a:r>
+              <a:rPr kumimoji="0" lang="ja-JP" altLang="en-US" sz="600" b="0" i="0" u="none" strike="noStrike" kern="0" cap="none" spc="0" normalizeH="0" baseline="0" noProof="0" dirty="0">
+                <a:ln>
+                  <a:noFill/>
+                </a:ln>
+                <a:solidFill>
+                  <a:schemeClr val="tx1"/>
+                </a:solidFill>
+                <a:effectLst/>
+                <a:uLnTx/>
+                <a:uFillTx/>
+                <a:latin typeface="+mj-lt"/>
+                <a:ea typeface="+mn-ea"/>
+                <a:cs typeface="Arial"/>
+              </a:rPr>
+              <a:t>コンサルティング株式会社に無断での使用・開示を禁じます。</a:t>
             </a:r>
           </a:p>
         </p:txBody>
       </p:sp>
       <p:pic>
         <p:nvPicPr>
-          <p:cNvPr id="5" name="グラフィックス 4">
+          <p:cNvPr id="4" name="グラフィックス 3">
             <a:extLst>
               <a:ext uri="{FF2B5EF4-FFF2-40B4-BE49-F238E27FC236}">
-                <a16:creationId xmlns:a16="http://schemas.microsoft.com/office/drawing/2014/main" id="{EF1C8B68-F029-E09F-3A5C-9C3F2F610E3B}"/>
+                <a16:creationId xmlns:a16="http://schemas.microsoft.com/office/drawing/2014/main" id="{8DBFFFF7-2E32-EF1E-E0FE-4AD8A29ADBF9}"/>
               </a:ext>
             </a:extLst>
           </p:cNvPr>
@@ -32712,7 +31734,7 @@
               <a:defRPr/>
             </a:pPr>
             <a:r>
-              <a:rPr lang="fr-FR" dirty="0"/>
+              <a:rPr lang="fr-FR"/>
               <a:t>Insert Number and Chapter Title</a:t>
             </a:r>
           </a:p>
@@ -33165,82 +32187,10 @@
       </p:sp>
       <p:sp>
         <p:nvSpPr>
-          <p:cNvPr id="3" name="テキスト ボックス 2">
+          <p:cNvPr id="13" name="TXT_@Akkodis">
             <a:extLst>
               <a:ext uri="{FF2B5EF4-FFF2-40B4-BE49-F238E27FC236}">
-                <a16:creationId xmlns:a16="http://schemas.microsoft.com/office/drawing/2014/main" id="{47E75173-BEFB-45AE-E91A-654FD2290154}"/>
-              </a:ext>
-            </a:extLst>
-          </p:cNvPr>
-          <p:cNvSpPr txBox="1"/>
-          <p:nvPr userDrawn="1">
-            <p:extLst>
-              <p:ext uri="{1162E1C5-73C7-4A58-AE30-91384D911F3F}">
-                <p184:classification xmlns:p184="http://schemas.microsoft.com/office/powerpoint/2018/4/main" val="hdr"/>
-              </p:ext>
-            </p:extLst>
-          </p:nvPr>
-        </p:nvSpPr>
-        <p:spPr>
-          <a:xfrm>
-            <a:off x="63500" y="63500"/>
-            <a:ext cx="663575" cy="153888"/>
-          </a:xfrm>
-          <a:prstGeom prst="rect">
-            <a:avLst/>
-          </a:prstGeom>
-        </p:spPr>
-        <p:txBody>
-          <a:bodyPr horzOverflow="overflow" lIns="0" tIns="0" rIns="0" bIns="0">
-            <a:spAutoFit/>
-          </a:bodyPr>
-          <a:lstStyle/>
-          <a:p>
-            <a:pPr marL="0" indent="0" algn="l">
-              <a:buNone/>
-            </a:pPr>
-            <a:r>
-              <a:rPr lang="en-US" sz="1000" dirty="0">
-                <a:solidFill>
-                  <a:srgbClr val="000000"/>
-                </a:solidFill>
-                <a:latin typeface="+mj-ea"/>
-                <a:ea typeface="+mj-ea"/>
-                <a:cs typeface="Calibri" panose="020F0502020204030204" pitchFamily="34" charset="0"/>
-              </a:rPr>
-              <a:t>【</a:t>
-            </a:r>
-            <a:r>
-              <a:rPr lang="en-US" sz="1000" dirty="0" err="1">
-                <a:solidFill>
-                  <a:srgbClr val="000000"/>
-                </a:solidFill>
-                <a:latin typeface="+mj-ea"/>
-                <a:ea typeface="+mj-ea"/>
-                <a:cs typeface="Calibri" panose="020F0502020204030204" pitchFamily="34" charset="0"/>
-              </a:rPr>
-              <a:t>社外秘</a:t>
-            </a:r>
-            <a:r>
-              <a:rPr lang="en-US" sz="1000" dirty="0">
-                <a:solidFill>
-                  <a:srgbClr val="000000"/>
-                </a:solidFill>
-                <a:latin typeface="+mj-ea"/>
-                <a:ea typeface="+mj-ea"/>
-                <a:cs typeface="Calibri" panose="020F0502020204030204" pitchFamily="34" charset="0"/>
-              </a:rPr>
-              <a:t>】</a:t>
-            </a:r>
-          </a:p>
-        </p:txBody>
-      </p:sp>
-      <p:sp>
-        <p:nvSpPr>
-          <p:cNvPr id="25" name="TXT_@Akkodis">
-            <a:extLst>
-              <a:ext uri="{FF2B5EF4-FFF2-40B4-BE49-F238E27FC236}">
-                <a16:creationId xmlns:a16="http://schemas.microsoft.com/office/drawing/2014/main" id="{E7459249-E7A1-453F-8B3F-92D941CEA18E}"/>
+                <a16:creationId xmlns:a16="http://schemas.microsoft.com/office/drawing/2014/main" id="{CA40F835-0E85-1CB1-8316-E0F4A1733EB0}"/>
               </a:ext>
             </a:extLst>
           </p:cNvPr>
@@ -33249,7 +32199,7 @@
         </p:nvSpPr>
         <p:spPr>
           <a:xfrm>
-            <a:off x="5115358" y="6436014"/>
+            <a:off x="5115358" y="6420738"/>
             <a:ext cx="1961284" cy="421986"/>
           </a:xfrm>
           <a:prstGeom prst="rect">
@@ -33362,10 +32312,10 @@
       </p:sp>
       <p:sp>
         <p:nvSpPr>
-          <p:cNvPr id="26" name="TXT_@Akkodis">
+          <p:cNvPr id="25" name="TXT_@Akkodis">
             <a:extLst>
               <a:ext uri="{FF2B5EF4-FFF2-40B4-BE49-F238E27FC236}">
-                <a16:creationId xmlns:a16="http://schemas.microsoft.com/office/drawing/2014/main" id="{24976A26-1D17-06C1-2532-D5880AD0F2F9}"/>
+                <a16:creationId xmlns:a16="http://schemas.microsoft.com/office/drawing/2014/main" id="{0D2546B5-9D15-F3BE-A6E0-D7305D050B2F}"/>
               </a:ext>
             </a:extLst>
           </p:cNvPr>
@@ -33374,8 +32324,8 @@
         </p:nvSpPr>
         <p:spPr>
           <a:xfrm>
-            <a:off x="0" y="6436014"/>
-            <a:ext cx="4114800" cy="421986"/>
+            <a:off x="0" y="6420738"/>
+            <a:ext cx="4480560" cy="421986"/>
           </a:xfrm>
           <a:prstGeom prst="rect">
             <a:avLst/>
@@ -33418,7 +32368,7 @@
               <a:buNone/>
             </a:pPr>
             <a:r>
-              <a:rPr kumimoji="0" lang="ja-JP" altLang="en-US" sz="700" b="0" i="0" u="none" strike="noStrike" kern="0" cap="none" spc="0" normalizeH="0" baseline="0" noProof="0" dirty="0">
+              <a:rPr kumimoji="0" lang="ja-JP" altLang="en-US" sz="600" b="0" i="0" u="none" strike="noStrike" kern="0" cap="none" spc="0" normalizeH="0" baseline="0" noProof="0" dirty="0">
                 <a:ln>
                   <a:noFill/>
                 </a:ln>
@@ -33428,21 +32378,55 @@
                 <a:effectLst/>
                 <a:uLnTx/>
                 <a:uFillTx/>
-                <a:latin typeface="Arial"/>
+                <a:latin typeface="+mj-lt"/>
                 <a:ea typeface="+mn-ea"/>
                 <a:cs typeface="Arial"/>
               </a:rPr>
-              <a:t>この情報は機密情報です。事前の書面による同意を得ずに組織外に開示することを禁じます。</a:t>
+              <a:t>この資料は関係者限りの厳秘の資料であり、</a:t>
+            </a:r>
+            <a:r>
+              <a:rPr kumimoji="0" lang="en-US" altLang="ja-JP" sz="600" b="0" i="0" u="none" strike="noStrike" kern="0" cap="none" spc="0" normalizeH="0" baseline="0" noProof="0" dirty="0">
+                <a:ln>
+                  <a:noFill/>
+                </a:ln>
+                <a:solidFill>
+                  <a:schemeClr val="tx1"/>
+                </a:solidFill>
+                <a:effectLst/>
+                <a:uLnTx/>
+                <a:uFillTx/>
+                <a:latin typeface="+mj-lt"/>
+                <a:ea typeface="+mn-ea"/>
+                <a:cs typeface="Arial"/>
+              </a:rPr>
+              <a:t>AKKODiS</a:t>
+            </a:r>
+            <a:r>
+              <a:rPr kumimoji="0" lang="ja-JP" altLang="en-US" sz="600" b="0" i="0" u="none" strike="noStrike" kern="0" cap="none" spc="0" normalizeH="0" baseline="0" noProof="0" dirty="0">
+                <a:ln>
+                  <a:noFill/>
+                </a:ln>
+                <a:solidFill>
+                  <a:schemeClr val="tx1"/>
+                </a:solidFill>
+                <a:effectLst/>
+                <a:uLnTx/>
+                <a:uFillTx/>
+                <a:latin typeface="+mj-lt"/>
+                <a:ea typeface="+mn-ea"/>
+                <a:cs typeface="Arial"/>
+              </a:rPr>
+              <a:t>コンサルティング株式会社に無断での使用・開示を禁じます。</a:t>
             </a:r>
           </a:p>
         </p:txBody>
       </p:sp>
       <p:pic>
         <p:nvPicPr>
-          <p:cNvPr id="12" name="グラフィックス 11">
+          <p:cNvPr id="3" name="グラフィックス 2">
             <a:extLst>
               <a:ext uri="{FF2B5EF4-FFF2-40B4-BE49-F238E27FC236}">
-                <a16:creationId xmlns:a16="http://schemas.microsoft.com/office/drawing/2014/main" id="{FFB48D2A-DDF5-63A0-7075-7975566CC136}"/>
+                <a16:creationId xmlns:a16="http://schemas.microsoft.com/office/drawing/2014/main" id="{1CF907BD-64F8-8FC8-92DB-5FDE0B04E3C4}"/>
               </a:ext>
             </a:extLst>
           </p:cNvPr>
@@ -34270,7 +33254,7 @@
               <a:defRPr/>
             </a:pPr>
             <a:r>
-              <a:rPr lang="fr-FR" dirty="0"/>
+              <a:rPr lang="fr-FR"/>
               <a:t>Insert Number and Chapter Title</a:t>
             </a:r>
           </a:p>
@@ -34723,82 +33707,10 @@
       </p:sp>
       <p:sp>
         <p:nvSpPr>
-          <p:cNvPr id="7" name="テキスト ボックス 6">
+          <p:cNvPr id="9" name="TXT_@Akkodis">
             <a:extLst>
               <a:ext uri="{FF2B5EF4-FFF2-40B4-BE49-F238E27FC236}">
-                <a16:creationId xmlns:a16="http://schemas.microsoft.com/office/drawing/2014/main" id="{446B68CC-A53F-690E-62EA-B4E4F90A916D}"/>
-              </a:ext>
-            </a:extLst>
-          </p:cNvPr>
-          <p:cNvSpPr txBox="1"/>
-          <p:nvPr userDrawn="1">
-            <p:extLst>
-              <p:ext uri="{1162E1C5-73C7-4A58-AE30-91384D911F3F}">
-                <p184:classification xmlns:p184="http://schemas.microsoft.com/office/powerpoint/2018/4/main" val="hdr"/>
-              </p:ext>
-            </p:extLst>
-          </p:nvPr>
-        </p:nvSpPr>
-        <p:spPr>
-          <a:xfrm>
-            <a:off x="63500" y="63500"/>
-            <a:ext cx="663575" cy="153888"/>
-          </a:xfrm>
-          <a:prstGeom prst="rect">
-            <a:avLst/>
-          </a:prstGeom>
-        </p:spPr>
-        <p:txBody>
-          <a:bodyPr horzOverflow="overflow" lIns="0" tIns="0" rIns="0" bIns="0">
-            <a:spAutoFit/>
-          </a:bodyPr>
-          <a:lstStyle/>
-          <a:p>
-            <a:pPr marL="0" indent="0" algn="l">
-              <a:buNone/>
-            </a:pPr>
-            <a:r>
-              <a:rPr lang="en-US" sz="1000" dirty="0">
-                <a:solidFill>
-                  <a:srgbClr val="000000"/>
-                </a:solidFill>
-                <a:latin typeface="+mj-ea"/>
-                <a:ea typeface="+mj-ea"/>
-                <a:cs typeface="Calibri" panose="020F0502020204030204" pitchFamily="34" charset="0"/>
-              </a:rPr>
-              <a:t>【</a:t>
-            </a:r>
-            <a:r>
-              <a:rPr lang="en-US" sz="1000" dirty="0" err="1">
-                <a:solidFill>
-                  <a:srgbClr val="000000"/>
-                </a:solidFill>
-                <a:latin typeface="+mj-ea"/>
-                <a:ea typeface="+mj-ea"/>
-                <a:cs typeface="Calibri" panose="020F0502020204030204" pitchFamily="34" charset="0"/>
-              </a:rPr>
-              <a:t>社外秘</a:t>
-            </a:r>
-            <a:r>
-              <a:rPr lang="en-US" sz="1000" dirty="0">
-                <a:solidFill>
-                  <a:srgbClr val="000000"/>
-                </a:solidFill>
-                <a:latin typeface="+mj-ea"/>
-                <a:ea typeface="+mj-ea"/>
-                <a:cs typeface="Calibri" panose="020F0502020204030204" pitchFamily="34" charset="0"/>
-              </a:rPr>
-              <a:t>】</a:t>
-            </a:r>
-          </a:p>
-        </p:txBody>
-      </p:sp>
-      <p:sp>
-        <p:nvSpPr>
-          <p:cNvPr id="21" name="TXT_@Akkodis">
-            <a:extLst>
-              <a:ext uri="{FF2B5EF4-FFF2-40B4-BE49-F238E27FC236}">
-                <a16:creationId xmlns:a16="http://schemas.microsoft.com/office/drawing/2014/main" id="{9A9AE058-EBD3-6479-CD85-AB314AA712BF}"/>
+                <a16:creationId xmlns:a16="http://schemas.microsoft.com/office/drawing/2014/main" id="{0199F568-DDFE-222E-A609-8DB39FCB3EE4}"/>
               </a:ext>
             </a:extLst>
           </p:cNvPr>
@@ -34807,7 +33719,7 @@
         </p:nvSpPr>
         <p:spPr>
           <a:xfrm>
-            <a:off x="4124758" y="6436014"/>
+            <a:off x="4007717" y="6420738"/>
             <a:ext cx="1961284" cy="421986"/>
           </a:xfrm>
           <a:prstGeom prst="rect">
@@ -34920,10 +33832,10 @@
       </p:sp>
       <p:sp>
         <p:nvSpPr>
-          <p:cNvPr id="22" name="TXT_@Akkodis">
+          <p:cNvPr id="21" name="TXT_@Akkodis">
             <a:extLst>
               <a:ext uri="{FF2B5EF4-FFF2-40B4-BE49-F238E27FC236}">
-                <a16:creationId xmlns:a16="http://schemas.microsoft.com/office/drawing/2014/main" id="{CCD6D970-9BA0-26AD-3770-0CC25E0C2CA7}"/>
+                <a16:creationId xmlns:a16="http://schemas.microsoft.com/office/drawing/2014/main" id="{0DE2ED12-90E4-FF52-066F-AEABE89858BE}"/>
               </a:ext>
             </a:extLst>
           </p:cNvPr>
@@ -34932,8 +33844,8 @@
         </p:nvSpPr>
         <p:spPr>
           <a:xfrm>
-            <a:off x="0" y="6436014"/>
-            <a:ext cx="4114800" cy="421986"/>
+            <a:off x="0" y="6420738"/>
+            <a:ext cx="4480560" cy="421986"/>
           </a:xfrm>
           <a:prstGeom prst="rect">
             <a:avLst/>
@@ -34976,7 +33888,7 @@
               <a:buNone/>
             </a:pPr>
             <a:r>
-              <a:rPr kumimoji="0" lang="ja-JP" altLang="en-US" sz="700" b="0" i="0" u="none" strike="noStrike" kern="0" cap="none" spc="0" normalizeH="0" baseline="0" noProof="0" dirty="0">
+              <a:rPr kumimoji="0" lang="ja-JP" altLang="en-US" sz="600" b="0" i="0" u="none" strike="noStrike" kern="0" cap="none" spc="0" normalizeH="0" baseline="0" noProof="0" dirty="0">
                 <a:ln>
                   <a:noFill/>
                 </a:ln>
@@ -34986,21 +33898,55 @@
                 <a:effectLst/>
                 <a:uLnTx/>
                 <a:uFillTx/>
-                <a:latin typeface="Arial"/>
+                <a:latin typeface="+mj-lt"/>
                 <a:ea typeface="+mn-ea"/>
                 <a:cs typeface="Arial"/>
               </a:rPr>
-              <a:t>この情報は機密情報です。事前の書面による同意を得ずに組織外に開示することを禁じます。</a:t>
+              <a:t>この資料は関係者限りの厳秘の資料であり、</a:t>
+            </a:r>
+            <a:r>
+              <a:rPr kumimoji="0" lang="en-US" altLang="ja-JP" sz="600" b="0" i="0" u="none" strike="noStrike" kern="0" cap="none" spc="0" normalizeH="0" baseline="0" noProof="0" dirty="0">
+                <a:ln>
+                  <a:noFill/>
+                </a:ln>
+                <a:solidFill>
+                  <a:schemeClr val="tx1"/>
+                </a:solidFill>
+                <a:effectLst/>
+                <a:uLnTx/>
+                <a:uFillTx/>
+                <a:latin typeface="+mj-lt"/>
+                <a:ea typeface="+mn-ea"/>
+                <a:cs typeface="Arial"/>
+              </a:rPr>
+              <a:t>AKKODiS</a:t>
+            </a:r>
+            <a:r>
+              <a:rPr kumimoji="0" lang="ja-JP" altLang="en-US" sz="600" b="0" i="0" u="none" strike="noStrike" kern="0" cap="none" spc="0" normalizeH="0" baseline="0" noProof="0" dirty="0">
+                <a:ln>
+                  <a:noFill/>
+                </a:ln>
+                <a:solidFill>
+                  <a:schemeClr val="tx1"/>
+                </a:solidFill>
+                <a:effectLst/>
+                <a:uLnTx/>
+                <a:uFillTx/>
+                <a:latin typeface="+mj-lt"/>
+                <a:ea typeface="+mn-ea"/>
+                <a:cs typeface="Arial"/>
+              </a:rPr>
+              <a:t>コンサルティング株式会社に無断での使用・開示を禁じます。</a:t>
             </a:r>
           </a:p>
         </p:txBody>
       </p:sp>
       <p:pic>
         <p:nvPicPr>
-          <p:cNvPr id="9" name="グラフィックス 8">
+          <p:cNvPr id="7" name="グラフィックス 6">
             <a:extLst>
               <a:ext uri="{FF2B5EF4-FFF2-40B4-BE49-F238E27FC236}">
-                <a16:creationId xmlns:a16="http://schemas.microsoft.com/office/drawing/2014/main" id="{AB957952-2C3C-6218-EABF-E6CEECFB2D7C}"/>
+                <a16:creationId xmlns:a16="http://schemas.microsoft.com/office/drawing/2014/main" id="{AB24A9C2-28B4-D634-470C-1C75C3FBAE64}"/>
               </a:ext>
             </a:extLst>
           </p:cNvPr>
@@ -35673,82 +34619,10 @@
       </p:sp>
       <p:sp>
         <p:nvSpPr>
-          <p:cNvPr id="5" name="テキスト ボックス 4">
+          <p:cNvPr id="6" name="TXT_@Akkodis">
             <a:extLst>
               <a:ext uri="{FF2B5EF4-FFF2-40B4-BE49-F238E27FC236}">
-                <a16:creationId xmlns:a16="http://schemas.microsoft.com/office/drawing/2014/main" id="{0AD5773D-0511-7921-CADB-12367CB2DA2B}"/>
-              </a:ext>
-            </a:extLst>
-          </p:cNvPr>
-          <p:cNvSpPr txBox="1"/>
-          <p:nvPr userDrawn="1">
-            <p:extLst>
-              <p:ext uri="{1162E1C5-73C7-4A58-AE30-91384D911F3F}">
-                <p184:classification xmlns:p184="http://schemas.microsoft.com/office/powerpoint/2018/4/main" val="hdr"/>
-              </p:ext>
-            </p:extLst>
-          </p:nvPr>
-        </p:nvSpPr>
-        <p:spPr>
-          <a:xfrm>
-            <a:off x="63500" y="63500"/>
-            <a:ext cx="663575" cy="153888"/>
-          </a:xfrm>
-          <a:prstGeom prst="rect">
-            <a:avLst/>
-          </a:prstGeom>
-        </p:spPr>
-        <p:txBody>
-          <a:bodyPr horzOverflow="overflow" lIns="0" tIns="0" rIns="0" bIns="0">
-            <a:spAutoFit/>
-          </a:bodyPr>
-          <a:lstStyle/>
-          <a:p>
-            <a:pPr marL="0" indent="0" algn="l">
-              <a:buNone/>
-            </a:pPr>
-            <a:r>
-              <a:rPr lang="en-US" sz="1000" dirty="0">
-                <a:solidFill>
-                  <a:srgbClr val="000000"/>
-                </a:solidFill>
-                <a:latin typeface="+mj-ea"/>
-                <a:ea typeface="+mj-ea"/>
-                <a:cs typeface="Calibri" panose="020F0502020204030204" pitchFamily="34" charset="0"/>
-              </a:rPr>
-              <a:t>【</a:t>
-            </a:r>
-            <a:r>
-              <a:rPr lang="en-US" sz="1000" dirty="0" err="1">
-                <a:solidFill>
-                  <a:srgbClr val="000000"/>
-                </a:solidFill>
-                <a:latin typeface="+mj-ea"/>
-                <a:ea typeface="+mj-ea"/>
-                <a:cs typeface="Calibri" panose="020F0502020204030204" pitchFamily="34" charset="0"/>
-              </a:rPr>
-              <a:t>社外秘</a:t>
-            </a:r>
-            <a:r>
-              <a:rPr lang="en-US" sz="1000" dirty="0">
-                <a:solidFill>
-                  <a:srgbClr val="000000"/>
-                </a:solidFill>
-                <a:latin typeface="+mj-ea"/>
-                <a:ea typeface="+mj-ea"/>
-                <a:cs typeface="Calibri" panose="020F0502020204030204" pitchFamily="34" charset="0"/>
-              </a:rPr>
-              <a:t>】</a:t>
-            </a:r>
-          </a:p>
-        </p:txBody>
-      </p:sp>
-      <p:sp>
-        <p:nvSpPr>
-          <p:cNvPr id="9" name="TXT_@Akkodis">
-            <a:extLst>
-              <a:ext uri="{FF2B5EF4-FFF2-40B4-BE49-F238E27FC236}">
-                <a16:creationId xmlns:a16="http://schemas.microsoft.com/office/drawing/2014/main" id="{8719ECA7-643C-5E7D-3AFC-0C4BB175BA0B}"/>
+                <a16:creationId xmlns:a16="http://schemas.microsoft.com/office/drawing/2014/main" id="{933D23FC-E964-9494-08E5-4EDE9FE8EA99}"/>
               </a:ext>
             </a:extLst>
           </p:cNvPr>
@@ -35757,7 +34631,7 @@
         </p:nvSpPr>
         <p:spPr>
           <a:xfrm>
-            <a:off x="5115358" y="6436014"/>
+            <a:off x="5115358" y="6420738"/>
             <a:ext cx="1961284" cy="421986"/>
           </a:xfrm>
           <a:prstGeom prst="rect">
@@ -35870,10 +34744,10 @@
       </p:sp>
       <p:sp>
         <p:nvSpPr>
-          <p:cNvPr id="10" name="TXT_@Akkodis">
+          <p:cNvPr id="9" name="TXT_@Akkodis">
             <a:extLst>
               <a:ext uri="{FF2B5EF4-FFF2-40B4-BE49-F238E27FC236}">
-                <a16:creationId xmlns:a16="http://schemas.microsoft.com/office/drawing/2014/main" id="{E25992B4-ECBA-B4BD-4597-0CADEBFEDA10}"/>
+                <a16:creationId xmlns:a16="http://schemas.microsoft.com/office/drawing/2014/main" id="{EEE77417-60EE-8B29-A6AB-A9697E4EE1FD}"/>
               </a:ext>
             </a:extLst>
           </p:cNvPr>
@@ -35882,8 +34756,8 @@
         </p:nvSpPr>
         <p:spPr>
           <a:xfrm>
-            <a:off x="0" y="6436014"/>
-            <a:ext cx="4114800" cy="421986"/>
+            <a:off x="0" y="6420738"/>
+            <a:ext cx="4480560" cy="421986"/>
           </a:xfrm>
           <a:prstGeom prst="rect">
             <a:avLst/>
@@ -35926,7 +34800,7 @@
               <a:buNone/>
             </a:pPr>
             <a:r>
-              <a:rPr kumimoji="0" lang="ja-JP" altLang="en-US" sz="700" b="0" i="0" u="none" strike="noStrike" kern="0" cap="none" spc="0" normalizeH="0" baseline="0" noProof="0" dirty="0">
+              <a:rPr kumimoji="0" lang="ja-JP" altLang="en-US" sz="600" b="0" i="0" u="none" strike="noStrike" kern="0" cap="none" spc="0" normalizeH="0" baseline="0" noProof="0" dirty="0">
                 <a:ln>
                   <a:noFill/>
                 </a:ln>
@@ -35936,21 +34810,55 @@
                 <a:effectLst/>
                 <a:uLnTx/>
                 <a:uFillTx/>
-                <a:latin typeface="Arial"/>
+                <a:latin typeface="+mj-lt"/>
                 <a:ea typeface="+mn-ea"/>
                 <a:cs typeface="Arial"/>
               </a:rPr>
-              <a:t>この情報は機密情報です。事前の書面による同意を得ずに組織外に開示することを禁じます。</a:t>
+              <a:t>この資料は関係者限りの厳秘の資料であり、</a:t>
+            </a:r>
+            <a:r>
+              <a:rPr kumimoji="0" lang="en-US" altLang="ja-JP" sz="600" b="0" i="0" u="none" strike="noStrike" kern="0" cap="none" spc="0" normalizeH="0" baseline="0" noProof="0" dirty="0">
+                <a:ln>
+                  <a:noFill/>
+                </a:ln>
+                <a:solidFill>
+                  <a:schemeClr val="tx1"/>
+                </a:solidFill>
+                <a:effectLst/>
+                <a:uLnTx/>
+                <a:uFillTx/>
+                <a:latin typeface="+mj-lt"/>
+                <a:ea typeface="+mn-ea"/>
+                <a:cs typeface="Arial"/>
+              </a:rPr>
+              <a:t>AKKODiS</a:t>
+            </a:r>
+            <a:r>
+              <a:rPr kumimoji="0" lang="ja-JP" altLang="en-US" sz="600" b="0" i="0" u="none" strike="noStrike" kern="0" cap="none" spc="0" normalizeH="0" baseline="0" noProof="0" dirty="0">
+                <a:ln>
+                  <a:noFill/>
+                </a:ln>
+                <a:solidFill>
+                  <a:schemeClr val="tx1"/>
+                </a:solidFill>
+                <a:effectLst/>
+                <a:uLnTx/>
+                <a:uFillTx/>
+                <a:latin typeface="+mj-lt"/>
+                <a:ea typeface="+mn-ea"/>
+                <a:cs typeface="Arial"/>
+              </a:rPr>
+              <a:t>コンサルティング株式会社に無断での使用・開示を禁じます。</a:t>
             </a:r>
           </a:p>
         </p:txBody>
       </p:sp>
       <p:pic>
         <p:nvPicPr>
-          <p:cNvPr id="6" name="グラフィックス 5">
+          <p:cNvPr id="5" name="グラフィックス 4">
             <a:extLst>
               <a:ext uri="{FF2B5EF4-FFF2-40B4-BE49-F238E27FC236}">
-                <a16:creationId xmlns:a16="http://schemas.microsoft.com/office/drawing/2014/main" id="{F725D555-10CC-AD9F-747F-B0088A0DC413}"/>
+                <a16:creationId xmlns:a16="http://schemas.microsoft.com/office/drawing/2014/main" id="{CE76B8C2-74E2-E87D-9481-2ECCA07963EB}"/>
               </a:ext>
             </a:extLst>
           </p:cNvPr>
@@ -36438,82 +35346,10 @@
       </p:sp>
       <p:sp>
         <p:nvSpPr>
-          <p:cNvPr id="4" name="テキスト ボックス 3">
+          <p:cNvPr id="6" name="TXT_@Akkodis">
             <a:extLst>
               <a:ext uri="{FF2B5EF4-FFF2-40B4-BE49-F238E27FC236}">
-                <a16:creationId xmlns:a16="http://schemas.microsoft.com/office/drawing/2014/main" id="{AF9F847D-E2D2-6BF5-8CB9-AA805A1C0BEF}"/>
-              </a:ext>
-            </a:extLst>
-          </p:cNvPr>
-          <p:cNvSpPr txBox="1"/>
-          <p:nvPr userDrawn="1">
-            <p:extLst>
-              <p:ext uri="{1162E1C5-73C7-4A58-AE30-91384D911F3F}">
-                <p184:classification xmlns:p184="http://schemas.microsoft.com/office/powerpoint/2018/4/main" val="hdr"/>
-              </p:ext>
-            </p:extLst>
-          </p:nvPr>
-        </p:nvSpPr>
-        <p:spPr>
-          <a:xfrm>
-            <a:off x="63500" y="63500"/>
-            <a:ext cx="663575" cy="153888"/>
-          </a:xfrm>
-          <a:prstGeom prst="rect">
-            <a:avLst/>
-          </a:prstGeom>
-        </p:spPr>
-        <p:txBody>
-          <a:bodyPr horzOverflow="overflow" lIns="0" tIns="0" rIns="0" bIns="0">
-            <a:spAutoFit/>
-          </a:bodyPr>
-          <a:lstStyle/>
-          <a:p>
-            <a:pPr marL="0" indent="0" algn="l">
-              <a:buNone/>
-            </a:pPr>
-            <a:r>
-              <a:rPr lang="en-US" sz="1000" dirty="0">
-                <a:solidFill>
-                  <a:srgbClr val="000000"/>
-                </a:solidFill>
-                <a:latin typeface="+mj-ea"/>
-                <a:ea typeface="+mj-ea"/>
-                <a:cs typeface="Calibri" panose="020F0502020204030204" pitchFamily="34" charset="0"/>
-              </a:rPr>
-              <a:t>【</a:t>
-            </a:r>
-            <a:r>
-              <a:rPr lang="en-US" sz="1000" dirty="0" err="1">
-                <a:solidFill>
-                  <a:srgbClr val="000000"/>
-                </a:solidFill>
-                <a:latin typeface="+mj-ea"/>
-                <a:ea typeface="+mj-ea"/>
-                <a:cs typeface="Calibri" panose="020F0502020204030204" pitchFamily="34" charset="0"/>
-              </a:rPr>
-              <a:t>社外秘</a:t>
-            </a:r>
-            <a:r>
-              <a:rPr lang="en-US" sz="1000" dirty="0">
-                <a:solidFill>
-                  <a:srgbClr val="000000"/>
-                </a:solidFill>
-                <a:latin typeface="+mj-ea"/>
-                <a:ea typeface="+mj-ea"/>
-                <a:cs typeface="Calibri" panose="020F0502020204030204" pitchFamily="34" charset="0"/>
-              </a:rPr>
-              <a:t>】</a:t>
-            </a:r>
-          </a:p>
-        </p:txBody>
-      </p:sp>
-      <p:sp>
-        <p:nvSpPr>
-          <p:cNvPr id="8" name="TXT_@Akkodis">
-            <a:extLst>
-              <a:ext uri="{FF2B5EF4-FFF2-40B4-BE49-F238E27FC236}">
-                <a16:creationId xmlns:a16="http://schemas.microsoft.com/office/drawing/2014/main" id="{EBD39F00-2C3C-3CA1-63C8-43657C87567F}"/>
+                <a16:creationId xmlns:a16="http://schemas.microsoft.com/office/drawing/2014/main" id="{6B8AE870-90D3-7AA0-C26E-BDE5240C8BE1}"/>
               </a:ext>
             </a:extLst>
           </p:cNvPr>
@@ -36522,7 +35358,7 @@
         </p:nvSpPr>
         <p:spPr>
           <a:xfrm>
-            <a:off x="5115358" y="6436014"/>
+            <a:off x="5115358" y="6420738"/>
             <a:ext cx="1961284" cy="421986"/>
           </a:xfrm>
           <a:prstGeom prst="rect">
@@ -36635,10 +35471,10 @@
       </p:sp>
       <p:sp>
         <p:nvSpPr>
-          <p:cNvPr id="9" name="TXT_@Akkodis">
+          <p:cNvPr id="8" name="TXT_@Akkodis">
             <a:extLst>
               <a:ext uri="{FF2B5EF4-FFF2-40B4-BE49-F238E27FC236}">
-                <a16:creationId xmlns:a16="http://schemas.microsoft.com/office/drawing/2014/main" id="{A61A55B1-0C83-AE0E-FF63-6D7B901A575D}"/>
+                <a16:creationId xmlns:a16="http://schemas.microsoft.com/office/drawing/2014/main" id="{B2D07F29-29A1-0643-B826-D9F879E0D6C0}"/>
               </a:ext>
             </a:extLst>
           </p:cNvPr>
@@ -36647,8 +35483,8 @@
         </p:nvSpPr>
         <p:spPr>
           <a:xfrm>
-            <a:off x="0" y="6436014"/>
-            <a:ext cx="4114800" cy="421986"/>
+            <a:off x="0" y="6420738"/>
+            <a:ext cx="4480560" cy="421986"/>
           </a:xfrm>
           <a:prstGeom prst="rect">
             <a:avLst/>
@@ -36691,7 +35527,7 @@
               <a:buNone/>
             </a:pPr>
             <a:r>
-              <a:rPr kumimoji="0" lang="ja-JP" altLang="en-US" sz="700" b="0" i="0" u="none" strike="noStrike" kern="0" cap="none" spc="0" normalizeH="0" baseline="0" noProof="0" dirty="0">
+              <a:rPr kumimoji="0" lang="ja-JP" altLang="en-US" sz="600" b="0" i="0" u="none" strike="noStrike" kern="0" cap="none" spc="0" normalizeH="0" baseline="0" noProof="0" dirty="0">
                 <a:ln>
                   <a:noFill/>
                 </a:ln>
@@ -36701,21 +35537,55 @@
                 <a:effectLst/>
                 <a:uLnTx/>
                 <a:uFillTx/>
-                <a:latin typeface="Arial"/>
+                <a:latin typeface="+mj-lt"/>
                 <a:ea typeface="+mn-ea"/>
                 <a:cs typeface="Arial"/>
               </a:rPr>
-              <a:t>この情報は機密情報です。事前の書面による同意を得ずに組織外に開示することを禁じます。</a:t>
+              <a:t>この資料は関係者限りの厳秘の資料であり、</a:t>
+            </a:r>
+            <a:r>
+              <a:rPr kumimoji="0" lang="en-US" altLang="ja-JP" sz="600" b="0" i="0" u="none" strike="noStrike" kern="0" cap="none" spc="0" normalizeH="0" baseline="0" noProof="0" dirty="0">
+                <a:ln>
+                  <a:noFill/>
+                </a:ln>
+                <a:solidFill>
+                  <a:schemeClr val="tx1"/>
+                </a:solidFill>
+                <a:effectLst/>
+                <a:uLnTx/>
+                <a:uFillTx/>
+                <a:latin typeface="+mj-lt"/>
+                <a:ea typeface="+mn-ea"/>
+                <a:cs typeface="Arial"/>
+              </a:rPr>
+              <a:t>AKKODiS</a:t>
+            </a:r>
+            <a:r>
+              <a:rPr kumimoji="0" lang="ja-JP" altLang="en-US" sz="600" b="0" i="0" u="none" strike="noStrike" kern="0" cap="none" spc="0" normalizeH="0" baseline="0" noProof="0" dirty="0">
+                <a:ln>
+                  <a:noFill/>
+                </a:ln>
+                <a:solidFill>
+                  <a:schemeClr val="tx1"/>
+                </a:solidFill>
+                <a:effectLst/>
+                <a:uLnTx/>
+                <a:uFillTx/>
+                <a:latin typeface="+mj-lt"/>
+                <a:ea typeface="+mn-ea"/>
+                <a:cs typeface="Arial"/>
+              </a:rPr>
+              <a:t>コンサルティング株式会社に無断での使用・開示を禁じます。</a:t>
             </a:r>
           </a:p>
         </p:txBody>
       </p:sp>
       <p:pic>
         <p:nvPicPr>
-          <p:cNvPr id="5" name="グラフィックス 4">
+          <p:cNvPr id="4" name="グラフィックス 3">
             <a:extLst>
               <a:ext uri="{FF2B5EF4-FFF2-40B4-BE49-F238E27FC236}">
-                <a16:creationId xmlns:a16="http://schemas.microsoft.com/office/drawing/2014/main" id="{A542A51B-49A1-E9DD-B2F3-BBA4EE7E7BDB}"/>
+                <a16:creationId xmlns:a16="http://schemas.microsoft.com/office/drawing/2014/main" id="{77A16A75-2BDE-E06D-33E7-A8F091BEB2AC}"/>
               </a:ext>
             </a:extLst>
           </p:cNvPr>
@@ -36781,257 +35651,6 @@
           <a:chExt cx="0" cy="0"/>
         </a:xfrm>
       </p:grpSpPr>
-      <p:sp>
-        <p:nvSpPr>
-          <p:cNvPr id="4" name="テキスト ボックス 3">
-            <a:extLst>
-              <a:ext uri="{FF2B5EF4-FFF2-40B4-BE49-F238E27FC236}">
-                <a16:creationId xmlns:a16="http://schemas.microsoft.com/office/drawing/2014/main" id="{B8847624-2781-31B3-E0E4-4CE83D5C6DD9}"/>
-              </a:ext>
-            </a:extLst>
-          </p:cNvPr>
-          <p:cNvSpPr txBox="1"/>
-          <p:nvPr userDrawn="1"/>
-        </p:nvSpPr>
-        <p:spPr>
-          <a:xfrm>
-            <a:off x="313426" y="355959"/>
-            <a:ext cx="878216" cy="338554"/>
-          </a:xfrm>
-          <a:prstGeom prst="rect">
-            <a:avLst/>
-          </a:prstGeom>
-          <a:solidFill>
-            <a:schemeClr val="tx1"/>
-          </a:solidFill>
-          <a:ln w="28575">
-            <a:noFill/>
-          </a:ln>
-        </p:spPr>
-        <p:txBody>
-          <a:bodyPr wrap="square" rtlCol="0">
-            <a:spAutoFit/>
-          </a:bodyPr>
-          <a:lstStyle/>
-          <a:p>
-            <a:pPr marL="0" indent="0" algn="ctr">
-              <a:buNone/>
-            </a:pPr>
-            <a:r>
-              <a:rPr kumimoji="1" lang="ja-JP" altLang="en-US" b="1" dirty="0">
-                <a:solidFill>
-                  <a:schemeClr val="tx2"/>
-                </a:solidFill>
-                <a:latin typeface="Meiryo UI" panose="020B0604030504040204" pitchFamily="50" charset="-128"/>
-                <a:ea typeface="Meiryo UI" panose="020B0604030504040204" pitchFamily="50" charset="-128"/>
-              </a:rPr>
-              <a:t>社外秘</a:t>
-            </a:r>
-          </a:p>
-        </p:txBody>
-      </p:sp>
-      <p:sp>
-        <p:nvSpPr>
-          <p:cNvPr id="6" name="TXT_@Akkodis">
-            <a:extLst>
-              <a:ext uri="{FF2B5EF4-FFF2-40B4-BE49-F238E27FC236}">
-                <a16:creationId xmlns:a16="http://schemas.microsoft.com/office/drawing/2014/main" id="{B2E96D8E-FE84-F65C-9B0D-75B0826A1979}"/>
-              </a:ext>
-            </a:extLst>
-          </p:cNvPr>
-          <p:cNvSpPr/>
-          <p:nvPr userDrawn="1"/>
-        </p:nvSpPr>
-        <p:spPr>
-          <a:xfrm>
-            <a:off x="5115358" y="6436014"/>
-            <a:ext cx="1961284" cy="421986"/>
-          </a:xfrm>
-          <a:prstGeom prst="rect">
-            <a:avLst/>
-          </a:prstGeom>
-          <a:noFill/>
-          <a:ln>
-            <a:noFill/>
-          </a:ln>
-        </p:spPr>
-        <p:style>
-          <a:lnRef idx="2">
-            <a:schemeClr val="accent1">
-              <a:shade val="15000"/>
-            </a:schemeClr>
-          </a:lnRef>
-          <a:fillRef idx="1">
-            <a:schemeClr val="accent1"/>
-          </a:fillRef>
-          <a:effectRef idx="0">
-            <a:schemeClr val="accent1"/>
-          </a:effectRef>
-          <a:fontRef idx="minor">
-            <a:schemeClr val="lt1"/>
-          </a:fontRef>
-        </p:style>
-        <p:txBody>
-          <a:bodyPr rtlCol="0" anchor="ctr">
-            <a:noAutofit/>
-          </a:bodyPr>
-          <a:lstStyle/>
-          <a:p>
-            <a:pPr marL="0" lvl="0" indent="0" algn="ctr" defTabSz="914400" rtl="0" eaLnBrk="1" latinLnBrk="0" hangingPunct="1">
-              <a:lnSpc>
-                <a:spcPct val="90000"/>
-              </a:lnSpc>
-              <a:spcBef>
-                <a:spcPts val="1000"/>
-              </a:spcBef>
-              <a:buFont typeface="Arial" panose="020B0604020202020204" pitchFamily="34" charset="0"/>
-              <a:buNone/>
-            </a:pPr>
-            <a:r>
-              <a:rPr kumimoji="0" lang="en-US" sz="800" b="0" i="0" u="none" strike="noStrike" kern="0" cap="none" spc="0" normalizeH="0" baseline="0" noProof="0" dirty="0">
-                <a:ln>
-                  <a:noFill/>
-                </a:ln>
-                <a:solidFill>
-                  <a:schemeClr val="tx1"/>
-                </a:solidFill>
-                <a:effectLst/>
-                <a:uLnTx/>
-                <a:uFillTx/>
-                <a:latin typeface="Arial"/>
-                <a:ea typeface="+mn-ea"/>
-                <a:cs typeface="Arial"/>
-              </a:rPr>
-              <a:t>© </a:t>
-            </a:r>
-            <a:r>
-              <a:rPr kumimoji="0" lang="en-US" altLang="ja-JP" sz="800" b="0" i="0" u="none" strike="noStrike" kern="0" cap="none" spc="0" normalizeH="0" baseline="0" noProof="0" dirty="0">
-                <a:ln>
-                  <a:noFill/>
-                </a:ln>
-                <a:solidFill>
-                  <a:schemeClr val="tx1"/>
-                </a:solidFill>
-                <a:effectLst/>
-                <a:uLnTx/>
-                <a:uFillTx/>
-                <a:latin typeface="Arial"/>
-                <a:ea typeface="+mn-ea"/>
-                <a:cs typeface="Arial"/>
-              </a:rPr>
-              <a:t>AKKODiS</a:t>
-            </a:r>
-            <a:r>
-              <a:rPr kumimoji="0" lang="ja-JP" altLang="en-US" sz="800" b="0" i="0" u="none" strike="noStrike" kern="0" cap="none" spc="0" normalizeH="0" baseline="0" noProof="0" dirty="0">
-                <a:ln>
-                  <a:noFill/>
-                </a:ln>
-                <a:solidFill>
-                  <a:schemeClr val="tx1"/>
-                </a:solidFill>
-                <a:effectLst/>
-                <a:uLnTx/>
-                <a:uFillTx/>
-                <a:latin typeface="Arial"/>
-                <a:ea typeface="+mn-ea"/>
-                <a:cs typeface="Arial"/>
-              </a:rPr>
-              <a:t>コンサルティング株式会社</a:t>
-            </a:r>
-            <a:endParaRPr kumimoji="0" lang="en-US" sz="800" b="0" i="0" u="none" strike="noStrike" kern="0" cap="none" spc="0" normalizeH="0" baseline="0" dirty="0">
-              <a:ln>
-                <a:noFill/>
-              </a:ln>
-              <a:solidFill>
-                <a:schemeClr val="tx1"/>
-              </a:solidFill>
-              <a:effectLst/>
-              <a:uLnTx/>
-              <a:uFillTx/>
-              <a:latin typeface="Arial"/>
-              <a:ea typeface="+mn-ea"/>
-              <a:cs typeface="Arial"/>
-            </a:endParaRPr>
-          </a:p>
-        </p:txBody>
-      </p:sp>
-      <p:sp>
-        <p:nvSpPr>
-          <p:cNvPr id="2" name="TXT_@Akkodis">
-            <a:extLst>
-              <a:ext uri="{FF2B5EF4-FFF2-40B4-BE49-F238E27FC236}">
-                <a16:creationId xmlns:a16="http://schemas.microsoft.com/office/drawing/2014/main" id="{F31F33EA-0ED9-BF68-D7A8-B16028278D07}"/>
-              </a:ext>
-            </a:extLst>
-          </p:cNvPr>
-          <p:cNvSpPr/>
-          <p:nvPr userDrawn="1"/>
-        </p:nvSpPr>
-        <p:spPr>
-          <a:xfrm>
-            <a:off x="0" y="6436014"/>
-            <a:ext cx="4114800" cy="421986"/>
-          </a:xfrm>
-          <a:prstGeom prst="rect">
-            <a:avLst/>
-          </a:prstGeom>
-          <a:noFill/>
-          <a:ln>
-            <a:noFill/>
-          </a:ln>
-        </p:spPr>
-        <p:style>
-          <a:lnRef idx="2">
-            <a:schemeClr val="accent1">
-              <a:shade val="15000"/>
-            </a:schemeClr>
-          </a:lnRef>
-          <a:fillRef idx="1">
-            <a:schemeClr val="accent1"/>
-          </a:fillRef>
-          <a:effectRef idx="0">
-            <a:schemeClr val="accent1"/>
-          </a:effectRef>
-          <a:fontRef idx="minor">
-            <a:schemeClr val="lt1"/>
-          </a:fontRef>
-        </p:style>
-        <p:txBody>
-          <a:bodyPr rtlCol="0" anchor="ctr">
-            <a:noAutofit/>
-          </a:bodyPr>
-          <a:lstStyle/>
-          <a:p>
-            <a:pPr marL="0" lvl="0" indent="0" algn="l" defTabSz="914400" rtl="0" eaLnBrk="1" latinLnBrk="0" hangingPunct="1">
-              <a:lnSpc>
-                <a:spcPct val="90000"/>
-              </a:lnSpc>
-              <a:spcBef>
-                <a:spcPts val="1000"/>
-              </a:spcBef>
-              <a:buFont typeface="Arial" panose="020B0604020202020204" pitchFamily="34" charset="0"/>
-              <a:buNone/>
-            </a:pPr>
-            <a:r>
-              <a:rPr kumimoji="0" lang="ja-JP" altLang="en-US" sz="700" b="0" i="0" u="none" strike="noStrike" kern="0" cap="none" spc="0" normalizeH="0" baseline="0" noProof="0" dirty="0">
-                <a:ln>
-                  <a:noFill/>
-                </a:ln>
-                <a:solidFill>
-                  <a:schemeClr val="tx1"/>
-                </a:solidFill>
-                <a:effectLst/>
-                <a:uLnTx/>
-                <a:uFillTx/>
-                <a:latin typeface="Arial"/>
-                <a:ea typeface="+mn-ea"/>
-                <a:cs typeface="Arial"/>
-              </a:rPr>
-              <a:t>この情報は機密情報です。事前の書面による同意を得ずに組織外に開示することを禁じます。</a:t>
-            </a:r>
-          </a:p>
-        </p:txBody>
-      </p:sp>
     </p:spTree>
     <p:extLst>
       <p:ext uri="{BB962C8B-B14F-4D97-AF65-F5344CB8AC3E}">
@@ -37398,208 +36017,6 @@
           <a:chExt cx="0" cy="0"/>
         </a:xfrm>
       </p:grpSpPr>
-      <p:sp>
-        <p:nvSpPr>
-          <p:cNvPr id="2" name="TXT_@Akkodis">
-            <a:extLst>
-              <a:ext uri="{FF2B5EF4-FFF2-40B4-BE49-F238E27FC236}">
-                <a16:creationId xmlns:a16="http://schemas.microsoft.com/office/drawing/2014/main" id="{C44C5091-8984-20EE-FF61-C2180E1E9850}"/>
-              </a:ext>
-            </a:extLst>
-          </p:cNvPr>
-          <p:cNvSpPr/>
-          <p:nvPr userDrawn="1"/>
-        </p:nvSpPr>
-        <p:spPr>
-          <a:xfrm>
-            <a:off x="5115358" y="6436014"/>
-            <a:ext cx="1961284" cy="421986"/>
-          </a:xfrm>
-          <a:prstGeom prst="rect">
-            <a:avLst/>
-          </a:prstGeom>
-          <a:noFill/>
-          <a:ln>
-            <a:noFill/>
-          </a:ln>
-        </p:spPr>
-        <p:style>
-          <a:lnRef idx="2">
-            <a:schemeClr val="accent1">
-              <a:shade val="15000"/>
-            </a:schemeClr>
-          </a:lnRef>
-          <a:fillRef idx="1">
-            <a:schemeClr val="accent1"/>
-          </a:fillRef>
-          <a:effectRef idx="0">
-            <a:schemeClr val="accent1"/>
-          </a:effectRef>
-          <a:fontRef idx="minor">
-            <a:schemeClr val="lt1"/>
-          </a:fontRef>
-        </p:style>
-        <p:txBody>
-          <a:bodyPr rtlCol="0" anchor="ctr">
-            <a:noAutofit/>
-          </a:bodyPr>
-          <a:lstStyle/>
-          <a:p>
-            <a:pPr marL="0" lvl="0" indent="0" algn="ctr" defTabSz="914400" rtl="0" eaLnBrk="1" latinLnBrk="0" hangingPunct="1">
-              <a:lnSpc>
-                <a:spcPct val="90000"/>
-              </a:lnSpc>
-              <a:spcBef>
-                <a:spcPts val="1000"/>
-              </a:spcBef>
-              <a:buFont typeface="Arial" panose="020B0604020202020204" pitchFamily="34" charset="0"/>
-              <a:buNone/>
-            </a:pPr>
-            <a:r>
-              <a:rPr kumimoji="0" lang="en-US" sz="800" b="0" i="0" u="none" strike="noStrike" kern="0" cap="none" spc="0" normalizeH="0" baseline="0" noProof="0" dirty="0">
-                <a:ln>
-                  <a:noFill/>
-                </a:ln>
-                <a:solidFill>
-                  <a:schemeClr val="tx1"/>
-                </a:solidFill>
-                <a:effectLst/>
-                <a:uLnTx/>
-                <a:uFillTx/>
-                <a:latin typeface="Arial"/>
-                <a:ea typeface="+mn-ea"/>
-                <a:cs typeface="Arial"/>
-              </a:rPr>
-              <a:t>© </a:t>
-            </a:r>
-            <a:r>
-              <a:rPr kumimoji="0" lang="en-US" altLang="ja-JP" sz="800" b="0" i="0" u="none" strike="noStrike" kern="0" cap="none" spc="0" normalizeH="0" baseline="0" noProof="0" dirty="0">
-                <a:ln>
-                  <a:noFill/>
-                </a:ln>
-                <a:solidFill>
-                  <a:schemeClr val="tx1"/>
-                </a:solidFill>
-                <a:effectLst/>
-                <a:uLnTx/>
-                <a:uFillTx/>
-                <a:latin typeface="Arial"/>
-                <a:ea typeface="+mn-ea"/>
-                <a:cs typeface="Arial"/>
-              </a:rPr>
-              <a:t>AKKODiS</a:t>
-            </a:r>
-            <a:r>
-              <a:rPr kumimoji="0" lang="ja-JP" altLang="en-US" sz="800" b="0" i="0" u="none" strike="noStrike" kern="0" cap="none" spc="0" normalizeH="0" baseline="0" noProof="0" dirty="0">
-                <a:ln>
-                  <a:noFill/>
-                </a:ln>
-                <a:solidFill>
-                  <a:schemeClr val="tx1"/>
-                </a:solidFill>
-                <a:effectLst/>
-                <a:uLnTx/>
-                <a:uFillTx/>
-                <a:latin typeface="Arial"/>
-                <a:ea typeface="+mn-ea"/>
-                <a:cs typeface="Arial"/>
-              </a:rPr>
-              <a:t>コンサルティング株式会社</a:t>
-            </a:r>
-            <a:endParaRPr kumimoji="0" lang="en-US" sz="800" b="0" i="0" u="none" strike="noStrike" kern="0" cap="none" spc="0" normalizeH="0" baseline="0" dirty="0">
-              <a:ln>
-                <a:noFill/>
-              </a:ln>
-              <a:solidFill>
-                <a:schemeClr val="tx1"/>
-              </a:solidFill>
-              <a:effectLst/>
-              <a:uLnTx/>
-              <a:uFillTx/>
-              <a:latin typeface="Arial"/>
-              <a:ea typeface="+mn-ea"/>
-              <a:cs typeface="Arial"/>
-            </a:endParaRPr>
-          </a:p>
-        </p:txBody>
-      </p:sp>
-      <p:sp>
-        <p:nvSpPr>
-          <p:cNvPr id="3" name="TXT_@Akkodis">
-            <a:extLst>
-              <a:ext uri="{FF2B5EF4-FFF2-40B4-BE49-F238E27FC236}">
-                <a16:creationId xmlns:a16="http://schemas.microsoft.com/office/drawing/2014/main" id="{2652AB74-4DA6-9953-0123-1F49803E5901}"/>
-              </a:ext>
-            </a:extLst>
-          </p:cNvPr>
-          <p:cNvSpPr/>
-          <p:nvPr userDrawn="1"/>
-        </p:nvSpPr>
-        <p:spPr>
-          <a:xfrm>
-            <a:off x="0" y="6436014"/>
-            <a:ext cx="4114800" cy="421986"/>
-          </a:xfrm>
-          <a:prstGeom prst="rect">
-            <a:avLst/>
-          </a:prstGeom>
-          <a:noFill/>
-          <a:ln>
-            <a:noFill/>
-          </a:ln>
-        </p:spPr>
-        <p:style>
-          <a:lnRef idx="2">
-            <a:schemeClr val="accent1">
-              <a:shade val="15000"/>
-            </a:schemeClr>
-          </a:lnRef>
-          <a:fillRef idx="1">
-            <a:schemeClr val="accent1"/>
-          </a:fillRef>
-          <a:effectRef idx="0">
-            <a:schemeClr val="accent1"/>
-          </a:effectRef>
-          <a:fontRef idx="minor">
-            <a:schemeClr val="lt1"/>
-          </a:fontRef>
-        </p:style>
-        <p:txBody>
-          <a:bodyPr rtlCol="0" anchor="ctr">
-            <a:noAutofit/>
-          </a:bodyPr>
-          <a:lstStyle/>
-          <a:p>
-            <a:pPr marL="0" lvl="0" indent="0" algn="l" defTabSz="914400" rtl="0" eaLnBrk="1" latinLnBrk="0" hangingPunct="1">
-              <a:lnSpc>
-                <a:spcPct val="90000"/>
-              </a:lnSpc>
-              <a:spcBef>
-                <a:spcPts val="1000"/>
-              </a:spcBef>
-              <a:buFont typeface="Arial" panose="020B0604020202020204" pitchFamily="34" charset="0"/>
-              <a:buNone/>
-            </a:pPr>
-            <a:r>
-              <a:rPr kumimoji="0" lang="ja-JP" altLang="en-US" sz="700" b="0" i="0" u="none" strike="noStrike" kern="0" cap="none" spc="0" normalizeH="0" baseline="0" noProof="0" dirty="0">
-                <a:ln>
-                  <a:noFill/>
-                </a:ln>
-                <a:solidFill>
-                  <a:schemeClr val="tx1"/>
-                </a:solidFill>
-                <a:effectLst/>
-                <a:uLnTx/>
-                <a:uFillTx/>
-                <a:latin typeface="Arial"/>
-                <a:ea typeface="+mn-ea"/>
-                <a:cs typeface="Arial"/>
-              </a:rPr>
-              <a:t>この情報は機密情報です。事前の書面による同意を得ずに組織外に開示することを禁じます。</a:t>
-            </a:r>
-          </a:p>
-        </p:txBody>
-      </p:sp>
     </p:spTree>
     <p:extLst>
       <p:ext uri="{BB962C8B-B14F-4D97-AF65-F5344CB8AC3E}">
@@ -38165,208 +36582,6 @@
                 </a:solidFill>
               </a:rPr>
               <a:t>WSS</a:t>
-            </a:r>
-          </a:p>
-        </p:txBody>
-      </p:sp>
-      <p:sp>
-        <p:nvSpPr>
-          <p:cNvPr id="2" name="TXT_@Akkodis">
-            <a:extLst>
-              <a:ext uri="{FF2B5EF4-FFF2-40B4-BE49-F238E27FC236}">
-                <a16:creationId xmlns:a16="http://schemas.microsoft.com/office/drawing/2014/main" id="{9A970583-719B-AF59-4579-C92669CEAD53}"/>
-              </a:ext>
-            </a:extLst>
-          </p:cNvPr>
-          <p:cNvSpPr/>
-          <p:nvPr userDrawn="1"/>
-        </p:nvSpPr>
-        <p:spPr>
-          <a:xfrm>
-            <a:off x="5115358" y="6436014"/>
-            <a:ext cx="1961284" cy="421986"/>
-          </a:xfrm>
-          <a:prstGeom prst="rect">
-            <a:avLst/>
-          </a:prstGeom>
-          <a:noFill/>
-          <a:ln>
-            <a:noFill/>
-          </a:ln>
-        </p:spPr>
-        <p:style>
-          <a:lnRef idx="2">
-            <a:schemeClr val="accent1">
-              <a:shade val="15000"/>
-            </a:schemeClr>
-          </a:lnRef>
-          <a:fillRef idx="1">
-            <a:schemeClr val="accent1"/>
-          </a:fillRef>
-          <a:effectRef idx="0">
-            <a:schemeClr val="accent1"/>
-          </a:effectRef>
-          <a:fontRef idx="minor">
-            <a:schemeClr val="lt1"/>
-          </a:fontRef>
-        </p:style>
-        <p:txBody>
-          <a:bodyPr rtlCol="0" anchor="ctr">
-            <a:noAutofit/>
-          </a:bodyPr>
-          <a:lstStyle/>
-          <a:p>
-            <a:pPr marL="0" lvl="0" indent="0" algn="ctr" defTabSz="914400" rtl="0" eaLnBrk="1" latinLnBrk="0" hangingPunct="1">
-              <a:lnSpc>
-                <a:spcPct val="90000"/>
-              </a:lnSpc>
-              <a:spcBef>
-                <a:spcPts val="1000"/>
-              </a:spcBef>
-              <a:buFont typeface="Arial" panose="020B0604020202020204" pitchFamily="34" charset="0"/>
-              <a:buNone/>
-            </a:pPr>
-            <a:r>
-              <a:rPr kumimoji="0" lang="en-US" sz="800" b="0" i="0" u="none" strike="noStrike" kern="0" cap="none" spc="0" normalizeH="0" baseline="0" noProof="0" dirty="0">
-                <a:ln>
-                  <a:noFill/>
-                </a:ln>
-                <a:solidFill>
-                  <a:schemeClr val="tx1"/>
-                </a:solidFill>
-                <a:effectLst/>
-                <a:uLnTx/>
-                <a:uFillTx/>
-                <a:latin typeface="Arial"/>
-                <a:ea typeface="+mn-ea"/>
-                <a:cs typeface="Arial"/>
-              </a:rPr>
-              <a:t>© </a:t>
-            </a:r>
-            <a:r>
-              <a:rPr kumimoji="0" lang="en-US" altLang="ja-JP" sz="800" b="0" i="0" u="none" strike="noStrike" kern="0" cap="none" spc="0" normalizeH="0" baseline="0" noProof="0" dirty="0">
-                <a:ln>
-                  <a:noFill/>
-                </a:ln>
-                <a:solidFill>
-                  <a:schemeClr val="tx1"/>
-                </a:solidFill>
-                <a:effectLst/>
-                <a:uLnTx/>
-                <a:uFillTx/>
-                <a:latin typeface="Arial"/>
-                <a:ea typeface="+mn-ea"/>
-                <a:cs typeface="Arial"/>
-              </a:rPr>
-              <a:t>AKKODiS</a:t>
-            </a:r>
-            <a:r>
-              <a:rPr kumimoji="0" lang="ja-JP" altLang="en-US" sz="800" b="0" i="0" u="none" strike="noStrike" kern="0" cap="none" spc="0" normalizeH="0" baseline="0" noProof="0" dirty="0">
-                <a:ln>
-                  <a:noFill/>
-                </a:ln>
-                <a:solidFill>
-                  <a:schemeClr val="tx1"/>
-                </a:solidFill>
-                <a:effectLst/>
-                <a:uLnTx/>
-                <a:uFillTx/>
-                <a:latin typeface="Arial"/>
-                <a:ea typeface="+mn-ea"/>
-                <a:cs typeface="Arial"/>
-              </a:rPr>
-              <a:t>コンサルティング株式会社</a:t>
-            </a:r>
-            <a:endParaRPr kumimoji="0" lang="en-US" sz="800" b="0" i="0" u="none" strike="noStrike" kern="0" cap="none" spc="0" normalizeH="0" baseline="0" dirty="0">
-              <a:ln>
-                <a:noFill/>
-              </a:ln>
-              <a:solidFill>
-                <a:schemeClr val="tx1"/>
-              </a:solidFill>
-              <a:effectLst/>
-              <a:uLnTx/>
-              <a:uFillTx/>
-              <a:latin typeface="Arial"/>
-              <a:ea typeface="+mn-ea"/>
-              <a:cs typeface="Arial"/>
-            </a:endParaRPr>
-          </a:p>
-        </p:txBody>
-      </p:sp>
-      <p:sp>
-        <p:nvSpPr>
-          <p:cNvPr id="3" name="TXT_@Akkodis">
-            <a:extLst>
-              <a:ext uri="{FF2B5EF4-FFF2-40B4-BE49-F238E27FC236}">
-                <a16:creationId xmlns:a16="http://schemas.microsoft.com/office/drawing/2014/main" id="{5C6D589A-457D-70E9-2EE0-E4A8693A11B5}"/>
-              </a:ext>
-            </a:extLst>
-          </p:cNvPr>
-          <p:cNvSpPr/>
-          <p:nvPr userDrawn="1"/>
-        </p:nvSpPr>
-        <p:spPr>
-          <a:xfrm>
-            <a:off x="0" y="6436014"/>
-            <a:ext cx="4114800" cy="421986"/>
-          </a:xfrm>
-          <a:prstGeom prst="rect">
-            <a:avLst/>
-          </a:prstGeom>
-          <a:noFill/>
-          <a:ln>
-            <a:noFill/>
-          </a:ln>
-        </p:spPr>
-        <p:style>
-          <a:lnRef idx="2">
-            <a:schemeClr val="accent1">
-              <a:shade val="15000"/>
-            </a:schemeClr>
-          </a:lnRef>
-          <a:fillRef idx="1">
-            <a:schemeClr val="accent1"/>
-          </a:fillRef>
-          <a:effectRef idx="0">
-            <a:schemeClr val="accent1"/>
-          </a:effectRef>
-          <a:fontRef idx="minor">
-            <a:schemeClr val="lt1"/>
-          </a:fontRef>
-        </p:style>
-        <p:txBody>
-          <a:bodyPr rtlCol="0" anchor="ctr">
-            <a:noAutofit/>
-          </a:bodyPr>
-          <a:lstStyle/>
-          <a:p>
-            <a:pPr marL="0" lvl="0" indent="0" algn="l" defTabSz="914400" rtl="0" eaLnBrk="1" latinLnBrk="0" hangingPunct="1">
-              <a:lnSpc>
-                <a:spcPct val="90000"/>
-              </a:lnSpc>
-              <a:spcBef>
-                <a:spcPts val="1000"/>
-              </a:spcBef>
-              <a:buFont typeface="Arial" panose="020B0604020202020204" pitchFamily="34" charset="0"/>
-              <a:buNone/>
-            </a:pPr>
-            <a:r>
-              <a:rPr kumimoji="0" lang="ja-JP" altLang="en-US" sz="700" b="0" i="0" u="none" strike="noStrike" kern="0" cap="none" spc="0" normalizeH="0" baseline="0" noProof="0" dirty="0">
-                <a:ln>
-                  <a:noFill/>
-                </a:ln>
-                <a:solidFill>
-                  <a:schemeClr val="tx1"/>
-                </a:solidFill>
-                <a:effectLst/>
-                <a:uLnTx/>
-                <a:uFillTx/>
-                <a:latin typeface="Arial"/>
-                <a:ea typeface="+mn-ea"/>
-                <a:cs typeface="Arial"/>
-              </a:rPr>
-              <a:t>この情報は機密情報です。事前の書面による同意を得ずに組織外に開示することを禁じます。</a:t>
             </a:r>
           </a:p>
         </p:txBody>
@@ -38782,208 +36997,6 @@
           <a:chExt cx="0" cy="0"/>
         </a:xfrm>
       </p:grpSpPr>
-      <p:sp>
-        <p:nvSpPr>
-          <p:cNvPr id="2" name="TXT_@Akkodis">
-            <a:extLst>
-              <a:ext uri="{FF2B5EF4-FFF2-40B4-BE49-F238E27FC236}">
-                <a16:creationId xmlns:a16="http://schemas.microsoft.com/office/drawing/2014/main" id="{042ECA9E-E837-93B3-F7B1-A2B8FE17EC52}"/>
-              </a:ext>
-            </a:extLst>
-          </p:cNvPr>
-          <p:cNvSpPr/>
-          <p:nvPr userDrawn="1"/>
-        </p:nvSpPr>
-        <p:spPr>
-          <a:xfrm>
-            <a:off x="5115358" y="6436014"/>
-            <a:ext cx="1961284" cy="421986"/>
-          </a:xfrm>
-          <a:prstGeom prst="rect">
-            <a:avLst/>
-          </a:prstGeom>
-          <a:noFill/>
-          <a:ln>
-            <a:noFill/>
-          </a:ln>
-        </p:spPr>
-        <p:style>
-          <a:lnRef idx="2">
-            <a:schemeClr val="accent1">
-              <a:shade val="15000"/>
-            </a:schemeClr>
-          </a:lnRef>
-          <a:fillRef idx="1">
-            <a:schemeClr val="accent1"/>
-          </a:fillRef>
-          <a:effectRef idx="0">
-            <a:schemeClr val="accent1"/>
-          </a:effectRef>
-          <a:fontRef idx="minor">
-            <a:schemeClr val="lt1"/>
-          </a:fontRef>
-        </p:style>
-        <p:txBody>
-          <a:bodyPr rtlCol="0" anchor="ctr">
-            <a:noAutofit/>
-          </a:bodyPr>
-          <a:lstStyle/>
-          <a:p>
-            <a:pPr marL="0" lvl="0" indent="0" algn="ctr" defTabSz="914400" rtl="0" eaLnBrk="1" latinLnBrk="0" hangingPunct="1">
-              <a:lnSpc>
-                <a:spcPct val="90000"/>
-              </a:lnSpc>
-              <a:spcBef>
-                <a:spcPts val="1000"/>
-              </a:spcBef>
-              <a:buFont typeface="Arial" panose="020B0604020202020204" pitchFamily="34" charset="0"/>
-              <a:buNone/>
-            </a:pPr>
-            <a:r>
-              <a:rPr kumimoji="0" lang="en-US" sz="800" b="0" i="0" u="none" strike="noStrike" kern="0" cap="none" spc="0" normalizeH="0" baseline="0" noProof="0" dirty="0">
-                <a:ln>
-                  <a:noFill/>
-                </a:ln>
-                <a:solidFill>
-                  <a:schemeClr val="tx1"/>
-                </a:solidFill>
-                <a:effectLst/>
-                <a:uLnTx/>
-                <a:uFillTx/>
-                <a:latin typeface="Arial"/>
-                <a:ea typeface="+mn-ea"/>
-                <a:cs typeface="Arial"/>
-              </a:rPr>
-              <a:t>© </a:t>
-            </a:r>
-            <a:r>
-              <a:rPr kumimoji="0" lang="en-US" altLang="ja-JP" sz="800" b="0" i="0" u="none" strike="noStrike" kern="0" cap="none" spc="0" normalizeH="0" baseline="0" noProof="0" dirty="0">
-                <a:ln>
-                  <a:noFill/>
-                </a:ln>
-                <a:solidFill>
-                  <a:schemeClr val="tx1"/>
-                </a:solidFill>
-                <a:effectLst/>
-                <a:uLnTx/>
-                <a:uFillTx/>
-                <a:latin typeface="Arial"/>
-                <a:ea typeface="+mn-ea"/>
-                <a:cs typeface="Arial"/>
-              </a:rPr>
-              <a:t>AKKODiS</a:t>
-            </a:r>
-            <a:r>
-              <a:rPr kumimoji="0" lang="ja-JP" altLang="en-US" sz="800" b="0" i="0" u="none" strike="noStrike" kern="0" cap="none" spc="0" normalizeH="0" baseline="0" noProof="0" dirty="0">
-                <a:ln>
-                  <a:noFill/>
-                </a:ln>
-                <a:solidFill>
-                  <a:schemeClr val="tx1"/>
-                </a:solidFill>
-                <a:effectLst/>
-                <a:uLnTx/>
-                <a:uFillTx/>
-                <a:latin typeface="Arial"/>
-                <a:ea typeface="+mn-ea"/>
-                <a:cs typeface="Arial"/>
-              </a:rPr>
-              <a:t>コンサルティング株式会社</a:t>
-            </a:r>
-            <a:endParaRPr kumimoji="0" lang="en-US" sz="800" b="0" i="0" u="none" strike="noStrike" kern="0" cap="none" spc="0" normalizeH="0" baseline="0" dirty="0">
-              <a:ln>
-                <a:noFill/>
-              </a:ln>
-              <a:solidFill>
-                <a:schemeClr val="tx1"/>
-              </a:solidFill>
-              <a:effectLst/>
-              <a:uLnTx/>
-              <a:uFillTx/>
-              <a:latin typeface="Arial"/>
-              <a:ea typeface="+mn-ea"/>
-              <a:cs typeface="Arial"/>
-            </a:endParaRPr>
-          </a:p>
-        </p:txBody>
-      </p:sp>
-      <p:sp>
-        <p:nvSpPr>
-          <p:cNvPr id="3" name="TXT_@Akkodis">
-            <a:extLst>
-              <a:ext uri="{FF2B5EF4-FFF2-40B4-BE49-F238E27FC236}">
-                <a16:creationId xmlns:a16="http://schemas.microsoft.com/office/drawing/2014/main" id="{243A81FD-CFF3-40F3-1DDA-F58DA9AB765C}"/>
-              </a:ext>
-            </a:extLst>
-          </p:cNvPr>
-          <p:cNvSpPr/>
-          <p:nvPr userDrawn="1"/>
-        </p:nvSpPr>
-        <p:spPr>
-          <a:xfrm>
-            <a:off x="0" y="6436014"/>
-            <a:ext cx="4114800" cy="421986"/>
-          </a:xfrm>
-          <a:prstGeom prst="rect">
-            <a:avLst/>
-          </a:prstGeom>
-          <a:noFill/>
-          <a:ln>
-            <a:noFill/>
-          </a:ln>
-        </p:spPr>
-        <p:style>
-          <a:lnRef idx="2">
-            <a:schemeClr val="accent1">
-              <a:shade val="15000"/>
-            </a:schemeClr>
-          </a:lnRef>
-          <a:fillRef idx="1">
-            <a:schemeClr val="accent1"/>
-          </a:fillRef>
-          <a:effectRef idx="0">
-            <a:schemeClr val="accent1"/>
-          </a:effectRef>
-          <a:fontRef idx="minor">
-            <a:schemeClr val="lt1"/>
-          </a:fontRef>
-        </p:style>
-        <p:txBody>
-          <a:bodyPr rtlCol="0" anchor="ctr">
-            <a:noAutofit/>
-          </a:bodyPr>
-          <a:lstStyle/>
-          <a:p>
-            <a:pPr marL="0" lvl="0" indent="0" algn="l" defTabSz="914400" rtl="0" eaLnBrk="1" latinLnBrk="0" hangingPunct="1">
-              <a:lnSpc>
-                <a:spcPct val="90000"/>
-              </a:lnSpc>
-              <a:spcBef>
-                <a:spcPts val="1000"/>
-              </a:spcBef>
-              <a:buFont typeface="Arial" panose="020B0604020202020204" pitchFamily="34" charset="0"/>
-              <a:buNone/>
-            </a:pPr>
-            <a:r>
-              <a:rPr kumimoji="0" lang="ja-JP" altLang="en-US" sz="700" b="0" i="0" u="none" strike="noStrike" kern="0" cap="none" spc="0" normalizeH="0" baseline="0" noProof="0" dirty="0">
-                <a:ln>
-                  <a:noFill/>
-                </a:ln>
-                <a:solidFill>
-                  <a:schemeClr val="tx1"/>
-                </a:solidFill>
-                <a:effectLst/>
-                <a:uLnTx/>
-                <a:uFillTx/>
-                <a:latin typeface="Arial"/>
-                <a:ea typeface="+mn-ea"/>
-                <a:cs typeface="Arial"/>
-              </a:rPr>
-              <a:t>この情報は機密情報です。事前の書面による同意を得ずに組織外に開示することを禁じます。</a:t>
-            </a:r>
-          </a:p>
-        </p:txBody>
-      </p:sp>
     </p:spTree>
     <p:extLst>
       <p:ext uri="{BB962C8B-B14F-4D97-AF65-F5344CB8AC3E}">
@@ -39358,7 +37371,7 @@
           <a:lstStyle/>
           <a:p>
             <a:r>
-              <a:rPr sz="1100">
+              <a:rPr sz="1100" b="0">
                 <a:solidFill>
                   <a:srgbClr val="5A6470"/>
                 </a:solidFill>
@@ -39385,7 +37398,7 @@
           <a:lstStyle/>
           <a:p>
             <a:r>
-              <a:rPr sz="2000">
+              <a:rPr sz="2000" b="0">
                 <a:solidFill>
                   <a:srgbClr val="001F33"/>
                 </a:solidFill>
@@ -39443,51 +37456,6 @@
       <p:grpSpPr/>
       <p:sp>
         <p:nvSpPr>
-          <p:cNvPr id="5" name="Rectangle 4"/>
-          <p:cNvSpPr/>
-          <p:nvPr/>
-        </p:nvSpPr>
-        <p:spPr>
-          <a:xfrm>
-            <a:off x="0" y="0"/>
-            <a:ext cx="12192000" cy="6858000"/>
-          </a:xfrm>
-          <a:prstGeom prst="rect">
-            <a:avLst/>
-          </a:prstGeom>
-          <a:solidFill>
-            <a:srgbClr val="FFFFFF">
-              <a:alpha val="82000"/>
-            </a:srgbClr>
-          </a:solidFill>
-          <a:ln>
-            <a:noFill/>
-          </a:ln>
-        </p:spPr>
-        <p:style>
-          <a:lnRef idx="1">
-            <a:schemeClr val="accent1"/>
-          </a:lnRef>
-          <a:fillRef idx="3">
-            <a:schemeClr val="accent1"/>
-          </a:fillRef>
-          <a:effectRef idx="2">
-            <a:schemeClr val="accent1"/>
-          </a:effectRef>
-          <a:fontRef idx="minor">
-            <a:schemeClr val="lt1"/>
-          </a:fontRef>
-        </p:style>
-        <p:txBody>
-          <a:bodyPr rtlCol="0" anchor="ctr"/>
-          <a:lstStyle/>
-          <a:p>
-            <a:pPr algn="ctr"/>
-          </a:p>
-        </p:txBody>
-      </p:sp>
-      <p:sp>
-        <p:nvSpPr>
           <p:cNvPr id="4" name="Title 3"/>
           <p:cNvSpPr>
             <a:spLocks noGrp="1"/>
@@ -39520,7 +37488,7 @@
       </p:sp>
       <p:sp>
         <p:nvSpPr>
-          <p:cNvPr id="6" name="Rectangle 5"/>
+          <p:cNvPr id="5" name="Rectangle 4"/>
           <p:cNvSpPr/>
           <p:nvPr/>
         </p:nvSpPr>
@@ -39563,7 +37531,7 @@
       </p:sp>
       <p:sp>
         <p:nvSpPr>
-          <p:cNvPr id="7" name="TextBox 6"/>
+          <p:cNvPr id="6" name="TextBox 5"/>
           <p:cNvSpPr txBox="1"/>
           <p:nvPr/>
         </p:nvSpPr>
@@ -39636,7 +37604,7 @@
       </p:sp>
       <p:sp>
         <p:nvSpPr>
-          <p:cNvPr id="8" name="TextBox 7"/>
+          <p:cNvPr id="7" name="TextBox 6"/>
           <p:cNvSpPr txBox="1"/>
           <p:nvPr/>
         </p:nvSpPr>
@@ -39689,51 +37657,6 @@
       <p:grpSpPr/>
       <p:sp>
         <p:nvSpPr>
-          <p:cNvPr id="5" name="Rectangle 4"/>
-          <p:cNvSpPr/>
-          <p:nvPr/>
-        </p:nvSpPr>
-        <p:spPr>
-          <a:xfrm>
-            <a:off x="0" y="0"/>
-            <a:ext cx="12192000" cy="6858000"/>
-          </a:xfrm>
-          <a:prstGeom prst="rect">
-            <a:avLst/>
-          </a:prstGeom>
-          <a:solidFill>
-            <a:srgbClr val="FFFFFF">
-              <a:alpha val="82000"/>
-            </a:srgbClr>
-          </a:solidFill>
-          <a:ln>
-            <a:noFill/>
-          </a:ln>
-        </p:spPr>
-        <p:style>
-          <a:lnRef idx="1">
-            <a:schemeClr val="accent1"/>
-          </a:lnRef>
-          <a:fillRef idx="3">
-            <a:schemeClr val="accent1"/>
-          </a:fillRef>
-          <a:effectRef idx="2">
-            <a:schemeClr val="accent1"/>
-          </a:effectRef>
-          <a:fontRef idx="minor">
-            <a:schemeClr val="lt1"/>
-          </a:fontRef>
-        </p:style>
-        <p:txBody>
-          <a:bodyPr rtlCol="0" anchor="ctr"/>
-          <a:lstStyle/>
-          <a:p>
-            <a:pPr algn="ctr"/>
-          </a:p>
-        </p:txBody>
-      </p:sp>
-      <p:sp>
-        <p:nvSpPr>
           <p:cNvPr id="4" name="Title 3"/>
           <p:cNvSpPr>
             <a:spLocks noGrp="1"/>
@@ -39766,7 +37689,7 @@
       </p:sp>
       <p:sp>
         <p:nvSpPr>
-          <p:cNvPr id="6" name="Rectangle 5"/>
+          <p:cNvPr id="5" name="Rectangle 4"/>
           <p:cNvSpPr/>
           <p:nvPr/>
         </p:nvSpPr>
@@ -39809,7 +37732,7 @@
       </p:sp>
       <p:sp>
         <p:nvSpPr>
-          <p:cNvPr id="7" name="TextBox 6"/>
+          <p:cNvPr id="6" name="TextBox 5"/>
           <p:cNvSpPr txBox="1"/>
           <p:nvPr/>
         </p:nvSpPr>
@@ -39838,13 +37761,22 @@
               </a:spcAft>
             </a:pPr>
             <a:r>
-              <a:rPr sz="1800">
-                <a:solidFill>
-                  <a:srgbClr val="000000"/>
+              <a:rPr sz="1800" b="1">
+                <a:solidFill>
+                  <a:srgbClr val="FFB81C"/>
                 </a:solidFill>
                 <a:latin typeface="Noto Sans JP"/>
               </a:rPr>
-              <a:t>—  意思決定者が複数（DMU）→ ペルソナを職種別に複数定義し、職種別 LP を用意</a:t>
+              <a:t>—  </a:t>
+            </a:r>
+            <a:r>
+              <a:rPr sz="1800">
+                <a:solidFill>
+                  <a:srgbClr val="000000"/>
+                </a:solidFill>
+                <a:latin typeface="Noto Sans JP"/>
+              </a:rPr>
+              <a:t>意思決定者が複数（DMU）→ ペルソナを職種別に複数定義し、職種別 LP を用意</a:t>
             </a:r>
           </a:p>
           <a:p>
@@ -39857,13 +37789,22 @@
               </a:spcAft>
             </a:pPr>
             <a:r>
-              <a:rPr sz="1800">
-                <a:solidFill>
-                  <a:srgbClr val="000000"/>
+              <a:rPr sz="1800" b="1">
+                <a:solidFill>
+                  <a:srgbClr val="FFB81C"/>
                 </a:solidFill>
                 <a:latin typeface="Noto Sans JP"/>
               </a:rPr>
-              <a:t>—  意思決定サイクルが長い → Marketo でフェーズ別ナーチャリングを自動化</a:t>
+              <a:t>—  </a:t>
+            </a:r>
+            <a:r>
+              <a:rPr sz="1800">
+                <a:solidFill>
+                  <a:srgbClr val="000000"/>
+                </a:solidFill>
+                <a:latin typeface="Noto Sans JP"/>
+              </a:rPr>
+              <a:t>意思決定サイクルが長い → Marketo でフェーズ別ナーチャリングを自動化</a:t>
             </a:r>
           </a:p>
           <a:p>
@@ -39876,13 +37817,22 @@
               </a:spcAft>
             </a:pPr>
             <a:r>
-              <a:rPr sz="1800">
-                <a:solidFill>
-                  <a:srgbClr val="000000"/>
+              <a:rPr sz="1800" b="1">
+                <a:solidFill>
+                  <a:srgbClr val="FFB81C"/>
                 </a:solidFill>
                 <a:latin typeface="Noto Sans JP"/>
               </a:rPr>
-              <a:t>—  ROI 計測が難しい → MQL/SQL/商談化を中間 KPI として Power BI で可視化</a:t>
+              <a:t>—  </a:t>
+            </a:r>
+            <a:r>
+              <a:rPr sz="1800">
+                <a:solidFill>
+                  <a:srgbClr val="000000"/>
+                </a:solidFill>
+                <a:latin typeface="Noto Sans JP"/>
+              </a:rPr>
+              <a:t>ROI 計測が難しい → MQL/SQL/商談化を中間 KPI として Power BI で可視化</a:t>
             </a:r>
           </a:p>
           <a:p>
@@ -39895,13 +37845,22 @@
               </a:spcAft>
             </a:pPr>
             <a:r>
-              <a:rPr sz="1800">
-                <a:solidFill>
-                  <a:srgbClr val="000000"/>
+              <a:rPr sz="1800" b="1">
+                <a:solidFill>
+                  <a:srgbClr val="FFB81C"/>
                 </a:solidFill>
                 <a:latin typeface="Noto Sans JP"/>
               </a:rPr>
-              <a:t>—  失敗1: リード量だけ追う → 商談化率・受注率まで KPI 化する</a:t>
+              <a:t>—  </a:t>
+            </a:r>
+            <a:r>
+              <a:rPr sz="1800">
+                <a:solidFill>
+                  <a:srgbClr val="000000"/>
+                </a:solidFill>
+                <a:latin typeface="Noto Sans JP"/>
+              </a:rPr>
+              <a:t>失敗1: リード量だけ追う → 商談化率・受注率まで KPI 化する</a:t>
             </a:r>
           </a:p>
           <a:p>
@@ -39914,20 +37873,29 @@
               </a:spcAft>
             </a:pPr>
             <a:r>
-              <a:rPr sz="1800">
-                <a:solidFill>
-                  <a:srgbClr val="000000"/>
+              <a:rPr sz="1800" b="1">
+                <a:solidFill>
+                  <a:srgbClr val="FFB81C"/>
                 </a:solidFill>
                 <a:latin typeface="Noto Sans JP"/>
               </a:rPr>
-              <a:t>—  失敗2: LP を1本化 → 業種・職種で分岐し、コンバージョンを最適化</a:t>
+              <a:t>—  </a:t>
+            </a:r>
+            <a:r>
+              <a:rPr sz="1800">
+                <a:solidFill>
+                  <a:srgbClr val="000000"/>
+                </a:solidFill>
+                <a:latin typeface="Noto Sans JP"/>
+              </a:rPr>
+              <a:t>失敗2: LP を1本化 → 業種・職種で分岐し、コンバージョンを最適化</a:t>
             </a:r>
           </a:p>
         </p:txBody>
       </p:sp>
       <p:sp>
         <p:nvSpPr>
-          <p:cNvPr id="8" name="TextBox 7"/>
+          <p:cNvPr id="7" name="TextBox 6"/>
           <p:cNvSpPr txBox="1"/>
           <p:nvPr/>
         </p:nvSpPr>
@@ -40387,7 +38355,7 @@
         </a:ln>
         <a:extLst>
           <a:ext uri="{C572A759-6A51-4108-AA02-DFA0A04FC94B}">
-            <ma14:wrappingTextBoxFlag xmlns:ma14="http://schemas.microsoft.com/office/mac/drawingml/2011/main" xmlns:a14="http://schemas.microsoft.com/office/drawing/2010/main" xmlns:m="http://schemas.openxmlformats.org/officeDocument/2006/math" xmlns="" xmlns:p="http://schemas.openxmlformats.org/presentationml/2006/main" xmlns:r="http://schemas.openxmlformats.org/officeDocument/2006/relationships" val="1"/>
+            <ma14:wrappingTextBoxFlag xmlns:r="http://schemas.openxmlformats.org/officeDocument/2006/relationships" xmlns:p="http://schemas.openxmlformats.org/presentationml/2006/main" xmlns="" xmlns:m="http://schemas.openxmlformats.org/officeDocument/2006/math" xmlns:a14="http://schemas.microsoft.com/office/drawing/2010/main" xmlns:ma14="http://schemas.microsoft.com/office/mac/drawingml/2011/main" val="1"/>
           </a:ext>
         </a:extLst>
       </a:spPr>
@@ -41716,36 +39684,6 @@
 </file>
 
 <file path=customXml/item1.xml><?xml version="1.0" encoding="utf-8"?>
-<?mso-contentType ?>
-<FormTemplates xmlns="http://schemas.microsoft.com/sharepoint/v3/contenttype/forms">
-  <Display>DocumentLibraryForm</Display>
-  <Edit>DocumentLibraryForm</Edit>
-  <New>DocumentLibraryForm</New>
-</FormTemplates>
-</file>
-
-<file path=customXml/item2.xml><?xml version="1.0" encoding="utf-8"?>
-<p:properties xmlns:p="http://schemas.microsoft.com/office/2006/metadata/properties" xmlns:xsi="http://www.w3.org/2001/XMLSchema-instance" xmlns:pc="http://schemas.microsoft.com/office/infopath/2007/PartnerControls">
-  <documentManagement>
-    <lcf76f155ced4ddcb4097134ff3c332f xmlns="47a6d4bf-5be2-4128-becf-c640b464bce1">
-      <Terms xmlns="http://schemas.microsoft.com/office/infopath/2007/PartnerControls"/>
-    </lcf76f155ced4ddcb4097134ff3c332f>
-    <TaxCatchAll xmlns="bacfbfc4-940a-401c-a573-376360c6b669" xsi:nil="true"/>
-    <SharedWithUsers xmlns="bacfbfc4-940a-401c-a573-376360c6b669">
-      <UserInfo>
-        <DisplayName/>
-        <AccountId xsi:nil="true"/>
-        <AccountType/>
-      </UserInfo>
-    </SharedWithUsers>
-    <_x6709__x52b9__x671f__x9650_ xmlns="47a6d4bf-5be2-4128-becf-c640b464bce1">2027-01-28T15:00:00+00:00</_x6709__x52b9__x671f__x9650_>
-    <_x4e3b__x5e79__x90e8__x9580_ xmlns="47a6d4bf-5be2-4128-becf-c640b464bce1">Brand &amp; Candidate Marketing</_x4e3b__x5e79__x90e8__x9580_>
-    <_x6587__x66f8__x30ab__x30c6__x30b4__x30ea_ xmlns="47a6d4bf-5be2-4128-becf-c640b464bce1">手引書・マニュアル・ガイドライン</_x6587__x66f8__x30ab__x30c6__x30b4__x30ea_>
-  </documentManagement>
-</p:properties>
-</file>
-
-<file path=customXml/item3.xml><?xml version="1.0" encoding="utf-8"?>
 <ct:contentTypeSchema xmlns:ct="http://schemas.microsoft.com/office/2006/metadata/contentType" xmlns:ma="http://schemas.microsoft.com/office/2006/metadata/properties/metaAttributes" ct:_="" ma:_="" ma:contentTypeName="ドキュメント" ma:contentTypeID="0x01010019B5FBA8B3D2FA4B89071852C4E5BAC1" ma:contentTypeVersion="20" ma:contentTypeDescription="新しいドキュメントを作成します。" ma:contentTypeScope="" ma:versionID="539cc9e07677aad46f9b4e62c5ff0252">
   <xsd:schema xmlns:xsd="http://www.w3.org/2001/XMLSchema" xmlns:xs="http://www.w3.org/2001/XMLSchema" xmlns:p="http://schemas.microsoft.com/office/2006/metadata/properties" xmlns:ns2="47a6d4bf-5be2-4128-becf-c640b464bce1" xmlns:ns3="bacfbfc4-940a-401c-a573-376360c6b669" targetNamespace="http://schemas.microsoft.com/office/2006/metadata/properties" ma:root="true" ma:fieldsID="5814eac6e5d86d9bfe392b44da0e744f" ns2:_="" ns3:_="">
     <xsd:import namespace="47a6d4bf-5be2-4128-becf-c640b464bce1"/>
@@ -42015,7 +39953,41 @@
 </ct:contentTypeSchema>
 </file>
 
+<file path=customXml/item2.xml><?xml version="1.0" encoding="utf-8"?>
+<?mso-contentType ?>
+<FormTemplates xmlns="http://schemas.microsoft.com/sharepoint/v3/contenttype/forms">
+  <Display>DocumentLibraryForm</Display>
+  <Edit>DocumentLibraryForm</Edit>
+  <New>DocumentLibraryForm</New>
+</FormTemplates>
+</file>
+
+<file path=customXml/item3.xml><?xml version="1.0" encoding="utf-8"?>
+<p:properties xmlns:p="http://schemas.microsoft.com/office/2006/metadata/properties" xmlns:xsi="http://www.w3.org/2001/XMLSchema-instance" xmlns:pc="http://schemas.microsoft.com/office/infopath/2007/PartnerControls">
+  <documentManagement>
+    <lcf76f155ced4ddcb4097134ff3c332f xmlns="47a6d4bf-5be2-4128-becf-c640b464bce1">
+      <Terms xmlns="http://schemas.microsoft.com/office/infopath/2007/PartnerControls"/>
+    </lcf76f155ced4ddcb4097134ff3c332f>
+    <TaxCatchAll xmlns="bacfbfc4-940a-401c-a573-376360c6b669" xsi:nil="true"/>
+    <SharedWithUsers xmlns="bacfbfc4-940a-401c-a573-376360c6b669">
+      <UserInfo>
+        <DisplayName/>
+        <AccountId xsi:nil="true"/>
+        <AccountType/>
+      </UserInfo>
+    </SharedWithUsers>
+    <_x6709__x52b9__x671f__x9650_ xmlns="47a6d4bf-5be2-4128-becf-c640b464bce1">2027-01-28T15:00:00+00:00</_x6709__x52b9__x671f__x9650_>
+    <_x4e3b__x5e79__x90e8__x9580_ xmlns="47a6d4bf-5be2-4128-becf-c640b464bce1">Brand &amp; Candidate Marketing</_x4e3b__x5e79__x90e8__x9580_>
+    <_x6587__x66f8__x30ab__x30c6__x30b4__x30ea_ xmlns="47a6d4bf-5be2-4128-becf-c640b464bce1">手引書・マニュアル・ガイドライン</_x6587__x66f8__x30ab__x30c6__x30b4__x30ea_>
+  </documentManagement>
+</p:properties>
+</file>
+
 <file path=customXml/itemProps1.xml><?xml version="1.0" encoding="utf-8"?>
+<ds:datastoreItem xmlns:ds="http://schemas.openxmlformats.org/officeDocument/2006/customXml" ds:itemID="{381A6E93-70CC-4BB3-A929-EE5CA502167F}"/>
+</file>
+
+<file path=customXml/itemProps2.xml><?xml version="1.0" encoding="utf-8"?>
 <ds:datastoreItem xmlns:ds="http://schemas.openxmlformats.org/officeDocument/2006/customXml" ds:itemID="{71C5364E-35E5-40DC-8DBA-4B5389050B44}">
   <ds:schemaRefs>
     <ds:schemaRef ds:uri="http://schemas.microsoft.com/sharepoint/v3/contenttype/forms"/>
@@ -42023,25 +39995,21 @@
 </ds:datastoreItem>
 </file>
 
-<file path=customXml/itemProps2.xml><?xml version="1.0" encoding="utf-8"?>
+<file path=customXml/itemProps3.xml><?xml version="1.0" encoding="utf-8"?>
 <ds:datastoreItem xmlns:ds="http://schemas.openxmlformats.org/officeDocument/2006/customXml" ds:itemID="{7C721018-8EAC-4CFC-85DA-36590C7951A4}">
   <ds:schemaRefs>
+    <ds:schemaRef ds:uri="http://purl.org/dc/terms/"/>
+    <ds:schemaRef ds:uri="http://schemas.microsoft.com/office/2006/documentManagement/types"/>
+    <ds:schemaRef ds:uri="http://purl.org/dc/elements/1.1/"/>
+    <ds:schemaRef ds:uri="bacfbfc4-940a-401c-a573-376360c6b669"/>
+    <ds:schemaRef ds:uri="http://schemas.microsoft.com/office/2006/metadata/properties"/>
     <ds:schemaRef ds:uri="http://schemas.microsoft.com/office/infopath/2007/PartnerControls"/>
-    <ds:schemaRef ds:uri="http://purl.org/dc/elements/1.1/"/>
-    <ds:schemaRef ds:uri="d11fc70d-f960-4640-ad01-27edb7bc7eef"/>
-    <ds:schemaRef ds:uri="http://schemas.microsoft.com/office/2006/documentManagement/types"/>
+    <ds:schemaRef ds:uri="http://purl.org/dc/dcmitype/"/>
+    <ds:schemaRef ds:uri="47a6d4bf-5be2-4128-becf-c640b464bce1"/>
+    <ds:schemaRef ds:uri="http://schemas.openxmlformats.org/package/2006/metadata/core-properties"/>
     <ds:schemaRef ds:uri="http://www.w3.org/XML/1998/namespace"/>
-    <ds:schemaRef ds:uri="http://schemas.openxmlformats.org/package/2006/metadata/core-properties"/>
-    <ds:schemaRef ds:uri="http://purl.org/dc/dcmitype/"/>
-    <ds:schemaRef ds:uri="9253a7fa-cb9e-4121-a6a3-dfbc2f616445"/>
-    <ds:schemaRef ds:uri="http://schemas.microsoft.com/office/2006/metadata/properties"/>
-    <ds:schemaRef ds:uri="http://purl.org/dc/terms/"/>
   </ds:schemaRefs>
 </ds:datastoreItem>
-</file>
-
-<file path=customXml/itemProps3.xml><?xml version="1.0" encoding="utf-8"?>
-<ds:datastoreItem xmlns:ds="http://schemas.openxmlformats.org/officeDocument/2006/customXml" ds:itemID="{CB6D9822-6F17-4A01-AEC0-4E9DD39C76DC}"/>
 </file>
 
 <file path=docMetadata/LabelInfo.xml><?xml version="1.0" encoding="utf-8"?>

--- a/assets/samples/btob-marketing-sample.pptx
+++ b/assets/samples/btob-marketing-sample.pptx
@@ -13073,6 +13073,41 @@
           <a:chExt cx="0" cy="0"/>
         </a:xfrm>
       </p:grpSpPr>
+      <p:pic>
+        <p:nvPicPr>
+          <p:cNvPr id="9" name="IMG_Back">
+            <a:extLst>
+              <a:ext uri="{FF2B5EF4-FFF2-40B4-BE49-F238E27FC236}">
+                <a16:creationId xmlns:a16="http://schemas.microsoft.com/office/drawing/2014/main" id="{9008214D-B784-B570-F58F-EF90B42BD2F8}"/>
+              </a:ext>
+            </a:extLst>
+          </p:cNvPr>
+          <p:cNvPicPr>
+            <a:picLocks noChangeAspect="1"/>
+          </p:cNvPicPr>
+          <p:nvPr userDrawn="1"/>
+        </p:nvPicPr>
+        <p:blipFill rotWithShape="1">
+          <a:blip r:embed="rId2">
+            <a:extLst>
+              <a:ext uri="{28A0092B-C50C-407E-A947-70E740481C1C}">
+                <a14:useLocalDpi xmlns:a14="http://schemas.microsoft.com/office/drawing/2010/main"/>
+              </a:ext>
+            </a:extLst>
+          </a:blip>
+          <a:srcRect b="17825"/>
+          <a:stretch/>
+        </p:blipFill>
+        <p:spPr>
+          <a:xfrm>
+            <a:off x="0" y="3930650"/>
+            <a:ext cx="12192000" cy="2927350"/>
+          </a:xfrm>
+          <a:prstGeom prst="rect">
+            <a:avLst/>
+          </a:prstGeom>
+        </p:spPr>
+      </p:pic>
       <p:cxnSp>
         <p:nvCxnSpPr>
           <p:cNvPr id="4" name="Line orange">
@@ -37371,12 +37406,6 @@
           <a:lstStyle/>
           <a:p>
             <a:r>
-              <a:rPr sz="1100" b="0">
-                <a:solidFill>
-                  <a:srgbClr val="5A6470"/>
-                </a:solidFill>
-                <a:latin typeface="Noto Sans JP"/>
-              </a:rPr>
               <a:t>2026.04.28  /  AKKODiS Japan / マーケティング部</a:t>
             </a:r>
           </a:p>
@@ -37398,12 +37427,6 @@
           <a:lstStyle/>
           <a:p>
             <a:r>
-              <a:rPr sz="2000" b="0">
-                <a:solidFill>
-                  <a:srgbClr val="001F33"/>
-                </a:solidFill>
-                <a:latin typeface="Noto Sans JP"/>
-              </a:rPr>
               <a:t>失敗しがちな3つの罠と打ち手</a:t>
             </a:r>
           </a:p>
@@ -37425,12 +37448,6 @@
           <a:lstStyle/>
           <a:p>
             <a:r>
-              <a:rPr sz="4000" b="1">
-                <a:solidFill>
-                  <a:srgbClr val="001F33"/>
-                </a:solidFill>
-                <a:latin typeface="Noto Sans JP"/>
-              </a:rPr>
               <a:t>BtoB マーケティングの全体像</a:t>
             </a:r>
           </a:p>
@@ -37456,183 +37473,105 @@
       <p:grpSpPr/>
       <p:sp>
         <p:nvSpPr>
-          <p:cNvPr id="4" name="Title 3"/>
+          <p:cNvPr id="6" name="Text Placeholder 5"/>
           <p:cNvSpPr>
             <a:spLocks noGrp="1"/>
           </p:cNvSpPr>
           <p:nvPr>
-            <p:ph type="title"/>
+            <p:ph type="body" idx="14" sz="quarter"/>
           </p:nvPr>
         </p:nvSpPr>
-        <p:spPr>
-          <a:xfrm>
-            <a:off x="548640" y="457200"/>
-            <a:ext cx="11091672" cy="822960"/>
-          </a:xfrm>
-        </p:spPr>
+        <p:spPr/>
         <p:txBody>
           <a:bodyPr/>
           <a:lstStyle/>
           <a:p>
             <a:r>
-              <a:rPr sz="2800" b="1">
-                <a:solidFill>
-                  <a:srgbClr val="001F33"/>
-                </a:solidFill>
-                <a:latin typeface="Noto Sans JP"/>
-              </a:rPr>
-              <a:t>アジェンダ</a:t>
+              <a:t>2. 失敗パターン × 打ち手（Marketo / SharePoint / Power BI 活用）</a:t>
             </a:r>
           </a:p>
         </p:txBody>
       </p:sp>
       <p:sp>
         <p:nvSpPr>
-          <p:cNvPr id="5" name="Rectangle 4"/>
-          <p:cNvSpPr/>
-          <p:nvPr/>
+          <p:cNvPr id="7" name="Text Placeholder 6"/>
+          <p:cNvSpPr>
+            <a:spLocks noGrp="1"/>
+          </p:cNvSpPr>
+          <p:nvPr>
+            <p:ph type="body" idx="12" sz="quarter"/>
+          </p:nvPr>
         </p:nvSpPr>
-        <p:spPr>
-          <a:xfrm>
-            <a:off x="548640" y="1325880"/>
-            <a:ext cx="548640" cy="54864"/>
-          </a:xfrm>
-          <a:prstGeom prst="rect">
-            <a:avLst/>
-          </a:prstGeom>
-          <a:solidFill>
-            <a:srgbClr val="FFB81C"/>
-          </a:solidFill>
-          <a:ln>
-            <a:noFill/>
-          </a:ln>
-        </p:spPr>
-        <p:style>
-          <a:lnRef idx="1">
-            <a:schemeClr val="accent1"/>
-          </a:lnRef>
-          <a:fillRef idx="3">
-            <a:schemeClr val="accent1"/>
-          </a:fillRef>
-          <a:effectRef idx="2">
-            <a:schemeClr val="accent1"/>
-          </a:effectRef>
-          <a:fontRef idx="minor">
-            <a:schemeClr val="lt1"/>
-          </a:fontRef>
-        </p:style>
+        <p:spPr/>
         <p:txBody>
-          <a:bodyPr rtlCol="0" anchor="ctr"/>
+          <a:bodyPr/>
           <a:lstStyle/>
           <a:p>
-            <a:pPr algn="ctr"/>
+            <a:r>
+              <a:t>1. BtoB マーケが BtoC と決定的に違う3点</a:t>
+            </a:r>
           </a:p>
         </p:txBody>
       </p:sp>
       <p:sp>
         <p:nvSpPr>
-          <p:cNvPr id="6" name="TextBox 5"/>
-          <p:cNvSpPr txBox="1"/>
-          <p:nvPr/>
+          <p:cNvPr id="12" name="Text Placeholder 11"/>
+          <p:cNvSpPr>
+            <a:spLocks noGrp="1"/>
+          </p:cNvSpPr>
+          <p:nvPr>
+            <p:ph type="body" idx="15" sz="quarter"/>
+          </p:nvPr>
         </p:nvSpPr>
-        <p:spPr>
-          <a:xfrm>
-            <a:off x="914400" y="1828800"/>
-            <a:ext cx="10515600" cy="4114800"/>
-          </a:xfrm>
-          <a:prstGeom prst="rect">
-            <a:avLst/>
-          </a:prstGeom>
-          <a:noFill/>
-        </p:spPr>
+        <p:spPr/>
         <p:txBody>
-          <a:bodyPr wrap="square">
-            <a:spAutoFit/>
-          </a:bodyPr>
+          <a:bodyPr/>
           <a:lstStyle/>
           <a:p>
-            <a:pPr>
-              <a:spcAft>
-                <a:spcPts val="1400"/>
-              </a:spcAft>
-            </a:pPr>
-            <a:r>
-              <a:rPr sz="2800" b="1">
-                <a:solidFill>
-                  <a:srgbClr val="FFB81C"/>
-                </a:solidFill>
-                <a:latin typeface="Inter"/>
-              </a:rPr>
-              <a:t>01    </a:t>
-            </a:r>
-            <a:r>
-              <a:rPr sz="2200">
-                <a:solidFill>
-                  <a:srgbClr val="000000"/>
-                </a:solidFill>
-                <a:latin typeface="Noto Sans JP"/>
-              </a:rPr>
-              <a:t>1. BtoB マーケが BtoC と決定的に違う3点</a:t>
-            </a:r>
-          </a:p>
-          <a:p>
-            <a:pPr>
-              <a:spcAft>
-                <a:spcPts val="1400"/>
-              </a:spcAft>
-            </a:pPr>
-            <a:r>
-              <a:rPr sz="2800" b="1">
-                <a:solidFill>
-                  <a:srgbClr val="FFB81C"/>
-                </a:solidFill>
-                <a:latin typeface="Inter"/>
-              </a:rPr>
-              <a:t>02    </a:t>
-            </a:r>
-            <a:r>
-              <a:rPr sz="2200">
-                <a:solidFill>
-                  <a:srgbClr val="000000"/>
-                </a:solidFill>
-                <a:latin typeface="Noto Sans JP"/>
-              </a:rPr>
-              <a:t>2. 失敗パターン × 打ち手（Marketo / SharePoint / Power BI 活用）</a:t>
+            <a:r>
+              <a:t>2</a:t>
             </a:r>
           </a:p>
         </p:txBody>
       </p:sp>
       <p:sp>
         <p:nvSpPr>
-          <p:cNvPr id="7" name="TextBox 6"/>
-          <p:cNvSpPr txBox="1"/>
-          <p:nvPr/>
+          <p:cNvPr id="13" name="Text Placeholder 12"/>
+          <p:cNvSpPr>
+            <a:spLocks noGrp="1"/>
+          </p:cNvSpPr>
+          <p:nvPr>
+            <p:ph type="body" idx="13" sz="quarter"/>
+          </p:nvPr>
         </p:nvSpPr>
-        <p:spPr>
-          <a:xfrm>
-            <a:off x="10911840" y="6400800"/>
-            <a:ext cx="914400" cy="274320"/>
-          </a:xfrm>
-          <a:prstGeom prst="rect">
-            <a:avLst/>
-          </a:prstGeom>
-          <a:noFill/>
-        </p:spPr>
+        <p:spPr/>
         <p:txBody>
-          <a:bodyPr wrap="none">
-            <a:spAutoFit/>
-          </a:bodyPr>
+          <a:bodyPr/>
           <a:lstStyle/>
           <a:p>
-            <a:pPr algn="r"/>
-            <a:r>
-              <a:rPr sz="1000" b="0">
-                <a:solidFill>
-                  <a:srgbClr val="5A6470"/>
-                </a:solidFill>
-                <a:latin typeface="Noto Sans JP"/>
-              </a:rPr>
-              <a:t>2 / 3</a:t>
+            <a:r>
+              <a:t>1</a:t>
+            </a:r>
+          </a:p>
+        </p:txBody>
+      </p:sp>
+      <p:sp>
+        <p:nvSpPr>
+          <p:cNvPr id="14" name="Text Placeholder 13"/>
+          <p:cNvSpPr>
+            <a:spLocks noGrp="1"/>
+          </p:cNvSpPr>
+          <p:nvPr>
+            <p:ph type="body" idx="24" sz="quarter"/>
+          </p:nvPr>
+        </p:nvSpPr>
+        <p:spPr/>
+        <p:txBody>
+          <a:bodyPr/>
+          <a:lstStyle/>
+          <a:p>
+            <a:r>
+              <a:t>アジェンダ</a:t>
             </a:r>
           </a:p>
         </p:txBody>
@@ -37657,273 +37596,127 @@
       <p:grpSpPr/>
       <p:sp>
         <p:nvSpPr>
-          <p:cNvPr id="4" name="Title 3"/>
+          <p:cNvPr id="2" name="Text Placeholder 1"/>
           <p:cNvSpPr>
             <a:spLocks noGrp="1"/>
           </p:cNvSpPr>
           <p:nvPr>
-            <p:ph type="title"/>
+            <p:ph type="body" idx="32" sz="quarter"/>
           </p:nvPr>
         </p:nvSpPr>
-        <p:spPr>
-          <a:xfrm>
-            <a:off x="548640" y="457200"/>
-            <a:ext cx="11091672" cy="822960"/>
-          </a:xfrm>
-        </p:spPr>
+        <p:spPr/>
         <p:txBody>
-          <a:bodyPr/>
+          <a:bodyPr wrap="square"/>
           <a:lstStyle/>
           <a:p>
-            <a:r>
-              <a:rPr sz="2800" b="1">
-                <a:solidFill>
-                  <a:srgbClr val="001F33"/>
-                </a:solidFill>
-                <a:latin typeface="Noto Sans JP"/>
+            <a:pPr>
+              <a:spcAft>
+                <a:spcPts val="1000"/>
+              </a:spcAft>
+            </a:pPr>
+            <a:r>
+              <a:rPr b="1">
+                <a:solidFill>
+                  <a:srgbClr val="FFB81C"/>
+                </a:solidFill>
               </a:rPr>
-              <a:t>BtoB マーケティングの本質と打ち手</a:t>
+              <a:t>—  </a:t>
+            </a:r>
+            <a:r>
+              <a:t>意思決定者が複数（DMU）→ ペルソナを職種別に複数定義し、職種別 LP を用意</a:t>
+            </a:r>
+          </a:p>
+          <a:p>
+            <a:pPr>
+              <a:spcAft>
+                <a:spcPts val="1000"/>
+              </a:spcAft>
+            </a:pPr>
+            <a:r>
+              <a:rPr b="1">
+                <a:solidFill>
+                  <a:srgbClr val="FFB81C"/>
+                </a:solidFill>
+              </a:rPr>
+              <a:t>—  </a:t>
+            </a:r>
+            <a:r>
+              <a:t>意思決定サイクルが長い → Marketo でフェーズ別ナーチャリングを自動化</a:t>
+            </a:r>
+          </a:p>
+          <a:p>
+            <a:pPr>
+              <a:spcAft>
+                <a:spcPts val="1000"/>
+              </a:spcAft>
+            </a:pPr>
+            <a:r>
+              <a:rPr b="1">
+                <a:solidFill>
+                  <a:srgbClr val="FFB81C"/>
+                </a:solidFill>
+              </a:rPr>
+              <a:t>—  </a:t>
+            </a:r>
+            <a:r>
+              <a:t>ROI 計測が難しい → MQL/SQL/商談化を中間 KPI として Power BI で可視化</a:t>
+            </a:r>
+          </a:p>
+          <a:p>
+            <a:pPr>
+              <a:spcAft>
+                <a:spcPts val="1000"/>
+              </a:spcAft>
+            </a:pPr>
+            <a:r>
+              <a:rPr b="1">
+                <a:solidFill>
+                  <a:srgbClr val="FFB81C"/>
+                </a:solidFill>
+              </a:rPr>
+              <a:t>—  </a:t>
+            </a:r>
+            <a:r>
+              <a:t>失敗1: リード量だけ追う → 商談化率・受注率まで KPI 化する</a:t>
+            </a:r>
+          </a:p>
+          <a:p>
+            <a:pPr>
+              <a:spcAft>
+                <a:spcPts val="1000"/>
+              </a:spcAft>
+            </a:pPr>
+            <a:r>
+              <a:rPr b="1">
+                <a:solidFill>
+                  <a:srgbClr val="FFB81C"/>
+                </a:solidFill>
+              </a:rPr>
+              <a:t>—  </a:t>
+            </a:r>
+            <a:r>
+              <a:t>失敗2: LP を1本化 → 業種・職種で分岐し、コンバージョンを最適化</a:t>
             </a:r>
           </a:p>
         </p:txBody>
       </p:sp>
       <p:sp>
         <p:nvSpPr>
-          <p:cNvPr id="5" name="Rectangle 4"/>
-          <p:cNvSpPr/>
-          <p:nvPr/>
+          <p:cNvPr id="4" name="Text Placeholder 3"/>
+          <p:cNvSpPr>
+            <a:spLocks noGrp="1"/>
+          </p:cNvSpPr>
+          <p:nvPr>
+            <p:ph type="body" idx="29" sz="quarter"/>
+          </p:nvPr>
         </p:nvSpPr>
-        <p:spPr>
-          <a:xfrm>
-            <a:off x="548640" y="1325880"/>
-            <a:ext cx="548640" cy="54864"/>
-          </a:xfrm>
-          <a:prstGeom prst="rect">
-            <a:avLst/>
-          </a:prstGeom>
-          <a:solidFill>
-            <a:srgbClr val="FFB81C"/>
-          </a:solidFill>
-          <a:ln>
-            <a:noFill/>
-          </a:ln>
-        </p:spPr>
-        <p:style>
-          <a:lnRef idx="1">
-            <a:schemeClr val="accent1"/>
-          </a:lnRef>
-          <a:fillRef idx="3">
-            <a:schemeClr val="accent1"/>
-          </a:fillRef>
-          <a:effectRef idx="2">
-            <a:schemeClr val="accent1"/>
-          </a:effectRef>
-          <a:fontRef idx="minor">
-            <a:schemeClr val="lt1"/>
-          </a:fontRef>
-        </p:style>
+        <p:spPr/>
         <p:txBody>
-          <a:bodyPr rtlCol="0" anchor="ctr"/>
+          <a:bodyPr/>
           <a:lstStyle/>
           <a:p>
-            <a:pPr algn="ctr"/>
-          </a:p>
-        </p:txBody>
-      </p:sp>
-      <p:sp>
-        <p:nvSpPr>
-          <p:cNvPr id="6" name="TextBox 5"/>
-          <p:cNvSpPr txBox="1"/>
-          <p:nvPr/>
-        </p:nvSpPr>
-        <p:spPr>
-          <a:xfrm>
-            <a:off x="548640" y="1645920"/>
-            <a:ext cx="11091672" cy="4572000"/>
-          </a:xfrm>
-          <a:prstGeom prst="rect">
-            <a:avLst/>
-          </a:prstGeom>
-          <a:noFill/>
-        </p:spPr>
-        <p:txBody>
-          <a:bodyPr wrap="square">
-            <a:spAutoFit/>
-          </a:bodyPr>
-          <a:lstStyle/>
-          <a:p>
-            <a:pPr>
-              <a:spcBef>
-                <a:spcPts val="400"/>
-              </a:spcBef>
-              <a:spcAft>
-                <a:spcPts val="1000"/>
-              </a:spcAft>
-            </a:pPr>
-            <a:r>
-              <a:rPr sz="1800" b="1">
-                <a:solidFill>
-                  <a:srgbClr val="FFB81C"/>
-                </a:solidFill>
-                <a:latin typeface="Noto Sans JP"/>
-              </a:rPr>
-              <a:t>—  </a:t>
-            </a:r>
-            <a:r>
-              <a:rPr sz="1800">
-                <a:solidFill>
-                  <a:srgbClr val="000000"/>
-                </a:solidFill>
-                <a:latin typeface="Noto Sans JP"/>
-              </a:rPr>
-              <a:t>意思決定者が複数（DMU）→ ペルソナを職種別に複数定義し、職種別 LP を用意</a:t>
-            </a:r>
-          </a:p>
-          <a:p>
-            <a:pPr>
-              <a:spcBef>
-                <a:spcPts val="400"/>
-              </a:spcBef>
-              <a:spcAft>
-                <a:spcPts val="1000"/>
-              </a:spcAft>
-            </a:pPr>
-            <a:r>
-              <a:rPr sz="1800" b="1">
-                <a:solidFill>
-                  <a:srgbClr val="FFB81C"/>
-                </a:solidFill>
-                <a:latin typeface="Noto Sans JP"/>
-              </a:rPr>
-              <a:t>—  </a:t>
-            </a:r>
-            <a:r>
-              <a:rPr sz="1800">
-                <a:solidFill>
-                  <a:srgbClr val="000000"/>
-                </a:solidFill>
-                <a:latin typeface="Noto Sans JP"/>
-              </a:rPr>
-              <a:t>意思決定サイクルが長い → Marketo でフェーズ別ナーチャリングを自動化</a:t>
-            </a:r>
-          </a:p>
-          <a:p>
-            <a:pPr>
-              <a:spcBef>
-                <a:spcPts val="400"/>
-              </a:spcBef>
-              <a:spcAft>
-                <a:spcPts val="1000"/>
-              </a:spcAft>
-            </a:pPr>
-            <a:r>
-              <a:rPr sz="1800" b="1">
-                <a:solidFill>
-                  <a:srgbClr val="FFB81C"/>
-                </a:solidFill>
-                <a:latin typeface="Noto Sans JP"/>
-              </a:rPr>
-              <a:t>—  </a:t>
-            </a:r>
-            <a:r>
-              <a:rPr sz="1800">
-                <a:solidFill>
-                  <a:srgbClr val="000000"/>
-                </a:solidFill>
-                <a:latin typeface="Noto Sans JP"/>
-              </a:rPr>
-              <a:t>ROI 計測が難しい → MQL/SQL/商談化を中間 KPI として Power BI で可視化</a:t>
-            </a:r>
-          </a:p>
-          <a:p>
-            <a:pPr>
-              <a:spcBef>
-                <a:spcPts val="400"/>
-              </a:spcBef>
-              <a:spcAft>
-                <a:spcPts val="1000"/>
-              </a:spcAft>
-            </a:pPr>
-            <a:r>
-              <a:rPr sz="1800" b="1">
-                <a:solidFill>
-                  <a:srgbClr val="FFB81C"/>
-                </a:solidFill>
-                <a:latin typeface="Noto Sans JP"/>
-              </a:rPr>
-              <a:t>—  </a:t>
-            </a:r>
-            <a:r>
-              <a:rPr sz="1800">
-                <a:solidFill>
-                  <a:srgbClr val="000000"/>
-                </a:solidFill>
-                <a:latin typeface="Noto Sans JP"/>
-              </a:rPr>
-              <a:t>失敗1: リード量だけ追う → 商談化率・受注率まで KPI 化する</a:t>
-            </a:r>
-          </a:p>
-          <a:p>
-            <a:pPr>
-              <a:spcBef>
-                <a:spcPts val="400"/>
-              </a:spcBef>
-              <a:spcAft>
-                <a:spcPts val="1000"/>
-              </a:spcAft>
-            </a:pPr>
-            <a:r>
-              <a:rPr sz="1800" b="1">
-                <a:solidFill>
-                  <a:srgbClr val="FFB81C"/>
-                </a:solidFill>
-                <a:latin typeface="Noto Sans JP"/>
-              </a:rPr>
-              <a:t>—  </a:t>
-            </a:r>
-            <a:r>
-              <a:rPr sz="1800">
-                <a:solidFill>
-                  <a:srgbClr val="000000"/>
-                </a:solidFill>
-                <a:latin typeface="Noto Sans JP"/>
-              </a:rPr>
-              <a:t>失敗2: LP を1本化 → 業種・職種で分岐し、コンバージョンを最適化</a:t>
-            </a:r>
-          </a:p>
-        </p:txBody>
-      </p:sp>
-      <p:sp>
-        <p:nvSpPr>
-          <p:cNvPr id="7" name="TextBox 6"/>
-          <p:cNvSpPr txBox="1"/>
-          <p:nvPr/>
-        </p:nvSpPr>
-        <p:spPr>
-          <a:xfrm>
-            <a:off x="10911840" y="6400800"/>
-            <a:ext cx="914400" cy="274320"/>
-          </a:xfrm>
-          <a:prstGeom prst="rect">
-            <a:avLst/>
-          </a:prstGeom>
-          <a:noFill/>
-        </p:spPr>
-        <p:txBody>
-          <a:bodyPr wrap="none">
-            <a:spAutoFit/>
-          </a:bodyPr>
-          <a:lstStyle/>
-          <a:p>
-            <a:pPr algn="r"/>
-            <a:r>
-              <a:rPr sz="1000" b="0">
-                <a:solidFill>
-                  <a:srgbClr val="5A6470"/>
-                </a:solidFill>
-                <a:latin typeface="Noto Sans JP"/>
-              </a:rPr>
-              <a:t>3 / 3</a:t>
+            <a:r>
+              <a:t>BtoB マーケティングの本質と打ち手</a:t>
             </a:r>
           </a:p>
         </p:txBody>

--- a/assets/samples/btob-marketing-sample.pptx
+++ b/assets/samples/btob-marketing-sample.pptx
@@ -37601,113 +37601,322 @@
             <a:spLocks noGrp="1"/>
           </p:cNvSpPr>
           <p:nvPr>
-            <p:ph type="body" idx="32" sz="quarter"/>
+            <p:ph type="body" idx="11" sz="quarter"/>
           </p:nvPr>
         </p:nvSpPr>
         <p:spPr/>
         <p:txBody>
-          <a:bodyPr wrap="square"/>
+          <a:bodyPr/>
           <a:lstStyle/>
           <a:p>
-            <a:pPr>
-              <a:spcAft>
-                <a:spcPts val="1000"/>
-              </a:spcAft>
-            </a:pPr>
-            <a:r>
-              <a:rPr b="1">
-                <a:solidFill>
-                  <a:srgbClr val="FFB81C"/>
-                </a:solidFill>
-              </a:rPr>
-              <a:t>—  </a:t>
-            </a:r>
-            <a:r>
-              <a:t>意思決定者が複数（DMU）→ ペルソナを職種別に複数定義し、職種別 LP を用意</a:t>
-            </a:r>
-          </a:p>
-          <a:p>
-            <a:pPr>
-              <a:spcAft>
-                <a:spcPts val="1000"/>
-              </a:spcAft>
-            </a:pPr>
-            <a:r>
-              <a:rPr b="1">
-                <a:solidFill>
-                  <a:srgbClr val="FFB81C"/>
-                </a:solidFill>
-              </a:rPr>
-              <a:t>—  </a:t>
-            </a:r>
-            <a:r>
-              <a:t>意思決定サイクルが長い → Marketo でフェーズ別ナーチャリングを自動化</a:t>
-            </a:r>
-          </a:p>
-          <a:p>
-            <a:pPr>
-              <a:spcAft>
-                <a:spcPts val="1000"/>
-              </a:spcAft>
-            </a:pPr>
-            <a:r>
-              <a:rPr b="1">
-                <a:solidFill>
-                  <a:srgbClr val="FFB81C"/>
-                </a:solidFill>
-              </a:rPr>
-              <a:t>—  </a:t>
-            </a:r>
-            <a:r>
-              <a:t>ROI 計測が難しい → MQL/SQL/商談化を中間 KPI として Power BI で可視化</a:t>
-            </a:r>
-          </a:p>
-          <a:p>
-            <a:pPr>
-              <a:spcAft>
-                <a:spcPts val="1000"/>
-              </a:spcAft>
-            </a:pPr>
-            <a:r>
-              <a:rPr b="1">
-                <a:solidFill>
-                  <a:srgbClr val="FFB81C"/>
-                </a:solidFill>
-              </a:rPr>
-              <a:t>—  </a:t>
-            </a:r>
-            <a:r>
-              <a:t>失敗1: リード量だけ追う → 商談化率・受注率まで KPI 化する</a:t>
-            </a:r>
-          </a:p>
-          <a:p>
-            <a:pPr>
-              <a:spcAft>
-                <a:spcPts val="1000"/>
-              </a:spcAft>
-            </a:pPr>
-            <a:r>
-              <a:rPr b="1">
-                <a:solidFill>
-                  <a:srgbClr val="FFB81C"/>
-                </a:solidFill>
-              </a:rPr>
-              <a:t>—  </a:t>
-            </a:r>
-            <a:r>
-              <a:t>失敗2: LP を1本化 → 業種・職種で分岐し、コンバージョンを最適化</a:t>
+            <a:r>
+              <a:t>商談化率・受注率まで KPI 化する</a:t>
             </a:r>
           </a:p>
         </p:txBody>
       </p:sp>
       <p:sp>
         <p:nvSpPr>
-          <p:cNvPr id="4" name="Text Placeholder 3"/>
+          <p:cNvPr id="3" name="Text Placeholder 2"/>
           <p:cNvSpPr>
             <a:spLocks noGrp="1"/>
           </p:cNvSpPr>
           <p:nvPr>
-            <p:ph type="body" idx="29" sz="quarter"/>
+            <p:ph type="body" idx="12" sz="quarter"/>
+          </p:nvPr>
+        </p:nvSpPr>
+        <p:spPr/>
+        <p:txBody>
+          <a:bodyPr/>
+          <a:lstStyle/>
+          <a:p>
+            <a:r>
+              <a:t>MQL/SQL/商談化を中間 KPI として Power BI で可視化</a:t>
+            </a:r>
+          </a:p>
+        </p:txBody>
+      </p:sp>
+      <p:sp>
+        <p:nvSpPr>
+          <p:cNvPr id="5" name="Text Placeholder 4"/>
+          <p:cNvSpPr>
+            <a:spLocks noGrp="1"/>
+          </p:cNvSpPr>
+          <p:nvPr>
+            <p:ph type="body" idx="15" sz="quarter"/>
+          </p:nvPr>
+        </p:nvSpPr>
+        <p:spPr/>
+        <p:txBody>
+          <a:bodyPr/>
+          <a:lstStyle/>
+          <a:p>
+            <a:r>
+              <a:t>Marketo でフェーズ別ナーチャリングを自動化</a:t>
+            </a:r>
+          </a:p>
+        </p:txBody>
+      </p:sp>
+      <p:sp>
+        <p:nvSpPr>
+          <p:cNvPr id="6" name="Text Placeholder 5"/>
+          <p:cNvSpPr>
+            <a:spLocks noGrp="1"/>
+          </p:cNvSpPr>
+          <p:nvPr>
+            <p:ph type="body" idx="16" sz="quarter"/>
+          </p:nvPr>
+        </p:nvSpPr>
+        <p:spPr/>
+        <p:txBody>
+          <a:bodyPr/>
+          <a:lstStyle/>
+          <a:p>
+            <a:r>
+              <a:t>業種・職種で分岐し、コンバージョンを最適化</a:t>
+            </a:r>
+          </a:p>
+        </p:txBody>
+      </p:sp>
+      <p:sp>
+        <p:nvSpPr>
+          <p:cNvPr id="7" name="Text Placeholder 6"/>
+          <p:cNvSpPr>
+            <a:spLocks noGrp="1"/>
+          </p:cNvSpPr>
+          <p:nvPr>
+            <p:ph type="body" idx="17" sz="quarter"/>
+          </p:nvPr>
+        </p:nvSpPr>
+        <p:spPr/>
+        <p:txBody>
+          <a:bodyPr/>
+          <a:lstStyle/>
+          <a:p>
+            <a:r>
+              <a:t>意思決定者が複数（DMU）</a:t>
+            </a:r>
+          </a:p>
+        </p:txBody>
+      </p:sp>
+      <p:sp>
+        <p:nvSpPr>
+          <p:cNvPr id="8" name="Text Placeholder 7"/>
+          <p:cNvSpPr>
+            <a:spLocks noGrp="1"/>
+          </p:cNvSpPr>
+          <p:nvPr>
+            <p:ph type="body" idx="18" sz="quarter"/>
+          </p:nvPr>
+        </p:nvSpPr>
+        <p:spPr/>
+        <p:txBody>
+          <a:bodyPr/>
+          <a:lstStyle/>
+          <a:p>
+            <a:r>
+              <a:t>失敗1: リード量だけ追う</a:t>
+            </a:r>
+          </a:p>
+        </p:txBody>
+      </p:sp>
+      <p:sp>
+        <p:nvSpPr>
+          <p:cNvPr id="9" name="Text Placeholder 8"/>
+          <p:cNvSpPr>
+            <a:spLocks noGrp="1"/>
+          </p:cNvSpPr>
+          <p:nvPr>
+            <p:ph type="body" idx="19" sz="quarter"/>
+          </p:nvPr>
+        </p:nvSpPr>
+        <p:spPr/>
+        <p:txBody>
+          <a:bodyPr/>
+          <a:lstStyle/>
+          <a:p>
+            <a:r>
+              <a:t>意思決定サイクルが長い</a:t>
+            </a:r>
+          </a:p>
+        </p:txBody>
+      </p:sp>
+      <p:sp>
+        <p:nvSpPr>
+          <p:cNvPr id="10" name="Text Placeholder 9"/>
+          <p:cNvSpPr>
+            <a:spLocks noGrp="1"/>
+          </p:cNvSpPr>
+          <p:nvPr>
+            <p:ph type="body" idx="20" sz="quarter"/>
+          </p:nvPr>
+        </p:nvSpPr>
+        <p:spPr/>
+        <p:txBody>
+          <a:bodyPr/>
+          <a:lstStyle/>
+          <a:p>
+            <a:r>
+              <a:t>失敗2: LP を1本化</a:t>
+            </a:r>
+          </a:p>
+        </p:txBody>
+      </p:sp>
+      <p:sp>
+        <p:nvSpPr>
+          <p:cNvPr id="11" name="Text Placeholder 10"/>
+          <p:cNvSpPr>
+            <a:spLocks noGrp="1"/>
+          </p:cNvSpPr>
+          <p:nvPr>
+            <p:ph type="body" idx="21" sz="quarter"/>
+          </p:nvPr>
+        </p:nvSpPr>
+        <p:spPr/>
+        <p:txBody>
+          <a:bodyPr/>
+          <a:lstStyle/>
+          <a:p>
+            <a:r>
+              <a:t>ROI 計測が難しい</a:t>
+            </a:r>
+          </a:p>
+        </p:txBody>
+      </p:sp>
+      <p:sp>
+        <p:nvSpPr>
+          <p:cNvPr id="13" name="Text Placeholder 12"/>
+          <p:cNvSpPr>
+            <a:spLocks noGrp="1"/>
+          </p:cNvSpPr>
+          <p:nvPr>
+            <p:ph type="body" idx="23" sz="quarter"/>
+          </p:nvPr>
+        </p:nvSpPr>
+        <p:spPr/>
+        <p:txBody>
+          <a:bodyPr/>
+          <a:lstStyle/>
+          <a:p>
+            <a:r>
+              <a:t>1</a:t>
+            </a:r>
+          </a:p>
+        </p:txBody>
+      </p:sp>
+      <p:sp>
+        <p:nvSpPr>
+          <p:cNvPr id="14" name="Text Placeholder 13"/>
+          <p:cNvSpPr>
+            <a:spLocks noGrp="1"/>
+          </p:cNvSpPr>
+          <p:nvPr>
+            <p:ph type="body" idx="24" sz="quarter"/>
+          </p:nvPr>
+        </p:nvSpPr>
+        <p:spPr/>
+        <p:txBody>
+          <a:bodyPr/>
+          <a:lstStyle/>
+          <a:p>
+            <a:r>
+              <a:t>4</a:t>
+            </a:r>
+          </a:p>
+        </p:txBody>
+      </p:sp>
+      <p:sp>
+        <p:nvSpPr>
+          <p:cNvPr id="15" name="Text Placeholder 14"/>
+          <p:cNvSpPr>
+            <a:spLocks noGrp="1"/>
+          </p:cNvSpPr>
+          <p:nvPr>
+            <p:ph type="body" idx="25" sz="quarter"/>
+          </p:nvPr>
+        </p:nvSpPr>
+        <p:spPr/>
+        <p:txBody>
+          <a:bodyPr/>
+          <a:lstStyle/>
+          <a:p>
+            <a:r>
+              <a:t>2</a:t>
+            </a:r>
+          </a:p>
+        </p:txBody>
+      </p:sp>
+      <p:sp>
+        <p:nvSpPr>
+          <p:cNvPr id="16" name="Text Placeholder 15"/>
+          <p:cNvSpPr>
+            <a:spLocks noGrp="1"/>
+          </p:cNvSpPr>
+          <p:nvPr>
+            <p:ph type="body" idx="26" sz="quarter"/>
+          </p:nvPr>
+        </p:nvSpPr>
+        <p:spPr/>
+        <p:txBody>
+          <a:bodyPr/>
+          <a:lstStyle/>
+          <a:p>
+            <a:r>
+              <a:t>5</a:t>
+            </a:r>
+          </a:p>
+        </p:txBody>
+      </p:sp>
+      <p:sp>
+        <p:nvSpPr>
+          <p:cNvPr id="17" name="Text Placeholder 16"/>
+          <p:cNvSpPr>
+            <a:spLocks noGrp="1"/>
+          </p:cNvSpPr>
+          <p:nvPr>
+            <p:ph type="body" idx="27" sz="quarter"/>
+          </p:nvPr>
+        </p:nvSpPr>
+        <p:spPr/>
+        <p:txBody>
+          <a:bodyPr/>
+          <a:lstStyle/>
+          <a:p>
+            <a:r>
+              <a:t>3</a:t>
+            </a:r>
+          </a:p>
+        </p:txBody>
+      </p:sp>
+      <p:sp>
+        <p:nvSpPr>
+          <p:cNvPr id="19" name="Text Placeholder 18"/>
+          <p:cNvSpPr>
+            <a:spLocks noGrp="1"/>
+          </p:cNvSpPr>
+          <p:nvPr>
+            <p:ph type="body" idx="10" sz="quarter"/>
+          </p:nvPr>
+        </p:nvSpPr>
+        <p:spPr/>
+        <p:txBody>
+          <a:bodyPr/>
+          <a:lstStyle/>
+          <a:p>
+            <a:r>
+              <a:t>ペルソナを職種別に複数定義し、職種別 LP を用意</a:t>
+            </a:r>
+          </a:p>
+        </p:txBody>
+      </p:sp>
+      <p:sp>
+        <p:nvSpPr>
+          <p:cNvPr id="21" name="Text Placeholder 20"/>
+          <p:cNvSpPr>
+            <a:spLocks noGrp="1"/>
+          </p:cNvSpPr>
+          <p:nvPr>
+            <p:ph type="body" idx="30" sz="quarter"/>
           </p:nvPr>
         </p:nvSpPr>
         <p:spPr/>

--- a/assets/samples/btob-marketing-sample.pptx
+++ b/assets/samples/btob-marketing-sample.pptx
@@ -37596,12 +37596,12 @@
       <p:grpSpPr/>
       <p:sp>
         <p:nvSpPr>
-          <p:cNvPr id="2" name="Text Placeholder 1"/>
+          <p:cNvPr id="4" name="Text Placeholder 3"/>
           <p:cNvSpPr>
             <a:spLocks noGrp="1"/>
           </p:cNvSpPr>
           <p:nvPr>
-            <p:ph type="body" idx="11" sz="quarter"/>
+            <p:ph type="body" idx="29" sz="quarter"/>
           </p:nvPr>
         </p:nvSpPr>
         <p:spPr/>
@@ -37610,132 +37610,317 @@
           <a:lstStyle/>
           <a:p>
             <a:r>
-              <a:t>商談化率・受注率まで KPI 化する</a:t>
+              <a:t>BtoB マーケティングの本質と打ち手</a:t>
             </a:r>
           </a:p>
         </p:txBody>
       </p:sp>
       <p:sp>
         <p:nvSpPr>
-          <p:cNvPr id="3" name="Text Placeholder 2"/>
-          <p:cNvSpPr>
-            <a:spLocks noGrp="1"/>
-          </p:cNvSpPr>
-          <p:nvPr>
-            <p:ph type="body" idx="12" sz="quarter"/>
-          </p:nvPr>
+          <p:cNvPr id="5" name="Oval 4"/>
+          <p:cNvSpPr/>
+          <p:nvPr/>
         </p:nvSpPr>
-        <p:spPr/>
+        <p:spPr>
+          <a:xfrm>
+            <a:off x="457200" y="1721815"/>
+            <a:ext cx="502920" cy="502920"/>
+          </a:xfrm>
+          <a:prstGeom prst="ellipse">
+            <a:avLst/>
+          </a:prstGeom>
+          <a:solidFill>
+            <a:srgbClr val="FFB81C"/>
+          </a:solidFill>
+          <a:ln>
+            <a:noFill/>
+          </a:ln>
+        </p:spPr>
+        <p:style>
+          <a:lnRef idx="1">
+            <a:schemeClr val="accent1"/>
+          </a:lnRef>
+          <a:fillRef idx="3">
+            <a:schemeClr val="accent1"/>
+          </a:fillRef>
+          <a:effectRef idx="2">
+            <a:schemeClr val="accent1"/>
+          </a:effectRef>
+          <a:fontRef idx="minor">
+            <a:schemeClr val="lt1"/>
+          </a:fontRef>
+        </p:style>
         <p:txBody>
-          <a:bodyPr/>
+          <a:bodyPr rtlCol="0" anchor="ctr" lIns="137160" rIns="137160" wrap="square"/>
           <a:lstStyle/>
           <a:p>
-            <a:r>
-              <a:t>MQL/SQL/商談化を中間 KPI として Power BI で可視化</a:t>
+            <a:pPr algn="ctr"/>
+            <a:r>
+              <a:rPr sz="1800" b="1">
+                <a:solidFill>
+                  <a:srgbClr val="001F33"/>
+                </a:solidFill>
+                <a:latin typeface="Inter"/>
+              </a:rPr>
+              <a:t>1</a:t>
             </a:r>
           </a:p>
         </p:txBody>
       </p:sp>
       <p:sp>
         <p:nvSpPr>
-          <p:cNvPr id="5" name="Text Placeholder 4"/>
-          <p:cNvSpPr>
-            <a:spLocks noGrp="1"/>
-          </p:cNvSpPr>
-          <p:nvPr>
-            <p:ph type="body" idx="15" sz="quarter"/>
-          </p:nvPr>
+          <p:cNvPr id="6" name="Rounded Rectangle 5"/>
+          <p:cNvSpPr/>
+          <p:nvPr/>
         </p:nvSpPr>
-        <p:spPr/>
+        <p:spPr>
+          <a:xfrm>
+            <a:off x="960120" y="1554480"/>
+            <a:ext cx="2880360" cy="837590"/>
+          </a:xfrm>
+          <a:prstGeom prst="roundRect">
+            <a:avLst>
+              <a:gd name="adj" fmla="val 12000"/>
+            </a:avLst>
+          </a:prstGeom>
+          <a:solidFill>
+            <a:srgbClr val="001F33"/>
+          </a:solidFill>
+          <a:ln>
+            <a:noFill/>
+          </a:ln>
+        </p:spPr>
+        <p:style>
+          <a:lnRef idx="1">
+            <a:schemeClr val="accent1"/>
+          </a:lnRef>
+          <a:fillRef idx="3">
+            <a:schemeClr val="accent1"/>
+          </a:fillRef>
+          <a:effectRef idx="2">
+            <a:schemeClr val="accent1"/>
+          </a:effectRef>
+          <a:fontRef idx="minor">
+            <a:schemeClr val="lt1"/>
+          </a:fontRef>
+        </p:style>
         <p:txBody>
-          <a:bodyPr/>
+          <a:bodyPr rtlCol="0" anchor="ctr" lIns="137160" rIns="137160" wrap="square"/>
           <a:lstStyle/>
           <a:p>
-            <a:r>
-              <a:t>Marketo でフェーズ別ナーチャリングを自動化</a:t>
+            <a:pPr algn="ctr"/>
+            <a:r>
+              <a:rPr sz="1500" b="1">
+                <a:solidFill>
+                  <a:srgbClr val="FFFFFF"/>
+                </a:solidFill>
+                <a:latin typeface="Noto Sans JP"/>
+              </a:rPr>
+              <a:t>意思決定者が複数（DMU）</a:t>
             </a:r>
           </a:p>
         </p:txBody>
       </p:sp>
       <p:sp>
         <p:nvSpPr>
-          <p:cNvPr id="6" name="Text Placeholder 5"/>
-          <p:cNvSpPr>
-            <a:spLocks noGrp="1"/>
-          </p:cNvSpPr>
-          <p:nvPr>
-            <p:ph type="body" idx="16" sz="quarter"/>
-          </p:nvPr>
+          <p:cNvPr id="7" name="Right Arrow 6"/>
+          <p:cNvSpPr/>
+          <p:nvPr/>
         </p:nvSpPr>
-        <p:spPr/>
+        <p:spPr>
+          <a:xfrm>
+            <a:off x="3886200" y="1813255"/>
+            <a:ext cx="676656" cy="320040"/>
+          </a:xfrm>
+          <a:prstGeom prst="rightArrow">
+            <a:avLst/>
+          </a:prstGeom>
+          <a:solidFill>
+            <a:srgbClr val="FFB81C"/>
+          </a:solidFill>
+          <a:ln>
+            <a:noFill/>
+          </a:ln>
+        </p:spPr>
+        <p:style>
+          <a:lnRef idx="1">
+            <a:schemeClr val="accent1"/>
+          </a:lnRef>
+          <a:fillRef idx="3">
+            <a:schemeClr val="accent1"/>
+          </a:fillRef>
+          <a:effectRef idx="2">
+            <a:schemeClr val="accent1"/>
+          </a:effectRef>
+          <a:fontRef idx="minor">
+            <a:schemeClr val="lt1"/>
+          </a:fontRef>
+        </p:style>
         <p:txBody>
-          <a:bodyPr/>
+          <a:bodyPr rtlCol="0" anchor="ctr"/>
           <a:lstStyle/>
           <a:p>
-            <a:r>
-              <a:t>業種・職種で分岐し、コンバージョンを最適化</a:t>
-            </a:r>
+            <a:pPr algn="ctr"/>
           </a:p>
         </p:txBody>
       </p:sp>
       <p:sp>
         <p:nvSpPr>
-          <p:cNvPr id="7" name="Text Placeholder 6"/>
-          <p:cNvSpPr>
-            <a:spLocks noGrp="1"/>
-          </p:cNvSpPr>
-          <p:nvPr>
-            <p:ph type="body" idx="17" sz="quarter"/>
-          </p:nvPr>
+          <p:cNvPr id="8" name="Rounded Rectangle 7"/>
+          <p:cNvSpPr/>
+          <p:nvPr/>
         </p:nvSpPr>
-        <p:spPr/>
+        <p:spPr>
+          <a:xfrm>
+            <a:off x="4654296" y="1554480"/>
+            <a:ext cx="7034784" cy="837590"/>
+          </a:xfrm>
+          <a:prstGeom prst="roundRect">
+            <a:avLst>
+              <a:gd name="adj" fmla="val 12000"/>
+            </a:avLst>
+          </a:prstGeom>
+          <a:solidFill>
+            <a:srgbClr val="FFF6DD"/>
+          </a:solidFill>
+          <a:ln w="15875">
+            <a:solidFill>
+              <a:srgbClr val="E89F00"/>
+            </a:solidFill>
+          </a:ln>
+        </p:spPr>
+        <p:style>
+          <a:lnRef idx="1">
+            <a:schemeClr val="accent1"/>
+          </a:lnRef>
+          <a:fillRef idx="3">
+            <a:schemeClr val="accent1"/>
+          </a:fillRef>
+          <a:effectRef idx="2">
+            <a:schemeClr val="accent1"/>
+          </a:effectRef>
+          <a:fontRef idx="minor">
+            <a:schemeClr val="lt1"/>
+          </a:fontRef>
+        </p:style>
         <p:txBody>
-          <a:bodyPr/>
+          <a:bodyPr rtlCol="0" anchor="ctr" lIns="137160" rIns="137160" wrap="square"/>
           <a:lstStyle/>
           <a:p>
-            <a:r>
-              <a:t>意思決定者が複数（DMU）</a:t>
+            <a:pPr algn="l"/>
+            <a:r>
+              <a:rPr sz="1300" b="0">
+                <a:solidFill>
+                  <a:srgbClr val="001F33"/>
+                </a:solidFill>
+                <a:latin typeface="Noto Sans JP"/>
+              </a:rPr>
+              <a:t>ペルソナを職種別に複数定義し、職種別 LP を用意</a:t>
             </a:r>
           </a:p>
         </p:txBody>
       </p:sp>
       <p:sp>
         <p:nvSpPr>
-          <p:cNvPr id="8" name="Text Placeholder 7"/>
-          <p:cNvSpPr>
-            <a:spLocks noGrp="1"/>
-          </p:cNvSpPr>
-          <p:nvPr>
-            <p:ph type="body" idx="18" sz="quarter"/>
-          </p:nvPr>
+          <p:cNvPr id="9" name="Oval 8"/>
+          <p:cNvSpPr/>
+          <p:nvPr/>
         </p:nvSpPr>
-        <p:spPr/>
+        <p:spPr>
+          <a:xfrm>
+            <a:off x="457200" y="2723997"/>
+            <a:ext cx="502920" cy="502920"/>
+          </a:xfrm>
+          <a:prstGeom prst="ellipse">
+            <a:avLst/>
+          </a:prstGeom>
+          <a:solidFill>
+            <a:srgbClr val="FFB81C"/>
+          </a:solidFill>
+          <a:ln>
+            <a:noFill/>
+          </a:ln>
+        </p:spPr>
+        <p:style>
+          <a:lnRef idx="1">
+            <a:schemeClr val="accent1"/>
+          </a:lnRef>
+          <a:fillRef idx="3">
+            <a:schemeClr val="accent1"/>
+          </a:fillRef>
+          <a:effectRef idx="2">
+            <a:schemeClr val="accent1"/>
+          </a:effectRef>
+          <a:fontRef idx="minor">
+            <a:schemeClr val="lt1"/>
+          </a:fontRef>
+        </p:style>
         <p:txBody>
-          <a:bodyPr/>
+          <a:bodyPr rtlCol="0" anchor="ctr" lIns="137160" rIns="137160" wrap="square"/>
           <a:lstStyle/>
           <a:p>
-            <a:r>
-              <a:t>失敗1: リード量だけ追う</a:t>
+            <a:pPr algn="ctr"/>
+            <a:r>
+              <a:rPr sz="1800" b="1">
+                <a:solidFill>
+                  <a:srgbClr val="001F33"/>
+                </a:solidFill>
+                <a:latin typeface="Inter"/>
+              </a:rPr>
+              <a:t>2</a:t>
             </a:r>
           </a:p>
         </p:txBody>
       </p:sp>
       <p:sp>
         <p:nvSpPr>
-          <p:cNvPr id="9" name="Text Placeholder 8"/>
-          <p:cNvSpPr>
-            <a:spLocks noGrp="1"/>
-          </p:cNvSpPr>
-          <p:nvPr>
-            <p:ph type="body" idx="19" sz="quarter"/>
-          </p:nvPr>
+          <p:cNvPr id="10" name="Rounded Rectangle 9"/>
+          <p:cNvSpPr/>
+          <p:nvPr/>
         </p:nvSpPr>
-        <p:spPr/>
+        <p:spPr>
+          <a:xfrm>
+            <a:off x="960120" y="2556662"/>
+            <a:ext cx="2880360" cy="837590"/>
+          </a:xfrm>
+          <a:prstGeom prst="roundRect">
+            <a:avLst>
+              <a:gd name="adj" fmla="val 12000"/>
+            </a:avLst>
+          </a:prstGeom>
+          <a:solidFill>
+            <a:srgbClr val="001F33"/>
+          </a:solidFill>
+          <a:ln>
+            <a:noFill/>
+          </a:ln>
+        </p:spPr>
+        <p:style>
+          <a:lnRef idx="1">
+            <a:schemeClr val="accent1"/>
+          </a:lnRef>
+          <a:fillRef idx="3">
+            <a:schemeClr val="accent1"/>
+          </a:fillRef>
+          <a:effectRef idx="2">
+            <a:schemeClr val="accent1"/>
+          </a:effectRef>
+          <a:fontRef idx="minor">
+            <a:schemeClr val="lt1"/>
+          </a:fontRef>
+        </p:style>
         <p:txBody>
-          <a:bodyPr/>
+          <a:bodyPr rtlCol="0" anchor="ctr" lIns="137160" rIns="137160" wrap="square"/>
           <a:lstStyle/>
           <a:p>
-            <a:r>
+            <a:pPr algn="ctr"/>
+            <a:r>
+              <a:rPr sz="1500" b="1">
+                <a:solidFill>
+                  <a:srgbClr val="FFFFFF"/>
+                </a:solidFill>
+                <a:latin typeface="Noto Sans JP"/>
+              </a:rPr>
               <a:t>意思決定サイクルが長い</a:t>
             </a:r>
           </a:p>
@@ -37743,189 +37928,714 @@
       </p:sp>
       <p:sp>
         <p:nvSpPr>
-          <p:cNvPr id="10" name="Text Placeholder 9"/>
-          <p:cNvSpPr>
-            <a:spLocks noGrp="1"/>
-          </p:cNvSpPr>
-          <p:nvPr>
-            <p:ph type="body" idx="20" sz="quarter"/>
-          </p:nvPr>
+          <p:cNvPr id="11" name="Right Arrow 10"/>
+          <p:cNvSpPr/>
+          <p:nvPr/>
         </p:nvSpPr>
-        <p:spPr/>
+        <p:spPr>
+          <a:xfrm>
+            <a:off x="3886200" y="2815437"/>
+            <a:ext cx="676656" cy="320040"/>
+          </a:xfrm>
+          <a:prstGeom prst="rightArrow">
+            <a:avLst/>
+          </a:prstGeom>
+          <a:solidFill>
+            <a:srgbClr val="FFB81C"/>
+          </a:solidFill>
+          <a:ln>
+            <a:noFill/>
+          </a:ln>
+        </p:spPr>
+        <p:style>
+          <a:lnRef idx="1">
+            <a:schemeClr val="accent1"/>
+          </a:lnRef>
+          <a:fillRef idx="3">
+            <a:schemeClr val="accent1"/>
+          </a:fillRef>
+          <a:effectRef idx="2">
+            <a:schemeClr val="accent1"/>
+          </a:effectRef>
+          <a:fontRef idx="minor">
+            <a:schemeClr val="lt1"/>
+          </a:fontRef>
+        </p:style>
         <p:txBody>
-          <a:bodyPr/>
+          <a:bodyPr rtlCol="0" anchor="ctr"/>
           <a:lstStyle/>
           <a:p>
-            <a:r>
-              <a:t>失敗2: LP を1本化</a:t>
-            </a:r>
+            <a:pPr algn="ctr"/>
           </a:p>
         </p:txBody>
       </p:sp>
       <p:sp>
         <p:nvSpPr>
-          <p:cNvPr id="11" name="Text Placeholder 10"/>
-          <p:cNvSpPr>
-            <a:spLocks noGrp="1"/>
-          </p:cNvSpPr>
-          <p:nvPr>
-            <p:ph type="body" idx="21" sz="quarter"/>
-          </p:nvPr>
+          <p:cNvPr id="12" name="Rounded Rectangle 11"/>
+          <p:cNvSpPr/>
+          <p:nvPr/>
         </p:nvSpPr>
-        <p:spPr/>
+        <p:spPr>
+          <a:xfrm>
+            <a:off x="4654296" y="2556662"/>
+            <a:ext cx="7034784" cy="837590"/>
+          </a:xfrm>
+          <a:prstGeom prst="roundRect">
+            <a:avLst>
+              <a:gd name="adj" fmla="val 12000"/>
+            </a:avLst>
+          </a:prstGeom>
+          <a:solidFill>
+            <a:srgbClr val="FFF6DD"/>
+          </a:solidFill>
+          <a:ln w="15875">
+            <a:solidFill>
+              <a:srgbClr val="E89F00"/>
+            </a:solidFill>
+          </a:ln>
+        </p:spPr>
+        <p:style>
+          <a:lnRef idx="1">
+            <a:schemeClr val="accent1"/>
+          </a:lnRef>
+          <a:fillRef idx="3">
+            <a:schemeClr val="accent1"/>
+          </a:fillRef>
+          <a:effectRef idx="2">
+            <a:schemeClr val="accent1"/>
+          </a:effectRef>
+          <a:fontRef idx="minor">
+            <a:schemeClr val="lt1"/>
+          </a:fontRef>
+        </p:style>
         <p:txBody>
-          <a:bodyPr/>
+          <a:bodyPr rtlCol="0" anchor="ctr" lIns="137160" rIns="137160" wrap="square"/>
           <a:lstStyle/>
           <a:p>
-            <a:r>
-              <a:t>ROI 計測が難しい</a:t>
+            <a:pPr algn="l"/>
+            <a:r>
+              <a:rPr sz="1300" b="0">
+                <a:solidFill>
+                  <a:srgbClr val="001F33"/>
+                </a:solidFill>
+                <a:latin typeface="Noto Sans JP"/>
+              </a:rPr>
+              <a:t>Marketo でフェーズ別ナーチャリングを自動化</a:t>
             </a:r>
           </a:p>
         </p:txBody>
       </p:sp>
       <p:sp>
         <p:nvSpPr>
-          <p:cNvPr id="13" name="Text Placeholder 12"/>
-          <p:cNvSpPr>
-            <a:spLocks noGrp="1"/>
-          </p:cNvSpPr>
-          <p:nvPr>
-            <p:ph type="body" idx="23" sz="quarter"/>
-          </p:nvPr>
+          <p:cNvPr id="13" name="Oval 12"/>
+          <p:cNvSpPr/>
+          <p:nvPr/>
         </p:nvSpPr>
-        <p:spPr/>
+        <p:spPr>
+          <a:xfrm>
+            <a:off x="457200" y="3726179"/>
+            <a:ext cx="502920" cy="502920"/>
+          </a:xfrm>
+          <a:prstGeom prst="ellipse">
+            <a:avLst/>
+          </a:prstGeom>
+          <a:solidFill>
+            <a:srgbClr val="FFB81C"/>
+          </a:solidFill>
+          <a:ln>
+            <a:noFill/>
+          </a:ln>
+        </p:spPr>
+        <p:style>
+          <a:lnRef idx="1">
+            <a:schemeClr val="accent1"/>
+          </a:lnRef>
+          <a:fillRef idx="3">
+            <a:schemeClr val="accent1"/>
+          </a:fillRef>
+          <a:effectRef idx="2">
+            <a:schemeClr val="accent1"/>
+          </a:effectRef>
+          <a:fontRef idx="minor">
+            <a:schemeClr val="lt1"/>
+          </a:fontRef>
+        </p:style>
         <p:txBody>
-          <a:bodyPr/>
+          <a:bodyPr rtlCol="0" anchor="ctr" lIns="137160" rIns="137160" wrap="square"/>
           <a:lstStyle/>
           <a:p>
-            <a:r>
-              <a:t>1</a:t>
+            <a:pPr algn="ctr"/>
+            <a:r>
+              <a:rPr sz="1800" b="1">
+                <a:solidFill>
+                  <a:srgbClr val="001F33"/>
+                </a:solidFill>
+                <a:latin typeface="Inter"/>
+              </a:rPr>
+              <a:t>3</a:t>
             </a:r>
           </a:p>
         </p:txBody>
       </p:sp>
       <p:sp>
         <p:nvSpPr>
-          <p:cNvPr id="14" name="Text Placeholder 13"/>
-          <p:cNvSpPr>
-            <a:spLocks noGrp="1"/>
-          </p:cNvSpPr>
-          <p:nvPr>
-            <p:ph type="body" idx="24" sz="quarter"/>
-          </p:nvPr>
+          <p:cNvPr id="14" name="Rounded Rectangle 13"/>
+          <p:cNvSpPr/>
+          <p:nvPr/>
         </p:nvSpPr>
-        <p:spPr/>
+        <p:spPr>
+          <a:xfrm>
+            <a:off x="960120" y="3558844"/>
+            <a:ext cx="2880360" cy="837590"/>
+          </a:xfrm>
+          <a:prstGeom prst="roundRect">
+            <a:avLst>
+              <a:gd name="adj" fmla="val 12000"/>
+            </a:avLst>
+          </a:prstGeom>
+          <a:solidFill>
+            <a:srgbClr val="001F33"/>
+          </a:solidFill>
+          <a:ln>
+            <a:noFill/>
+          </a:ln>
+        </p:spPr>
+        <p:style>
+          <a:lnRef idx="1">
+            <a:schemeClr val="accent1"/>
+          </a:lnRef>
+          <a:fillRef idx="3">
+            <a:schemeClr val="accent1"/>
+          </a:fillRef>
+          <a:effectRef idx="2">
+            <a:schemeClr val="accent1"/>
+          </a:effectRef>
+          <a:fontRef idx="minor">
+            <a:schemeClr val="lt1"/>
+          </a:fontRef>
+        </p:style>
         <p:txBody>
-          <a:bodyPr/>
+          <a:bodyPr rtlCol="0" anchor="ctr" lIns="137160" rIns="137160" wrap="square"/>
           <a:lstStyle/>
           <a:p>
-            <a:r>
-              <a:t>4</a:t>
+            <a:pPr algn="ctr"/>
+            <a:r>
+              <a:rPr sz="1500" b="1">
+                <a:solidFill>
+                  <a:srgbClr val="FFFFFF"/>
+                </a:solidFill>
+                <a:latin typeface="Noto Sans JP"/>
+              </a:rPr>
+              <a:t>ROI 計測が難しい</a:t>
             </a:r>
           </a:p>
         </p:txBody>
       </p:sp>
       <p:sp>
         <p:nvSpPr>
-          <p:cNvPr id="15" name="Text Placeholder 14"/>
-          <p:cNvSpPr>
-            <a:spLocks noGrp="1"/>
-          </p:cNvSpPr>
-          <p:nvPr>
-            <p:ph type="body" idx="25" sz="quarter"/>
-          </p:nvPr>
+          <p:cNvPr id="15" name="Right Arrow 14"/>
+          <p:cNvSpPr/>
+          <p:nvPr/>
         </p:nvSpPr>
-        <p:spPr/>
+        <p:spPr>
+          <a:xfrm>
+            <a:off x="3886200" y="3817619"/>
+            <a:ext cx="676656" cy="320040"/>
+          </a:xfrm>
+          <a:prstGeom prst="rightArrow">
+            <a:avLst/>
+          </a:prstGeom>
+          <a:solidFill>
+            <a:srgbClr val="FFB81C"/>
+          </a:solidFill>
+          <a:ln>
+            <a:noFill/>
+          </a:ln>
+        </p:spPr>
+        <p:style>
+          <a:lnRef idx="1">
+            <a:schemeClr val="accent1"/>
+          </a:lnRef>
+          <a:fillRef idx="3">
+            <a:schemeClr val="accent1"/>
+          </a:fillRef>
+          <a:effectRef idx="2">
+            <a:schemeClr val="accent1"/>
+          </a:effectRef>
+          <a:fontRef idx="minor">
+            <a:schemeClr val="lt1"/>
+          </a:fontRef>
+        </p:style>
         <p:txBody>
-          <a:bodyPr/>
+          <a:bodyPr rtlCol="0" anchor="ctr"/>
           <a:lstStyle/>
           <a:p>
-            <a:r>
-              <a:t>2</a:t>
-            </a:r>
+            <a:pPr algn="ctr"/>
           </a:p>
         </p:txBody>
       </p:sp>
       <p:sp>
         <p:nvSpPr>
-          <p:cNvPr id="16" name="Text Placeholder 15"/>
-          <p:cNvSpPr>
-            <a:spLocks noGrp="1"/>
-          </p:cNvSpPr>
-          <p:nvPr>
-            <p:ph type="body" idx="26" sz="quarter"/>
-          </p:nvPr>
+          <p:cNvPr id="16" name="Rounded Rectangle 15"/>
+          <p:cNvSpPr/>
+          <p:nvPr/>
         </p:nvSpPr>
-        <p:spPr/>
+        <p:spPr>
+          <a:xfrm>
+            <a:off x="4654296" y="3558844"/>
+            <a:ext cx="7034784" cy="837590"/>
+          </a:xfrm>
+          <a:prstGeom prst="roundRect">
+            <a:avLst>
+              <a:gd name="adj" fmla="val 12000"/>
+            </a:avLst>
+          </a:prstGeom>
+          <a:solidFill>
+            <a:srgbClr val="FFF6DD"/>
+          </a:solidFill>
+          <a:ln w="15875">
+            <a:solidFill>
+              <a:srgbClr val="E89F00"/>
+            </a:solidFill>
+          </a:ln>
+        </p:spPr>
+        <p:style>
+          <a:lnRef idx="1">
+            <a:schemeClr val="accent1"/>
+          </a:lnRef>
+          <a:fillRef idx="3">
+            <a:schemeClr val="accent1"/>
+          </a:fillRef>
+          <a:effectRef idx="2">
+            <a:schemeClr val="accent1"/>
+          </a:effectRef>
+          <a:fontRef idx="minor">
+            <a:schemeClr val="lt1"/>
+          </a:fontRef>
+        </p:style>
         <p:txBody>
-          <a:bodyPr/>
+          <a:bodyPr rtlCol="0" anchor="ctr" lIns="137160" rIns="137160" wrap="square"/>
           <a:lstStyle/>
           <a:p>
-            <a:r>
-              <a:t>5</a:t>
+            <a:pPr algn="l"/>
+            <a:r>
+              <a:rPr sz="1300" b="0">
+                <a:solidFill>
+                  <a:srgbClr val="001F33"/>
+                </a:solidFill>
+                <a:latin typeface="Noto Sans JP"/>
+              </a:rPr>
+              <a:t>MQL/SQL/商談化を中間 KPI として Power BI で可視化</a:t>
             </a:r>
           </a:p>
         </p:txBody>
       </p:sp>
       <p:sp>
         <p:nvSpPr>
-          <p:cNvPr id="17" name="Text Placeholder 16"/>
-          <p:cNvSpPr>
-            <a:spLocks noGrp="1"/>
-          </p:cNvSpPr>
-          <p:nvPr>
-            <p:ph type="body" idx="27" sz="quarter"/>
-          </p:nvPr>
+          <p:cNvPr id="17" name="Oval 16"/>
+          <p:cNvSpPr/>
+          <p:nvPr/>
         </p:nvSpPr>
-        <p:spPr/>
+        <p:spPr>
+          <a:xfrm>
+            <a:off x="457200" y="4728361"/>
+            <a:ext cx="502920" cy="502920"/>
+          </a:xfrm>
+          <a:prstGeom prst="ellipse">
+            <a:avLst/>
+          </a:prstGeom>
+          <a:solidFill>
+            <a:srgbClr val="FFB81C"/>
+          </a:solidFill>
+          <a:ln>
+            <a:noFill/>
+          </a:ln>
+        </p:spPr>
+        <p:style>
+          <a:lnRef idx="1">
+            <a:schemeClr val="accent1"/>
+          </a:lnRef>
+          <a:fillRef idx="3">
+            <a:schemeClr val="accent1"/>
+          </a:fillRef>
+          <a:effectRef idx="2">
+            <a:schemeClr val="accent1"/>
+          </a:effectRef>
+          <a:fontRef idx="minor">
+            <a:schemeClr val="lt1"/>
+          </a:fontRef>
+        </p:style>
         <p:txBody>
-          <a:bodyPr/>
+          <a:bodyPr rtlCol="0" anchor="ctr" lIns="137160" rIns="137160" wrap="square"/>
           <a:lstStyle/>
           <a:p>
-            <a:r>
-              <a:t>3</a:t>
+            <a:pPr algn="ctr"/>
+            <a:r>
+              <a:rPr sz="1800" b="1">
+                <a:solidFill>
+                  <a:srgbClr val="001F33"/>
+                </a:solidFill>
+                <a:latin typeface="Inter"/>
+              </a:rPr>
+              <a:t>4</a:t>
             </a:r>
           </a:p>
         </p:txBody>
       </p:sp>
       <p:sp>
         <p:nvSpPr>
-          <p:cNvPr id="19" name="Text Placeholder 18"/>
-          <p:cNvSpPr>
-            <a:spLocks noGrp="1"/>
-          </p:cNvSpPr>
-          <p:nvPr>
-            <p:ph type="body" idx="10" sz="quarter"/>
-          </p:nvPr>
+          <p:cNvPr id="18" name="Rounded Rectangle 17"/>
+          <p:cNvSpPr/>
+          <p:nvPr/>
         </p:nvSpPr>
-        <p:spPr/>
+        <p:spPr>
+          <a:xfrm>
+            <a:off x="960120" y="4561026"/>
+            <a:ext cx="2880360" cy="837590"/>
+          </a:xfrm>
+          <a:prstGeom prst="roundRect">
+            <a:avLst>
+              <a:gd name="adj" fmla="val 12000"/>
+            </a:avLst>
+          </a:prstGeom>
+          <a:solidFill>
+            <a:srgbClr val="001F33"/>
+          </a:solidFill>
+          <a:ln>
+            <a:noFill/>
+          </a:ln>
+        </p:spPr>
+        <p:style>
+          <a:lnRef idx="1">
+            <a:schemeClr val="accent1"/>
+          </a:lnRef>
+          <a:fillRef idx="3">
+            <a:schemeClr val="accent1"/>
+          </a:fillRef>
+          <a:effectRef idx="2">
+            <a:schemeClr val="accent1"/>
+          </a:effectRef>
+          <a:fontRef idx="minor">
+            <a:schemeClr val="lt1"/>
+          </a:fontRef>
+        </p:style>
         <p:txBody>
-          <a:bodyPr/>
+          <a:bodyPr rtlCol="0" anchor="ctr" lIns="137160" rIns="137160" wrap="square"/>
           <a:lstStyle/>
           <a:p>
-            <a:r>
-              <a:t>ペルソナを職種別に複数定義し、職種別 LP を用意</a:t>
+            <a:pPr algn="ctr"/>
+            <a:r>
+              <a:rPr sz="1500" b="1">
+                <a:solidFill>
+                  <a:srgbClr val="FFFFFF"/>
+                </a:solidFill>
+                <a:latin typeface="Noto Sans JP"/>
+              </a:rPr>
+              <a:t>失敗1: リード量だけ追う</a:t>
             </a:r>
           </a:p>
         </p:txBody>
       </p:sp>
       <p:sp>
         <p:nvSpPr>
-          <p:cNvPr id="21" name="Text Placeholder 20"/>
-          <p:cNvSpPr>
-            <a:spLocks noGrp="1"/>
-          </p:cNvSpPr>
-          <p:nvPr>
-            <p:ph type="body" idx="30" sz="quarter"/>
-          </p:nvPr>
+          <p:cNvPr id="19" name="Right Arrow 18"/>
+          <p:cNvSpPr/>
+          <p:nvPr/>
         </p:nvSpPr>
-        <p:spPr/>
+        <p:spPr>
+          <a:xfrm>
+            <a:off x="3886200" y="4819801"/>
+            <a:ext cx="676656" cy="320040"/>
+          </a:xfrm>
+          <a:prstGeom prst="rightArrow">
+            <a:avLst/>
+          </a:prstGeom>
+          <a:solidFill>
+            <a:srgbClr val="FFB81C"/>
+          </a:solidFill>
+          <a:ln>
+            <a:noFill/>
+          </a:ln>
+        </p:spPr>
+        <p:style>
+          <a:lnRef idx="1">
+            <a:schemeClr val="accent1"/>
+          </a:lnRef>
+          <a:fillRef idx="3">
+            <a:schemeClr val="accent1"/>
+          </a:fillRef>
+          <a:effectRef idx="2">
+            <a:schemeClr val="accent1"/>
+          </a:effectRef>
+          <a:fontRef idx="minor">
+            <a:schemeClr val="lt1"/>
+          </a:fontRef>
+        </p:style>
         <p:txBody>
-          <a:bodyPr/>
+          <a:bodyPr rtlCol="0" anchor="ctr"/>
           <a:lstStyle/>
           <a:p>
-            <a:r>
-              <a:t>BtoB マーケティングの本質と打ち手</a:t>
+            <a:pPr algn="ctr"/>
+          </a:p>
+        </p:txBody>
+      </p:sp>
+      <p:sp>
+        <p:nvSpPr>
+          <p:cNvPr id="20" name="Rounded Rectangle 19"/>
+          <p:cNvSpPr/>
+          <p:nvPr/>
+        </p:nvSpPr>
+        <p:spPr>
+          <a:xfrm>
+            <a:off x="4654296" y="4561026"/>
+            <a:ext cx="7034784" cy="837590"/>
+          </a:xfrm>
+          <a:prstGeom prst="roundRect">
+            <a:avLst>
+              <a:gd name="adj" fmla="val 12000"/>
+            </a:avLst>
+          </a:prstGeom>
+          <a:solidFill>
+            <a:srgbClr val="FFF6DD"/>
+          </a:solidFill>
+          <a:ln w="15875">
+            <a:solidFill>
+              <a:srgbClr val="E89F00"/>
+            </a:solidFill>
+          </a:ln>
+        </p:spPr>
+        <p:style>
+          <a:lnRef idx="1">
+            <a:schemeClr val="accent1"/>
+          </a:lnRef>
+          <a:fillRef idx="3">
+            <a:schemeClr val="accent1"/>
+          </a:fillRef>
+          <a:effectRef idx="2">
+            <a:schemeClr val="accent1"/>
+          </a:effectRef>
+          <a:fontRef idx="minor">
+            <a:schemeClr val="lt1"/>
+          </a:fontRef>
+        </p:style>
+        <p:txBody>
+          <a:bodyPr rtlCol="0" anchor="ctr" lIns="137160" rIns="137160" wrap="square"/>
+          <a:lstStyle/>
+          <a:p>
+            <a:pPr algn="l"/>
+            <a:r>
+              <a:rPr sz="1300" b="0">
+                <a:solidFill>
+                  <a:srgbClr val="001F33"/>
+                </a:solidFill>
+                <a:latin typeface="Noto Sans JP"/>
+              </a:rPr>
+              <a:t>商談化率・受注率まで KPI 化する</a:t>
+            </a:r>
+          </a:p>
+        </p:txBody>
+      </p:sp>
+      <p:sp>
+        <p:nvSpPr>
+          <p:cNvPr id="21" name="Oval 20"/>
+          <p:cNvSpPr/>
+          <p:nvPr/>
+        </p:nvSpPr>
+        <p:spPr>
+          <a:xfrm>
+            <a:off x="457200" y="5730543"/>
+            <a:ext cx="502920" cy="502920"/>
+          </a:xfrm>
+          <a:prstGeom prst="ellipse">
+            <a:avLst/>
+          </a:prstGeom>
+          <a:solidFill>
+            <a:srgbClr val="FFB81C"/>
+          </a:solidFill>
+          <a:ln>
+            <a:noFill/>
+          </a:ln>
+        </p:spPr>
+        <p:style>
+          <a:lnRef idx="1">
+            <a:schemeClr val="accent1"/>
+          </a:lnRef>
+          <a:fillRef idx="3">
+            <a:schemeClr val="accent1"/>
+          </a:fillRef>
+          <a:effectRef idx="2">
+            <a:schemeClr val="accent1"/>
+          </a:effectRef>
+          <a:fontRef idx="minor">
+            <a:schemeClr val="lt1"/>
+          </a:fontRef>
+        </p:style>
+        <p:txBody>
+          <a:bodyPr rtlCol="0" anchor="ctr" lIns="137160" rIns="137160" wrap="square"/>
+          <a:lstStyle/>
+          <a:p>
+            <a:pPr algn="ctr"/>
+            <a:r>
+              <a:rPr sz="1800" b="1">
+                <a:solidFill>
+                  <a:srgbClr val="001F33"/>
+                </a:solidFill>
+                <a:latin typeface="Inter"/>
+              </a:rPr>
+              <a:t>5</a:t>
+            </a:r>
+          </a:p>
+        </p:txBody>
+      </p:sp>
+      <p:sp>
+        <p:nvSpPr>
+          <p:cNvPr id="22" name="Rounded Rectangle 21"/>
+          <p:cNvSpPr/>
+          <p:nvPr/>
+        </p:nvSpPr>
+        <p:spPr>
+          <a:xfrm>
+            <a:off x="960120" y="5563208"/>
+            <a:ext cx="2880360" cy="837590"/>
+          </a:xfrm>
+          <a:prstGeom prst="roundRect">
+            <a:avLst>
+              <a:gd name="adj" fmla="val 12000"/>
+            </a:avLst>
+          </a:prstGeom>
+          <a:solidFill>
+            <a:srgbClr val="001F33"/>
+          </a:solidFill>
+          <a:ln>
+            <a:noFill/>
+          </a:ln>
+        </p:spPr>
+        <p:style>
+          <a:lnRef idx="1">
+            <a:schemeClr val="accent1"/>
+          </a:lnRef>
+          <a:fillRef idx="3">
+            <a:schemeClr val="accent1"/>
+          </a:fillRef>
+          <a:effectRef idx="2">
+            <a:schemeClr val="accent1"/>
+          </a:effectRef>
+          <a:fontRef idx="minor">
+            <a:schemeClr val="lt1"/>
+          </a:fontRef>
+        </p:style>
+        <p:txBody>
+          <a:bodyPr rtlCol="0" anchor="ctr" lIns="137160" rIns="137160" wrap="square"/>
+          <a:lstStyle/>
+          <a:p>
+            <a:pPr algn="ctr"/>
+            <a:r>
+              <a:rPr sz="1500" b="1">
+                <a:solidFill>
+                  <a:srgbClr val="FFFFFF"/>
+                </a:solidFill>
+                <a:latin typeface="Noto Sans JP"/>
+              </a:rPr>
+              <a:t>失敗2: LP を1本化</a:t>
+            </a:r>
+          </a:p>
+        </p:txBody>
+      </p:sp>
+      <p:sp>
+        <p:nvSpPr>
+          <p:cNvPr id="23" name="Right Arrow 22"/>
+          <p:cNvSpPr/>
+          <p:nvPr/>
+        </p:nvSpPr>
+        <p:spPr>
+          <a:xfrm>
+            <a:off x="3886200" y="5821983"/>
+            <a:ext cx="676656" cy="320040"/>
+          </a:xfrm>
+          <a:prstGeom prst="rightArrow">
+            <a:avLst/>
+          </a:prstGeom>
+          <a:solidFill>
+            <a:srgbClr val="FFB81C"/>
+          </a:solidFill>
+          <a:ln>
+            <a:noFill/>
+          </a:ln>
+        </p:spPr>
+        <p:style>
+          <a:lnRef idx="1">
+            <a:schemeClr val="accent1"/>
+          </a:lnRef>
+          <a:fillRef idx="3">
+            <a:schemeClr val="accent1"/>
+          </a:fillRef>
+          <a:effectRef idx="2">
+            <a:schemeClr val="accent1"/>
+          </a:effectRef>
+          <a:fontRef idx="minor">
+            <a:schemeClr val="lt1"/>
+          </a:fontRef>
+        </p:style>
+        <p:txBody>
+          <a:bodyPr rtlCol="0" anchor="ctr"/>
+          <a:lstStyle/>
+          <a:p>
+            <a:pPr algn="ctr"/>
+          </a:p>
+        </p:txBody>
+      </p:sp>
+      <p:sp>
+        <p:nvSpPr>
+          <p:cNvPr id="24" name="Rounded Rectangle 23"/>
+          <p:cNvSpPr/>
+          <p:nvPr/>
+        </p:nvSpPr>
+        <p:spPr>
+          <a:xfrm>
+            <a:off x="4654296" y="5563208"/>
+            <a:ext cx="7034784" cy="837590"/>
+          </a:xfrm>
+          <a:prstGeom prst="roundRect">
+            <a:avLst>
+              <a:gd name="adj" fmla="val 12000"/>
+            </a:avLst>
+          </a:prstGeom>
+          <a:solidFill>
+            <a:srgbClr val="FFF6DD"/>
+          </a:solidFill>
+          <a:ln w="15875">
+            <a:solidFill>
+              <a:srgbClr val="E89F00"/>
+            </a:solidFill>
+          </a:ln>
+        </p:spPr>
+        <p:style>
+          <a:lnRef idx="1">
+            <a:schemeClr val="accent1"/>
+          </a:lnRef>
+          <a:fillRef idx="3">
+            <a:schemeClr val="accent1"/>
+          </a:fillRef>
+          <a:effectRef idx="2">
+            <a:schemeClr val="accent1"/>
+          </a:effectRef>
+          <a:fontRef idx="minor">
+            <a:schemeClr val="lt1"/>
+          </a:fontRef>
+        </p:style>
+        <p:txBody>
+          <a:bodyPr rtlCol="0" anchor="ctr" lIns="137160" rIns="137160" wrap="square"/>
+          <a:lstStyle/>
+          <a:p>
+            <a:pPr algn="l"/>
+            <a:r>
+              <a:rPr sz="1300" b="0">
+                <a:solidFill>
+                  <a:srgbClr val="001F33"/>
+                </a:solidFill>
+                <a:latin typeface="Noto Sans JP"/>
+              </a:rPr>
+              <a:t>業種・職種で分岐し、コンバージョンを最適化</a:t>
             </a:r>
           </a:p>
         </p:txBody>
